--- a/Đồ án CNPM.pptx
+++ b/Đồ án CNPM.pptx
@@ -12,7 +12,19 @@
     <p:sldId id="286" r:id="rId6"/>
     <p:sldId id="280" r:id="rId7"/>
     <p:sldId id="282" r:id="rId8"/>
-    <p:sldId id="276" r:id="rId9"/>
+    <p:sldId id="287" r:id="rId9"/>
+    <p:sldId id="288" r:id="rId10"/>
+    <p:sldId id="289" r:id="rId11"/>
+    <p:sldId id="290" r:id="rId12"/>
+    <p:sldId id="291" r:id="rId13"/>
+    <p:sldId id="292" r:id="rId14"/>
+    <p:sldId id="293" r:id="rId15"/>
+    <p:sldId id="294" r:id="rId16"/>
+    <p:sldId id="295" r:id="rId17"/>
+    <p:sldId id="296" r:id="rId18"/>
+    <p:sldId id="297" r:id="rId19"/>
+    <p:sldId id="298" r:id="rId20"/>
+    <p:sldId id="276" r:id="rId21"/>
   </p:sldIdLst>
   <p:sldSz cx="12192000" cy="6858000"/>
   <p:notesSz cx="6858000" cy="9144000"/>
@@ -841,7 +853,7 @@
           <a:p>
             <a:fld id="{33B53125-3DB6-4BB9-8326-F0320FE2AE48}" type="datetimeFigureOut">
               <a:rPr lang="en-US" smtClean="0"/>
-              <a:t>5/22/2024</a:t>
+              <a:t>5/24/2024</a:t>
             </a:fld>
             <a:endParaRPr lang="en-US"/>
           </a:p>
@@ -1092,7 +1104,7 @@
           <a:p>
             <a:fld id="{33B53125-3DB6-4BB9-8326-F0320FE2AE48}" type="datetimeFigureOut">
               <a:rPr lang="en-US" smtClean="0"/>
-              <a:t>5/22/2024</a:t>
+              <a:t>5/24/2024</a:t>
             </a:fld>
             <a:endParaRPr lang="en-US"/>
           </a:p>
@@ -1406,7 +1418,7 @@
           <a:p>
             <a:fld id="{33B53125-3DB6-4BB9-8326-F0320FE2AE48}" type="datetimeFigureOut">
               <a:rPr lang="en-US" smtClean="0"/>
-              <a:t>5/22/2024</a:t>
+              <a:t>5/24/2024</a:t>
             </a:fld>
             <a:endParaRPr lang="en-US"/>
           </a:p>
@@ -1747,7 +1759,7 @@
           <a:p>
             <a:fld id="{33B53125-3DB6-4BB9-8326-F0320FE2AE48}" type="datetimeFigureOut">
               <a:rPr lang="en-US" smtClean="0"/>
-              <a:t>5/22/2024</a:t>
+              <a:t>5/24/2024</a:t>
             </a:fld>
             <a:endParaRPr lang="en-US"/>
           </a:p>
@@ -2061,7 +2073,7 @@
           <a:p>
             <a:fld id="{33B53125-3DB6-4BB9-8326-F0320FE2AE48}" type="datetimeFigureOut">
               <a:rPr lang="en-US" smtClean="0"/>
-              <a:t>5/22/2024</a:t>
+              <a:t>5/24/2024</a:t>
             </a:fld>
             <a:endParaRPr lang="en-US"/>
           </a:p>
@@ -2454,7 +2466,7 @@
           <a:p>
             <a:fld id="{33B53125-3DB6-4BB9-8326-F0320FE2AE48}" type="datetimeFigureOut">
               <a:rPr lang="en-US" smtClean="0"/>
-              <a:t>5/22/2024</a:t>
+              <a:t>5/24/2024</a:t>
             </a:fld>
             <a:endParaRPr lang="en-US"/>
           </a:p>
@@ -2624,7 +2636,7 @@
           <a:p>
             <a:fld id="{33B53125-3DB6-4BB9-8326-F0320FE2AE48}" type="datetimeFigureOut">
               <a:rPr lang="en-US" smtClean="0"/>
-              <a:t>5/22/2024</a:t>
+              <a:t>5/24/2024</a:t>
             </a:fld>
             <a:endParaRPr lang="en-US"/>
           </a:p>
@@ -2804,7 +2816,7 @@
           <a:p>
             <a:fld id="{33B53125-3DB6-4BB9-8326-F0320FE2AE48}" type="datetimeFigureOut">
               <a:rPr lang="en-US" smtClean="0"/>
-              <a:t>5/22/2024</a:t>
+              <a:t>5/24/2024</a:t>
             </a:fld>
             <a:endParaRPr lang="en-US"/>
           </a:p>
@@ -2980,7 +2992,7 @@
           <a:p>
             <a:fld id="{33B53125-3DB6-4BB9-8326-F0320FE2AE48}" type="datetimeFigureOut">
               <a:rPr lang="en-US" smtClean="0"/>
-              <a:t>5/22/2024</a:t>
+              <a:t>5/24/2024</a:t>
             </a:fld>
             <a:endParaRPr lang="en-US"/>
           </a:p>
@@ -3227,7 +3239,7 @@
           <a:p>
             <a:fld id="{33B53125-3DB6-4BB9-8326-F0320FE2AE48}" type="datetimeFigureOut">
               <a:rPr lang="en-US" smtClean="0"/>
-              <a:t>5/22/2024</a:t>
+              <a:t>5/24/2024</a:t>
             </a:fld>
             <a:endParaRPr lang="en-US"/>
           </a:p>
@@ -3459,7 +3471,7 @@
           <a:p>
             <a:fld id="{33B53125-3DB6-4BB9-8326-F0320FE2AE48}" type="datetimeFigureOut">
               <a:rPr lang="en-US" smtClean="0"/>
-              <a:t>5/22/2024</a:t>
+              <a:t>5/24/2024</a:t>
             </a:fld>
             <a:endParaRPr lang="en-US"/>
           </a:p>
@@ -3833,7 +3845,7 @@
           <a:p>
             <a:fld id="{33B53125-3DB6-4BB9-8326-F0320FE2AE48}" type="datetimeFigureOut">
               <a:rPr lang="en-US" smtClean="0"/>
-              <a:t>5/22/2024</a:t>
+              <a:t>5/24/2024</a:t>
             </a:fld>
             <a:endParaRPr lang="en-US"/>
           </a:p>
@@ -3956,7 +3968,7 @@
           <a:p>
             <a:fld id="{33B53125-3DB6-4BB9-8326-F0320FE2AE48}" type="datetimeFigureOut">
               <a:rPr lang="en-US" smtClean="0"/>
-              <a:t>5/22/2024</a:t>
+              <a:t>5/24/2024</a:t>
             </a:fld>
             <a:endParaRPr lang="en-US"/>
           </a:p>
@@ -4051,7 +4063,7 @@
           <a:p>
             <a:fld id="{33B53125-3DB6-4BB9-8326-F0320FE2AE48}" type="datetimeFigureOut">
               <a:rPr lang="en-US" smtClean="0"/>
-              <a:t>5/22/2024</a:t>
+              <a:t>5/24/2024</a:t>
             </a:fld>
             <a:endParaRPr lang="en-US"/>
           </a:p>
@@ -4306,7 +4318,7 @@
           <a:p>
             <a:fld id="{33B53125-3DB6-4BB9-8326-F0320FE2AE48}" type="datetimeFigureOut">
               <a:rPr lang="en-US" smtClean="0"/>
-              <a:t>5/22/2024</a:t>
+              <a:t>5/24/2024</a:t>
             </a:fld>
             <a:endParaRPr lang="en-US"/>
           </a:p>
@@ -4569,7 +4581,7 @@
           <a:p>
             <a:fld id="{33B53125-3DB6-4BB9-8326-F0320FE2AE48}" type="datetimeFigureOut">
               <a:rPr lang="en-US" smtClean="0"/>
-              <a:t>5/22/2024</a:t>
+              <a:t>5/24/2024</a:t>
             </a:fld>
             <a:endParaRPr lang="en-US"/>
           </a:p>
@@ -5312,7 +5324,7 @@
           <a:p>
             <a:fld id="{33B53125-3DB6-4BB9-8326-F0320FE2AE48}" type="datetimeFigureOut">
               <a:rPr lang="en-US" smtClean="0"/>
-              <a:t>5/22/2024</a:t>
+              <a:t>5/24/2024</a:t>
             </a:fld>
             <a:endParaRPr lang="en-US"/>
           </a:p>
@@ -6034,6 +6046,44 @@
             <a:r>
               <a:rPr lang="en-US" sz="2500" b="1" dirty="0" err="1">
                 <a:solidFill>
+                  <a:schemeClr val="tx1"/>
+                </a:solidFill>
+                <a:latin typeface="Times New Roman" panose="02020603050405020304" pitchFamily="18" charset="0"/>
+                <a:cs typeface="Times New Roman" panose="02020603050405020304" pitchFamily="18" charset="0"/>
+              </a:rPr>
+              <a:t>Nghĩa</a:t>
+            </a:r>
+            <a:r>
+              <a:rPr lang="en-US" sz="2500" b="1" dirty="0">
+                <a:solidFill>
+                  <a:schemeClr val="tx1"/>
+                </a:solidFill>
+                <a:latin typeface="Times New Roman" panose="02020603050405020304" pitchFamily="18" charset="0"/>
+                <a:cs typeface="Times New Roman" panose="02020603050405020304" pitchFamily="18" charset="0"/>
+              </a:rPr>
+              <a:t>  - </a:t>
+            </a:r>
+            <a:r>
+              <a:rPr lang="en-US" b="1" dirty="0">
+                <a:solidFill>
+                  <a:schemeClr val="tx1"/>
+                </a:solidFill>
+              </a:rPr>
+              <a:t>DH52111357</a:t>
+            </a:r>
+            <a:endParaRPr lang="en-US" sz="2500" b="1" dirty="0">
+              <a:solidFill>
+                <a:schemeClr val="tx1"/>
+              </a:solidFill>
+              <a:latin typeface="Times New Roman" panose="02020603050405020304" pitchFamily="18" charset="0"/>
+              <a:cs typeface="Times New Roman" panose="02020603050405020304" pitchFamily="18" charset="0"/>
+            </a:endParaRPr>
+          </a:p>
+          <a:p>
+            <a:pPr algn="l"/>
+            <a:r>
+              <a:rPr lang="en-US" sz="2500" b="1" dirty="0">
+                <a:solidFill>
                   <a:schemeClr val="tx1">
                     <a:lumMod val="95000"/>
                     <a:lumOff val="5000"/>
@@ -6042,10 +6092,10 @@
                 <a:latin typeface="Times New Roman" panose="02020603050405020304" pitchFamily="18" charset="0"/>
                 <a:cs typeface="Times New Roman" panose="02020603050405020304" pitchFamily="18" charset="0"/>
               </a:rPr>
-              <a:t>Nghĩa</a:t>
-            </a:r>
-            <a:r>
-              <a:rPr lang="en-US" sz="2500" b="1" dirty="0">
+              <a:t>- </a:t>
+            </a:r>
+            <a:r>
+              <a:rPr lang="en-US" sz="2500" b="1" dirty="0" err="1">
                 <a:solidFill>
                   <a:schemeClr val="tx1">
                     <a:lumMod val="95000"/>
@@ -6055,11 +6105,8 @@
                 <a:latin typeface="Times New Roman" panose="02020603050405020304" pitchFamily="18" charset="0"/>
                 <a:cs typeface="Times New Roman" panose="02020603050405020304" pitchFamily="18" charset="0"/>
               </a:rPr>
-              <a:t> </a:t>
-            </a:r>
-          </a:p>
-          <a:p>
-            <a:pPr algn="l"/>
+              <a:t>Nguyễn</a:t>
+            </a:r>
             <a:r>
               <a:rPr lang="en-US" sz="2500" b="1" dirty="0">
                 <a:solidFill>
@@ -6071,7 +6118,7 @@
                 <a:latin typeface="Times New Roman" panose="02020603050405020304" pitchFamily="18" charset="0"/>
                 <a:cs typeface="Times New Roman" panose="02020603050405020304" pitchFamily="18" charset="0"/>
               </a:rPr>
-              <a:t>- </a:t>
+              <a:t> Chí </a:t>
             </a:r>
             <a:r>
               <a:rPr lang="en-US" sz="2500" b="1" dirty="0" err="1">
@@ -6084,7 +6131,7 @@
                 <a:latin typeface="Times New Roman" panose="02020603050405020304" pitchFamily="18" charset="0"/>
                 <a:cs typeface="Times New Roman" panose="02020603050405020304" pitchFamily="18" charset="0"/>
               </a:rPr>
-              <a:t>Nguyễn</a:t>
+              <a:t>Đức</a:t>
             </a:r>
             <a:r>
               <a:rPr lang="en-US" sz="2500" b="1" dirty="0">
@@ -6097,10 +6144,28 @@
                 <a:latin typeface="Times New Roman" panose="02020603050405020304" pitchFamily="18" charset="0"/>
                 <a:cs typeface="Times New Roman" panose="02020603050405020304" pitchFamily="18" charset="0"/>
               </a:rPr>
-              <a:t> Chí </a:t>
-            </a:r>
-            <a:r>
-              <a:rPr lang="en-US" sz="2500" b="1" dirty="0" err="1">
+              <a:t>	- </a:t>
+            </a:r>
+            <a:r>
+              <a:rPr lang="en-US" b="1" dirty="0">
+                <a:solidFill>
+                  <a:schemeClr val="tx1"/>
+                </a:solidFill>
+              </a:rPr>
+              <a:t>DH52110821</a:t>
+            </a:r>
+            <a:endParaRPr lang="en-US" sz="2500" b="1" dirty="0">
+              <a:solidFill>
+                <a:schemeClr val="tx1"/>
+              </a:solidFill>
+              <a:latin typeface="Times New Roman" panose="02020603050405020304" pitchFamily="18" charset="0"/>
+              <a:cs typeface="Times New Roman" panose="02020603050405020304" pitchFamily="18" charset="0"/>
+            </a:endParaRPr>
+          </a:p>
+          <a:p>
+            <a:pPr algn="l"/>
+            <a:r>
+              <a:rPr lang="en-US" sz="2500" b="1" dirty="0">
                 <a:solidFill>
                   <a:schemeClr val="tx1">
                     <a:lumMod val="95000"/>
@@ -6110,10 +6175,10 @@
                 <a:latin typeface="Times New Roman" panose="02020603050405020304" pitchFamily="18" charset="0"/>
                 <a:cs typeface="Times New Roman" panose="02020603050405020304" pitchFamily="18" charset="0"/>
               </a:rPr>
-              <a:t>Đức</a:t>
-            </a:r>
-            <a:r>
-              <a:rPr lang="en-US" sz="2500" b="1" dirty="0">
+              <a:t>- </a:t>
+            </a:r>
+            <a:r>
+              <a:rPr lang="en-US" sz="2500" b="1" dirty="0" err="1">
                 <a:solidFill>
                   <a:schemeClr val="tx1">
                     <a:lumMod val="95000"/>
@@ -6123,11 +6188,8 @@
                 <a:latin typeface="Times New Roman" panose="02020603050405020304" pitchFamily="18" charset="0"/>
                 <a:cs typeface="Times New Roman" panose="02020603050405020304" pitchFamily="18" charset="0"/>
               </a:rPr>
-              <a:t> </a:t>
-            </a:r>
-          </a:p>
-          <a:p>
-            <a:pPr algn="l"/>
+              <a:t>Nguyễn</a:t>
+            </a:r>
             <a:r>
               <a:rPr lang="en-US" sz="2500" b="1" dirty="0">
                 <a:solidFill>
@@ -6139,7 +6201,7 @@
                 <a:latin typeface="Times New Roman" panose="02020603050405020304" pitchFamily="18" charset="0"/>
                 <a:cs typeface="Times New Roman" panose="02020603050405020304" pitchFamily="18" charset="0"/>
               </a:rPr>
-              <a:t>- </a:t>
+              <a:t> </a:t>
             </a:r>
             <a:r>
               <a:rPr lang="en-US" sz="2500" b="1" dirty="0" err="1">
@@ -6152,7 +6214,7 @@
                 <a:latin typeface="Times New Roman" panose="02020603050405020304" pitchFamily="18" charset="0"/>
                 <a:cs typeface="Times New Roman" panose="02020603050405020304" pitchFamily="18" charset="0"/>
               </a:rPr>
-              <a:t>Nguyễn</a:t>
+              <a:t>Ái</a:t>
             </a:r>
             <a:r>
               <a:rPr lang="en-US" sz="2500" b="1" dirty="0">
@@ -6178,7 +6240,7 @@
                 <a:latin typeface="Times New Roman" panose="02020603050405020304" pitchFamily="18" charset="0"/>
                 <a:cs typeface="Times New Roman" panose="02020603050405020304" pitchFamily="18" charset="0"/>
               </a:rPr>
-              <a:t>Ái</a:t>
+              <a:t>Thiềm</a:t>
             </a:r>
             <a:r>
               <a:rPr lang="en-US" sz="2500" b="1" dirty="0">
@@ -6204,7 +6266,7 @@
                 <a:latin typeface="Times New Roman" panose="02020603050405020304" pitchFamily="18" charset="0"/>
                 <a:cs typeface="Times New Roman" panose="02020603050405020304" pitchFamily="18" charset="0"/>
               </a:rPr>
-              <a:t>Thiềm</a:t>
+              <a:t>Định</a:t>
             </a:r>
             <a:r>
               <a:rPr lang="en-US" sz="2500" b="1" dirty="0">
@@ -6220,99 +6282,98 @@
               <a:t> </a:t>
             </a:r>
             <a:r>
-              <a:rPr lang="en-US" sz="2500" b="1" dirty="0" err="1">
-                <a:solidFill>
-                  <a:schemeClr val="tx1">
-                    <a:lumMod val="95000"/>
-                    <a:lumOff val="5000"/>
-                  </a:schemeClr>
+              <a:rPr lang="en-US" b="1" dirty="0"/>
+              <a:t>– </a:t>
+            </a:r>
+            <a:r>
+              <a:rPr lang="en-US" b="1" dirty="0">
+                <a:solidFill>
+                  <a:schemeClr val="tx1"/>
+                </a:solidFill>
+              </a:rPr>
+              <a:t>DH52110805</a:t>
+            </a:r>
+            <a:endParaRPr lang="en-US" sz="2500" b="1" dirty="0">
+              <a:solidFill>
+                <a:schemeClr val="tx1"/>
+              </a:solidFill>
+              <a:latin typeface="Times New Roman" panose="02020603050405020304" pitchFamily="18" charset="0"/>
+              <a:cs typeface="Times New Roman" panose="02020603050405020304" pitchFamily="18" charset="0"/>
+            </a:endParaRPr>
+          </a:p>
+          <a:p>
+            <a:pPr algn="l"/>
+            <a:r>
+              <a:rPr lang="en-US" sz="2500" b="1" dirty="0">
+                <a:solidFill>
+                  <a:schemeClr val="tx1"/>
                 </a:solidFill>
                 <a:latin typeface="Times New Roman" panose="02020603050405020304" pitchFamily="18" charset="0"/>
                 <a:cs typeface="Times New Roman" panose="02020603050405020304" pitchFamily="18" charset="0"/>
               </a:rPr>
-              <a:t>Định</a:t>
-            </a:r>
-            <a:r>
-              <a:rPr lang="en-US" sz="2500" b="1" dirty="0">
-                <a:solidFill>
-                  <a:schemeClr val="tx1">
-                    <a:lumMod val="95000"/>
-                    <a:lumOff val="5000"/>
-                  </a:schemeClr>
+              <a:t>- </a:t>
+            </a:r>
+            <a:r>
+              <a:rPr lang="en-US" sz="2500" b="1" dirty="0" err="1">
+                <a:solidFill>
+                  <a:schemeClr val="tx1"/>
                 </a:solidFill>
                 <a:latin typeface="Times New Roman" panose="02020603050405020304" pitchFamily="18" charset="0"/>
                 <a:cs typeface="Times New Roman" panose="02020603050405020304" pitchFamily="18" charset="0"/>
               </a:rPr>
-              <a:t> </a:t>
-            </a:r>
-          </a:p>
-          <a:p>
-            <a:pPr algn="l"/>
+              <a:t>Trương</a:t>
+            </a:r>
             <a:r>
               <a:rPr lang="en-US" sz="2500" b="1" dirty="0">
                 <a:solidFill>
-                  <a:schemeClr val="tx1">
-                    <a:lumMod val="95000"/>
-                    <a:lumOff val="5000"/>
-                  </a:schemeClr>
+                  <a:schemeClr val="tx1"/>
                 </a:solidFill>
                 <a:latin typeface="Times New Roman" panose="02020603050405020304" pitchFamily="18" charset="0"/>
                 <a:cs typeface="Times New Roman" panose="02020603050405020304" pitchFamily="18" charset="0"/>
               </a:rPr>
-              <a:t>- </a:t>
+              <a:t> Quang </a:t>
             </a:r>
             <a:r>
               <a:rPr lang="en-US" sz="2500" b="1" dirty="0" err="1">
                 <a:solidFill>
-                  <a:schemeClr val="tx1">
-                    <a:lumMod val="95000"/>
-                    <a:lumOff val="5000"/>
-                  </a:schemeClr>
+                  <a:schemeClr val="tx1"/>
                 </a:solidFill>
                 <a:latin typeface="Times New Roman" panose="02020603050405020304" pitchFamily="18" charset="0"/>
                 <a:cs typeface="Times New Roman" panose="02020603050405020304" pitchFamily="18" charset="0"/>
               </a:rPr>
-              <a:t>Trương</a:t>
+              <a:t>Phát</a:t>
             </a:r>
             <a:r>
               <a:rPr lang="en-US" sz="2500" b="1" dirty="0">
                 <a:solidFill>
-                  <a:schemeClr val="tx1">
-                    <a:lumMod val="95000"/>
-                    <a:lumOff val="5000"/>
-                  </a:schemeClr>
+                  <a:schemeClr val="tx1"/>
                 </a:solidFill>
                 <a:latin typeface="Times New Roman" panose="02020603050405020304" pitchFamily="18" charset="0"/>
                 <a:cs typeface="Times New Roman" panose="02020603050405020304" pitchFamily="18" charset="0"/>
               </a:rPr>
-              <a:t> Quang </a:t>
-            </a:r>
-            <a:r>
-              <a:rPr lang="en-US" sz="2500" b="1" dirty="0" err="1">
-                <a:solidFill>
-                  <a:schemeClr val="tx1">
-                    <a:lumMod val="95000"/>
-                    <a:lumOff val="5000"/>
-                  </a:schemeClr>
-                </a:solidFill>
-                <a:latin typeface="Times New Roman" panose="02020603050405020304" pitchFamily="18" charset="0"/>
-                <a:cs typeface="Times New Roman" panose="02020603050405020304" pitchFamily="18" charset="0"/>
-              </a:rPr>
-              <a:t>Phát</a:t>
-            </a:r>
-            <a:r>
-              <a:rPr lang="en-US" sz="2500" b="1" dirty="0">
-                <a:solidFill>
-                  <a:schemeClr val="tx1">
-                    <a:lumMod val="95000"/>
-                    <a:lumOff val="5000"/>
-                  </a:schemeClr>
-                </a:solidFill>
-                <a:latin typeface="Times New Roman" panose="02020603050405020304" pitchFamily="18" charset="0"/>
-                <a:cs typeface="Times New Roman" panose="02020603050405020304" pitchFamily="18" charset="0"/>
-              </a:rPr>
-              <a:t>	</a:t>
-            </a:r>
+              <a:t>	-	</a:t>
+            </a:r>
+            <a:r>
+              <a:rPr lang="en-US" b="1" dirty="0">
+                <a:solidFill>
+                  <a:schemeClr val="tx1"/>
+                </a:solidFill>
+              </a:rPr>
+              <a:t>DH52111481</a:t>
+            </a:r>
+          </a:p>
+          <a:p>
+            <a:pPr algn="l"/>
+            <a:endParaRPr lang="en-US" sz="2500" b="1" dirty="0">
+              <a:solidFill>
+                <a:schemeClr val="tx1">
+                  <a:lumMod val="95000"/>
+                  <a:lumOff val="5000"/>
+                </a:schemeClr>
+              </a:solidFill>
+              <a:latin typeface="Times New Roman" panose="02020603050405020304" pitchFamily="18" charset="0"/>
+              <a:cs typeface="Times New Roman" panose="02020603050405020304" pitchFamily="18" charset="0"/>
+            </a:endParaRPr>
           </a:p>
           <a:p>
             <a:pPr algn="l"/>
@@ -7427,7 +7488,7 @@
                                         <p:tgtEl>
                                           <p:spTgt spid="3">
                                             <p:txEl>
-                                              <p:pRg st="6" end="6"/>
+                                              <p:pRg st="7" end="7"/>
                                             </p:txEl>
                                           </p:spTgt>
                                         </p:tgtEl>
@@ -7445,7 +7506,7 @@
                                         <p:tgtEl>
                                           <p:spTgt spid="3">
                                             <p:txEl>
-                                              <p:pRg st="6" end="6"/>
+                                              <p:pRg st="7" end="7"/>
                                             </p:txEl>
                                           </p:spTgt>
                                         </p:tgtEl>
@@ -7485,6 +7546,2897 @@
       <p:bldP spid="3" grpId="0" uiExpand="1" build="p"/>
       <p:bldP spid="8" grpId="0"/>
       <p:bldP spid="2" grpId="0" animBg="1"/>
+    </p:bldLst>
+  </p:timing>
+</p:sld>
+</file>
+
+<file path=ppt/slides/slide10.xml><?xml version="1.0" encoding="utf-8"?>
+<p:sld xmlns:a="http://schemas.openxmlformats.org/drawingml/2006/main" xmlns:r="http://schemas.openxmlformats.org/officeDocument/2006/relationships" xmlns:p="http://schemas.openxmlformats.org/presentationml/2006/main">
+  <p:cSld>
+    <p:spTree>
+      <p:nvGrpSpPr>
+        <p:cNvPr id="1" name=""/>
+        <p:cNvGrpSpPr/>
+        <p:nvPr/>
+      </p:nvGrpSpPr>
+      <p:grpSpPr>
+        <a:xfrm>
+          <a:off x="0" y="0"/>
+          <a:ext cx="0" cy="0"/>
+          <a:chOff x="0" y="0"/>
+          <a:chExt cx="0" cy="0"/>
+        </a:xfrm>
+      </p:grpSpPr>
+      <p:sp>
+        <p:nvSpPr>
+          <p:cNvPr id="5" name="Rectangle 4"/>
+          <p:cNvSpPr/>
+          <p:nvPr/>
+        </p:nvSpPr>
+        <p:spPr>
+          <a:xfrm>
+            <a:off x="1219201" y="278693"/>
+            <a:ext cx="7333672" cy="707886"/>
+          </a:xfrm>
+          <a:prstGeom prst="rect">
+            <a:avLst/>
+          </a:prstGeom>
+          <a:noFill/>
+        </p:spPr>
+        <p:txBody>
+          <a:bodyPr wrap="square" lIns="91440" tIns="45720" rIns="91440" bIns="45720">
+            <a:spAutoFit/>
+          </a:bodyPr>
+          <a:lstStyle/>
+          <a:p>
+            <a:pPr algn="ctr"/>
+            <a:r>
+              <a:rPr lang="en-US" sz="4000" dirty="0">
+                <a:ln w="0"/>
+                <a:gradFill>
+                  <a:gsLst>
+                    <a:gs pos="0">
+                      <a:schemeClr val="accent5">
+                        <a:lumMod val="50000"/>
+                      </a:schemeClr>
+                    </a:gs>
+                    <a:gs pos="50000">
+                      <a:schemeClr val="accent5"/>
+                    </a:gs>
+                    <a:gs pos="100000">
+                      <a:schemeClr val="accent5">
+                        <a:lumMod val="60000"/>
+                        <a:lumOff val="40000"/>
+                      </a:schemeClr>
+                    </a:gs>
+                  </a:gsLst>
+                  <a:lin ang="5400000"/>
+                </a:gradFill>
+                <a:effectLst>
+                  <a:reflection blurRad="6350" stA="53000" endA="300" endPos="35500" dir="5400000" sy="-90000" algn="bl" rotWithShape="0"/>
+                </a:effectLst>
+                <a:latin typeface="Times New Roman" panose="02020603050405020304" pitchFamily="18" charset="0"/>
+                <a:cs typeface="Times New Roman" panose="02020603050405020304" pitchFamily="18" charset="0"/>
+              </a:rPr>
+              <a:t>V : FORM ỨNG DỤNG</a:t>
+            </a:r>
+            <a:endParaRPr lang="en-US" sz="4000" b="0" cap="none" spc="0" dirty="0">
+              <a:ln w="0"/>
+              <a:gradFill>
+                <a:gsLst>
+                  <a:gs pos="0">
+                    <a:schemeClr val="accent5">
+                      <a:lumMod val="50000"/>
+                    </a:schemeClr>
+                  </a:gs>
+                  <a:gs pos="50000">
+                    <a:schemeClr val="accent5"/>
+                  </a:gs>
+                  <a:gs pos="100000">
+                    <a:schemeClr val="accent5">
+                      <a:lumMod val="60000"/>
+                      <a:lumOff val="40000"/>
+                    </a:schemeClr>
+                  </a:gs>
+                </a:gsLst>
+                <a:lin ang="5400000"/>
+              </a:gradFill>
+              <a:effectLst>
+                <a:reflection blurRad="6350" stA="53000" endA="300" endPos="35500" dir="5400000" sy="-90000" algn="bl" rotWithShape="0"/>
+              </a:effectLst>
+              <a:latin typeface="Times New Roman" panose="02020603050405020304" pitchFamily="18" charset="0"/>
+              <a:cs typeface="Times New Roman" panose="02020603050405020304" pitchFamily="18" charset="0"/>
+            </a:endParaRPr>
+          </a:p>
+        </p:txBody>
+      </p:sp>
+      <p:sp>
+        <p:nvSpPr>
+          <p:cNvPr id="8" name="TextBox 7">
+            <a:extLst>
+              <a:ext uri="{FF2B5EF4-FFF2-40B4-BE49-F238E27FC236}">
+                <a16:creationId xmlns:a16="http://schemas.microsoft.com/office/drawing/2014/main" id="{1DC3E2F0-DDE7-27D4-D616-E6FA31242FBC}"/>
+              </a:ext>
+            </a:extLst>
+          </p:cNvPr>
+          <p:cNvSpPr txBox="1"/>
+          <p:nvPr/>
+        </p:nvSpPr>
+        <p:spPr>
+          <a:xfrm>
+            <a:off x="2037347" y="1411705"/>
+            <a:ext cx="5470358" cy="369332"/>
+          </a:xfrm>
+          <a:prstGeom prst="rect">
+            <a:avLst/>
+          </a:prstGeom>
+          <a:noFill/>
+        </p:spPr>
+        <p:txBody>
+          <a:bodyPr wrap="square" rtlCol="0">
+            <a:spAutoFit/>
+          </a:bodyPr>
+          <a:lstStyle/>
+          <a:p>
+            <a:pPr algn="ctr"/>
+            <a:r>
+              <a:rPr lang="en-US" dirty="0"/>
+              <a:t>FORM CHỌN VÉ CỦA NGƯỜI ĐẶT VÉ</a:t>
+            </a:r>
+          </a:p>
+        </p:txBody>
+      </p:sp>
+      <p:pic>
+        <p:nvPicPr>
+          <p:cNvPr id="6" name="Content Placeholder 5" descr="A screenshot of a computer&#10;&#10;Description automatically generated">
+            <a:extLst>
+              <a:ext uri="{FF2B5EF4-FFF2-40B4-BE49-F238E27FC236}">
+                <a16:creationId xmlns:a16="http://schemas.microsoft.com/office/drawing/2014/main" id="{40ADCEF1-2114-42B8-1EA2-46F61DCD7FA9}"/>
+              </a:ext>
+            </a:extLst>
+          </p:cNvPr>
+          <p:cNvPicPr>
+            <a:picLocks noGrp="1" noChangeAspect="1"/>
+          </p:cNvPicPr>
+          <p:nvPr>
+            <p:ph idx="1"/>
+          </p:nvPr>
+        </p:nvPicPr>
+        <p:blipFill>
+          <a:blip r:embed="rId2"/>
+          <a:stretch>
+            <a:fillRect/>
+          </a:stretch>
+        </p:blipFill>
+        <p:spPr>
+          <a:xfrm>
+            <a:off x="1524168" y="2160588"/>
+            <a:ext cx="6903701" cy="3881437"/>
+          </a:xfrm>
+          <a:prstGeom prst="rect">
+            <a:avLst/>
+          </a:prstGeom>
+        </p:spPr>
+      </p:pic>
+    </p:spTree>
+    <p:extLst>
+      <p:ext uri="{BB962C8B-B14F-4D97-AF65-F5344CB8AC3E}">
+        <p14:creationId xmlns:p14="http://schemas.microsoft.com/office/powerpoint/2010/main" val="1319842285"/>
+      </p:ext>
+    </p:extLst>
+  </p:cSld>
+  <p:clrMapOvr>
+    <a:masterClrMapping/>
+  </p:clrMapOvr>
+  <mc:AlternateContent xmlns:mc="http://schemas.openxmlformats.org/markup-compatibility/2006" xmlns:p14="http://schemas.microsoft.com/office/powerpoint/2010/main">
+    <mc:Choice Requires="p14">
+      <p:transition spd="med" p14:dur="700">
+        <p:fade/>
+      </p:transition>
+    </mc:Choice>
+    <mc:Fallback xmlns="">
+      <p:transition spd="med">
+        <p:fade/>
+      </p:transition>
+    </mc:Fallback>
+  </mc:AlternateContent>
+  <p:timing>
+    <p:tnLst>
+      <p:par>
+        <p:cTn id="1" dur="indefinite" restart="never" nodeType="tmRoot">
+          <p:childTnLst>
+            <p:seq concurrent="1" nextAc="seek">
+              <p:cTn id="2" dur="indefinite" nodeType="mainSeq">
+                <p:childTnLst>
+                  <p:par>
+                    <p:cTn id="3" fill="hold">
+                      <p:stCondLst>
+                        <p:cond delay="indefinite"/>
+                      </p:stCondLst>
+                      <p:childTnLst>
+                        <p:par>
+                          <p:cTn id="4" fill="hold">
+                            <p:stCondLst>
+                              <p:cond delay="0"/>
+                            </p:stCondLst>
+                            <p:childTnLst>
+                              <p:par>
+                                <p:cTn id="5" presetID="6" presetClass="entr" presetSubtype="16" fill="hold" grpId="0" nodeType="clickEffect">
+                                  <p:stCondLst>
+                                    <p:cond delay="0"/>
+                                  </p:stCondLst>
+                                  <p:childTnLst>
+                                    <p:set>
+                                      <p:cBhvr>
+                                        <p:cTn id="6" dur="1" fill="hold">
+                                          <p:stCondLst>
+                                            <p:cond delay="0"/>
+                                          </p:stCondLst>
+                                        </p:cTn>
+                                        <p:tgtEl>
+                                          <p:spTgt spid="5"/>
+                                        </p:tgtEl>
+                                        <p:attrNameLst>
+                                          <p:attrName>style.visibility</p:attrName>
+                                        </p:attrNameLst>
+                                      </p:cBhvr>
+                                      <p:to>
+                                        <p:strVal val="visible"/>
+                                      </p:to>
+                                    </p:set>
+                                    <p:animEffect transition="in" filter="circle(in)">
+                                      <p:cBhvr>
+                                        <p:cTn id="7" dur="2000"/>
+                                        <p:tgtEl>
+                                          <p:spTgt spid="5"/>
+                                        </p:tgtEl>
+                                      </p:cBhvr>
+                                    </p:animEffect>
+                                  </p:childTnLst>
+                                </p:cTn>
+                              </p:par>
+                            </p:childTnLst>
+                          </p:cTn>
+                        </p:par>
+                      </p:childTnLst>
+                    </p:cTn>
+                  </p:par>
+                </p:childTnLst>
+              </p:cTn>
+              <p:prevCondLst>
+                <p:cond evt="onPrev" delay="0">
+                  <p:tgtEl>
+                    <p:sldTgt/>
+                  </p:tgtEl>
+                </p:cond>
+              </p:prevCondLst>
+              <p:nextCondLst>
+                <p:cond evt="onNext" delay="0">
+                  <p:tgtEl>
+                    <p:sldTgt/>
+                  </p:tgtEl>
+                </p:cond>
+              </p:nextCondLst>
+            </p:seq>
+          </p:childTnLst>
+        </p:cTn>
+      </p:par>
+    </p:tnLst>
+    <p:bldLst>
+      <p:bldP spid="5" grpId="0"/>
+    </p:bldLst>
+  </p:timing>
+</p:sld>
+</file>
+
+<file path=ppt/slides/slide11.xml><?xml version="1.0" encoding="utf-8"?>
+<p:sld xmlns:a="http://schemas.openxmlformats.org/drawingml/2006/main" xmlns:r="http://schemas.openxmlformats.org/officeDocument/2006/relationships" xmlns:p="http://schemas.openxmlformats.org/presentationml/2006/main">
+  <p:cSld>
+    <p:spTree>
+      <p:nvGrpSpPr>
+        <p:cNvPr id="1" name=""/>
+        <p:cNvGrpSpPr/>
+        <p:nvPr/>
+      </p:nvGrpSpPr>
+      <p:grpSpPr>
+        <a:xfrm>
+          <a:off x="0" y="0"/>
+          <a:ext cx="0" cy="0"/>
+          <a:chOff x="0" y="0"/>
+          <a:chExt cx="0" cy="0"/>
+        </a:xfrm>
+      </p:grpSpPr>
+      <p:sp>
+        <p:nvSpPr>
+          <p:cNvPr id="5" name="Rectangle 4"/>
+          <p:cNvSpPr/>
+          <p:nvPr/>
+        </p:nvSpPr>
+        <p:spPr>
+          <a:xfrm>
+            <a:off x="1219201" y="278693"/>
+            <a:ext cx="7333672" cy="707886"/>
+          </a:xfrm>
+          <a:prstGeom prst="rect">
+            <a:avLst/>
+          </a:prstGeom>
+          <a:noFill/>
+        </p:spPr>
+        <p:txBody>
+          <a:bodyPr wrap="square" lIns="91440" tIns="45720" rIns="91440" bIns="45720">
+            <a:spAutoFit/>
+          </a:bodyPr>
+          <a:lstStyle/>
+          <a:p>
+            <a:pPr algn="ctr"/>
+            <a:r>
+              <a:rPr lang="en-US" sz="4000" dirty="0">
+                <a:ln w="0"/>
+                <a:gradFill>
+                  <a:gsLst>
+                    <a:gs pos="0">
+                      <a:schemeClr val="accent5">
+                        <a:lumMod val="50000"/>
+                      </a:schemeClr>
+                    </a:gs>
+                    <a:gs pos="50000">
+                      <a:schemeClr val="accent5"/>
+                    </a:gs>
+                    <a:gs pos="100000">
+                      <a:schemeClr val="accent5">
+                        <a:lumMod val="60000"/>
+                        <a:lumOff val="40000"/>
+                      </a:schemeClr>
+                    </a:gs>
+                  </a:gsLst>
+                  <a:lin ang="5400000"/>
+                </a:gradFill>
+                <a:effectLst>
+                  <a:reflection blurRad="6350" stA="53000" endA="300" endPos="35500" dir="5400000" sy="-90000" algn="bl" rotWithShape="0"/>
+                </a:effectLst>
+                <a:latin typeface="Times New Roman" panose="02020603050405020304" pitchFamily="18" charset="0"/>
+                <a:cs typeface="Times New Roman" panose="02020603050405020304" pitchFamily="18" charset="0"/>
+              </a:rPr>
+              <a:t>V : FORM ỨNG DỤNG</a:t>
+            </a:r>
+            <a:endParaRPr lang="en-US" sz="4000" b="0" cap="none" spc="0" dirty="0">
+              <a:ln w="0"/>
+              <a:gradFill>
+                <a:gsLst>
+                  <a:gs pos="0">
+                    <a:schemeClr val="accent5">
+                      <a:lumMod val="50000"/>
+                    </a:schemeClr>
+                  </a:gs>
+                  <a:gs pos="50000">
+                    <a:schemeClr val="accent5"/>
+                  </a:gs>
+                  <a:gs pos="100000">
+                    <a:schemeClr val="accent5">
+                      <a:lumMod val="60000"/>
+                      <a:lumOff val="40000"/>
+                    </a:schemeClr>
+                  </a:gs>
+                </a:gsLst>
+                <a:lin ang="5400000"/>
+              </a:gradFill>
+              <a:effectLst>
+                <a:reflection blurRad="6350" stA="53000" endA="300" endPos="35500" dir="5400000" sy="-90000" algn="bl" rotWithShape="0"/>
+              </a:effectLst>
+              <a:latin typeface="Times New Roman" panose="02020603050405020304" pitchFamily="18" charset="0"/>
+              <a:cs typeface="Times New Roman" panose="02020603050405020304" pitchFamily="18" charset="0"/>
+            </a:endParaRPr>
+          </a:p>
+        </p:txBody>
+      </p:sp>
+      <p:sp>
+        <p:nvSpPr>
+          <p:cNvPr id="8" name="TextBox 7">
+            <a:extLst>
+              <a:ext uri="{FF2B5EF4-FFF2-40B4-BE49-F238E27FC236}">
+                <a16:creationId xmlns:a16="http://schemas.microsoft.com/office/drawing/2014/main" id="{1DC3E2F0-DDE7-27D4-D616-E6FA31242FBC}"/>
+              </a:ext>
+            </a:extLst>
+          </p:cNvPr>
+          <p:cNvSpPr txBox="1"/>
+          <p:nvPr/>
+        </p:nvSpPr>
+        <p:spPr>
+          <a:xfrm>
+            <a:off x="2037347" y="1411705"/>
+            <a:ext cx="5470358" cy="369332"/>
+          </a:xfrm>
+          <a:prstGeom prst="rect">
+            <a:avLst/>
+          </a:prstGeom>
+          <a:noFill/>
+        </p:spPr>
+        <p:txBody>
+          <a:bodyPr wrap="square" rtlCol="0">
+            <a:spAutoFit/>
+          </a:bodyPr>
+          <a:lstStyle/>
+          <a:p>
+            <a:pPr algn="ctr"/>
+            <a:r>
+              <a:rPr lang="en-US" dirty="0"/>
+              <a:t>FORM THÔNG TIN KHÁCH HÀNG</a:t>
+            </a:r>
+          </a:p>
+        </p:txBody>
+      </p:sp>
+      <p:sp>
+        <p:nvSpPr>
+          <p:cNvPr id="3" name="Content Placeholder 2">
+            <a:extLst>
+              <a:ext uri="{FF2B5EF4-FFF2-40B4-BE49-F238E27FC236}">
+                <a16:creationId xmlns:a16="http://schemas.microsoft.com/office/drawing/2014/main" id="{308F24AA-04E4-94DE-7F31-A41227ED1C70}"/>
+              </a:ext>
+            </a:extLst>
+          </p:cNvPr>
+          <p:cNvSpPr>
+            <a:spLocks noGrp="1"/>
+          </p:cNvSpPr>
+          <p:nvPr>
+            <p:ph idx="1"/>
+          </p:nvPr>
+        </p:nvSpPr>
+        <p:spPr/>
+        <p:txBody>
+          <a:bodyPr/>
+          <a:lstStyle/>
+          <a:p>
+            <a:endParaRPr lang="en-US"/>
+          </a:p>
+        </p:txBody>
+      </p:sp>
+      <p:pic>
+        <p:nvPicPr>
+          <p:cNvPr id="4" name="Picture 3" descr="A screenshot of a computer&#10;&#10;Description automatically generated">
+            <a:extLst>
+              <a:ext uri="{FF2B5EF4-FFF2-40B4-BE49-F238E27FC236}">
+                <a16:creationId xmlns:a16="http://schemas.microsoft.com/office/drawing/2014/main" id="{D21BF7BE-C3F7-7B92-0F04-539574D65E2A}"/>
+              </a:ext>
+            </a:extLst>
+          </p:cNvPr>
+          <p:cNvPicPr>
+            <a:picLocks noChangeAspect="1"/>
+          </p:cNvPicPr>
+          <p:nvPr/>
+        </p:nvPicPr>
+        <p:blipFill>
+          <a:blip r:embed="rId2"/>
+          <a:stretch>
+            <a:fillRect/>
+          </a:stretch>
+        </p:blipFill>
+        <p:spPr>
+          <a:xfrm>
+            <a:off x="808498" y="2160589"/>
+            <a:ext cx="8465503" cy="3880772"/>
+          </a:xfrm>
+          <a:prstGeom prst="rect">
+            <a:avLst/>
+          </a:prstGeom>
+        </p:spPr>
+      </p:pic>
+    </p:spTree>
+    <p:extLst>
+      <p:ext uri="{BB962C8B-B14F-4D97-AF65-F5344CB8AC3E}">
+        <p14:creationId xmlns:p14="http://schemas.microsoft.com/office/powerpoint/2010/main" val="2318875020"/>
+      </p:ext>
+    </p:extLst>
+  </p:cSld>
+  <p:clrMapOvr>
+    <a:masterClrMapping/>
+  </p:clrMapOvr>
+  <mc:AlternateContent xmlns:mc="http://schemas.openxmlformats.org/markup-compatibility/2006" xmlns:p14="http://schemas.microsoft.com/office/powerpoint/2010/main">
+    <mc:Choice Requires="p14">
+      <p:transition spd="med" p14:dur="700">
+        <p:fade/>
+      </p:transition>
+    </mc:Choice>
+    <mc:Fallback xmlns="">
+      <p:transition spd="med">
+        <p:fade/>
+      </p:transition>
+    </mc:Fallback>
+  </mc:AlternateContent>
+  <p:timing>
+    <p:tnLst>
+      <p:par>
+        <p:cTn id="1" dur="indefinite" restart="never" nodeType="tmRoot">
+          <p:childTnLst>
+            <p:seq concurrent="1" nextAc="seek">
+              <p:cTn id="2" dur="indefinite" nodeType="mainSeq">
+                <p:childTnLst>
+                  <p:par>
+                    <p:cTn id="3" fill="hold">
+                      <p:stCondLst>
+                        <p:cond delay="indefinite"/>
+                      </p:stCondLst>
+                      <p:childTnLst>
+                        <p:par>
+                          <p:cTn id="4" fill="hold">
+                            <p:stCondLst>
+                              <p:cond delay="0"/>
+                            </p:stCondLst>
+                            <p:childTnLst>
+                              <p:par>
+                                <p:cTn id="5" presetID="6" presetClass="entr" presetSubtype="16" fill="hold" grpId="0" nodeType="clickEffect">
+                                  <p:stCondLst>
+                                    <p:cond delay="0"/>
+                                  </p:stCondLst>
+                                  <p:childTnLst>
+                                    <p:set>
+                                      <p:cBhvr>
+                                        <p:cTn id="6" dur="1" fill="hold">
+                                          <p:stCondLst>
+                                            <p:cond delay="0"/>
+                                          </p:stCondLst>
+                                        </p:cTn>
+                                        <p:tgtEl>
+                                          <p:spTgt spid="5"/>
+                                        </p:tgtEl>
+                                        <p:attrNameLst>
+                                          <p:attrName>style.visibility</p:attrName>
+                                        </p:attrNameLst>
+                                      </p:cBhvr>
+                                      <p:to>
+                                        <p:strVal val="visible"/>
+                                      </p:to>
+                                    </p:set>
+                                    <p:animEffect transition="in" filter="circle(in)">
+                                      <p:cBhvr>
+                                        <p:cTn id="7" dur="2000"/>
+                                        <p:tgtEl>
+                                          <p:spTgt spid="5"/>
+                                        </p:tgtEl>
+                                      </p:cBhvr>
+                                    </p:animEffect>
+                                  </p:childTnLst>
+                                </p:cTn>
+                              </p:par>
+                            </p:childTnLst>
+                          </p:cTn>
+                        </p:par>
+                      </p:childTnLst>
+                    </p:cTn>
+                  </p:par>
+                </p:childTnLst>
+              </p:cTn>
+              <p:prevCondLst>
+                <p:cond evt="onPrev" delay="0">
+                  <p:tgtEl>
+                    <p:sldTgt/>
+                  </p:tgtEl>
+                </p:cond>
+              </p:prevCondLst>
+              <p:nextCondLst>
+                <p:cond evt="onNext" delay="0">
+                  <p:tgtEl>
+                    <p:sldTgt/>
+                  </p:tgtEl>
+                </p:cond>
+              </p:nextCondLst>
+            </p:seq>
+          </p:childTnLst>
+        </p:cTn>
+      </p:par>
+    </p:tnLst>
+    <p:bldLst>
+      <p:bldP spid="5" grpId="0"/>
+    </p:bldLst>
+  </p:timing>
+</p:sld>
+</file>
+
+<file path=ppt/slides/slide12.xml><?xml version="1.0" encoding="utf-8"?>
+<p:sld xmlns:a="http://schemas.openxmlformats.org/drawingml/2006/main" xmlns:r="http://schemas.openxmlformats.org/officeDocument/2006/relationships" xmlns:p="http://schemas.openxmlformats.org/presentationml/2006/main">
+  <p:cSld>
+    <p:spTree>
+      <p:nvGrpSpPr>
+        <p:cNvPr id="1" name=""/>
+        <p:cNvGrpSpPr/>
+        <p:nvPr/>
+      </p:nvGrpSpPr>
+      <p:grpSpPr>
+        <a:xfrm>
+          <a:off x="0" y="0"/>
+          <a:ext cx="0" cy="0"/>
+          <a:chOff x="0" y="0"/>
+          <a:chExt cx="0" cy="0"/>
+        </a:xfrm>
+      </p:grpSpPr>
+      <p:sp>
+        <p:nvSpPr>
+          <p:cNvPr id="5" name="Rectangle 4"/>
+          <p:cNvSpPr/>
+          <p:nvPr/>
+        </p:nvSpPr>
+        <p:spPr>
+          <a:xfrm>
+            <a:off x="1219201" y="278693"/>
+            <a:ext cx="7333672" cy="707886"/>
+          </a:xfrm>
+          <a:prstGeom prst="rect">
+            <a:avLst/>
+          </a:prstGeom>
+          <a:noFill/>
+        </p:spPr>
+        <p:txBody>
+          <a:bodyPr wrap="square" lIns="91440" tIns="45720" rIns="91440" bIns="45720">
+            <a:spAutoFit/>
+          </a:bodyPr>
+          <a:lstStyle/>
+          <a:p>
+            <a:pPr algn="ctr"/>
+            <a:r>
+              <a:rPr lang="en-US" sz="4000" dirty="0">
+                <a:ln w="0"/>
+                <a:gradFill>
+                  <a:gsLst>
+                    <a:gs pos="0">
+                      <a:schemeClr val="accent5">
+                        <a:lumMod val="50000"/>
+                      </a:schemeClr>
+                    </a:gs>
+                    <a:gs pos="50000">
+                      <a:schemeClr val="accent5"/>
+                    </a:gs>
+                    <a:gs pos="100000">
+                      <a:schemeClr val="accent5">
+                        <a:lumMod val="60000"/>
+                        <a:lumOff val="40000"/>
+                      </a:schemeClr>
+                    </a:gs>
+                  </a:gsLst>
+                  <a:lin ang="5400000"/>
+                </a:gradFill>
+                <a:effectLst>
+                  <a:reflection blurRad="6350" stA="53000" endA="300" endPos="35500" dir="5400000" sy="-90000" algn="bl" rotWithShape="0"/>
+                </a:effectLst>
+                <a:latin typeface="Times New Roman" panose="02020603050405020304" pitchFamily="18" charset="0"/>
+                <a:cs typeface="Times New Roman" panose="02020603050405020304" pitchFamily="18" charset="0"/>
+              </a:rPr>
+              <a:t>V : FORM ỨNG DỤNG</a:t>
+            </a:r>
+            <a:endParaRPr lang="en-US" sz="4000" b="0" cap="none" spc="0" dirty="0">
+              <a:ln w="0"/>
+              <a:gradFill>
+                <a:gsLst>
+                  <a:gs pos="0">
+                    <a:schemeClr val="accent5">
+                      <a:lumMod val="50000"/>
+                    </a:schemeClr>
+                  </a:gs>
+                  <a:gs pos="50000">
+                    <a:schemeClr val="accent5"/>
+                  </a:gs>
+                  <a:gs pos="100000">
+                    <a:schemeClr val="accent5">
+                      <a:lumMod val="60000"/>
+                      <a:lumOff val="40000"/>
+                    </a:schemeClr>
+                  </a:gs>
+                </a:gsLst>
+                <a:lin ang="5400000"/>
+              </a:gradFill>
+              <a:effectLst>
+                <a:reflection blurRad="6350" stA="53000" endA="300" endPos="35500" dir="5400000" sy="-90000" algn="bl" rotWithShape="0"/>
+              </a:effectLst>
+              <a:latin typeface="Times New Roman" panose="02020603050405020304" pitchFamily="18" charset="0"/>
+              <a:cs typeface="Times New Roman" panose="02020603050405020304" pitchFamily="18" charset="0"/>
+            </a:endParaRPr>
+          </a:p>
+        </p:txBody>
+      </p:sp>
+      <p:sp>
+        <p:nvSpPr>
+          <p:cNvPr id="8" name="TextBox 7">
+            <a:extLst>
+              <a:ext uri="{FF2B5EF4-FFF2-40B4-BE49-F238E27FC236}">
+                <a16:creationId xmlns:a16="http://schemas.microsoft.com/office/drawing/2014/main" id="{1DC3E2F0-DDE7-27D4-D616-E6FA31242FBC}"/>
+              </a:ext>
+            </a:extLst>
+          </p:cNvPr>
+          <p:cNvSpPr txBox="1"/>
+          <p:nvPr/>
+        </p:nvSpPr>
+        <p:spPr>
+          <a:xfrm>
+            <a:off x="2037347" y="1459832"/>
+            <a:ext cx="5470358" cy="369332"/>
+          </a:xfrm>
+          <a:prstGeom prst="rect">
+            <a:avLst/>
+          </a:prstGeom>
+          <a:noFill/>
+        </p:spPr>
+        <p:txBody>
+          <a:bodyPr wrap="square" rtlCol="0">
+            <a:spAutoFit/>
+          </a:bodyPr>
+          <a:lstStyle/>
+          <a:p>
+            <a:pPr algn="ctr"/>
+            <a:r>
+              <a:rPr lang="en-US" dirty="0"/>
+              <a:t>FORM THANH TOÁN CHUYẾN ĐI</a:t>
+            </a:r>
+          </a:p>
+        </p:txBody>
+      </p:sp>
+      <p:sp>
+        <p:nvSpPr>
+          <p:cNvPr id="3" name="Content Placeholder 2">
+            <a:extLst>
+              <a:ext uri="{FF2B5EF4-FFF2-40B4-BE49-F238E27FC236}">
+                <a16:creationId xmlns:a16="http://schemas.microsoft.com/office/drawing/2014/main" id="{308F24AA-04E4-94DE-7F31-A41227ED1C70}"/>
+              </a:ext>
+            </a:extLst>
+          </p:cNvPr>
+          <p:cNvSpPr>
+            <a:spLocks noGrp="1"/>
+          </p:cNvSpPr>
+          <p:nvPr>
+            <p:ph idx="1"/>
+          </p:nvPr>
+        </p:nvSpPr>
+        <p:spPr/>
+        <p:txBody>
+          <a:bodyPr/>
+          <a:lstStyle/>
+          <a:p>
+            <a:endParaRPr lang="en-US"/>
+          </a:p>
+        </p:txBody>
+      </p:sp>
+      <p:pic>
+        <p:nvPicPr>
+          <p:cNvPr id="2" name="Picture 1">
+            <a:extLst>
+              <a:ext uri="{FF2B5EF4-FFF2-40B4-BE49-F238E27FC236}">
+                <a16:creationId xmlns:a16="http://schemas.microsoft.com/office/drawing/2014/main" id="{D5B61274-B9AC-92EE-9B26-0D202E673E33}"/>
+              </a:ext>
+            </a:extLst>
+          </p:cNvPr>
+          <p:cNvPicPr>
+            <a:picLocks noChangeAspect="1"/>
+          </p:cNvPicPr>
+          <p:nvPr/>
+        </p:nvPicPr>
+        <p:blipFill>
+          <a:blip r:embed="rId2"/>
+          <a:stretch>
+            <a:fillRect/>
+          </a:stretch>
+        </p:blipFill>
+        <p:spPr>
+          <a:xfrm>
+            <a:off x="677334" y="2207794"/>
+            <a:ext cx="8596667" cy="3880773"/>
+          </a:xfrm>
+          <a:prstGeom prst="rect">
+            <a:avLst/>
+          </a:prstGeom>
+        </p:spPr>
+      </p:pic>
+    </p:spTree>
+    <p:extLst>
+      <p:ext uri="{BB962C8B-B14F-4D97-AF65-F5344CB8AC3E}">
+        <p14:creationId xmlns:p14="http://schemas.microsoft.com/office/powerpoint/2010/main" val="4159328663"/>
+      </p:ext>
+    </p:extLst>
+  </p:cSld>
+  <p:clrMapOvr>
+    <a:masterClrMapping/>
+  </p:clrMapOvr>
+  <mc:AlternateContent xmlns:mc="http://schemas.openxmlformats.org/markup-compatibility/2006" xmlns:p14="http://schemas.microsoft.com/office/powerpoint/2010/main">
+    <mc:Choice Requires="p14">
+      <p:transition spd="med" p14:dur="700">
+        <p:fade/>
+      </p:transition>
+    </mc:Choice>
+    <mc:Fallback xmlns="">
+      <p:transition spd="med">
+        <p:fade/>
+      </p:transition>
+    </mc:Fallback>
+  </mc:AlternateContent>
+  <p:timing>
+    <p:tnLst>
+      <p:par>
+        <p:cTn id="1" dur="indefinite" restart="never" nodeType="tmRoot">
+          <p:childTnLst>
+            <p:seq concurrent="1" nextAc="seek">
+              <p:cTn id="2" dur="indefinite" nodeType="mainSeq">
+                <p:childTnLst>
+                  <p:par>
+                    <p:cTn id="3" fill="hold">
+                      <p:stCondLst>
+                        <p:cond delay="indefinite"/>
+                      </p:stCondLst>
+                      <p:childTnLst>
+                        <p:par>
+                          <p:cTn id="4" fill="hold">
+                            <p:stCondLst>
+                              <p:cond delay="0"/>
+                            </p:stCondLst>
+                            <p:childTnLst>
+                              <p:par>
+                                <p:cTn id="5" presetID="6" presetClass="entr" presetSubtype="16" fill="hold" grpId="0" nodeType="clickEffect">
+                                  <p:stCondLst>
+                                    <p:cond delay="0"/>
+                                  </p:stCondLst>
+                                  <p:childTnLst>
+                                    <p:set>
+                                      <p:cBhvr>
+                                        <p:cTn id="6" dur="1" fill="hold">
+                                          <p:stCondLst>
+                                            <p:cond delay="0"/>
+                                          </p:stCondLst>
+                                        </p:cTn>
+                                        <p:tgtEl>
+                                          <p:spTgt spid="5"/>
+                                        </p:tgtEl>
+                                        <p:attrNameLst>
+                                          <p:attrName>style.visibility</p:attrName>
+                                        </p:attrNameLst>
+                                      </p:cBhvr>
+                                      <p:to>
+                                        <p:strVal val="visible"/>
+                                      </p:to>
+                                    </p:set>
+                                    <p:animEffect transition="in" filter="circle(in)">
+                                      <p:cBhvr>
+                                        <p:cTn id="7" dur="2000"/>
+                                        <p:tgtEl>
+                                          <p:spTgt spid="5"/>
+                                        </p:tgtEl>
+                                      </p:cBhvr>
+                                    </p:animEffect>
+                                  </p:childTnLst>
+                                </p:cTn>
+                              </p:par>
+                            </p:childTnLst>
+                          </p:cTn>
+                        </p:par>
+                      </p:childTnLst>
+                    </p:cTn>
+                  </p:par>
+                </p:childTnLst>
+              </p:cTn>
+              <p:prevCondLst>
+                <p:cond evt="onPrev" delay="0">
+                  <p:tgtEl>
+                    <p:sldTgt/>
+                  </p:tgtEl>
+                </p:cond>
+              </p:prevCondLst>
+              <p:nextCondLst>
+                <p:cond evt="onNext" delay="0">
+                  <p:tgtEl>
+                    <p:sldTgt/>
+                  </p:tgtEl>
+                </p:cond>
+              </p:nextCondLst>
+            </p:seq>
+          </p:childTnLst>
+        </p:cTn>
+      </p:par>
+    </p:tnLst>
+    <p:bldLst>
+      <p:bldP spid="5" grpId="0"/>
+    </p:bldLst>
+  </p:timing>
+</p:sld>
+</file>
+
+<file path=ppt/slides/slide13.xml><?xml version="1.0" encoding="utf-8"?>
+<p:sld xmlns:a="http://schemas.openxmlformats.org/drawingml/2006/main" xmlns:r="http://schemas.openxmlformats.org/officeDocument/2006/relationships" xmlns:p="http://schemas.openxmlformats.org/presentationml/2006/main">
+  <p:cSld>
+    <p:spTree>
+      <p:nvGrpSpPr>
+        <p:cNvPr id="1" name=""/>
+        <p:cNvGrpSpPr/>
+        <p:nvPr/>
+      </p:nvGrpSpPr>
+      <p:grpSpPr>
+        <a:xfrm>
+          <a:off x="0" y="0"/>
+          <a:ext cx="0" cy="0"/>
+          <a:chOff x="0" y="0"/>
+          <a:chExt cx="0" cy="0"/>
+        </a:xfrm>
+      </p:grpSpPr>
+      <p:sp>
+        <p:nvSpPr>
+          <p:cNvPr id="5" name="Rectangle 4"/>
+          <p:cNvSpPr/>
+          <p:nvPr/>
+        </p:nvSpPr>
+        <p:spPr>
+          <a:xfrm>
+            <a:off x="1219201" y="278693"/>
+            <a:ext cx="7333672" cy="707886"/>
+          </a:xfrm>
+          <a:prstGeom prst="rect">
+            <a:avLst/>
+          </a:prstGeom>
+          <a:noFill/>
+        </p:spPr>
+        <p:txBody>
+          <a:bodyPr wrap="square" lIns="91440" tIns="45720" rIns="91440" bIns="45720">
+            <a:spAutoFit/>
+          </a:bodyPr>
+          <a:lstStyle/>
+          <a:p>
+            <a:pPr algn="ctr"/>
+            <a:r>
+              <a:rPr lang="en-US" sz="4000" dirty="0">
+                <a:ln w="0"/>
+                <a:gradFill>
+                  <a:gsLst>
+                    <a:gs pos="0">
+                      <a:schemeClr val="accent5">
+                        <a:lumMod val="50000"/>
+                      </a:schemeClr>
+                    </a:gs>
+                    <a:gs pos="50000">
+                      <a:schemeClr val="accent5"/>
+                    </a:gs>
+                    <a:gs pos="100000">
+                      <a:schemeClr val="accent5">
+                        <a:lumMod val="60000"/>
+                        <a:lumOff val="40000"/>
+                      </a:schemeClr>
+                    </a:gs>
+                  </a:gsLst>
+                  <a:lin ang="5400000"/>
+                </a:gradFill>
+                <a:effectLst>
+                  <a:reflection blurRad="6350" stA="53000" endA="300" endPos="35500" dir="5400000" sy="-90000" algn="bl" rotWithShape="0"/>
+                </a:effectLst>
+                <a:latin typeface="Times New Roman" panose="02020603050405020304" pitchFamily="18" charset="0"/>
+                <a:cs typeface="Times New Roman" panose="02020603050405020304" pitchFamily="18" charset="0"/>
+              </a:rPr>
+              <a:t>V : FORM ỨNG DỤNG</a:t>
+            </a:r>
+            <a:endParaRPr lang="en-US" sz="4000" b="0" cap="none" spc="0" dirty="0">
+              <a:ln w="0"/>
+              <a:gradFill>
+                <a:gsLst>
+                  <a:gs pos="0">
+                    <a:schemeClr val="accent5">
+                      <a:lumMod val="50000"/>
+                    </a:schemeClr>
+                  </a:gs>
+                  <a:gs pos="50000">
+                    <a:schemeClr val="accent5"/>
+                  </a:gs>
+                  <a:gs pos="100000">
+                    <a:schemeClr val="accent5">
+                      <a:lumMod val="60000"/>
+                      <a:lumOff val="40000"/>
+                    </a:schemeClr>
+                  </a:gs>
+                </a:gsLst>
+                <a:lin ang="5400000"/>
+              </a:gradFill>
+              <a:effectLst>
+                <a:reflection blurRad="6350" stA="53000" endA="300" endPos="35500" dir="5400000" sy="-90000" algn="bl" rotWithShape="0"/>
+              </a:effectLst>
+              <a:latin typeface="Times New Roman" panose="02020603050405020304" pitchFamily="18" charset="0"/>
+              <a:cs typeface="Times New Roman" panose="02020603050405020304" pitchFamily="18" charset="0"/>
+            </a:endParaRPr>
+          </a:p>
+        </p:txBody>
+      </p:sp>
+      <p:sp>
+        <p:nvSpPr>
+          <p:cNvPr id="8" name="TextBox 7">
+            <a:extLst>
+              <a:ext uri="{FF2B5EF4-FFF2-40B4-BE49-F238E27FC236}">
+                <a16:creationId xmlns:a16="http://schemas.microsoft.com/office/drawing/2014/main" id="{1DC3E2F0-DDE7-27D4-D616-E6FA31242FBC}"/>
+              </a:ext>
+            </a:extLst>
+          </p:cNvPr>
+          <p:cNvSpPr txBox="1"/>
+          <p:nvPr/>
+        </p:nvSpPr>
+        <p:spPr>
+          <a:xfrm>
+            <a:off x="2053389" y="1459832"/>
+            <a:ext cx="5470358" cy="369332"/>
+          </a:xfrm>
+          <a:prstGeom prst="rect">
+            <a:avLst/>
+          </a:prstGeom>
+          <a:noFill/>
+        </p:spPr>
+        <p:txBody>
+          <a:bodyPr wrap="square" rtlCol="0">
+            <a:spAutoFit/>
+          </a:bodyPr>
+          <a:lstStyle/>
+          <a:p>
+            <a:pPr algn="ctr"/>
+            <a:r>
+              <a:rPr lang="en-US" dirty="0"/>
+              <a:t>FORM KIỂM TRA VÉ</a:t>
+            </a:r>
+          </a:p>
+        </p:txBody>
+      </p:sp>
+      <p:pic>
+        <p:nvPicPr>
+          <p:cNvPr id="4" name="Content Placeholder 3">
+            <a:extLst>
+              <a:ext uri="{FF2B5EF4-FFF2-40B4-BE49-F238E27FC236}">
+                <a16:creationId xmlns:a16="http://schemas.microsoft.com/office/drawing/2014/main" id="{5EF4D78B-1C47-39F3-A8BB-4B194F89C947}"/>
+              </a:ext>
+            </a:extLst>
+          </p:cNvPr>
+          <p:cNvPicPr>
+            <a:picLocks noGrp="1" noChangeAspect="1"/>
+          </p:cNvPicPr>
+          <p:nvPr>
+            <p:ph idx="1"/>
+          </p:nvPr>
+        </p:nvPicPr>
+        <p:blipFill>
+          <a:blip r:embed="rId2"/>
+          <a:stretch>
+            <a:fillRect/>
+          </a:stretch>
+        </p:blipFill>
+        <p:spPr>
+          <a:xfrm>
+            <a:off x="1524168" y="2160588"/>
+            <a:ext cx="6903701" cy="3881437"/>
+          </a:xfrm>
+          <a:prstGeom prst="rect">
+            <a:avLst/>
+          </a:prstGeom>
+        </p:spPr>
+      </p:pic>
+    </p:spTree>
+    <p:extLst>
+      <p:ext uri="{BB962C8B-B14F-4D97-AF65-F5344CB8AC3E}">
+        <p14:creationId xmlns:p14="http://schemas.microsoft.com/office/powerpoint/2010/main" val="2638207556"/>
+      </p:ext>
+    </p:extLst>
+  </p:cSld>
+  <p:clrMapOvr>
+    <a:masterClrMapping/>
+  </p:clrMapOvr>
+  <mc:AlternateContent xmlns:mc="http://schemas.openxmlformats.org/markup-compatibility/2006" xmlns:p14="http://schemas.microsoft.com/office/powerpoint/2010/main">
+    <mc:Choice Requires="p14">
+      <p:transition spd="med" p14:dur="700">
+        <p:fade/>
+      </p:transition>
+    </mc:Choice>
+    <mc:Fallback xmlns="">
+      <p:transition spd="med">
+        <p:fade/>
+      </p:transition>
+    </mc:Fallback>
+  </mc:AlternateContent>
+  <p:timing>
+    <p:tnLst>
+      <p:par>
+        <p:cTn id="1" dur="indefinite" restart="never" nodeType="tmRoot">
+          <p:childTnLst>
+            <p:seq concurrent="1" nextAc="seek">
+              <p:cTn id="2" dur="indefinite" nodeType="mainSeq">
+                <p:childTnLst>
+                  <p:par>
+                    <p:cTn id="3" fill="hold">
+                      <p:stCondLst>
+                        <p:cond delay="indefinite"/>
+                      </p:stCondLst>
+                      <p:childTnLst>
+                        <p:par>
+                          <p:cTn id="4" fill="hold">
+                            <p:stCondLst>
+                              <p:cond delay="0"/>
+                            </p:stCondLst>
+                            <p:childTnLst>
+                              <p:par>
+                                <p:cTn id="5" presetID="6" presetClass="entr" presetSubtype="16" fill="hold" grpId="0" nodeType="clickEffect">
+                                  <p:stCondLst>
+                                    <p:cond delay="0"/>
+                                  </p:stCondLst>
+                                  <p:childTnLst>
+                                    <p:set>
+                                      <p:cBhvr>
+                                        <p:cTn id="6" dur="1" fill="hold">
+                                          <p:stCondLst>
+                                            <p:cond delay="0"/>
+                                          </p:stCondLst>
+                                        </p:cTn>
+                                        <p:tgtEl>
+                                          <p:spTgt spid="5"/>
+                                        </p:tgtEl>
+                                        <p:attrNameLst>
+                                          <p:attrName>style.visibility</p:attrName>
+                                        </p:attrNameLst>
+                                      </p:cBhvr>
+                                      <p:to>
+                                        <p:strVal val="visible"/>
+                                      </p:to>
+                                    </p:set>
+                                    <p:animEffect transition="in" filter="circle(in)">
+                                      <p:cBhvr>
+                                        <p:cTn id="7" dur="2000"/>
+                                        <p:tgtEl>
+                                          <p:spTgt spid="5"/>
+                                        </p:tgtEl>
+                                      </p:cBhvr>
+                                    </p:animEffect>
+                                  </p:childTnLst>
+                                </p:cTn>
+                              </p:par>
+                            </p:childTnLst>
+                          </p:cTn>
+                        </p:par>
+                      </p:childTnLst>
+                    </p:cTn>
+                  </p:par>
+                </p:childTnLst>
+              </p:cTn>
+              <p:prevCondLst>
+                <p:cond evt="onPrev" delay="0">
+                  <p:tgtEl>
+                    <p:sldTgt/>
+                  </p:tgtEl>
+                </p:cond>
+              </p:prevCondLst>
+              <p:nextCondLst>
+                <p:cond evt="onNext" delay="0">
+                  <p:tgtEl>
+                    <p:sldTgt/>
+                  </p:tgtEl>
+                </p:cond>
+              </p:nextCondLst>
+            </p:seq>
+          </p:childTnLst>
+        </p:cTn>
+      </p:par>
+    </p:tnLst>
+    <p:bldLst>
+      <p:bldP spid="5" grpId="0"/>
+    </p:bldLst>
+  </p:timing>
+</p:sld>
+</file>
+
+<file path=ppt/slides/slide14.xml><?xml version="1.0" encoding="utf-8"?>
+<p:sld xmlns:a="http://schemas.openxmlformats.org/drawingml/2006/main" xmlns:r="http://schemas.openxmlformats.org/officeDocument/2006/relationships" xmlns:p="http://schemas.openxmlformats.org/presentationml/2006/main">
+  <p:cSld>
+    <p:spTree>
+      <p:nvGrpSpPr>
+        <p:cNvPr id="1" name=""/>
+        <p:cNvGrpSpPr/>
+        <p:nvPr/>
+      </p:nvGrpSpPr>
+      <p:grpSpPr>
+        <a:xfrm>
+          <a:off x="0" y="0"/>
+          <a:ext cx="0" cy="0"/>
+          <a:chOff x="0" y="0"/>
+          <a:chExt cx="0" cy="0"/>
+        </a:xfrm>
+      </p:grpSpPr>
+      <p:sp>
+        <p:nvSpPr>
+          <p:cNvPr id="5" name="Rectangle 4"/>
+          <p:cNvSpPr/>
+          <p:nvPr/>
+        </p:nvSpPr>
+        <p:spPr>
+          <a:xfrm>
+            <a:off x="1219201" y="278693"/>
+            <a:ext cx="7333672" cy="707886"/>
+          </a:xfrm>
+          <a:prstGeom prst="rect">
+            <a:avLst/>
+          </a:prstGeom>
+          <a:noFill/>
+        </p:spPr>
+        <p:txBody>
+          <a:bodyPr wrap="square" lIns="91440" tIns="45720" rIns="91440" bIns="45720">
+            <a:spAutoFit/>
+          </a:bodyPr>
+          <a:lstStyle/>
+          <a:p>
+            <a:pPr algn="ctr"/>
+            <a:r>
+              <a:rPr lang="en-US" sz="4000" dirty="0">
+                <a:ln w="0"/>
+                <a:gradFill>
+                  <a:gsLst>
+                    <a:gs pos="0">
+                      <a:schemeClr val="accent5">
+                        <a:lumMod val="50000"/>
+                      </a:schemeClr>
+                    </a:gs>
+                    <a:gs pos="50000">
+                      <a:schemeClr val="accent5"/>
+                    </a:gs>
+                    <a:gs pos="100000">
+                      <a:schemeClr val="accent5">
+                        <a:lumMod val="60000"/>
+                        <a:lumOff val="40000"/>
+                      </a:schemeClr>
+                    </a:gs>
+                  </a:gsLst>
+                  <a:lin ang="5400000"/>
+                </a:gradFill>
+                <a:effectLst>
+                  <a:reflection blurRad="6350" stA="53000" endA="300" endPos="35500" dir="5400000" sy="-90000" algn="bl" rotWithShape="0"/>
+                </a:effectLst>
+                <a:latin typeface="Times New Roman" panose="02020603050405020304" pitchFamily="18" charset="0"/>
+                <a:cs typeface="Times New Roman" panose="02020603050405020304" pitchFamily="18" charset="0"/>
+              </a:rPr>
+              <a:t>V : FORM ỨNG DỤNG</a:t>
+            </a:r>
+            <a:endParaRPr lang="en-US" sz="4000" b="0" cap="none" spc="0" dirty="0">
+              <a:ln w="0"/>
+              <a:gradFill>
+                <a:gsLst>
+                  <a:gs pos="0">
+                    <a:schemeClr val="accent5">
+                      <a:lumMod val="50000"/>
+                    </a:schemeClr>
+                  </a:gs>
+                  <a:gs pos="50000">
+                    <a:schemeClr val="accent5"/>
+                  </a:gs>
+                  <a:gs pos="100000">
+                    <a:schemeClr val="accent5">
+                      <a:lumMod val="60000"/>
+                      <a:lumOff val="40000"/>
+                    </a:schemeClr>
+                  </a:gs>
+                </a:gsLst>
+                <a:lin ang="5400000"/>
+              </a:gradFill>
+              <a:effectLst>
+                <a:reflection blurRad="6350" stA="53000" endA="300" endPos="35500" dir="5400000" sy="-90000" algn="bl" rotWithShape="0"/>
+              </a:effectLst>
+              <a:latin typeface="Times New Roman" panose="02020603050405020304" pitchFamily="18" charset="0"/>
+              <a:cs typeface="Times New Roman" panose="02020603050405020304" pitchFamily="18" charset="0"/>
+            </a:endParaRPr>
+          </a:p>
+        </p:txBody>
+      </p:sp>
+      <p:sp>
+        <p:nvSpPr>
+          <p:cNvPr id="8" name="TextBox 7">
+            <a:extLst>
+              <a:ext uri="{FF2B5EF4-FFF2-40B4-BE49-F238E27FC236}">
+                <a16:creationId xmlns:a16="http://schemas.microsoft.com/office/drawing/2014/main" id="{1DC3E2F0-DDE7-27D4-D616-E6FA31242FBC}"/>
+              </a:ext>
+            </a:extLst>
+          </p:cNvPr>
+          <p:cNvSpPr txBox="1"/>
+          <p:nvPr/>
+        </p:nvSpPr>
+        <p:spPr>
+          <a:xfrm>
+            <a:off x="2053389" y="1459832"/>
+            <a:ext cx="5470358" cy="369332"/>
+          </a:xfrm>
+          <a:prstGeom prst="rect">
+            <a:avLst/>
+          </a:prstGeom>
+          <a:noFill/>
+        </p:spPr>
+        <p:txBody>
+          <a:bodyPr wrap="square" rtlCol="0">
+            <a:spAutoFit/>
+          </a:bodyPr>
+          <a:lstStyle/>
+          <a:p>
+            <a:pPr algn="ctr"/>
+            <a:r>
+              <a:rPr lang="en-US" dirty="0"/>
+              <a:t>FORM ĐĂNG KÍ TÀI KHOẢN NGƯỜI ĐẶT VÉ</a:t>
+            </a:r>
+          </a:p>
+        </p:txBody>
+      </p:sp>
+      <p:pic>
+        <p:nvPicPr>
+          <p:cNvPr id="7" name="Content Placeholder 6" descr="A screenshot of a sign up form&#10;&#10;Description automatically generated">
+            <a:extLst>
+              <a:ext uri="{FF2B5EF4-FFF2-40B4-BE49-F238E27FC236}">
+                <a16:creationId xmlns:a16="http://schemas.microsoft.com/office/drawing/2014/main" id="{CD3775D4-635A-332F-5F62-20E546EC728B}"/>
+              </a:ext>
+            </a:extLst>
+          </p:cNvPr>
+          <p:cNvPicPr>
+            <a:picLocks noGrp="1" noChangeAspect="1"/>
+          </p:cNvPicPr>
+          <p:nvPr>
+            <p:ph idx="1"/>
+          </p:nvPr>
+        </p:nvPicPr>
+        <p:blipFill>
+          <a:blip r:embed="rId2"/>
+          <a:stretch>
+            <a:fillRect/>
+          </a:stretch>
+        </p:blipFill>
+        <p:spPr>
+          <a:xfrm>
+            <a:off x="1524168" y="2160588"/>
+            <a:ext cx="6903701" cy="3881437"/>
+          </a:xfrm>
+          <a:prstGeom prst="rect">
+            <a:avLst/>
+          </a:prstGeom>
+        </p:spPr>
+      </p:pic>
+    </p:spTree>
+    <p:extLst>
+      <p:ext uri="{BB962C8B-B14F-4D97-AF65-F5344CB8AC3E}">
+        <p14:creationId xmlns:p14="http://schemas.microsoft.com/office/powerpoint/2010/main" val="2701241292"/>
+      </p:ext>
+    </p:extLst>
+  </p:cSld>
+  <p:clrMapOvr>
+    <a:masterClrMapping/>
+  </p:clrMapOvr>
+  <mc:AlternateContent xmlns:mc="http://schemas.openxmlformats.org/markup-compatibility/2006" xmlns:p14="http://schemas.microsoft.com/office/powerpoint/2010/main">
+    <mc:Choice Requires="p14">
+      <p:transition spd="med" p14:dur="700">
+        <p:fade/>
+      </p:transition>
+    </mc:Choice>
+    <mc:Fallback xmlns="">
+      <p:transition spd="med">
+        <p:fade/>
+      </p:transition>
+    </mc:Fallback>
+  </mc:AlternateContent>
+  <p:timing>
+    <p:tnLst>
+      <p:par>
+        <p:cTn id="1" dur="indefinite" restart="never" nodeType="tmRoot">
+          <p:childTnLst>
+            <p:seq concurrent="1" nextAc="seek">
+              <p:cTn id="2" dur="indefinite" nodeType="mainSeq">
+                <p:childTnLst>
+                  <p:par>
+                    <p:cTn id="3" fill="hold">
+                      <p:stCondLst>
+                        <p:cond delay="indefinite"/>
+                      </p:stCondLst>
+                      <p:childTnLst>
+                        <p:par>
+                          <p:cTn id="4" fill="hold">
+                            <p:stCondLst>
+                              <p:cond delay="0"/>
+                            </p:stCondLst>
+                            <p:childTnLst>
+                              <p:par>
+                                <p:cTn id="5" presetID="6" presetClass="entr" presetSubtype="16" fill="hold" grpId="0" nodeType="clickEffect">
+                                  <p:stCondLst>
+                                    <p:cond delay="0"/>
+                                  </p:stCondLst>
+                                  <p:childTnLst>
+                                    <p:set>
+                                      <p:cBhvr>
+                                        <p:cTn id="6" dur="1" fill="hold">
+                                          <p:stCondLst>
+                                            <p:cond delay="0"/>
+                                          </p:stCondLst>
+                                        </p:cTn>
+                                        <p:tgtEl>
+                                          <p:spTgt spid="5"/>
+                                        </p:tgtEl>
+                                        <p:attrNameLst>
+                                          <p:attrName>style.visibility</p:attrName>
+                                        </p:attrNameLst>
+                                      </p:cBhvr>
+                                      <p:to>
+                                        <p:strVal val="visible"/>
+                                      </p:to>
+                                    </p:set>
+                                    <p:animEffect transition="in" filter="circle(in)">
+                                      <p:cBhvr>
+                                        <p:cTn id="7" dur="2000"/>
+                                        <p:tgtEl>
+                                          <p:spTgt spid="5"/>
+                                        </p:tgtEl>
+                                      </p:cBhvr>
+                                    </p:animEffect>
+                                  </p:childTnLst>
+                                </p:cTn>
+                              </p:par>
+                            </p:childTnLst>
+                          </p:cTn>
+                        </p:par>
+                      </p:childTnLst>
+                    </p:cTn>
+                  </p:par>
+                </p:childTnLst>
+              </p:cTn>
+              <p:prevCondLst>
+                <p:cond evt="onPrev" delay="0">
+                  <p:tgtEl>
+                    <p:sldTgt/>
+                  </p:tgtEl>
+                </p:cond>
+              </p:prevCondLst>
+              <p:nextCondLst>
+                <p:cond evt="onNext" delay="0">
+                  <p:tgtEl>
+                    <p:sldTgt/>
+                  </p:tgtEl>
+                </p:cond>
+              </p:nextCondLst>
+            </p:seq>
+          </p:childTnLst>
+        </p:cTn>
+      </p:par>
+    </p:tnLst>
+    <p:bldLst>
+      <p:bldP spid="5" grpId="0"/>
+    </p:bldLst>
+  </p:timing>
+</p:sld>
+</file>
+
+<file path=ppt/slides/slide15.xml><?xml version="1.0" encoding="utf-8"?>
+<p:sld xmlns:a="http://schemas.openxmlformats.org/drawingml/2006/main" xmlns:r="http://schemas.openxmlformats.org/officeDocument/2006/relationships" xmlns:p="http://schemas.openxmlformats.org/presentationml/2006/main">
+  <p:cSld>
+    <p:spTree>
+      <p:nvGrpSpPr>
+        <p:cNvPr id="1" name=""/>
+        <p:cNvGrpSpPr/>
+        <p:nvPr/>
+      </p:nvGrpSpPr>
+      <p:grpSpPr>
+        <a:xfrm>
+          <a:off x="0" y="0"/>
+          <a:ext cx="0" cy="0"/>
+          <a:chOff x="0" y="0"/>
+          <a:chExt cx="0" cy="0"/>
+        </a:xfrm>
+      </p:grpSpPr>
+      <p:sp>
+        <p:nvSpPr>
+          <p:cNvPr id="5" name="Rectangle 4"/>
+          <p:cNvSpPr/>
+          <p:nvPr/>
+        </p:nvSpPr>
+        <p:spPr>
+          <a:xfrm>
+            <a:off x="1219201" y="278693"/>
+            <a:ext cx="7333672" cy="707886"/>
+          </a:xfrm>
+          <a:prstGeom prst="rect">
+            <a:avLst/>
+          </a:prstGeom>
+          <a:noFill/>
+        </p:spPr>
+        <p:txBody>
+          <a:bodyPr wrap="square" lIns="91440" tIns="45720" rIns="91440" bIns="45720">
+            <a:spAutoFit/>
+          </a:bodyPr>
+          <a:lstStyle/>
+          <a:p>
+            <a:pPr algn="ctr"/>
+            <a:r>
+              <a:rPr lang="en-US" sz="4000" dirty="0">
+                <a:ln w="0"/>
+                <a:gradFill>
+                  <a:gsLst>
+                    <a:gs pos="0">
+                      <a:schemeClr val="accent5">
+                        <a:lumMod val="50000"/>
+                      </a:schemeClr>
+                    </a:gs>
+                    <a:gs pos="50000">
+                      <a:schemeClr val="accent5"/>
+                    </a:gs>
+                    <a:gs pos="100000">
+                      <a:schemeClr val="accent5">
+                        <a:lumMod val="60000"/>
+                        <a:lumOff val="40000"/>
+                      </a:schemeClr>
+                    </a:gs>
+                  </a:gsLst>
+                  <a:lin ang="5400000"/>
+                </a:gradFill>
+                <a:effectLst>
+                  <a:reflection blurRad="6350" stA="53000" endA="300" endPos="35500" dir="5400000" sy="-90000" algn="bl" rotWithShape="0"/>
+                </a:effectLst>
+                <a:latin typeface="Times New Roman" panose="02020603050405020304" pitchFamily="18" charset="0"/>
+                <a:cs typeface="Times New Roman" panose="02020603050405020304" pitchFamily="18" charset="0"/>
+              </a:rPr>
+              <a:t>V : FORM ỨNG DỤNG</a:t>
+            </a:r>
+            <a:endParaRPr lang="en-US" sz="4000" b="0" cap="none" spc="0" dirty="0">
+              <a:ln w="0"/>
+              <a:gradFill>
+                <a:gsLst>
+                  <a:gs pos="0">
+                    <a:schemeClr val="accent5">
+                      <a:lumMod val="50000"/>
+                    </a:schemeClr>
+                  </a:gs>
+                  <a:gs pos="50000">
+                    <a:schemeClr val="accent5"/>
+                  </a:gs>
+                  <a:gs pos="100000">
+                    <a:schemeClr val="accent5">
+                      <a:lumMod val="60000"/>
+                      <a:lumOff val="40000"/>
+                    </a:schemeClr>
+                  </a:gs>
+                </a:gsLst>
+                <a:lin ang="5400000"/>
+              </a:gradFill>
+              <a:effectLst>
+                <a:reflection blurRad="6350" stA="53000" endA="300" endPos="35500" dir="5400000" sy="-90000" algn="bl" rotWithShape="0"/>
+              </a:effectLst>
+              <a:latin typeface="Times New Roman" panose="02020603050405020304" pitchFamily="18" charset="0"/>
+              <a:cs typeface="Times New Roman" panose="02020603050405020304" pitchFamily="18" charset="0"/>
+            </a:endParaRPr>
+          </a:p>
+        </p:txBody>
+      </p:sp>
+      <p:sp>
+        <p:nvSpPr>
+          <p:cNvPr id="8" name="TextBox 7">
+            <a:extLst>
+              <a:ext uri="{FF2B5EF4-FFF2-40B4-BE49-F238E27FC236}">
+                <a16:creationId xmlns:a16="http://schemas.microsoft.com/office/drawing/2014/main" id="{1DC3E2F0-DDE7-27D4-D616-E6FA31242FBC}"/>
+              </a:ext>
+            </a:extLst>
+          </p:cNvPr>
+          <p:cNvSpPr txBox="1"/>
+          <p:nvPr/>
+        </p:nvSpPr>
+        <p:spPr>
+          <a:xfrm>
+            <a:off x="2080470" y="1459832"/>
+            <a:ext cx="5416196" cy="369332"/>
+          </a:xfrm>
+          <a:prstGeom prst="rect">
+            <a:avLst/>
+          </a:prstGeom>
+          <a:noFill/>
+        </p:spPr>
+        <p:txBody>
+          <a:bodyPr wrap="square" rtlCol="0">
+            <a:spAutoFit/>
+          </a:bodyPr>
+          <a:lstStyle/>
+          <a:p>
+            <a:pPr algn="ctr"/>
+            <a:r>
+              <a:rPr lang="en-US" dirty="0"/>
+              <a:t>FORM QUẢN LÝ NHÂN VIÊN</a:t>
+            </a:r>
+          </a:p>
+        </p:txBody>
+      </p:sp>
+      <p:pic>
+        <p:nvPicPr>
+          <p:cNvPr id="4" name="Content Placeholder 3">
+            <a:extLst>
+              <a:ext uri="{FF2B5EF4-FFF2-40B4-BE49-F238E27FC236}">
+                <a16:creationId xmlns:a16="http://schemas.microsoft.com/office/drawing/2014/main" id="{584244D7-2CEC-7B42-62F6-9B7185A09276}"/>
+              </a:ext>
+            </a:extLst>
+          </p:cNvPr>
+          <p:cNvPicPr>
+            <a:picLocks noGrp="1" noChangeAspect="1"/>
+          </p:cNvPicPr>
+          <p:nvPr>
+            <p:ph idx="1"/>
+          </p:nvPr>
+        </p:nvPicPr>
+        <p:blipFill>
+          <a:blip r:embed="rId2" cstate="print">
+            <a:extLst>
+              <a:ext uri="{28A0092B-C50C-407E-A947-70E740481C1C}">
+                <a14:useLocalDpi xmlns:a14="http://schemas.microsoft.com/office/drawing/2010/main" val="0"/>
+              </a:ext>
+            </a:extLst>
+          </a:blip>
+          <a:srcRect/>
+          <a:stretch>
+            <a:fillRect/>
+          </a:stretch>
+        </p:blipFill>
+        <p:spPr bwMode="auto">
+          <a:xfrm>
+            <a:off x="2097737" y="2482403"/>
+            <a:ext cx="5756564" cy="3237807"/>
+          </a:xfrm>
+          <a:prstGeom prst="rect">
+            <a:avLst/>
+          </a:prstGeom>
+          <a:noFill/>
+          <a:ln>
+            <a:noFill/>
+          </a:ln>
+        </p:spPr>
+      </p:pic>
+    </p:spTree>
+    <p:extLst>
+      <p:ext uri="{BB962C8B-B14F-4D97-AF65-F5344CB8AC3E}">
+        <p14:creationId xmlns:p14="http://schemas.microsoft.com/office/powerpoint/2010/main" val="817019549"/>
+      </p:ext>
+    </p:extLst>
+  </p:cSld>
+  <p:clrMapOvr>
+    <a:masterClrMapping/>
+  </p:clrMapOvr>
+  <mc:AlternateContent xmlns:mc="http://schemas.openxmlformats.org/markup-compatibility/2006" xmlns:p14="http://schemas.microsoft.com/office/powerpoint/2010/main">
+    <mc:Choice Requires="p14">
+      <p:transition spd="med" p14:dur="700">
+        <p:fade/>
+      </p:transition>
+    </mc:Choice>
+    <mc:Fallback xmlns="">
+      <p:transition spd="med">
+        <p:fade/>
+      </p:transition>
+    </mc:Fallback>
+  </mc:AlternateContent>
+  <p:timing>
+    <p:tnLst>
+      <p:par>
+        <p:cTn id="1" dur="indefinite" restart="never" nodeType="tmRoot">
+          <p:childTnLst>
+            <p:seq concurrent="1" nextAc="seek">
+              <p:cTn id="2" dur="indefinite" nodeType="mainSeq">
+                <p:childTnLst>
+                  <p:par>
+                    <p:cTn id="3" fill="hold">
+                      <p:stCondLst>
+                        <p:cond delay="indefinite"/>
+                      </p:stCondLst>
+                      <p:childTnLst>
+                        <p:par>
+                          <p:cTn id="4" fill="hold">
+                            <p:stCondLst>
+                              <p:cond delay="0"/>
+                            </p:stCondLst>
+                            <p:childTnLst>
+                              <p:par>
+                                <p:cTn id="5" presetID="6" presetClass="entr" presetSubtype="16" fill="hold" grpId="0" nodeType="clickEffect">
+                                  <p:stCondLst>
+                                    <p:cond delay="0"/>
+                                  </p:stCondLst>
+                                  <p:childTnLst>
+                                    <p:set>
+                                      <p:cBhvr>
+                                        <p:cTn id="6" dur="1" fill="hold">
+                                          <p:stCondLst>
+                                            <p:cond delay="0"/>
+                                          </p:stCondLst>
+                                        </p:cTn>
+                                        <p:tgtEl>
+                                          <p:spTgt spid="5"/>
+                                        </p:tgtEl>
+                                        <p:attrNameLst>
+                                          <p:attrName>style.visibility</p:attrName>
+                                        </p:attrNameLst>
+                                      </p:cBhvr>
+                                      <p:to>
+                                        <p:strVal val="visible"/>
+                                      </p:to>
+                                    </p:set>
+                                    <p:animEffect transition="in" filter="circle(in)">
+                                      <p:cBhvr>
+                                        <p:cTn id="7" dur="2000"/>
+                                        <p:tgtEl>
+                                          <p:spTgt spid="5"/>
+                                        </p:tgtEl>
+                                      </p:cBhvr>
+                                    </p:animEffect>
+                                  </p:childTnLst>
+                                </p:cTn>
+                              </p:par>
+                            </p:childTnLst>
+                          </p:cTn>
+                        </p:par>
+                      </p:childTnLst>
+                    </p:cTn>
+                  </p:par>
+                </p:childTnLst>
+              </p:cTn>
+              <p:prevCondLst>
+                <p:cond evt="onPrev" delay="0">
+                  <p:tgtEl>
+                    <p:sldTgt/>
+                  </p:tgtEl>
+                </p:cond>
+              </p:prevCondLst>
+              <p:nextCondLst>
+                <p:cond evt="onNext" delay="0">
+                  <p:tgtEl>
+                    <p:sldTgt/>
+                  </p:tgtEl>
+                </p:cond>
+              </p:nextCondLst>
+            </p:seq>
+          </p:childTnLst>
+        </p:cTn>
+      </p:par>
+    </p:tnLst>
+    <p:bldLst>
+      <p:bldP spid="5" grpId="0"/>
+    </p:bldLst>
+  </p:timing>
+</p:sld>
+</file>
+
+<file path=ppt/slides/slide16.xml><?xml version="1.0" encoding="utf-8"?>
+<p:sld xmlns:a="http://schemas.openxmlformats.org/drawingml/2006/main" xmlns:r="http://schemas.openxmlformats.org/officeDocument/2006/relationships" xmlns:p="http://schemas.openxmlformats.org/presentationml/2006/main">
+  <p:cSld>
+    <p:spTree>
+      <p:nvGrpSpPr>
+        <p:cNvPr id="1" name=""/>
+        <p:cNvGrpSpPr/>
+        <p:nvPr/>
+      </p:nvGrpSpPr>
+      <p:grpSpPr>
+        <a:xfrm>
+          <a:off x="0" y="0"/>
+          <a:ext cx="0" cy="0"/>
+          <a:chOff x="0" y="0"/>
+          <a:chExt cx="0" cy="0"/>
+        </a:xfrm>
+      </p:grpSpPr>
+      <p:sp>
+        <p:nvSpPr>
+          <p:cNvPr id="5" name="Rectangle 4"/>
+          <p:cNvSpPr/>
+          <p:nvPr/>
+        </p:nvSpPr>
+        <p:spPr>
+          <a:xfrm>
+            <a:off x="1219201" y="278693"/>
+            <a:ext cx="7333672" cy="707886"/>
+          </a:xfrm>
+          <a:prstGeom prst="rect">
+            <a:avLst/>
+          </a:prstGeom>
+          <a:noFill/>
+        </p:spPr>
+        <p:txBody>
+          <a:bodyPr wrap="square" lIns="91440" tIns="45720" rIns="91440" bIns="45720">
+            <a:spAutoFit/>
+          </a:bodyPr>
+          <a:lstStyle/>
+          <a:p>
+            <a:pPr algn="ctr"/>
+            <a:r>
+              <a:rPr lang="en-US" sz="4000" dirty="0">
+                <a:ln w="0"/>
+                <a:gradFill>
+                  <a:gsLst>
+                    <a:gs pos="0">
+                      <a:schemeClr val="accent5">
+                        <a:lumMod val="50000"/>
+                      </a:schemeClr>
+                    </a:gs>
+                    <a:gs pos="50000">
+                      <a:schemeClr val="accent5"/>
+                    </a:gs>
+                    <a:gs pos="100000">
+                      <a:schemeClr val="accent5">
+                        <a:lumMod val="60000"/>
+                        <a:lumOff val="40000"/>
+                      </a:schemeClr>
+                    </a:gs>
+                  </a:gsLst>
+                  <a:lin ang="5400000"/>
+                </a:gradFill>
+                <a:effectLst>
+                  <a:reflection blurRad="6350" stA="53000" endA="300" endPos="35500" dir="5400000" sy="-90000" algn="bl" rotWithShape="0"/>
+                </a:effectLst>
+                <a:latin typeface="Times New Roman" panose="02020603050405020304" pitchFamily="18" charset="0"/>
+                <a:cs typeface="Times New Roman" panose="02020603050405020304" pitchFamily="18" charset="0"/>
+              </a:rPr>
+              <a:t>V : FORM ỨNG DỤNG</a:t>
+            </a:r>
+            <a:endParaRPr lang="en-US" sz="4000" b="0" cap="none" spc="0" dirty="0">
+              <a:ln w="0"/>
+              <a:gradFill>
+                <a:gsLst>
+                  <a:gs pos="0">
+                    <a:schemeClr val="accent5">
+                      <a:lumMod val="50000"/>
+                    </a:schemeClr>
+                  </a:gs>
+                  <a:gs pos="50000">
+                    <a:schemeClr val="accent5"/>
+                  </a:gs>
+                  <a:gs pos="100000">
+                    <a:schemeClr val="accent5">
+                      <a:lumMod val="60000"/>
+                      <a:lumOff val="40000"/>
+                    </a:schemeClr>
+                  </a:gs>
+                </a:gsLst>
+                <a:lin ang="5400000"/>
+              </a:gradFill>
+              <a:effectLst>
+                <a:reflection blurRad="6350" stA="53000" endA="300" endPos="35500" dir="5400000" sy="-90000" algn="bl" rotWithShape="0"/>
+              </a:effectLst>
+              <a:latin typeface="Times New Roman" panose="02020603050405020304" pitchFamily="18" charset="0"/>
+              <a:cs typeface="Times New Roman" panose="02020603050405020304" pitchFamily="18" charset="0"/>
+            </a:endParaRPr>
+          </a:p>
+        </p:txBody>
+      </p:sp>
+      <p:sp>
+        <p:nvSpPr>
+          <p:cNvPr id="8" name="TextBox 7">
+            <a:extLst>
+              <a:ext uri="{FF2B5EF4-FFF2-40B4-BE49-F238E27FC236}">
+                <a16:creationId xmlns:a16="http://schemas.microsoft.com/office/drawing/2014/main" id="{1DC3E2F0-DDE7-27D4-D616-E6FA31242FBC}"/>
+              </a:ext>
+            </a:extLst>
+          </p:cNvPr>
+          <p:cNvSpPr txBox="1"/>
+          <p:nvPr/>
+        </p:nvSpPr>
+        <p:spPr>
+          <a:xfrm>
+            <a:off x="2080470" y="1459832"/>
+            <a:ext cx="5416196" cy="369332"/>
+          </a:xfrm>
+          <a:prstGeom prst="rect">
+            <a:avLst/>
+          </a:prstGeom>
+          <a:noFill/>
+        </p:spPr>
+        <p:txBody>
+          <a:bodyPr wrap="square" rtlCol="0">
+            <a:spAutoFit/>
+          </a:bodyPr>
+          <a:lstStyle/>
+          <a:p>
+            <a:pPr algn="ctr"/>
+            <a:r>
+              <a:rPr lang="en-US" dirty="0"/>
+              <a:t>FORM QUẢN LÝ VÉ XE XE</a:t>
+            </a:r>
+          </a:p>
+        </p:txBody>
+      </p:sp>
+      <p:pic>
+        <p:nvPicPr>
+          <p:cNvPr id="7" name="Content Placeholder 6" descr="A screenshot of a computer&#10;&#10;Description automatically generated">
+            <a:extLst>
+              <a:ext uri="{FF2B5EF4-FFF2-40B4-BE49-F238E27FC236}">
+                <a16:creationId xmlns:a16="http://schemas.microsoft.com/office/drawing/2014/main" id="{97B75619-EB19-5159-9098-FA746127B171}"/>
+              </a:ext>
+            </a:extLst>
+          </p:cNvPr>
+          <p:cNvPicPr>
+            <a:picLocks noGrp="1" noChangeAspect="1"/>
+          </p:cNvPicPr>
+          <p:nvPr>
+            <p:ph idx="1"/>
+          </p:nvPr>
+        </p:nvPicPr>
+        <p:blipFill>
+          <a:blip r:embed="rId2" cstate="print">
+            <a:extLst>
+              <a:ext uri="{28A0092B-C50C-407E-A947-70E740481C1C}">
+                <a14:useLocalDpi xmlns:a14="http://schemas.microsoft.com/office/drawing/2010/main" val="0"/>
+              </a:ext>
+            </a:extLst>
+          </a:blip>
+          <a:srcRect/>
+          <a:stretch>
+            <a:fillRect/>
+          </a:stretch>
+        </p:blipFill>
+        <p:spPr bwMode="auto">
+          <a:xfrm>
+            <a:off x="2097737" y="2482403"/>
+            <a:ext cx="5756564" cy="3237807"/>
+          </a:xfrm>
+          <a:prstGeom prst="rect">
+            <a:avLst/>
+          </a:prstGeom>
+          <a:noFill/>
+          <a:ln>
+            <a:noFill/>
+          </a:ln>
+        </p:spPr>
+      </p:pic>
+    </p:spTree>
+    <p:extLst>
+      <p:ext uri="{BB962C8B-B14F-4D97-AF65-F5344CB8AC3E}">
+        <p14:creationId xmlns:p14="http://schemas.microsoft.com/office/powerpoint/2010/main" val="2290670912"/>
+      </p:ext>
+    </p:extLst>
+  </p:cSld>
+  <p:clrMapOvr>
+    <a:masterClrMapping/>
+  </p:clrMapOvr>
+  <mc:AlternateContent xmlns:mc="http://schemas.openxmlformats.org/markup-compatibility/2006" xmlns:p14="http://schemas.microsoft.com/office/powerpoint/2010/main">
+    <mc:Choice Requires="p14">
+      <p:transition spd="med" p14:dur="700">
+        <p:fade/>
+      </p:transition>
+    </mc:Choice>
+    <mc:Fallback xmlns="">
+      <p:transition spd="med">
+        <p:fade/>
+      </p:transition>
+    </mc:Fallback>
+  </mc:AlternateContent>
+  <p:timing>
+    <p:tnLst>
+      <p:par>
+        <p:cTn id="1" dur="indefinite" restart="never" nodeType="tmRoot">
+          <p:childTnLst>
+            <p:seq concurrent="1" nextAc="seek">
+              <p:cTn id="2" dur="indefinite" nodeType="mainSeq">
+                <p:childTnLst>
+                  <p:par>
+                    <p:cTn id="3" fill="hold">
+                      <p:stCondLst>
+                        <p:cond delay="indefinite"/>
+                      </p:stCondLst>
+                      <p:childTnLst>
+                        <p:par>
+                          <p:cTn id="4" fill="hold">
+                            <p:stCondLst>
+                              <p:cond delay="0"/>
+                            </p:stCondLst>
+                            <p:childTnLst>
+                              <p:par>
+                                <p:cTn id="5" presetID="6" presetClass="entr" presetSubtype="16" fill="hold" grpId="0" nodeType="clickEffect">
+                                  <p:stCondLst>
+                                    <p:cond delay="0"/>
+                                  </p:stCondLst>
+                                  <p:childTnLst>
+                                    <p:set>
+                                      <p:cBhvr>
+                                        <p:cTn id="6" dur="1" fill="hold">
+                                          <p:stCondLst>
+                                            <p:cond delay="0"/>
+                                          </p:stCondLst>
+                                        </p:cTn>
+                                        <p:tgtEl>
+                                          <p:spTgt spid="5"/>
+                                        </p:tgtEl>
+                                        <p:attrNameLst>
+                                          <p:attrName>style.visibility</p:attrName>
+                                        </p:attrNameLst>
+                                      </p:cBhvr>
+                                      <p:to>
+                                        <p:strVal val="visible"/>
+                                      </p:to>
+                                    </p:set>
+                                    <p:animEffect transition="in" filter="circle(in)">
+                                      <p:cBhvr>
+                                        <p:cTn id="7" dur="2000"/>
+                                        <p:tgtEl>
+                                          <p:spTgt spid="5"/>
+                                        </p:tgtEl>
+                                      </p:cBhvr>
+                                    </p:animEffect>
+                                  </p:childTnLst>
+                                </p:cTn>
+                              </p:par>
+                            </p:childTnLst>
+                          </p:cTn>
+                        </p:par>
+                      </p:childTnLst>
+                    </p:cTn>
+                  </p:par>
+                </p:childTnLst>
+              </p:cTn>
+              <p:prevCondLst>
+                <p:cond evt="onPrev" delay="0">
+                  <p:tgtEl>
+                    <p:sldTgt/>
+                  </p:tgtEl>
+                </p:cond>
+              </p:prevCondLst>
+              <p:nextCondLst>
+                <p:cond evt="onNext" delay="0">
+                  <p:tgtEl>
+                    <p:sldTgt/>
+                  </p:tgtEl>
+                </p:cond>
+              </p:nextCondLst>
+            </p:seq>
+          </p:childTnLst>
+        </p:cTn>
+      </p:par>
+    </p:tnLst>
+    <p:bldLst>
+      <p:bldP spid="5" grpId="0"/>
+    </p:bldLst>
+  </p:timing>
+</p:sld>
+</file>
+
+<file path=ppt/slides/slide17.xml><?xml version="1.0" encoding="utf-8"?>
+<p:sld xmlns:a="http://schemas.openxmlformats.org/drawingml/2006/main" xmlns:r="http://schemas.openxmlformats.org/officeDocument/2006/relationships" xmlns:p="http://schemas.openxmlformats.org/presentationml/2006/main">
+  <p:cSld>
+    <p:spTree>
+      <p:nvGrpSpPr>
+        <p:cNvPr id="1" name=""/>
+        <p:cNvGrpSpPr/>
+        <p:nvPr/>
+      </p:nvGrpSpPr>
+      <p:grpSpPr>
+        <a:xfrm>
+          <a:off x="0" y="0"/>
+          <a:ext cx="0" cy="0"/>
+          <a:chOff x="0" y="0"/>
+          <a:chExt cx="0" cy="0"/>
+        </a:xfrm>
+      </p:grpSpPr>
+      <p:sp>
+        <p:nvSpPr>
+          <p:cNvPr id="5" name="Rectangle 4"/>
+          <p:cNvSpPr/>
+          <p:nvPr/>
+        </p:nvSpPr>
+        <p:spPr>
+          <a:xfrm>
+            <a:off x="1219201" y="278693"/>
+            <a:ext cx="7333672" cy="707886"/>
+          </a:xfrm>
+          <a:prstGeom prst="rect">
+            <a:avLst/>
+          </a:prstGeom>
+          <a:noFill/>
+        </p:spPr>
+        <p:txBody>
+          <a:bodyPr wrap="square" lIns="91440" tIns="45720" rIns="91440" bIns="45720">
+            <a:spAutoFit/>
+          </a:bodyPr>
+          <a:lstStyle/>
+          <a:p>
+            <a:pPr algn="ctr"/>
+            <a:r>
+              <a:rPr lang="en-US" sz="4000" dirty="0">
+                <a:ln w="0"/>
+                <a:gradFill>
+                  <a:gsLst>
+                    <a:gs pos="0">
+                      <a:schemeClr val="accent5">
+                        <a:lumMod val="50000"/>
+                      </a:schemeClr>
+                    </a:gs>
+                    <a:gs pos="50000">
+                      <a:schemeClr val="accent5"/>
+                    </a:gs>
+                    <a:gs pos="100000">
+                      <a:schemeClr val="accent5">
+                        <a:lumMod val="60000"/>
+                        <a:lumOff val="40000"/>
+                      </a:schemeClr>
+                    </a:gs>
+                  </a:gsLst>
+                  <a:lin ang="5400000"/>
+                </a:gradFill>
+                <a:effectLst>
+                  <a:reflection blurRad="6350" stA="53000" endA="300" endPos="35500" dir="5400000" sy="-90000" algn="bl" rotWithShape="0"/>
+                </a:effectLst>
+                <a:latin typeface="Times New Roman" panose="02020603050405020304" pitchFamily="18" charset="0"/>
+                <a:cs typeface="Times New Roman" panose="02020603050405020304" pitchFamily="18" charset="0"/>
+              </a:rPr>
+              <a:t>V : FORM ỨNG DỤNG</a:t>
+            </a:r>
+            <a:endParaRPr lang="en-US" sz="4000" b="0" cap="none" spc="0" dirty="0">
+              <a:ln w="0"/>
+              <a:gradFill>
+                <a:gsLst>
+                  <a:gs pos="0">
+                    <a:schemeClr val="accent5">
+                      <a:lumMod val="50000"/>
+                    </a:schemeClr>
+                  </a:gs>
+                  <a:gs pos="50000">
+                    <a:schemeClr val="accent5"/>
+                  </a:gs>
+                  <a:gs pos="100000">
+                    <a:schemeClr val="accent5">
+                      <a:lumMod val="60000"/>
+                      <a:lumOff val="40000"/>
+                    </a:schemeClr>
+                  </a:gs>
+                </a:gsLst>
+                <a:lin ang="5400000"/>
+              </a:gradFill>
+              <a:effectLst>
+                <a:reflection blurRad="6350" stA="53000" endA="300" endPos="35500" dir="5400000" sy="-90000" algn="bl" rotWithShape="0"/>
+              </a:effectLst>
+              <a:latin typeface="Times New Roman" panose="02020603050405020304" pitchFamily="18" charset="0"/>
+              <a:cs typeface="Times New Roman" panose="02020603050405020304" pitchFamily="18" charset="0"/>
+            </a:endParaRPr>
+          </a:p>
+        </p:txBody>
+      </p:sp>
+      <p:sp>
+        <p:nvSpPr>
+          <p:cNvPr id="8" name="TextBox 7">
+            <a:extLst>
+              <a:ext uri="{FF2B5EF4-FFF2-40B4-BE49-F238E27FC236}">
+                <a16:creationId xmlns:a16="http://schemas.microsoft.com/office/drawing/2014/main" id="{1DC3E2F0-DDE7-27D4-D616-E6FA31242FBC}"/>
+              </a:ext>
+            </a:extLst>
+          </p:cNvPr>
+          <p:cNvSpPr txBox="1"/>
+          <p:nvPr/>
+        </p:nvSpPr>
+        <p:spPr>
+          <a:xfrm>
+            <a:off x="2080470" y="1459832"/>
+            <a:ext cx="5416196" cy="369332"/>
+          </a:xfrm>
+          <a:prstGeom prst="rect">
+            <a:avLst/>
+          </a:prstGeom>
+          <a:noFill/>
+        </p:spPr>
+        <p:txBody>
+          <a:bodyPr wrap="square" rtlCol="0">
+            <a:spAutoFit/>
+          </a:bodyPr>
+          <a:lstStyle/>
+          <a:p>
+            <a:pPr algn="ctr"/>
+            <a:r>
+              <a:rPr lang="en-US" dirty="0"/>
+              <a:t>FORM QUẢN LÝ VÉ  XE</a:t>
+            </a:r>
+          </a:p>
+        </p:txBody>
+      </p:sp>
+      <p:pic>
+        <p:nvPicPr>
+          <p:cNvPr id="4" name="Content Placeholder 3" descr="A screenshot of a computer&#10;&#10;Description automatically generated">
+            <a:extLst>
+              <a:ext uri="{FF2B5EF4-FFF2-40B4-BE49-F238E27FC236}">
+                <a16:creationId xmlns:a16="http://schemas.microsoft.com/office/drawing/2014/main" id="{245231ED-16EA-A89B-9F31-283FA291452A}"/>
+              </a:ext>
+            </a:extLst>
+          </p:cNvPr>
+          <p:cNvPicPr>
+            <a:picLocks noGrp="1" noChangeAspect="1"/>
+          </p:cNvPicPr>
+          <p:nvPr>
+            <p:ph idx="1"/>
+          </p:nvPr>
+        </p:nvPicPr>
+        <p:blipFill>
+          <a:blip r:embed="rId2" cstate="print">
+            <a:extLst>
+              <a:ext uri="{28A0092B-C50C-407E-A947-70E740481C1C}">
+                <a14:useLocalDpi xmlns:a14="http://schemas.microsoft.com/office/drawing/2010/main" val="0"/>
+              </a:ext>
+            </a:extLst>
+          </a:blip>
+          <a:srcRect/>
+          <a:stretch>
+            <a:fillRect/>
+          </a:stretch>
+        </p:blipFill>
+        <p:spPr bwMode="auto">
+          <a:xfrm>
+            <a:off x="2097737" y="2482403"/>
+            <a:ext cx="5756564" cy="3237807"/>
+          </a:xfrm>
+          <a:prstGeom prst="rect">
+            <a:avLst/>
+          </a:prstGeom>
+          <a:noFill/>
+          <a:ln>
+            <a:noFill/>
+          </a:ln>
+        </p:spPr>
+      </p:pic>
+    </p:spTree>
+    <p:extLst>
+      <p:ext uri="{BB962C8B-B14F-4D97-AF65-F5344CB8AC3E}">
+        <p14:creationId xmlns:p14="http://schemas.microsoft.com/office/powerpoint/2010/main" val="2840332757"/>
+      </p:ext>
+    </p:extLst>
+  </p:cSld>
+  <p:clrMapOvr>
+    <a:masterClrMapping/>
+  </p:clrMapOvr>
+  <mc:AlternateContent xmlns:mc="http://schemas.openxmlformats.org/markup-compatibility/2006" xmlns:p14="http://schemas.microsoft.com/office/powerpoint/2010/main">
+    <mc:Choice Requires="p14">
+      <p:transition spd="med" p14:dur="700">
+        <p:fade/>
+      </p:transition>
+    </mc:Choice>
+    <mc:Fallback xmlns="">
+      <p:transition spd="med">
+        <p:fade/>
+      </p:transition>
+    </mc:Fallback>
+  </mc:AlternateContent>
+  <p:timing>
+    <p:tnLst>
+      <p:par>
+        <p:cTn id="1" dur="indefinite" restart="never" nodeType="tmRoot">
+          <p:childTnLst>
+            <p:seq concurrent="1" nextAc="seek">
+              <p:cTn id="2" dur="indefinite" nodeType="mainSeq">
+                <p:childTnLst>
+                  <p:par>
+                    <p:cTn id="3" fill="hold">
+                      <p:stCondLst>
+                        <p:cond delay="indefinite"/>
+                      </p:stCondLst>
+                      <p:childTnLst>
+                        <p:par>
+                          <p:cTn id="4" fill="hold">
+                            <p:stCondLst>
+                              <p:cond delay="0"/>
+                            </p:stCondLst>
+                            <p:childTnLst>
+                              <p:par>
+                                <p:cTn id="5" presetID="6" presetClass="entr" presetSubtype="16" fill="hold" grpId="0" nodeType="clickEffect">
+                                  <p:stCondLst>
+                                    <p:cond delay="0"/>
+                                  </p:stCondLst>
+                                  <p:childTnLst>
+                                    <p:set>
+                                      <p:cBhvr>
+                                        <p:cTn id="6" dur="1" fill="hold">
+                                          <p:stCondLst>
+                                            <p:cond delay="0"/>
+                                          </p:stCondLst>
+                                        </p:cTn>
+                                        <p:tgtEl>
+                                          <p:spTgt spid="5"/>
+                                        </p:tgtEl>
+                                        <p:attrNameLst>
+                                          <p:attrName>style.visibility</p:attrName>
+                                        </p:attrNameLst>
+                                      </p:cBhvr>
+                                      <p:to>
+                                        <p:strVal val="visible"/>
+                                      </p:to>
+                                    </p:set>
+                                    <p:animEffect transition="in" filter="circle(in)">
+                                      <p:cBhvr>
+                                        <p:cTn id="7" dur="2000"/>
+                                        <p:tgtEl>
+                                          <p:spTgt spid="5"/>
+                                        </p:tgtEl>
+                                      </p:cBhvr>
+                                    </p:animEffect>
+                                  </p:childTnLst>
+                                </p:cTn>
+                              </p:par>
+                            </p:childTnLst>
+                          </p:cTn>
+                        </p:par>
+                      </p:childTnLst>
+                    </p:cTn>
+                  </p:par>
+                </p:childTnLst>
+              </p:cTn>
+              <p:prevCondLst>
+                <p:cond evt="onPrev" delay="0">
+                  <p:tgtEl>
+                    <p:sldTgt/>
+                  </p:tgtEl>
+                </p:cond>
+              </p:prevCondLst>
+              <p:nextCondLst>
+                <p:cond evt="onNext" delay="0">
+                  <p:tgtEl>
+                    <p:sldTgt/>
+                  </p:tgtEl>
+                </p:cond>
+              </p:nextCondLst>
+            </p:seq>
+          </p:childTnLst>
+        </p:cTn>
+      </p:par>
+    </p:tnLst>
+    <p:bldLst>
+      <p:bldP spid="5" grpId="0"/>
+    </p:bldLst>
+  </p:timing>
+</p:sld>
+</file>
+
+<file path=ppt/slides/slide18.xml><?xml version="1.0" encoding="utf-8"?>
+<p:sld xmlns:a="http://schemas.openxmlformats.org/drawingml/2006/main" xmlns:r="http://schemas.openxmlformats.org/officeDocument/2006/relationships" xmlns:p="http://schemas.openxmlformats.org/presentationml/2006/main">
+  <p:cSld>
+    <p:spTree>
+      <p:nvGrpSpPr>
+        <p:cNvPr id="1" name=""/>
+        <p:cNvGrpSpPr/>
+        <p:nvPr/>
+      </p:nvGrpSpPr>
+      <p:grpSpPr>
+        <a:xfrm>
+          <a:off x="0" y="0"/>
+          <a:ext cx="0" cy="0"/>
+          <a:chOff x="0" y="0"/>
+          <a:chExt cx="0" cy="0"/>
+        </a:xfrm>
+      </p:grpSpPr>
+      <p:sp>
+        <p:nvSpPr>
+          <p:cNvPr id="5" name="Rectangle 4"/>
+          <p:cNvSpPr/>
+          <p:nvPr/>
+        </p:nvSpPr>
+        <p:spPr>
+          <a:xfrm>
+            <a:off x="1219201" y="278693"/>
+            <a:ext cx="7333672" cy="707886"/>
+          </a:xfrm>
+          <a:prstGeom prst="rect">
+            <a:avLst/>
+          </a:prstGeom>
+          <a:noFill/>
+        </p:spPr>
+        <p:txBody>
+          <a:bodyPr wrap="square" lIns="91440" tIns="45720" rIns="91440" bIns="45720">
+            <a:spAutoFit/>
+          </a:bodyPr>
+          <a:lstStyle/>
+          <a:p>
+            <a:pPr algn="ctr"/>
+            <a:r>
+              <a:rPr lang="en-US" sz="4000" dirty="0">
+                <a:ln w="0"/>
+                <a:gradFill>
+                  <a:gsLst>
+                    <a:gs pos="0">
+                      <a:schemeClr val="accent5">
+                        <a:lumMod val="50000"/>
+                      </a:schemeClr>
+                    </a:gs>
+                    <a:gs pos="50000">
+                      <a:schemeClr val="accent5"/>
+                    </a:gs>
+                    <a:gs pos="100000">
+                      <a:schemeClr val="accent5">
+                        <a:lumMod val="60000"/>
+                        <a:lumOff val="40000"/>
+                      </a:schemeClr>
+                    </a:gs>
+                  </a:gsLst>
+                  <a:lin ang="5400000"/>
+                </a:gradFill>
+                <a:effectLst>
+                  <a:reflection blurRad="6350" stA="53000" endA="300" endPos="35500" dir="5400000" sy="-90000" algn="bl" rotWithShape="0"/>
+                </a:effectLst>
+                <a:latin typeface="Times New Roman" panose="02020603050405020304" pitchFamily="18" charset="0"/>
+                <a:cs typeface="Times New Roman" panose="02020603050405020304" pitchFamily="18" charset="0"/>
+              </a:rPr>
+              <a:t>V : FORM ỨNG DỤNG</a:t>
+            </a:r>
+            <a:endParaRPr lang="en-US" sz="4000" b="0" cap="none" spc="0" dirty="0">
+              <a:ln w="0"/>
+              <a:gradFill>
+                <a:gsLst>
+                  <a:gs pos="0">
+                    <a:schemeClr val="accent5">
+                      <a:lumMod val="50000"/>
+                    </a:schemeClr>
+                  </a:gs>
+                  <a:gs pos="50000">
+                    <a:schemeClr val="accent5"/>
+                  </a:gs>
+                  <a:gs pos="100000">
+                    <a:schemeClr val="accent5">
+                      <a:lumMod val="60000"/>
+                      <a:lumOff val="40000"/>
+                    </a:schemeClr>
+                  </a:gs>
+                </a:gsLst>
+                <a:lin ang="5400000"/>
+              </a:gradFill>
+              <a:effectLst>
+                <a:reflection blurRad="6350" stA="53000" endA="300" endPos="35500" dir="5400000" sy="-90000" algn="bl" rotWithShape="0"/>
+              </a:effectLst>
+              <a:latin typeface="Times New Roman" panose="02020603050405020304" pitchFamily="18" charset="0"/>
+              <a:cs typeface="Times New Roman" panose="02020603050405020304" pitchFamily="18" charset="0"/>
+            </a:endParaRPr>
+          </a:p>
+        </p:txBody>
+      </p:sp>
+      <p:sp>
+        <p:nvSpPr>
+          <p:cNvPr id="8" name="TextBox 7">
+            <a:extLst>
+              <a:ext uri="{FF2B5EF4-FFF2-40B4-BE49-F238E27FC236}">
+                <a16:creationId xmlns:a16="http://schemas.microsoft.com/office/drawing/2014/main" id="{1DC3E2F0-DDE7-27D4-D616-E6FA31242FBC}"/>
+              </a:ext>
+            </a:extLst>
+          </p:cNvPr>
+          <p:cNvSpPr txBox="1"/>
+          <p:nvPr/>
+        </p:nvSpPr>
+        <p:spPr>
+          <a:xfrm>
+            <a:off x="2080470" y="1459832"/>
+            <a:ext cx="5416196" cy="369332"/>
+          </a:xfrm>
+          <a:prstGeom prst="rect">
+            <a:avLst/>
+          </a:prstGeom>
+          <a:noFill/>
+        </p:spPr>
+        <p:txBody>
+          <a:bodyPr wrap="square" rtlCol="0">
+            <a:spAutoFit/>
+          </a:bodyPr>
+          <a:lstStyle/>
+          <a:p>
+            <a:pPr algn="ctr"/>
+            <a:r>
+              <a:rPr lang="en-US" dirty="0"/>
+              <a:t>FORM QUẢN LÝ CHUYẾN XE</a:t>
+            </a:r>
+          </a:p>
+        </p:txBody>
+      </p:sp>
+      <p:pic>
+        <p:nvPicPr>
+          <p:cNvPr id="6" name="Content Placeholder 5" descr="A screenshot of a computer&#10;&#10;Description automatically generated">
+            <a:extLst>
+              <a:ext uri="{FF2B5EF4-FFF2-40B4-BE49-F238E27FC236}">
+                <a16:creationId xmlns:a16="http://schemas.microsoft.com/office/drawing/2014/main" id="{72D406C8-3463-F8FC-0A39-914C36C0522B}"/>
+              </a:ext>
+            </a:extLst>
+          </p:cNvPr>
+          <p:cNvPicPr>
+            <a:picLocks noGrp="1" noChangeAspect="1"/>
+          </p:cNvPicPr>
+          <p:nvPr>
+            <p:ph idx="1"/>
+          </p:nvPr>
+        </p:nvPicPr>
+        <p:blipFill>
+          <a:blip r:embed="rId2" cstate="print">
+            <a:extLst>
+              <a:ext uri="{28A0092B-C50C-407E-A947-70E740481C1C}">
+                <a14:useLocalDpi xmlns:a14="http://schemas.microsoft.com/office/drawing/2010/main" val="0"/>
+              </a:ext>
+            </a:extLst>
+          </a:blip>
+          <a:srcRect/>
+          <a:stretch>
+            <a:fillRect/>
+          </a:stretch>
+        </p:blipFill>
+        <p:spPr bwMode="auto">
+          <a:xfrm>
+            <a:off x="2097737" y="2482403"/>
+            <a:ext cx="5756564" cy="3237807"/>
+          </a:xfrm>
+          <a:prstGeom prst="rect">
+            <a:avLst/>
+          </a:prstGeom>
+          <a:noFill/>
+          <a:ln>
+            <a:noFill/>
+          </a:ln>
+        </p:spPr>
+      </p:pic>
+    </p:spTree>
+    <p:extLst>
+      <p:ext uri="{BB962C8B-B14F-4D97-AF65-F5344CB8AC3E}">
+        <p14:creationId xmlns:p14="http://schemas.microsoft.com/office/powerpoint/2010/main" val="2222295021"/>
+      </p:ext>
+    </p:extLst>
+  </p:cSld>
+  <p:clrMapOvr>
+    <a:masterClrMapping/>
+  </p:clrMapOvr>
+  <mc:AlternateContent xmlns:mc="http://schemas.openxmlformats.org/markup-compatibility/2006" xmlns:p14="http://schemas.microsoft.com/office/powerpoint/2010/main">
+    <mc:Choice Requires="p14">
+      <p:transition spd="med" p14:dur="700">
+        <p:fade/>
+      </p:transition>
+    </mc:Choice>
+    <mc:Fallback xmlns="">
+      <p:transition spd="med">
+        <p:fade/>
+      </p:transition>
+    </mc:Fallback>
+  </mc:AlternateContent>
+  <p:timing>
+    <p:tnLst>
+      <p:par>
+        <p:cTn id="1" dur="indefinite" restart="never" nodeType="tmRoot">
+          <p:childTnLst>
+            <p:seq concurrent="1" nextAc="seek">
+              <p:cTn id="2" dur="indefinite" nodeType="mainSeq">
+                <p:childTnLst>
+                  <p:par>
+                    <p:cTn id="3" fill="hold">
+                      <p:stCondLst>
+                        <p:cond delay="indefinite"/>
+                      </p:stCondLst>
+                      <p:childTnLst>
+                        <p:par>
+                          <p:cTn id="4" fill="hold">
+                            <p:stCondLst>
+                              <p:cond delay="0"/>
+                            </p:stCondLst>
+                            <p:childTnLst>
+                              <p:par>
+                                <p:cTn id="5" presetID="6" presetClass="entr" presetSubtype="16" fill="hold" grpId="0" nodeType="clickEffect">
+                                  <p:stCondLst>
+                                    <p:cond delay="0"/>
+                                  </p:stCondLst>
+                                  <p:childTnLst>
+                                    <p:set>
+                                      <p:cBhvr>
+                                        <p:cTn id="6" dur="1" fill="hold">
+                                          <p:stCondLst>
+                                            <p:cond delay="0"/>
+                                          </p:stCondLst>
+                                        </p:cTn>
+                                        <p:tgtEl>
+                                          <p:spTgt spid="5"/>
+                                        </p:tgtEl>
+                                        <p:attrNameLst>
+                                          <p:attrName>style.visibility</p:attrName>
+                                        </p:attrNameLst>
+                                      </p:cBhvr>
+                                      <p:to>
+                                        <p:strVal val="visible"/>
+                                      </p:to>
+                                    </p:set>
+                                    <p:animEffect transition="in" filter="circle(in)">
+                                      <p:cBhvr>
+                                        <p:cTn id="7" dur="2000"/>
+                                        <p:tgtEl>
+                                          <p:spTgt spid="5"/>
+                                        </p:tgtEl>
+                                      </p:cBhvr>
+                                    </p:animEffect>
+                                  </p:childTnLst>
+                                </p:cTn>
+                              </p:par>
+                            </p:childTnLst>
+                          </p:cTn>
+                        </p:par>
+                      </p:childTnLst>
+                    </p:cTn>
+                  </p:par>
+                </p:childTnLst>
+              </p:cTn>
+              <p:prevCondLst>
+                <p:cond evt="onPrev" delay="0">
+                  <p:tgtEl>
+                    <p:sldTgt/>
+                  </p:tgtEl>
+                </p:cond>
+              </p:prevCondLst>
+              <p:nextCondLst>
+                <p:cond evt="onNext" delay="0">
+                  <p:tgtEl>
+                    <p:sldTgt/>
+                  </p:tgtEl>
+                </p:cond>
+              </p:nextCondLst>
+            </p:seq>
+          </p:childTnLst>
+        </p:cTn>
+      </p:par>
+    </p:tnLst>
+    <p:bldLst>
+      <p:bldP spid="5" grpId="0"/>
+    </p:bldLst>
+  </p:timing>
+</p:sld>
+</file>
+
+<file path=ppt/slides/slide19.xml><?xml version="1.0" encoding="utf-8"?>
+<p:sld xmlns:a="http://schemas.openxmlformats.org/drawingml/2006/main" xmlns:r="http://schemas.openxmlformats.org/officeDocument/2006/relationships" xmlns:p="http://schemas.openxmlformats.org/presentationml/2006/main">
+  <p:cSld>
+    <p:spTree>
+      <p:nvGrpSpPr>
+        <p:cNvPr id="1" name=""/>
+        <p:cNvGrpSpPr/>
+        <p:nvPr/>
+      </p:nvGrpSpPr>
+      <p:grpSpPr>
+        <a:xfrm>
+          <a:off x="0" y="0"/>
+          <a:ext cx="0" cy="0"/>
+          <a:chOff x="0" y="0"/>
+          <a:chExt cx="0" cy="0"/>
+        </a:xfrm>
+      </p:grpSpPr>
+      <p:sp>
+        <p:nvSpPr>
+          <p:cNvPr id="5" name="Rectangle 4"/>
+          <p:cNvSpPr/>
+          <p:nvPr/>
+        </p:nvSpPr>
+        <p:spPr>
+          <a:xfrm>
+            <a:off x="1219201" y="278693"/>
+            <a:ext cx="7333672" cy="707886"/>
+          </a:xfrm>
+          <a:prstGeom prst="rect">
+            <a:avLst/>
+          </a:prstGeom>
+          <a:noFill/>
+        </p:spPr>
+        <p:txBody>
+          <a:bodyPr wrap="square" lIns="91440" tIns="45720" rIns="91440" bIns="45720">
+            <a:spAutoFit/>
+          </a:bodyPr>
+          <a:lstStyle/>
+          <a:p>
+            <a:pPr algn="ctr"/>
+            <a:r>
+              <a:rPr lang="en-US" sz="4000" dirty="0">
+                <a:ln w="0"/>
+                <a:gradFill>
+                  <a:gsLst>
+                    <a:gs pos="0">
+                      <a:schemeClr val="accent5">
+                        <a:lumMod val="50000"/>
+                      </a:schemeClr>
+                    </a:gs>
+                    <a:gs pos="50000">
+                      <a:schemeClr val="accent5"/>
+                    </a:gs>
+                    <a:gs pos="100000">
+                      <a:schemeClr val="accent5">
+                        <a:lumMod val="60000"/>
+                        <a:lumOff val="40000"/>
+                      </a:schemeClr>
+                    </a:gs>
+                  </a:gsLst>
+                  <a:lin ang="5400000"/>
+                </a:gradFill>
+                <a:effectLst>
+                  <a:reflection blurRad="6350" stA="53000" endA="300" endPos="35500" dir="5400000" sy="-90000" algn="bl" rotWithShape="0"/>
+                </a:effectLst>
+                <a:latin typeface="Times New Roman" panose="02020603050405020304" pitchFamily="18" charset="0"/>
+                <a:cs typeface="Times New Roman" panose="02020603050405020304" pitchFamily="18" charset="0"/>
+              </a:rPr>
+              <a:t>V : FORM ỨNG DỤNG</a:t>
+            </a:r>
+            <a:endParaRPr lang="en-US" sz="4000" b="0" cap="none" spc="0" dirty="0">
+              <a:ln w="0"/>
+              <a:gradFill>
+                <a:gsLst>
+                  <a:gs pos="0">
+                    <a:schemeClr val="accent5">
+                      <a:lumMod val="50000"/>
+                    </a:schemeClr>
+                  </a:gs>
+                  <a:gs pos="50000">
+                    <a:schemeClr val="accent5"/>
+                  </a:gs>
+                  <a:gs pos="100000">
+                    <a:schemeClr val="accent5">
+                      <a:lumMod val="60000"/>
+                      <a:lumOff val="40000"/>
+                    </a:schemeClr>
+                  </a:gs>
+                </a:gsLst>
+                <a:lin ang="5400000"/>
+              </a:gradFill>
+              <a:effectLst>
+                <a:reflection blurRad="6350" stA="53000" endA="300" endPos="35500" dir="5400000" sy="-90000" algn="bl" rotWithShape="0"/>
+              </a:effectLst>
+              <a:latin typeface="Times New Roman" panose="02020603050405020304" pitchFamily="18" charset="0"/>
+              <a:cs typeface="Times New Roman" panose="02020603050405020304" pitchFamily="18" charset="0"/>
+            </a:endParaRPr>
+          </a:p>
+        </p:txBody>
+      </p:sp>
+      <p:sp>
+        <p:nvSpPr>
+          <p:cNvPr id="8" name="TextBox 7">
+            <a:extLst>
+              <a:ext uri="{FF2B5EF4-FFF2-40B4-BE49-F238E27FC236}">
+                <a16:creationId xmlns:a16="http://schemas.microsoft.com/office/drawing/2014/main" id="{1DC3E2F0-DDE7-27D4-D616-E6FA31242FBC}"/>
+              </a:ext>
+            </a:extLst>
+          </p:cNvPr>
+          <p:cNvSpPr txBox="1"/>
+          <p:nvPr/>
+        </p:nvSpPr>
+        <p:spPr>
+          <a:xfrm>
+            <a:off x="2080470" y="1459832"/>
+            <a:ext cx="5416196" cy="369332"/>
+          </a:xfrm>
+          <a:prstGeom prst="rect">
+            <a:avLst/>
+          </a:prstGeom>
+          <a:noFill/>
+        </p:spPr>
+        <p:txBody>
+          <a:bodyPr wrap="square" rtlCol="0">
+            <a:spAutoFit/>
+          </a:bodyPr>
+          <a:lstStyle/>
+          <a:p>
+            <a:pPr algn="ctr"/>
+            <a:r>
+              <a:rPr lang="en-US" dirty="0"/>
+              <a:t>FORM QUẢN LÝ TUYẾN XE</a:t>
+            </a:r>
+          </a:p>
+        </p:txBody>
+      </p:sp>
+      <p:pic>
+        <p:nvPicPr>
+          <p:cNvPr id="4" name="Content Placeholder 3" descr="A screenshot of a computer&#10;&#10;Description automatically generated">
+            <a:extLst>
+              <a:ext uri="{FF2B5EF4-FFF2-40B4-BE49-F238E27FC236}">
+                <a16:creationId xmlns:a16="http://schemas.microsoft.com/office/drawing/2014/main" id="{ADF06764-390B-13E5-F3D3-6116106E8777}"/>
+              </a:ext>
+            </a:extLst>
+          </p:cNvPr>
+          <p:cNvPicPr>
+            <a:picLocks noGrp="1" noChangeAspect="1"/>
+          </p:cNvPicPr>
+          <p:nvPr>
+            <p:ph idx="1"/>
+          </p:nvPr>
+        </p:nvPicPr>
+        <p:blipFill>
+          <a:blip r:embed="rId2" cstate="print">
+            <a:extLst>
+              <a:ext uri="{28A0092B-C50C-407E-A947-70E740481C1C}">
+                <a14:useLocalDpi xmlns:a14="http://schemas.microsoft.com/office/drawing/2010/main" val="0"/>
+              </a:ext>
+            </a:extLst>
+          </a:blip>
+          <a:srcRect/>
+          <a:stretch>
+            <a:fillRect/>
+          </a:stretch>
+        </p:blipFill>
+        <p:spPr bwMode="auto">
+          <a:xfrm>
+            <a:off x="1652338" y="2438400"/>
+            <a:ext cx="7122694" cy="3673641"/>
+          </a:xfrm>
+          <a:prstGeom prst="rect">
+            <a:avLst/>
+          </a:prstGeom>
+          <a:noFill/>
+          <a:ln>
+            <a:noFill/>
+          </a:ln>
+        </p:spPr>
+      </p:pic>
+    </p:spTree>
+    <p:extLst>
+      <p:ext uri="{BB962C8B-B14F-4D97-AF65-F5344CB8AC3E}">
+        <p14:creationId xmlns:p14="http://schemas.microsoft.com/office/powerpoint/2010/main" val="3134632209"/>
+      </p:ext>
+    </p:extLst>
+  </p:cSld>
+  <p:clrMapOvr>
+    <a:masterClrMapping/>
+  </p:clrMapOvr>
+  <mc:AlternateContent xmlns:mc="http://schemas.openxmlformats.org/markup-compatibility/2006" xmlns:p14="http://schemas.microsoft.com/office/powerpoint/2010/main">
+    <mc:Choice Requires="p14">
+      <p:transition spd="med" p14:dur="700">
+        <p:fade/>
+      </p:transition>
+    </mc:Choice>
+    <mc:Fallback xmlns="">
+      <p:transition spd="med">
+        <p:fade/>
+      </p:transition>
+    </mc:Fallback>
+  </mc:AlternateContent>
+  <p:timing>
+    <p:tnLst>
+      <p:par>
+        <p:cTn id="1" dur="indefinite" restart="never" nodeType="tmRoot">
+          <p:childTnLst>
+            <p:seq concurrent="1" nextAc="seek">
+              <p:cTn id="2" dur="indefinite" nodeType="mainSeq">
+                <p:childTnLst>
+                  <p:par>
+                    <p:cTn id="3" fill="hold">
+                      <p:stCondLst>
+                        <p:cond delay="indefinite"/>
+                      </p:stCondLst>
+                      <p:childTnLst>
+                        <p:par>
+                          <p:cTn id="4" fill="hold">
+                            <p:stCondLst>
+                              <p:cond delay="0"/>
+                            </p:stCondLst>
+                            <p:childTnLst>
+                              <p:par>
+                                <p:cTn id="5" presetID="6" presetClass="entr" presetSubtype="16" fill="hold" grpId="0" nodeType="clickEffect">
+                                  <p:stCondLst>
+                                    <p:cond delay="0"/>
+                                  </p:stCondLst>
+                                  <p:childTnLst>
+                                    <p:set>
+                                      <p:cBhvr>
+                                        <p:cTn id="6" dur="1" fill="hold">
+                                          <p:stCondLst>
+                                            <p:cond delay="0"/>
+                                          </p:stCondLst>
+                                        </p:cTn>
+                                        <p:tgtEl>
+                                          <p:spTgt spid="5"/>
+                                        </p:tgtEl>
+                                        <p:attrNameLst>
+                                          <p:attrName>style.visibility</p:attrName>
+                                        </p:attrNameLst>
+                                      </p:cBhvr>
+                                      <p:to>
+                                        <p:strVal val="visible"/>
+                                      </p:to>
+                                    </p:set>
+                                    <p:animEffect transition="in" filter="circle(in)">
+                                      <p:cBhvr>
+                                        <p:cTn id="7" dur="2000"/>
+                                        <p:tgtEl>
+                                          <p:spTgt spid="5"/>
+                                        </p:tgtEl>
+                                      </p:cBhvr>
+                                    </p:animEffect>
+                                  </p:childTnLst>
+                                </p:cTn>
+                              </p:par>
+                            </p:childTnLst>
+                          </p:cTn>
+                        </p:par>
+                      </p:childTnLst>
+                    </p:cTn>
+                  </p:par>
+                </p:childTnLst>
+              </p:cTn>
+              <p:prevCondLst>
+                <p:cond evt="onPrev" delay="0">
+                  <p:tgtEl>
+                    <p:sldTgt/>
+                  </p:tgtEl>
+                </p:cond>
+              </p:prevCondLst>
+              <p:nextCondLst>
+                <p:cond evt="onNext" delay="0">
+                  <p:tgtEl>
+                    <p:sldTgt/>
+                  </p:tgtEl>
+                </p:cond>
+              </p:nextCondLst>
+            </p:seq>
+          </p:childTnLst>
+        </p:cTn>
+      </p:par>
+    </p:tnLst>
+    <p:bldLst>
+      <p:bldP spid="5" grpId="0"/>
     </p:bldLst>
   </p:timing>
 </p:sld>
@@ -8962,6 +11914,926 @@
     <p:bldLst>
       <p:bldP spid="8" grpId="0"/>
       <p:bldP spid="2" grpId="0" animBg="1"/>
+    </p:bldLst>
+  </p:timing>
+</p:sld>
+</file>
+
+<file path=ppt/slides/slide20.xml><?xml version="1.0" encoding="utf-8"?>
+<p:sld xmlns:a="http://schemas.openxmlformats.org/drawingml/2006/main" xmlns:r="http://schemas.openxmlformats.org/officeDocument/2006/relationships" xmlns:p="http://schemas.openxmlformats.org/presentationml/2006/main">
+  <p:cSld>
+    <p:spTree>
+      <p:nvGrpSpPr>
+        <p:cNvPr id="1" name=""/>
+        <p:cNvGrpSpPr/>
+        <p:nvPr/>
+      </p:nvGrpSpPr>
+      <p:grpSpPr>
+        <a:xfrm>
+          <a:off x="0" y="0"/>
+          <a:ext cx="0" cy="0"/>
+          <a:chOff x="0" y="0"/>
+          <a:chExt cx="0" cy="0"/>
+        </a:xfrm>
+      </p:grpSpPr>
+      <p:sp>
+        <p:nvSpPr>
+          <p:cNvPr id="4" name="Rectangle 3"/>
+          <p:cNvSpPr/>
+          <p:nvPr/>
+        </p:nvSpPr>
+        <p:spPr>
+          <a:xfrm>
+            <a:off x="794328" y="639771"/>
+            <a:ext cx="7703128" cy="4247317"/>
+          </a:xfrm>
+          <a:prstGeom prst="rect">
+            <a:avLst/>
+          </a:prstGeom>
+          <a:noFill/>
+        </p:spPr>
+        <p:txBody>
+          <a:bodyPr wrap="square" lIns="91440" tIns="45720" rIns="91440" bIns="45720">
+            <a:spAutoFit/>
+          </a:bodyPr>
+          <a:lstStyle/>
+          <a:p>
+            <a:pPr algn="ctr"/>
+            <a:r>
+              <a:rPr lang="en-US" sz="5400" b="1" dirty="0" err="1">
+                <a:ln w="9525">
+                  <a:solidFill>
+                    <a:schemeClr val="bg1"/>
+                  </a:solidFill>
+                  <a:prstDash val="solid"/>
+                </a:ln>
+                <a:solidFill>
+                  <a:srgbClr val="FF0000"/>
+                </a:solidFill>
+                <a:effectLst>
+                  <a:outerShdw blurRad="12700" dist="38100" dir="2700000" algn="tl" rotWithShape="0">
+                    <a:schemeClr val="bg1">
+                      <a:lumMod val="50000"/>
+                    </a:schemeClr>
+                  </a:outerShdw>
+                </a:effectLst>
+              </a:rPr>
+              <a:t>Muốn</a:t>
+            </a:r>
+            <a:r>
+              <a:rPr lang="en-US" sz="5400" b="1" dirty="0">
+                <a:ln w="9525">
+                  <a:solidFill>
+                    <a:schemeClr val="bg1"/>
+                  </a:solidFill>
+                  <a:prstDash val="solid"/>
+                </a:ln>
+                <a:solidFill>
+                  <a:srgbClr val="FF0000"/>
+                </a:solidFill>
+                <a:effectLst>
+                  <a:outerShdw blurRad="12700" dist="38100" dir="2700000" algn="tl" rotWithShape="0">
+                    <a:schemeClr val="bg1">
+                      <a:lumMod val="50000"/>
+                    </a:schemeClr>
+                  </a:outerShdw>
+                </a:effectLst>
+              </a:rPr>
+              <a:t> </a:t>
+            </a:r>
+            <a:r>
+              <a:rPr lang="en-US" sz="5400" b="1" dirty="0" err="1">
+                <a:ln w="9525">
+                  <a:solidFill>
+                    <a:schemeClr val="bg1"/>
+                  </a:solidFill>
+                  <a:prstDash val="solid"/>
+                </a:ln>
+                <a:solidFill>
+                  <a:srgbClr val="FF0000"/>
+                </a:solidFill>
+                <a:effectLst>
+                  <a:outerShdw blurRad="12700" dist="38100" dir="2700000" algn="tl" rotWithShape="0">
+                    <a:schemeClr val="bg1">
+                      <a:lumMod val="50000"/>
+                    </a:schemeClr>
+                  </a:outerShdw>
+                </a:effectLst>
+              </a:rPr>
+              <a:t>đi</a:t>
+            </a:r>
+            <a:r>
+              <a:rPr lang="en-US" sz="5400" b="1" dirty="0">
+                <a:ln w="9525">
+                  <a:solidFill>
+                    <a:schemeClr val="bg1"/>
+                  </a:solidFill>
+                  <a:prstDash val="solid"/>
+                </a:ln>
+                <a:solidFill>
+                  <a:srgbClr val="FF0000"/>
+                </a:solidFill>
+                <a:effectLst>
+                  <a:outerShdw blurRad="12700" dist="38100" dir="2700000" algn="tl" rotWithShape="0">
+                    <a:schemeClr val="bg1">
+                      <a:lumMod val="50000"/>
+                    </a:schemeClr>
+                  </a:outerShdw>
+                </a:effectLst>
+              </a:rPr>
+              <a:t> du </a:t>
+            </a:r>
+            <a:r>
+              <a:rPr lang="en-US" sz="5400" b="1" dirty="0" err="1">
+                <a:ln w="9525">
+                  <a:solidFill>
+                    <a:schemeClr val="bg1"/>
+                  </a:solidFill>
+                  <a:prstDash val="solid"/>
+                </a:ln>
+                <a:solidFill>
+                  <a:srgbClr val="FF0000"/>
+                </a:solidFill>
+                <a:effectLst>
+                  <a:outerShdw blurRad="12700" dist="38100" dir="2700000" algn="tl" rotWithShape="0">
+                    <a:schemeClr val="bg1">
+                      <a:lumMod val="50000"/>
+                    </a:schemeClr>
+                  </a:outerShdw>
+                </a:effectLst>
+              </a:rPr>
+              <a:t>lịch</a:t>
+            </a:r>
+            <a:r>
+              <a:rPr lang="en-US" sz="5400" b="1" dirty="0">
+                <a:ln w="9525">
+                  <a:solidFill>
+                    <a:schemeClr val="bg1"/>
+                  </a:solidFill>
+                  <a:prstDash val="solid"/>
+                </a:ln>
+                <a:solidFill>
+                  <a:srgbClr val="FF0000"/>
+                </a:solidFill>
+                <a:effectLst>
+                  <a:outerShdw blurRad="12700" dist="38100" dir="2700000" algn="tl" rotWithShape="0">
+                    <a:schemeClr val="bg1">
+                      <a:lumMod val="50000"/>
+                    </a:schemeClr>
+                  </a:outerShdw>
+                </a:effectLst>
+              </a:rPr>
+              <a:t> </a:t>
+            </a:r>
+            <a:r>
+              <a:rPr lang="en-US" sz="5400" b="1" dirty="0" err="1">
+                <a:ln w="9525">
+                  <a:solidFill>
+                    <a:schemeClr val="bg1"/>
+                  </a:solidFill>
+                  <a:prstDash val="solid"/>
+                </a:ln>
+                <a:solidFill>
+                  <a:srgbClr val="FF0000"/>
+                </a:solidFill>
+                <a:effectLst>
+                  <a:outerShdw blurRad="12700" dist="38100" dir="2700000" algn="tl" rotWithShape="0">
+                    <a:schemeClr val="bg1">
+                      <a:lumMod val="50000"/>
+                    </a:schemeClr>
+                  </a:outerShdw>
+                </a:effectLst>
+              </a:rPr>
+              <a:t>đặt</a:t>
+            </a:r>
+            <a:r>
+              <a:rPr lang="en-US" sz="5400" b="1" dirty="0">
+                <a:ln w="9525">
+                  <a:solidFill>
+                    <a:schemeClr val="bg1"/>
+                  </a:solidFill>
+                  <a:prstDash val="solid"/>
+                </a:ln>
+                <a:solidFill>
+                  <a:srgbClr val="FF0000"/>
+                </a:solidFill>
+                <a:effectLst>
+                  <a:outerShdw blurRad="12700" dist="38100" dir="2700000" algn="tl" rotWithShape="0">
+                    <a:schemeClr val="bg1">
+                      <a:lumMod val="50000"/>
+                    </a:schemeClr>
+                  </a:outerShdw>
+                </a:effectLst>
+              </a:rPr>
+              <a:t> </a:t>
+            </a:r>
+            <a:r>
+              <a:rPr lang="en-US" sz="5400" b="1" dirty="0" err="1">
+                <a:ln w="9525">
+                  <a:solidFill>
+                    <a:schemeClr val="bg1"/>
+                  </a:solidFill>
+                  <a:prstDash val="solid"/>
+                </a:ln>
+                <a:solidFill>
+                  <a:srgbClr val="FF0000"/>
+                </a:solidFill>
+                <a:effectLst>
+                  <a:outerShdw blurRad="12700" dist="38100" dir="2700000" algn="tl" rotWithShape="0">
+                    <a:schemeClr val="bg1">
+                      <a:lumMod val="50000"/>
+                    </a:schemeClr>
+                  </a:outerShdw>
+                </a:effectLst>
+              </a:rPr>
+              <a:t>xe</a:t>
+            </a:r>
+            <a:r>
+              <a:rPr lang="en-US" sz="5400" b="1" dirty="0">
+                <a:ln w="9525">
+                  <a:solidFill>
+                    <a:schemeClr val="bg1"/>
+                  </a:solidFill>
+                  <a:prstDash val="solid"/>
+                </a:ln>
+                <a:solidFill>
+                  <a:srgbClr val="FF0000"/>
+                </a:solidFill>
+                <a:effectLst>
+                  <a:outerShdw blurRad="12700" dist="38100" dir="2700000" algn="tl" rotWithShape="0">
+                    <a:schemeClr val="bg1">
+                      <a:lumMod val="50000"/>
+                    </a:schemeClr>
+                  </a:outerShdw>
+                </a:effectLst>
+              </a:rPr>
+              <a:t> </a:t>
+            </a:r>
+            <a:r>
+              <a:rPr lang="en-US" sz="5400" b="1" dirty="0" err="1">
+                <a:ln w="9525">
+                  <a:solidFill>
+                    <a:schemeClr val="bg1"/>
+                  </a:solidFill>
+                  <a:prstDash val="solid"/>
+                </a:ln>
+                <a:solidFill>
+                  <a:srgbClr val="FF0000"/>
+                </a:solidFill>
+                <a:effectLst>
+                  <a:outerShdw blurRad="12700" dist="38100" dir="2700000" algn="tl" rotWithShape="0">
+                    <a:schemeClr val="bg1">
+                      <a:lumMod val="50000"/>
+                    </a:schemeClr>
+                  </a:outerShdw>
+                </a:effectLst>
+              </a:rPr>
+              <a:t>liên</a:t>
+            </a:r>
+            <a:r>
+              <a:rPr lang="en-US" sz="5400" b="1" dirty="0">
+                <a:ln w="9525">
+                  <a:solidFill>
+                    <a:schemeClr val="bg1"/>
+                  </a:solidFill>
+                  <a:prstDash val="solid"/>
+                </a:ln>
+                <a:solidFill>
+                  <a:srgbClr val="FF0000"/>
+                </a:solidFill>
+                <a:effectLst>
+                  <a:outerShdw blurRad="12700" dist="38100" dir="2700000" algn="tl" rotWithShape="0">
+                    <a:schemeClr val="bg1">
+                      <a:lumMod val="50000"/>
+                    </a:schemeClr>
+                  </a:outerShdw>
+                </a:effectLst>
+              </a:rPr>
+              <a:t> </a:t>
+            </a:r>
+            <a:r>
+              <a:rPr lang="en-US" sz="5400" b="1" dirty="0" err="1">
+                <a:ln w="9525">
+                  <a:solidFill>
+                    <a:schemeClr val="bg1"/>
+                  </a:solidFill>
+                  <a:prstDash val="solid"/>
+                </a:ln>
+                <a:solidFill>
+                  <a:srgbClr val="FF0000"/>
+                </a:solidFill>
+                <a:effectLst>
+                  <a:outerShdw blurRad="12700" dist="38100" dir="2700000" algn="tl" rotWithShape="0">
+                    <a:schemeClr val="bg1">
+                      <a:lumMod val="50000"/>
+                    </a:schemeClr>
+                  </a:outerShdw>
+                </a:effectLst>
+              </a:rPr>
+              <a:t>hệ</a:t>
+            </a:r>
+            <a:r>
+              <a:rPr lang="en-US" sz="5400" b="1" dirty="0">
+                <a:ln w="9525">
+                  <a:solidFill>
+                    <a:schemeClr val="bg1"/>
+                  </a:solidFill>
+                  <a:prstDash val="solid"/>
+                </a:ln>
+                <a:solidFill>
+                  <a:srgbClr val="FF0000"/>
+                </a:solidFill>
+                <a:effectLst>
+                  <a:outerShdw blurRad="12700" dist="38100" dir="2700000" algn="tl" rotWithShape="0">
+                    <a:schemeClr val="bg1">
+                      <a:lumMod val="50000"/>
+                    </a:schemeClr>
+                  </a:outerShdw>
+                </a:effectLst>
+              </a:rPr>
+              <a:t> </a:t>
+            </a:r>
+            <a:r>
+              <a:rPr lang="en-US" sz="5400" b="1" dirty="0" err="1">
+                <a:ln w="9525">
+                  <a:solidFill>
+                    <a:schemeClr val="bg1"/>
+                  </a:solidFill>
+                  <a:prstDash val="solid"/>
+                </a:ln>
+                <a:solidFill>
+                  <a:srgbClr val="FF0000"/>
+                </a:solidFill>
+                <a:effectLst>
+                  <a:outerShdw blurRad="12700" dist="38100" dir="2700000" algn="tl" rotWithShape="0">
+                    <a:schemeClr val="bg1">
+                      <a:lumMod val="50000"/>
+                    </a:schemeClr>
+                  </a:outerShdw>
+                </a:effectLst>
+              </a:rPr>
+              <a:t>nhóm</a:t>
+            </a:r>
+            <a:r>
+              <a:rPr lang="en-US" sz="5400" b="1" dirty="0">
+                <a:ln w="9525">
+                  <a:solidFill>
+                    <a:schemeClr val="bg1"/>
+                  </a:solidFill>
+                  <a:prstDash val="solid"/>
+                </a:ln>
+                <a:solidFill>
+                  <a:srgbClr val="FF0000"/>
+                </a:solidFill>
+                <a:effectLst>
+                  <a:outerShdw blurRad="12700" dist="38100" dir="2700000" algn="tl" rotWithShape="0">
+                    <a:schemeClr val="bg1">
+                      <a:lumMod val="50000"/>
+                    </a:schemeClr>
+                  </a:outerShdw>
+                </a:effectLst>
+              </a:rPr>
+              <a:t> QB_TTH_KH</a:t>
+            </a:r>
+          </a:p>
+          <a:p>
+            <a:pPr algn="ctr"/>
+            <a:r>
+              <a:rPr lang="en-US" sz="5400" b="1" dirty="0" err="1">
+                <a:ln w="9525">
+                  <a:solidFill>
+                    <a:schemeClr val="bg1"/>
+                  </a:solidFill>
+                  <a:prstDash val="solid"/>
+                </a:ln>
+                <a:solidFill>
+                  <a:srgbClr val="FF0000"/>
+                </a:solidFill>
+                <a:effectLst>
+                  <a:outerShdw blurRad="12700" dist="38100" dir="2700000" algn="tl" rotWithShape="0">
+                    <a:schemeClr val="bg1">
+                      <a:lumMod val="50000"/>
+                    </a:schemeClr>
+                  </a:outerShdw>
+                </a:effectLst>
+              </a:rPr>
+              <a:t>Cảm</a:t>
+            </a:r>
+            <a:r>
+              <a:rPr lang="en-US" sz="5400" b="1" dirty="0">
+                <a:ln w="9525">
+                  <a:solidFill>
+                    <a:schemeClr val="bg1"/>
+                  </a:solidFill>
+                  <a:prstDash val="solid"/>
+                </a:ln>
+                <a:solidFill>
+                  <a:srgbClr val="FF0000"/>
+                </a:solidFill>
+                <a:effectLst>
+                  <a:outerShdw blurRad="12700" dist="38100" dir="2700000" algn="tl" rotWithShape="0">
+                    <a:schemeClr val="bg1">
+                      <a:lumMod val="50000"/>
+                    </a:schemeClr>
+                  </a:outerShdw>
+                </a:effectLst>
+              </a:rPr>
+              <a:t> </a:t>
+            </a:r>
+            <a:r>
+              <a:rPr lang="en-US" sz="5400" b="1" dirty="0" err="1">
+                <a:ln w="9525">
+                  <a:solidFill>
+                    <a:schemeClr val="bg1"/>
+                  </a:solidFill>
+                  <a:prstDash val="solid"/>
+                </a:ln>
+                <a:solidFill>
+                  <a:srgbClr val="FF0000"/>
+                </a:solidFill>
+                <a:effectLst>
+                  <a:outerShdw blurRad="12700" dist="38100" dir="2700000" algn="tl" rotWithShape="0">
+                    <a:schemeClr val="bg1">
+                      <a:lumMod val="50000"/>
+                    </a:schemeClr>
+                  </a:outerShdw>
+                </a:effectLst>
+              </a:rPr>
+              <a:t>ơn</a:t>
+            </a:r>
+            <a:r>
+              <a:rPr lang="en-US" sz="5400" b="1" dirty="0">
+                <a:ln w="9525">
+                  <a:solidFill>
+                    <a:schemeClr val="bg1"/>
+                  </a:solidFill>
+                  <a:prstDash val="solid"/>
+                </a:ln>
+                <a:solidFill>
+                  <a:srgbClr val="FF0000"/>
+                </a:solidFill>
+                <a:effectLst>
+                  <a:outerShdw blurRad="12700" dist="38100" dir="2700000" algn="tl" rotWithShape="0">
+                    <a:schemeClr val="bg1">
+                      <a:lumMod val="50000"/>
+                    </a:schemeClr>
+                  </a:outerShdw>
+                </a:effectLst>
+              </a:rPr>
+              <a:t> </a:t>
+            </a:r>
+            <a:r>
+              <a:rPr lang="en-US" sz="5400" b="1" dirty="0" err="1">
+                <a:ln w="9525">
+                  <a:solidFill>
+                    <a:schemeClr val="bg1"/>
+                  </a:solidFill>
+                  <a:prstDash val="solid"/>
+                </a:ln>
+                <a:solidFill>
+                  <a:srgbClr val="FF0000"/>
+                </a:solidFill>
+                <a:effectLst>
+                  <a:outerShdw blurRad="12700" dist="38100" dir="2700000" algn="tl" rotWithShape="0">
+                    <a:schemeClr val="bg1">
+                      <a:lumMod val="50000"/>
+                    </a:schemeClr>
+                  </a:outerShdw>
+                </a:effectLst>
+              </a:rPr>
+              <a:t>các</a:t>
+            </a:r>
+            <a:r>
+              <a:rPr lang="en-US" sz="5400" b="1" dirty="0">
+                <a:ln w="9525">
+                  <a:solidFill>
+                    <a:schemeClr val="bg1"/>
+                  </a:solidFill>
+                  <a:prstDash val="solid"/>
+                </a:ln>
+                <a:solidFill>
+                  <a:srgbClr val="FF0000"/>
+                </a:solidFill>
+                <a:effectLst>
+                  <a:outerShdw blurRad="12700" dist="38100" dir="2700000" algn="tl" rotWithShape="0">
+                    <a:schemeClr val="bg1">
+                      <a:lumMod val="50000"/>
+                    </a:schemeClr>
+                  </a:outerShdw>
+                </a:effectLst>
+              </a:rPr>
+              <a:t> </a:t>
+            </a:r>
+            <a:r>
+              <a:rPr lang="en-US" sz="5400" b="1" dirty="0" err="1">
+                <a:ln w="9525">
+                  <a:solidFill>
+                    <a:schemeClr val="bg1"/>
+                  </a:solidFill>
+                  <a:prstDash val="solid"/>
+                </a:ln>
+                <a:solidFill>
+                  <a:srgbClr val="FF0000"/>
+                </a:solidFill>
+                <a:effectLst>
+                  <a:outerShdw blurRad="12700" dist="38100" dir="2700000" algn="tl" rotWithShape="0">
+                    <a:schemeClr val="bg1">
+                      <a:lumMod val="50000"/>
+                    </a:schemeClr>
+                  </a:outerShdw>
+                </a:effectLst>
+              </a:rPr>
+              <a:t>bạn</a:t>
+            </a:r>
+            <a:r>
+              <a:rPr lang="en-US" sz="5400" b="1" dirty="0">
+                <a:ln w="9525">
+                  <a:solidFill>
+                    <a:schemeClr val="bg1"/>
+                  </a:solidFill>
+                  <a:prstDash val="solid"/>
+                </a:ln>
+                <a:solidFill>
+                  <a:srgbClr val="FF0000"/>
+                </a:solidFill>
+                <a:effectLst>
+                  <a:outerShdw blurRad="12700" dist="38100" dir="2700000" algn="tl" rotWithShape="0">
+                    <a:schemeClr val="bg1">
+                      <a:lumMod val="50000"/>
+                    </a:schemeClr>
+                  </a:outerShdw>
+                </a:effectLst>
+              </a:rPr>
+              <a:t> </a:t>
+            </a:r>
+            <a:r>
+              <a:rPr lang="en-US" sz="5400" b="1" dirty="0" err="1">
+                <a:ln w="9525">
+                  <a:solidFill>
+                    <a:schemeClr val="bg1"/>
+                  </a:solidFill>
+                  <a:prstDash val="solid"/>
+                </a:ln>
+                <a:solidFill>
+                  <a:srgbClr val="FF0000"/>
+                </a:solidFill>
+                <a:effectLst>
+                  <a:outerShdw blurRad="12700" dist="38100" dir="2700000" algn="tl" rotWithShape="0">
+                    <a:schemeClr val="bg1">
+                      <a:lumMod val="50000"/>
+                    </a:schemeClr>
+                  </a:outerShdw>
+                </a:effectLst>
+              </a:rPr>
+              <a:t>đã</a:t>
+            </a:r>
+            <a:r>
+              <a:rPr lang="en-US" sz="5400" b="1" dirty="0">
+                <a:ln w="9525">
+                  <a:solidFill>
+                    <a:schemeClr val="bg1"/>
+                  </a:solidFill>
+                  <a:prstDash val="solid"/>
+                </a:ln>
+                <a:solidFill>
+                  <a:srgbClr val="FF0000"/>
+                </a:solidFill>
+                <a:effectLst>
+                  <a:outerShdw blurRad="12700" dist="38100" dir="2700000" algn="tl" rotWithShape="0">
+                    <a:schemeClr val="bg1">
+                      <a:lumMod val="50000"/>
+                    </a:schemeClr>
+                  </a:outerShdw>
+                </a:effectLst>
+              </a:rPr>
+              <a:t> </a:t>
+            </a:r>
+            <a:r>
+              <a:rPr lang="en-US" sz="5400" b="1" dirty="0" err="1">
+                <a:ln w="9525">
+                  <a:solidFill>
+                    <a:schemeClr val="bg1"/>
+                  </a:solidFill>
+                  <a:prstDash val="solid"/>
+                </a:ln>
+                <a:solidFill>
+                  <a:srgbClr val="FF0000"/>
+                </a:solidFill>
+                <a:effectLst>
+                  <a:outerShdw blurRad="12700" dist="38100" dir="2700000" algn="tl" rotWithShape="0">
+                    <a:schemeClr val="bg1">
+                      <a:lumMod val="50000"/>
+                    </a:schemeClr>
+                  </a:outerShdw>
+                </a:effectLst>
+              </a:rPr>
+              <a:t>lắng</a:t>
+            </a:r>
+            <a:r>
+              <a:rPr lang="en-US" sz="5400" b="1" dirty="0">
+                <a:ln w="9525">
+                  <a:solidFill>
+                    <a:schemeClr val="bg1"/>
+                  </a:solidFill>
+                  <a:prstDash val="solid"/>
+                </a:ln>
+                <a:solidFill>
+                  <a:srgbClr val="FF0000"/>
+                </a:solidFill>
+                <a:effectLst>
+                  <a:outerShdw blurRad="12700" dist="38100" dir="2700000" algn="tl" rotWithShape="0">
+                    <a:schemeClr val="bg1">
+                      <a:lumMod val="50000"/>
+                    </a:schemeClr>
+                  </a:outerShdw>
+                </a:effectLst>
+              </a:rPr>
+              <a:t> </a:t>
+            </a:r>
+            <a:r>
+              <a:rPr lang="en-US" sz="5400" b="1" dirty="0" err="1">
+                <a:ln w="9525">
+                  <a:solidFill>
+                    <a:schemeClr val="bg1"/>
+                  </a:solidFill>
+                  <a:prstDash val="solid"/>
+                </a:ln>
+                <a:solidFill>
+                  <a:srgbClr val="FF0000"/>
+                </a:solidFill>
+                <a:effectLst>
+                  <a:outerShdw blurRad="12700" dist="38100" dir="2700000" algn="tl" rotWithShape="0">
+                    <a:schemeClr val="bg1">
+                      <a:lumMod val="50000"/>
+                    </a:schemeClr>
+                  </a:outerShdw>
+                </a:effectLst>
+              </a:rPr>
+              <a:t>nghe</a:t>
+            </a:r>
+            <a:r>
+              <a:rPr lang="en-US" sz="5400" b="1" dirty="0">
+                <a:ln w="9525">
+                  <a:solidFill>
+                    <a:schemeClr val="bg1"/>
+                  </a:solidFill>
+                  <a:prstDash val="solid"/>
+                </a:ln>
+                <a:solidFill>
+                  <a:srgbClr val="FF0000"/>
+                </a:solidFill>
+                <a:effectLst>
+                  <a:outerShdw blurRad="12700" dist="38100" dir="2700000" algn="tl" rotWithShape="0">
+                    <a:schemeClr val="bg1">
+                      <a:lumMod val="50000"/>
+                    </a:schemeClr>
+                  </a:outerShdw>
+                </a:effectLst>
+              </a:rPr>
+              <a:t> !!!</a:t>
+            </a:r>
+            <a:endParaRPr lang="en-US" sz="5400" b="1" cap="none" spc="0" dirty="0">
+              <a:ln w="9525">
+                <a:solidFill>
+                  <a:schemeClr val="bg1"/>
+                </a:solidFill>
+                <a:prstDash val="solid"/>
+              </a:ln>
+              <a:solidFill>
+                <a:srgbClr val="FF0000"/>
+              </a:solidFill>
+              <a:effectLst>
+                <a:outerShdw blurRad="12700" dist="38100" dir="2700000" algn="tl" rotWithShape="0">
+                  <a:schemeClr val="bg1">
+                    <a:lumMod val="50000"/>
+                  </a:schemeClr>
+                </a:outerShdw>
+              </a:effectLst>
+            </a:endParaRPr>
+          </a:p>
+        </p:txBody>
+      </p:sp>
+      <p:pic>
+        <p:nvPicPr>
+          <p:cNvPr id="3" name="Graphic 2" descr="Angel face outline outline">
+            <a:extLst>
+              <a:ext uri="{FF2B5EF4-FFF2-40B4-BE49-F238E27FC236}">
+                <a16:creationId xmlns:a16="http://schemas.microsoft.com/office/drawing/2014/main" id="{62AB0718-96B6-FC28-60CD-646C9657DDB9}"/>
+              </a:ext>
+            </a:extLst>
+          </p:cNvPr>
+          <p:cNvPicPr>
+            <a:picLocks noChangeAspect="1"/>
+          </p:cNvPicPr>
+          <p:nvPr/>
+        </p:nvPicPr>
+        <p:blipFill>
+          <a:blip r:embed="rId2">
+            <a:extLst>
+              <a:ext uri="{28A0092B-C50C-407E-A947-70E740481C1C}">
+                <a14:useLocalDpi xmlns:a14="http://schemas.microsoft.com/office/drawing/2010/main" val="0"/>
+              </a:ext>
+              <a:ext uri="{96DAC541-7B7A-43D3-8B79-37D633B846F1}">
+                <asvg:svgBlip xmlns:asvg="http://schemas.microsoft.com/office/drawing/2016/SVG/main" r:embed="rId3"/>
+              </a:ext>
+            </a:extLst>
+          </a:blip>
+          <a:stretch>
+            <a:fillRect/>
+          </a:stretch>
+        </p:blipFill>
+        <p:spPr>
+          <a:xfrm>
+            <a:off x="187889" y="4114800"/>
+            <a:ext cx="3336758" cy="2743200"/>
+          </a:xfrm>
+          <a:prstGeom prst="rect">
+            <a:avLst/>
+          </a:prstGeom>
+        </p:spPr>
+      </p:pic>
+      <p:pic>
+        <p:nvPicPr>
+          <p:cNvPr id="5" name="Graphic 4" descr="Funny face outline outline">
+            <a:extLst>
+              <a:ext uri="{FF2B5EF4-FFF2-40B4-BE49-F238E27FC236}">
+                <a16:creationId xmlns:a16="http://schemas.microsoft.com/office/drawing/2014/main" id="{C28F0BE4-B2F2-9C22-345F-88A20607EA1D}"/>
+              </a:ext>
+            </a:extLst>
+          </p:cNvPr>
+          <p:cNvPicPr>
+            <a:picLocks noChangeAspect="1"/>
+          </p:cNvPicPr>
+          <p:nvPr/>
+        </p:nvPicPr>
+        <p:blipFill>
+          <a:blip r:embed="rId4">
+            <a:extLst>
+              <a:ext uri="{28A0092B-C50C-407E-A947-70E740481C1C}">
+                <a14:useLocalDpi xmlns:a14="http://schemas.microsoft.com/office/drawing/2010/main" val="0"/>
+              </a:ext>
+              <a:ext uri="{96DAC541-7B7A-43D3-8B79-37D633B846F1}">
+                <asvg:svgBlip xmlns:asvg="http://schemas.microsoft.com/office/drawing/2016/SVG/main" r:embed="rId5"/>
+              </a:ext>
+            </a:extLst>
+          </a:blip>
+          <a:stretch>
+            <a:fillRect/>
+          </a:stretch>
+        </p:blipFill>
+        <p:spPr>
+          <a:xfrm>
+            <a:off x="6809874" y="2306229"/>
+            <a:ext cx="914400" cy="914400"/>
+          </a:xfrm>
+          <a:prstGeom prst="rect">
+            <a:avLst/>
+          </a:prstGeom>
+        </p:spPr>
+      </p:pic>
+    </p:spTree>
+    <p:extLst>
+      <p:ext uri="{BB962C8B-B14F-4D97-AF65-F5344CB8AC3E}">
+        <p14:creationId xmlns:p14="http://schemas.microsoft.com/office/powerpoint/2010/main" val="2282157683"/>
+      </p:ext>
+    </p:extLst>
+  </p:cSld>
+  <p:clrMapOvr>
+    <a:masterClrMapping/>
+  </p:clrMapOvr>
+  <p:transition spd="slow">
+    <p:wipe/>
+  </p:transition>
+  <p:timing>
+    <p:tnLst>
+      <p:par>
+        <p:cTn id="1" dur="indefinite" restart="never" nodeType="tmRoot">
+          <p:childTnLst>
+            <p:seq concurrent="1" nextAc="seek">
+              <p:cTn id="2" dur="indefinite" nodeType="mainSeq">
+                <p:childTnLst>
+                  <p:par>
+                    <p:cTn id="3" fill="hold">
+                      <p:stCondLst>
+                        <p:cond delay="indefinite"/>
+                      </p:stCondLst>
+                      <p:childTnLst>
+                        <p:par>
+                          <p:cTn id="4" fill="hold">
+                            <p:stCondLst>
+                              <p:cond delay="0"/>
+                            </p:stCondLst>
+                            <p:childTnLst>
+                              <p:par>
+                                <p:cTn id="5" presetID="42" presetClass="entr" presetSubtype="0" fill="hold" grpId="0" nodeType="clickEffect">
+                                  <p:stCondLst>
+                                    <p:cond delay="0"/>
+                                  </p:stCondLst>
+                                  <p:childTnLst>
+                                    <p:set>
+                                      <p:cBhvr>
+                                        <p:cTn id="6" dur="1" fill="hold">
+                                          <p:stCondLst>
+                                            <p:cond delay="0"/>
+                                          </p:stCondLst>
+                                        </p:cTn>
+                                        <p:tgtEl>
+                                          <p:spTgt spid="4"/>
+                                        </p:tgtEl>
+                                        <p:attrNameLst>
+                                          <p:attrName>style.visibility</p:attrName>
+                                        </p:attrNameLst>
+                                      </p:cBhvr>
+                                      <p:to>
+                                        <p:strVal val="visible"/>
+                                      </p:to>
+                                    </p:set>
+                                    <p:animEffect transition="in" filter="fade">
+                                      <p:cBhvr>
+                                        <p:cTn id="7" dur="1000"/>
+                                        <p:tgtEl>
+                                          <p:spTgt spid="4"/>
+                                        </p:tgtEl>
+                                      </p:cBhvr>
+                                    </p:animEffect>
+                                    <p:anim calcmode="lin" valueType="num">
+                                      <p:cBhvr>
+                                        <p:cTn id="8" dur="1000" fill="hold"/>
+                                        <p:tgtEl>
+                                          <p:spTgt spid="4"/>
+                                        </p:tgtEl>
+                                        <p:attrNameLst>
+                                          <p:attrName>ppt_x</p:attrName>
+                                        </p:attrNameLst>
+                                      </p:cBhvr>
+                                      <p:tavLst>
+                                        <p:tav tm="0">
+                                          <p:val>
+                                            <p:strVal val="#ppt_x"/>
+                                          </p:val>
+                                        </p:tav>
+                                        <p:tav tm="100000">
+                                          <p:val>
+                                            <p:strVal val="#ppt_x"/>
+                                          </p:val>
+                                        </p:tav>
+                                      </p:tavLst>
+                                    </p:anim>
+                                    <p:anim calcmode="lin" valueType="num">
+                                      <p:cBhvr>
+                                        <p:cTn id="9" dur="1000" fill="hold"/>
+                                        <p:tgtEl>
+                                          <p:spTgt spid="4"/>
+                                        </p:tgtEl>
+                                        <p:attrNameLst>
+                                          <p:attrName>ppt_y</p:attrName>
+                                        </p:attrNameLst>
+                                      </p:cBhvr>
+                                      <p:tavLst>
+                                        <p:tav tm="0">
+                                          <p:val>
+                                            <p:strVal val="#ppt_y+.1"/>
+                                          </p:val>
+                                        </p:tav>
+                                        <p:tav tm="100000">
+                                          <p:val>
+                                            <p:strVal val="#ppt_y"/>
+                                          </p:val>
+                                        </p:tav>
+                                      </p:tavLst>
+                                    </p:anim>
+                                  </p:childTnLst>
+                                </p:cTn>
+                              </p:par>
+                            </p:childTnLst>
+                          </p:cTn>
+                        </p:par>
+                      </p:childTnLst>
+                    </p:cTn>
+                  </p:par>
+                </p:childTnLst>
+              </p:cTn>
+              <p:prevCondLst>
+                <p:cond evt="onPrev" delay="0">
+                  <p:tgtEl>
+                    <p:sldTgt/>
+                  </p:tgtEl>
+                </p:cond>
+              </p:prevCondLst>
+              <p:nextCondLst>
+                <p:cond evt="onNext" delay="0">
+                  <p:tgtEl>
+                    <p:sldTgt/>
+                  </p:tgtEl>
+                </p:cond>
+              </p:nextCondLst>
+            </p:seq>
+          </p:childTnLst>
+        </p:cTn>
+      </p:par>
+    </p:tnLst>
+    <p:bldLst>
+      <p:bldP spid="4" grpId="0"/>
     </p:bldLst>
   </p:timing>
 </p:sld>
@@ -11008,10 +14880,10 @@
       </p:sp>
       <p:pic>
         <p:nvPicPr>
-          <p:cNvPr id="3" name="Picture 2" descr="A diagram of a computer flowchart&#10;&#10;Description automatically generated">
+          <p:cNvPr id="4" name="Picture 3">
             <a:extLst>
               <a:ext uri="{FF2B5EF4-FFF2-40B4-BE49-F238E27FC236}">
-                <a16:creationId xmlns:a16="http://schemas.microsoft.com/office/drawing/2014/main" id="{479D7052-C007-C791-CAF1-669D79020F75}"/>
+                <a16:creationId xmlns:a16="http://schemas.microsoft.com/office/drawing/2014/main" id="{082ED19F-34A0-C253-3E1D-66045A526C85}"/>
               </a:ext>
             </a:extLst>
           </p:cNvPr>
@@ -11021,30 +14893,19 @@
           <p:nvPr/>
         </p:nvPicPr>
         <p:blipFill>
-          <a:blip r:embed="rId2" cstate="print">
-            <a:extLst>
-              <a:ext uri="{28A0092B-C50C-407E-A947-70E740481C1C}">
-                <a14:useLocalDpi xmlns:a14="http://schemas.microsoft.com/office/drawing/2010/main" val="0"/>
-              </a:ext>
-            </a:extLst>
-          </a:blip>
-          <a:srcRect/>
+          <a:blip r:embed="rId2"/>
           <a:stretch>
             <a:fillRect/>
           </a:stretch>
         </p:blipFill>
-        <p:spPr bwMode="auto">
+        <p:spPr>
           <a:xfrm>
-            <a:off x="1334123" y="1774600"/>
-            <a:ext cx="9758597" cy="4491288"/>
+            <a:off x="593558" y="1468064"/>
+            <a:ext cx="8971217" cy="5036492"/>
           </a:xfrm>
           <a:prstGeom prst="rect">
             <a:avLst/>
           </a:prstGeom>
-          <a:noFill/>
-          <a:ln>
-            <a:noFill/>
-          </a:ln>
         </p:spPr>
       </p:pic>
     </p:spTree>
@@ -11350,10 +15211,10 @@
       </p:sp>
       <p:pic>
         <p:nvPicPr>
-          <p:cNvPr id="2" name="Picture 1" descr="A diagram of a computer&#10;&#10;Description automatically generated">
+          <p:cNvPr id="4" name="Picture 3">
             <a:extLst>
               <a:ext uri="{FF2B5EF4-FFF2-40B4-BE49-F238E27FC236}">
-                <a16:creationId xmlns:a16="http://schemas.microsoft.com/office/drawing/2014/main" id="{FD29C2F0-9995-AD25-E041-4D47C6612E6C}"/>
+                <a16:creationId xmlns:a16="http://schemas.microsoft.com/office/drawing/2014/main" id="{60F9FA50-96F1-CB81-CFA3-EBF512BE1CC4}"/>
               </a:ext>
             </a:extLst>
           </p:cNvPr>
@@ -11363,35 +15224,19 @@
           <p:nvPr/>
         </p:nvPicPr>
         <p:blipFill>
-          <a:blip r:embed="rId2" cstate="print">
-            <a:extLst>
-              <a:ext uri="{28A0092B-C50C-407E-A947-70E740481C1C}">
-                <a14:useLocalDpi xmlns:a14="http://schemas.microsoft.com/office/drawing/2010/main" val="0"/>
-              </a:ext>
-            </a:extLst>
-          </a:blip>
-          <a:srcRect/>
+          <a:blip r:embed="rId2"/>
           <a:stretch>
             <a:fillRect/>
           </a:stretch>
         </p:blipFill>
-        <p:spPr bwMode="auto">
+        <p:spPr>
           <a:xfrm>
-            <a:off x="839448" y="1280386"/>
-            <a:ext cx="10927829" cy="5397733"/>
+            <a:off x="609600" y="1427746"/>
+            <a:ext cx="9243933" cy="5076810"/>
           </a:xfrm>
           <a:prstGeom prst="rect">
             <a:avLst/>
           </a:prstGeom>
-          <a:solidFill>
-            <a:schemeClr val="accent4">
-              <a:lumMod val="60000"/>
-              <a:lumOff val="40000"/>
-            </a:schemeClr>
-          </a:solidFill>
-          <a:ln>
-            <a:noFill/>
-          </a:ln>
         </p:spPr>
       </p:pic>
     </p:spTree>
@@ -11531,7 +15376,7 @@
         <p:spPr>
           <a:xfrm>
             <a:off x="1219201" y="353444"/>
-            <a:ext cx="7333672" cy="1323439"/>
+            <a:ext cx="7333672" cy="707886"/>
           </a:xfrm>
           <a:prstGeom prst="rect">
             <a:avLst/>
@@ -11634,186 +15479,6 @@
                 <a:cs typeface="Times New Roman" panose="02020603050405020304" pitchFamily="18" charset="0"/>
               </a:rPr>
               <a:t>tả</a:t>
-            </a:r>
-            <a:r>
-              <a:rPr lang="en-US" sz="4000" dirty="0">
-                <a:ln w="0"/>
-                <a:gradFill>
-                  <a:gsLst>
-                    <a:gs pos="0">
-                      <a:schemeClr val="accent5">
-                        <a:lumMod val="50000"/>
-                      </a:schemeClr>
-                    </a:gs>
-                    <a:gs pos="50000">
-                      <a:schemeClr val="accent5"/>
-                    </a:gs>
-                    <a:gs pos="100000">
-                      <a:schemeClr val="accent5">
-                        <a:lumMod val="60000"/>
-                        <a:lumOff val="40000"/>
-                      </a:schemeClr>
-                    </a:gs>
-                  </a:gsLst>
-                  <a:lin ang="5400000"/>
-                </a:gradFill>
-                <a:effectLst>
-                  <a:reflection blurRad="6350" stA="53000" endA="300" endPos="35500" dir="5400000" sy="-90000" algn="bl" rotWithShape="0"/>
-                </a:effectLst>
-                <a:latin typeface="Times New Roman" panose="02020603050405020304" pitchFamily="18" charset="0"/>
-                <a:cs typeface="Times New Roman" panose="02020603050405020304" pitchFamily="18" charset="0"/>
-              </a:rPr>
-              <a:t> </a:t>
-            </a:r>
-            <a:r>
-              <a:rPr lang="en-US" sz="4000" dirty="0" err="1">
-                <a:ln w="0"/>
-                <a:gradFill>
-                  <a:gsLst>
-                    <a:gs pos="0">
-                      <a:schemeClr val="accent5">
-                        <a:lumMod val="50000"/>
-                      </a:schemeClr>
-                    </a:gs>
-                    <a:gs pos="50000">
-                      <a:schemeClr val="accent5"/>
-                    </a:gs>
-                    <a:gs pos="100000">
-                      <a:schemeClr val="accent5">
-                        <a:lumMod val="60000"/>
-                        <a:lumOff val="40000"/>
-                      </a:schemeClr>
-                    </a:gs>
-                  </a:gsLst>
-                  <a:lin ang="5400000"/>
-                </a:gradFill>
-                <a:effectLst>
-                  <a:reflection blurRad="6350" stA="53000" endA="300" endPos="35500" dir="5400000" sy="-90000" algn="bl" rotWithShape="0"/>
-                </a:effectLst>
-                <a:latin typeface="Times New Roman" panose="02020603050405020304" pitchFamily="18" charset="0"/>
-                <a:cs typeface="Times New Roman" panose="02020603050405020304" pitchFamily="18" charset="0"/>
-              </a:rPr>
-              <a:t>cách</a:t>
-            </a:r>
-            <a:r>
-              <a:rPr lang="en-US" sz="4000" dirty="0">
-                <a:ln w="0"/>
-                <a:gradFill>
-                  <a:gsLst>
-                    <a:gs pos="0">
-                      <a:schemeClr val="accent5">
-                        <a:lumMod val="50000"/>
-                      </a:schemeClr>
-                    </a:gs>
-                    <a:gs pos="50000">
-                      <a:schemeClr val="accent5"/>
-                    </a:gs>
-                    <a:gs pos="100000">
-                      <a:schemeClr val="accent5">
-                        <a:lumMod val="60000"/>
-                        <a:lumOff val="40000"/>
-                      </a:schemeClr>
-                    </a:gs>
-                  </a:gsLst>
-                  <a:lin ang="5400000"/>
-                </a:gradFill>
-                <a:effectLst>
-                  <a:reflection blurRad="6350" stA="53000" endA="300" endPos="35500" dir="5400000" sy="-90000" algn="bl" rotWithShape="0"/>
-                </a:effectLst>
-                <a:latin typeface="Times New Roman" panose="02020603050405020304" pitchFamily="18" charset="0"/>
-                <a:cs typeface="Times New Roman" panose="02020603050405020304" pitchFamily="18" charset="0"/>
-              </a:rPr>
-              <a:t> </a:t>
-            </a:r>
-            <a:r>
-              <a:rPr lang="en-US" sz="4000" dirty="0" err="1">
-                <a:ln w="0"/>
-                <a:gradFill>
-                  <a:gsLst>
-                    <a:gs pos="0">
-                      <a:schemeClr val="accent5">
-                        <a:lumMod val="50000"/>
-                      </a:schemeClr>
-                    </a:gs>
-                    <a:gs pos="50000">
-                      <a:schemeClr val="accent5"/>
-                    </a:gs>
-                    <a:gs pos="100000">
-                      <a:schemeClr val="accent5">
-                        <a:lumMod val="60000"/>
-                        <a:lumOff val="40000"/>
-                      </a:schemeClr>
-                    </a:gs>
-                  </a:gsLst>
-                  <a:lin ang="5400000"/>
-                </a:gradFill>
-                <a:effectLst>
-                  <a:reflection blurRad="6350" stA="53000" endA="300" endPos="35500" dir="5400000" sy="-90000" algn="bl" rotWithShape="0"/>
-                </a:effectLst>
-                <a:latin typeface="Times New Roman" panose="02020603050405020304" pitchFamily="18" charset="0"/>
-                <a:cs typeface="Times New Roman" panose="02020603050405020304" pitchFamily="18" charset="0"/>
-              </a:rPr>
-              <a:t>sử</a:t>
-            </a:r>
-            <a:r>
-              <a:rPr lang="en-US" sz="4000" dirty="0">
-                <a:ln w="0"/>
-                <a:gradFill>
-                  <a:gsLst>
-                    <a:gs pos="0">
-                      <a:schemeClr val="accent5">
-                        <a:lumMod val="50000"/>
-                      </a:schemeClr>
-                    </a:gs>
-                    <a:gs pos="50000">
-                      <a:schemeClr val="accent5"/>
-                    </a:gs>
-                    <a:gs pos="100000">
-                      <a:schemeClr val="accent5">
-                        <a:lumMod val="60000"/>
-                        <a:lumOff val="40000"/>
-                      </a:schemeClr>
-                    </a:gs>
-                  </a:gsLst>
-                  <a:lin ang="5400000"/>
-                </a:gradFill>
-                <a:effectLst>
-                  <a:reflection blurRad="6350" stA="53000" endA="300" endPos="35500" dir="5400000" sy="-90000" algn="bl" rotWithShape="0"/>
-                </a:effectLst>
-                <a:latin typeface="Times New Roman" panose="02020603050405020304" pitchFamily="18" charset="0"/>
-                <a:cs typeface="Times New Roman" panose="02020603050405020304" pitchFamily="18" charset="0"/>
-              </a:rPr>
-              <a:t> </a:t>
-            </a:r>
-            <a:r>
-              <a:rPr lang="en-US" sz="4000" dirty="0" err="1">
-                <a:ln w="0"/>
-                <a:gradFill>
-                  <a:gsLst>
-                    <a:gs pos="0">
-                      <a:schemeClr val="accent5">
-                        <a:lumMod val="50000"/>
-                      </a:schemeClr>
-                    </a:gs>
-                    <a:gs pos="50000">
-                      <a:schemeClr val="accent5"/>
-                    </a:gs>
-                    <a:gs pos="100000">
-                      <a:schemeClr val="accent5">
-                        <a:lumMod val="60000"/>
-                        <a:lumOff val="40000"/>
-                      </a:schemeClr>
-                    </a:gs>
-                  </a:gsLst>
-                  <a:lin ang="5400000"/>
-                </a:gradFill>
-                <a:effectLst>
-                  <a:reflection blurRad="6350" stA="53000" endA="300" endPos="35500" dir="5400000" sy="-90000" algn="bl" rotWithShape="0"/>
-                </a:effectLst>
-                <a:latin typeface="Times New Roman" panose="02020603050405020304" pitchFamily="18" charset="0"/>
-                <a:cs typeface="Times New Roman" panose="02020603050405020304" pitchFamily="18" charset="0"/>
-              </a:rPr>
-              <a:t>dụng</a:t>
             </a:r>
             <a:r>
               <a:rPr lang="en-US" sz="4000" dirty="0">
@@ -12205,31 +15870,38 @@
           </a:p>
         </p:txBody>
       </p:sp>
-      <p:sp>
-        <p:nvSpPr>
-          <p:cNvPr id="4" name="Content Placeholder 3">
+      <p:pic>
+        <p:nvPicPr>
+          <p:cNvPr id="2" name="Content Placeholder 1">
             <a:extLst>
               <a:ext uri="{FF2B5EF4-FFF2-40B4-BE49-F238E27FC236}">
-                <a16:creationId xmlns:a16="http://schemas.microsoft.com/office/drawing/2014/main" id="{FD00DF71-75ED-569A-0A30-31D95D0DADAF}"/>
+                <a16:creationId xmlns:a16="http://schemas.microsoft.com/office/drawing/2014/main" id="{DA77D723-ABDF-8E59-12DA-4E0D3665D6D9}"/>
               </a:ext>
             </a:extLst>
           </p:cNvPr>
-          <p:cNvSpPr>
-            <a:spLocks noGrp="1"/>
-          </p:cNvSpPr>
+          <p:cNvPicPr>
+            <a:picLocks noGrp="1" noChangeAspect="1"/>
+          </p:cNvPicPr>
           <p:nvPr>
             <p:ph idx="1"/>
           </p:nvPr>
-        </p:nvSpPr>
-        <p:spPr/>
-        <p:txBody>
-          <a:bodyPr/>
-          <a:lstStyle/>
-          <a:p>
-            <a:endParaRPr lang="en-US"/>
-          </a:p>
-        </p:txBody>
-      </p:sp>
+        </p:nvPicPr>
+        <p:blipFill>
+          <a:blip r:embed="rId2"/>
+          <a:stretch>
+            <a:fillRect/>
+          </a:stretch>
+        </p:blipFill>
+        <p:spPr>
+          <a:xfrm>
+            <a:off x="545433" y="1379621"/>
+            <a:ext cx="9769640" cy="4876799"/>
+          </a:xfrm>
+          <a:prstGeom prst="rect">
+            <a:avLst/>
+          </a:prstGeom>
+        </p:spPr>
+      </p:pic>
     </p:spTree>
     <p:extLst>
       <p:ext uri="{BB962C8B-B14F-4D97-AF65-F5344CB8AC3E}">
@@ -12360,14 +16032,14 @@
       </p:grpSpPr>
       <p:sp>
         <p:nvSpPr>
-          <p:cNvPr id="4" name="Rectangle 3"/>
+          <p:cNvPr id="5" name="Rectangle 4"/>
           <p:cNvSpPr/>
           <p:nvPr/>
         </p:nvSpPr>
         <p:spPr>
           <a:xfrm>
-            <a:off x="794328" y="639771"/>
-            <a:ext cx="7703128" cy="4247317"/>
+            <a:off x="1219201" y="278693"/>
+            <a:ext cx="7333672" cy="707886"/>
           </a:xfrm>
           <a:prstGeom prst="rect">
             <a:avLst/>
@@ -12382,750 +16054,155 @@
           <a:p>
             <a:pPr algn="ctr"/>
             <a:r>
-              <a:rPr lang="en-US" sz="5400" b="1" dirty="0" err="1">
-                <a:ln w="9525">
-                  <a:solidFill>
-                    <a:schemeClr val="bg1"/>
-                  </a:solidFill>
-                  <a:prstDash val="solid"/>
-                </a:ln>
-                <a:solidFill>
-                  <a:srgbClr val="FF0000"/>
-                </a:solidFill>
+              <a:rPr lang="en-US" sz="4000" dirty="0">
+                <a:ln w="0"/>
+                <a:gradFill>
+                  <a:gsLst>
+                    <a:gs pos="0">
+                      <a:schemeClr val="accent5">
+                        <a:lumMod val="50000"/>
+                      </a:schemeClr>
+                    </a:gs>
+                    <a:gs pos="50000">
+                      <a:schemeClr val="accent5"/>
+                    </a:gs>
+                    <a:gs pos="100000">
+                      <a:schemeClr val="accent5">
+                        <a:lumMod val="60000"/>
+                        <a:lumOff val="40000"/>
+                      </a:schemeClr>
+                    </a:gs>
+                  </a:gsLst>
+                  <a:lin ang="5400000"/>
+                </a:gradFill>
                 <a:effectLst>
-                  <a:outerShdw blurRad="12700" dist="38100" dir="2700000" algn="tl" rotWithShape="0">
-                    <a:schemeClr val="bg1">
+                  <a:reflection blurRad="6350" stA="53000" endA="300" endPos="35500" dir="5400000" sy="-90000" algn="bl" rotWithShape="0"/>
+                </a:effectLst>
+                <a:latin typeface="Times New Roman" panose="02020603050405020304" pitchFamily="18" charset="0"/>
+                <a:cs typeface="Times New Roman" panose="02020603050405020304" pitchFamily="18" charset="0"/>
+              </a:rPr>
+              <a:t>V : FORM ỨNG DỤNG</a:t>
+            </a:r>
+            <a:endParaRPr lang="en-US" sz="4000" b="0" cap="none" spc="0" dirty="0">
+              <a:ln w="0"/>
+              <a:gradFill>
+                <a:gsLst>
+                  <a:gs pos="0">
+                    <a:schemeClr val="accent5">
                       <a:lumMod val="50000"/>
                     </a:schemeClr>
-                  </a:outerShdw>
-                </a:effectLst>
-              </a:rPr>
-              <a:t>Muốn</a:t>
-            </a:r>
-            <a:r>
-              <a:rPr lang="en-US" sz="5400" b="1" dirty="0">
-                <a:ln w="9525">
-                  <a:solidFill>
-                    <a:schemeClr val="bg1"/>
-                  </a:solidFill>
-                  <a:prstDash val="solid"/>
-                </a:ln>
-                <a:solidFill>
-                  <a:srgbClr val="FF0000"/>
-                </a:solidFill>
-                <a:effectLst>
-                  <a:outerShdw blurRad="12700" dist="38100" dir="2700000" algn="tl" rotWithShape="0">
-                    <a:schemeClr val="bg1">
-                      <a:lumMod val="50000"/>
+                  </a:gs>
+                  <a:gs pos="50000">
+                    <a:schemeClr val="accent5"/>
+                  </a:gs>
+                  <a:gs pos="100000">
+                    <a:schemeClr val="accent5">
+                      <a:lumMod val="60000"/>
+                      <a:lumOff val="40000"/>
                     </a:schemeClr>
-                  </a:outerShdw>
-                </a:effectLst>
-              </a:rPr>
-              <a:t> </a:t>
-            </a:r>
-            <a:r>
-              <a:rPr lang="en-US" sz="5400" b="1" dirty="0" err="1">
-                <a:ln w="9525">
-                  <a:solidFill>
-                    <a:schemeClr val="bg1"/>
-                  </a:solidFill>
-                  <a:prstDash val="solid"/>
-                </a:ln>
-                <a:solidFill>
-                  <a:srgbClr val="FF0000"/>
-                </a:solidFill>
-                <a:effectLst>
-                  <a:outerShdw blurRad="12700" dist="38100" dir="2700000" algn="tl" rotWithShape="0">
-                    <a:schemeClr val="bg1">
-                      <a:lumMod val="50000"/>
-                    </a:schemeClr>
-                  </a:outerShdw>
-                </a:effectLst>
-              </a:rPr>
-              <a:t>đi</a:t>
-            </a:r>
-            <a:r>
-              <a:rPr lang="en-US" sz="5400" b="1" dirty="0">
-                <a:ln w="9525">
-                  <a:solidFill>
-                    <a:schemeClr val="bg1"/>
-                  </a:solidFill>
-                  <a:prstDash val="solid"/>
-                </a:ln>
-                <a:solidFill>
-                  <a:srgbClr val="FF0000"/>
-                </a:solidFill>
-                <a:effectLst>
-                  <a:outerShdw blurRad="12700" dist="38100" dir="2700000" algn="tl" rotWithShape="0">
-                    <a:schemeClr val="bg1">
-                      <a:lumMod val="50000"/>
-                    </a:schemeClr>
-                  </a:outerShdw>
-                </a:effectLst>
-              </a:rPr>
-              <a:t> du </a:t>
-            </a:r>
-            <a:r>
-              <a:rPr lang="en-US" sz="5400" b="1" dirty="0" err="1">
-                <a:ln w="9525">
-                  <a:solidFill>
-                    <a:schemeClr val="bg1"/>
-                  </a:solidFill>
-                  <a:prstDash val="solid"/>
-                </a:ln>
-                <a:solidFill>
-                  <a:srgbClr val="FF0000"/>
-                </a:solidFill>
-                <a:effectLst>
-                  <a:outerShdw blurRad="12700" dist="38100" dir="2700000" algn="tl" rotWithShape="0">
-                    <a:schemeClr val="bg1">
-                      <a:lumMod val="50000"/>
-                    </a:schemeClr>
-                  </a:outerShdw>
-                </a:effectLst>
-              </a:rPr>
-              <a:t>lịch</a:t>
-            </a:r>
-            <a:r>
-              <a:rPr lang="en-US" sz="5400" b="1" dirty="0">
-                <a:ln w="9525">
-                  <a:solidFill>
-                    <a:schemeClr val="bg1"/>
-                  </a:solidFill>
-                  <a:prstDash val="solid"/>
-                </a:ln>
-                <a:solidFill>
-                  <a:srgbClr val="FF0000"/>
-                </a:solidFill>
-                <a:effectLst>
-                  <a:outerShdw blurRad="12700" dist="38100" dir="2700000" algn="tl" rotWithShape="0">
-                    <a:schemeClr val="bg1">
-                      <a:lumMod val="50000"/>
-                    </a:schemeClr>
-                  </a:outerShdw>
-                </a:effectLst>
-              </a:rPr>
-              <a:t> </a:t>
-            </a:r>
-            <a:r>
-              <a:rPr lang="en-US" sz="5400" b="1" dirty="0" err="1">
-                <a:ln w="9525">
-                  <a:solidFill>
-                    <a:schemeClr val="bg1"/>
-                  </a:solidFill>
-                  <a:prstDash val="solid"/>
-                </a:ln>
-                <a:solidFill>
-                  <a:srgbClr val="FF0000"/>
-                </a:solidFill>
-                <a:effectLst>
-                  <a:outerShdw blurRad="12700" dist="38100" dir="2700000" algn="tl" rotWithShape="0">
-                    <a:schemeClr val="bg1">
-                      <a:lumMod val="50000"/>
-                    </a:schemeClr>
-                  </a:outerShdw>
-                </a:effectLst>
-              </a:rPr>
-              <a:t>đặt</a:t>
-            </a:r>
-            <a:r>
-              <a:rPr lang="en-US" sz="5400" b="1" dirty="0">
-                <a:ln w="9525">
-                  <a:solidFill>
-                    <a:schemeClr val="bg1"/>
-                  </a:solidFill>
-                  <a:prstDash val="solid"/>
-                </a:ln>
-                <a:solidFill>
-                  <a:srgbClr val="FF0000"/>
-                </a:solidFill>
-                <a:effectLst>
-                  <a:outerShdw blurRad="12700" dist="38100" dir="2700000" algn="tl" rotWithShape="0">
-                    <a:schemeClr val="bg1">
-                      <a:lumMod val="50000"/>
-                    </a:schemeClr>
-                  </a:outerShdw>
-                </a:effectLst>
-              </a:rPr>
-              <a:t> </a:t>
-            </a:r>
-            <a:r>
-              <a:rPr lang="en-US" sz="5400" b="1" dirty="0" err="1">
-                <a:ln w="9525">
-                  <a:solidFill>
-                    <a:schemeClr val="bg1"/>
-                  </a:solidFill>
-                  <a:prstDash val="solid"/>
-                </a:ln>
-                <a:solidFill>
-                  <a:srgbClr val="FF0000"/>
-                </a:solidFill>
-                <a:effectLst>
-                  <a:outerShdw blurRad="12700" dist="38100" dir="2700000" algn="tl" rotWithShape="0">
-                    <a:schemeClr val="bg1">
-                      <a:lumMod val="50000"/>
-                    </a:schemeClr>
-                  </a:outerShdw>
-                </a:effectLst>
-              </a:rPr>
-              <a:t>xe</a:t>
-            </a:r>
-            <a:r>
-              <a:rPr lang="en-US" sz="5400" b="1" dirty="0">
-                <a:ln w="9525">
-                  <a:solidFill>
-                    <a:schemeClr val="bg1"/>
-                  </a:solidFill>
-                  <a:prstDash val="solid"/>
-                </a:ln>
-                <a:solidFill>
-                  <a:srgbClr val="FF0000"/>
-                </a:solidFill>
-                <a:effectLst>
-                  <a:outerShdw blurRad="12700" dist="38100" dir="2700000" algn="tl" rotWithShape="0">
-                    <a:schemeClr val="bg1">
-                      <a:lumMod val="50000"/>
-                    </a:schemeClr>
-                  </a:outerShdw>
-                </a:effectLst>
-              </a:rPr>
-              <a:t> </a:t>
-            </a:r>
-            <a:r>
-              <a:rPr lang="en-US" sz="5400" b="1" dirty="0" err="1">
-                <a:ln w="9525">
-                  <a:solidFill>
-                    <a:schemeClr val="bg1"/>
-                  </a:solidFill>
-                  <a:prstDash val="solid"/>
-                </a:ln>
-                <a:solidFill>
-                  <a:srgbClr val="FF0000"/>
-                </a:solidFill>
-                <a:effectLst>
-                  <a:outerShdw blurRad="12700" dist="38100" dir="2700000" algn="tl" rotWithShape="0">
-                    <a:schemeClr val="bg1">
-                      <a:lumMod val="50000"/>
-                    </a:schemeClr>
-                  </a:outerShdw>
-                </a:effectLst>
-              </a:rPr>
-              <a:t>liên</a:t>
-            </a:r>
-            <a:r>
-              <a:rPr lang="en-US" sz="5400" b="1" dirty="0">
-                <a:ln w="9525">
-                  <a:solidFill>
-                    <a:schemeClr val="bg1"/>
-                  </a:solidFill>
-                  <a:prstDash val="solid"/>
-                </a:ln>
-                <a:solidFill>
-                  <a:srgbClr val="FF0000"/>
-                </a:solidFill>
-                <a:effectLst>
-                  <a:outerShdw blurRad="12700" dist="38100" dir="2700000" algn="tl" rotWithShape="0">
-                    <a:schemeClr val="bg1">
-                      <a:lumMod val="50000"/>
-                    </a:schemeClr>
-                  </a:outerShdw>
-                </a:effectLst>
-              </a:rPr>
-              <a:t> </a:t>
-            </a:r>
-            <a:r>
-              <a:rPr lang="en-US" sz="5400" b="1" dirty="0" err="1">
-                <a:ln w="9525">
-                  <a:solidFill>
-                    <a:schemeClr val="bg1"/>
-                  </a:solidFill>
-                  <a:prstDash val="solid"/>
-                </a:ln>
-                <a:solidFill>
-                  <a:srgbClr val="FF0000"/>
-                </a:solidFill>
-                <a:effectLst>
-                  <a:outerShdw blurRad="12700" dist="38100" dir="2700000" algn="tl" rotWithShape="0">
-                    <a:schemeClr val="bg1">
-                      <a:lumMod val="50000"/>
-                    </a:schemeClr>
-                  </a:outerShdw>
-                </a:effectLst>
-              </a:rPr>
-              <a:t>hệ</a:t>
-            </a:r>
-            <a:r>
-              <a:rPr lang="en-US" sz="5400" b="1" dirty="0">
-                <a:ln w="9525">
-                  <a:solidFill>
-                    <a:schemeClr val="bg1"/>
-                  </a:solidFill>
-                  <a:prstDash val="solid"/>
-                </a:ln>
-                <a:solidFill>
-                  <a:srgbClr val="FF0000"/>
-                </a:solidFill>
-                <a:effectLst>
-                  <a:outerShdw blurRad="12700" dist="38100" dir="2700000" algn="tl" rotWithShape="0">
-                    <a:schemeClr val="bg1">
-                      <a:lumMod val="50000"/>
-                    </a:schemeClr>
-                  </a:outerShdw>
-                </a:effectLst>
-              </a:rPr>
-              <a:t> </a:t>
-            </a:r>
-            <a:r>
-              <a:rPr lang="en-US" sz="5400" b="1" dirty="0" err="1">
-                <a:ln w="9525">
-                  <a:solidFill>
-                    <a:schemeClr val="bg1"/>
-                  </a:solidFill>
-                  <a:prstDash val="solid"/>
-                </a:ln>
-                <a:solidFill>
-                  <a:srgbClr val="FF0000"/>
-                </a:solidFill>
-                <a:effectLst>
-                  <a:outerShdw blurRad="12700" dist="38100" dir="2700000" algn="tl" rotWithShape="0">
-                    <a:schemeClr val="bg1">
-                      <a:lumMod val="50000"/>
-                    </a:schemeClr>
-                  </a:outerShdw>
-                </a:effectLst>
-              </a:rPr>
-              <a:t>nhóm</a:t>
-            </a:r>
-            <a:r>
-              <a:rPr lang="en-US" sz="5400" b="1" dirty="0">
-                <a:ln w="9525">
-                  <a:solidFill>
-                    <a:schemeClr val="bg1"/>
-                  </a:solidFill>
-                  <a:prstDash val="solid"/>
-                </a:ln>
-                <a:solidFill>
-                  <a:srgbClr val="FF0000"/>
-                </a:solidFill>
-                <a:effectLst>
-                  <a:outerShdw blurRad="12700" dist="38100" dir="2700000" algn="tl" rotWithShape="0">
-                    <a:schemeClr val="bg1">
-                      <a:lumMod val="50000"/>
-                    </a:schemeClr>
-                  </a:outerShdw>
-                </a:effectLst>
-              </a:rPr>
-              <a:t> QB_TTH_KH</a:t>
-            </a:r>
-          </a:p>
-          <a:p>
-            <a:pPr algn="ctr"/>
-            <a:r>
-              <a:rPr lang="en-US" sz="5400" b="1" dirty="0" err="1">
-                <a:ln w="9525">
-                  <a:solidFill>
-                    <a:schemeClr val="bg1"/>
-                  </a:solidFill>
-                  <a:prstDash val="solid"/>
-                </a:ln>
-                <a:solidFill>
-                  <a:srgbClr val="FF0000"/>
-                </a:solidFill>
-                <a:effectLst>
-                  <a:outerShdw blurRad="12700" dist="38100" dir="2700000" algn="tl" rotWithShape="0">
-                    <a:schemeClr val="bg1">
-                      <a:lumMod val="50000"/>
-                    </a:schemeClr>
-                  </a:outerShdw>
-                </a:effectLst>
-              </a:rPr>
-              <a:t>Cảm</a:t>
-            </a:r>
-            <a:r>
-              <a:rPr lang="en-US" sz="5400" b="1" dirty="0">
-                <a:ln w="9525">
-                  <a:solidFill>
-                    <a:schemeClr val="bg1"/>
-                  </a:solidFill>
-                  <a:prstDash val="solid"/>
-                </a:ln>
-                <a:solidFill>
-                  <a:srgbClr val="FF0000"/>
-                </a:solidFill>
-                <a:effectLst>
-                  <a:outerShdw blurRad="12700" dist="38100" dir="2700000" algn="tl" rotWithShape="0">
-                    <a:schemeClr val="bg1">
-                      <a:lumMod val="50000"/>
-                    </a:schemeClr>
-                  </a:outerShdw>
-                </a:effectLst>
-              </a:rPr>
-              <a:t> </a:t>
-            </a:r>
-            <a:r>
-              <a:rPr lang="en-US" sz="5400" b="1" dirty="0" err="1">
-                <a:ln w="9525">
-                  <a:solidFill>
-                    <a:schemeClr val="bg1"/>
-                  </a:solidFill>
-                  <a:prstDash val="solid"/>
-                </a:ln>
-                <a:solidFill>
-                  <a:srgbClr val="FF0000"/>
-                </a:solidFill>
-                <a:effectLst>
-                  <a:outerShdw blurRad="12700" dist="38100" dir="2700000" algn="tl" rotWithShape="0">
-                    <a:schemeClr val="bg1">
-                      <a:lumMod val="50000"/>
-                    </a:schemeClr>
-                  </a:outerShdw>
-                </a:effectLst>
-              </a:rPr>
-              <a:t>ơn</a:t>
-            </a:r>
-            <a:r>
-              <a:rPr lang="en-US" sz="5400" b="1" dirty="0">
-                <a:ln w="9525">
-                  <a:solidFill>
-                    <a:schemeClr val="bg1"/>
-                  </a:solidFill>
-                  <a:prstDash val="solid"/>
-                </a:ln>
-                <a:solidFill>
-                  <a:srgbClr val="FF0000"/>
-                </a:solidFill>
-                <a:effectLst>
-                  <a:outerShdw blurRad="12700" dist="38100" dir="2700000" algn="tl" rotWithShape="0">
-                    <a:schemeClr val="bg1">
-                      <a:lumMod val="50000"/>
-                    </a:schemeClr>
-                  </a:outerShdw>
-                </a:effectLst>
-              </a:rPr>
-              <a:t> </a:t>
-            </a:r>
-            <a:r>
-              <a:rPr lang="en-US" sz="5400" b="1" dirty="0" err="1">
-                <a:ln w="9525">
-                  <a:solidFill>
-                    <a:schemeClr val="bg1"/>
-                  </a:solidFill>
-                  <a:prstDash val="solid"/>
-                </a:ln>
-                <a:solidFill>
-                  <a:srgbClr val="FF0000"/>
-                </a:solidFill>
-                <a:effectLst>
-                  <a:outerShdw blurRad="12700" dist="38100" dir="2700000" algn="tl" rotWithShape="0">
-                    <a:schemeClr val="bg1">
-                      <a:lumMod val="50000"/>
-                    </a:schemeClr>
-                  </a:outerShdw>
-                </a:effectLst>
-              </a:rPr>
-              <a:t>các</a:t>
-            </a:r>
-            <a:r>
-              <a:rPr lang="en-US" sz="5400" b="1" dirty="0">
-                <a:ln w="9525">
-                  <a:solidFill>
-                    <a:schemeClr val="bg1"/>
-                  </a:solidFill>
-                  <a:prstDash val="solid"/>
-                </a:ln>
-                <a:solidFill>
-                  <a:srgbClr val="FF0000"/>
-                </a:solidFill>
-                <a:effectLst>
-                  <a:outerShdw blurRad="12700" dist="38100" dir="2700000" algn="tl" rotWithShape="0">
-                    <a:schemeClr val="bg1">
-                      <a:lumMod val="50000"/>
-                    </a:schemeClr>
-                  </a:outerShdw>
-                </a:effectLst>
-              </a:rPr>
-              <a:t> </a:t>
-            </a:r>
-            <a:r>
-              <a:rPr lang="en-US" sz="5400" b="1" dirty="0" err="1">
-                <a:ln w="9525">
-                  <a:solidFill>
-                    <a:schemeClr val="bg1"/>
-                  </a:solidFill>
-                  <a:prstDash val="solid"/>
-                </a:ln>
-                <a:solidFill>
-                  <a:srgbClr val="FF0000"/>
-                </a:solidFill>
-                <a:effectLst>
-                  <a:outerShdw blurRad="12700" dist="38100" dir="2700000" algn="tl" rotWithShape="0">
-                    <a:schemeClr val="bg1">
-                      <a:lumMod val="50000"/>
-                    </a:schemeClr>
-                  </a:outerShdw>
-                </a:effectLst>
-              </a:rPr>
-              <a:t>bạn</a:t>
-            </a:r>
-            <a:r>
-              <a:rPr lang="en-US" sz="5400" b="1" dirty="0">
-                <a:ln w="9525">
-                  <a:solidFill>
-                    <a:schemeClr val="bg1"/>
-                  </a:solidFill>
-                  <a:prstDash val="solid"/>
-                </a:ln>
-                <a:solidFill>
-                  <a:srgbClr val="FF0000"/>
-                </a:solidFill>
-                <a:effectLst>
-                  <a:outerShdw blurRad="12700" dist="38100" dir="2700000" algn="tl" rotWithShape="0">
-                    <a:schemeClr val="bg1">
-                      <a:lumMod val="50000"/>
-                    </a:schemeClr>
-                  </a:outerShdw>
-                </a:effectLst>
-              </a:rPr>
-              <a:t> </a:t>
-            </a:r>
-            <a:r>
-              <a:rPr lang="en-US" sz="5400" b="1" dirty="0" err="1">
-                <a:ln w="9525">
-                  <a:solidFill>
-                    <a:schemeClr val="bg1"/>
-                  </a:solidFill>
-                  <a:prstDash val="solid"/>
-                </a:ln>
-                <a:solidFill>
-                  <a:srgbClr val="FF0000"/>
-                </a:solidFill>
-                <a:effectLst>
-                  <a:outerShdw blurRad="12700" dist="38100" dir="2700000" algn="tl" rotWithShape="0">
-                    <a:schemeClr val="bg1">
-                      <a:lumMod val="50000"/>
-                    </a:schemeClr>
-                  </a:outerShdw>
-                </a:effectLst>
-              </a:rPr>
-              <a:t>đã</a:t>
-            </a:r>
-            <a:r>
-              <a:rPr lang="en-US" sz="5400" b="1" dirty="0">
-                <a:ln w="9525">
-                  <a:solidFill>
-                    <a:schemeClr val="bg1"/>
-                  </a:solidFill>
-                  <a:prstDash val="solid"/>
-                </a:ln>
-                <a:solidFill>
-                  <a:srgbClr val="FF0000"/>
-                </a:solidFill>
-                <a:effectLst>
-                  <a:outerShdw blurRad="12700" dist="38100" dir="2700000" algn="tl" rotWithShape="0">
-                    <a:schemeClr val="bg1">
-                      <a:lumMod val="50000"/>
-                    </a:schemeClr>
-                  </a:outerShdw>
-                </a:effectLst>
-              </a:rPr>
-              <a:t> </a:t>
-            </a:r>
-            <a:r>
-              <a:rPr lang="en-US" sz="5400" b="1" dirty="0" err="1">
-                <a:ln w="9525">
-                  <a:solidFill>
-                    <a:schemeClr val="bg1"/>
-                  </a:solidFill>
-                  <a:prstDash val="solid"/>
-                </a:ln>
-                <a:solidFill>
-                  <a:srgbClr val="FF0000"/>
-                </a:solidFill>
-                <a:effectLst>
-                  <a:outerShdw blurRad="12700" dist="38100" dir="2700000" algn="tl" rotWithShape="0">
-                    <a:schemeClr val="bg1">
-                      <a:lumMod val="50000"/>
-                    </a:schemeClr>
-                  </a:outerShdw>
-                </a:effectLst>
-              </a:rPr>
-              <a:t>lắng</a:t>
-            </a:r>
-            <a:r>
-              <a:rPr lang="en-US" sz="5400" b="1" dirty="0">
-                <a:ln w="9525">
-                  <a:solidFill>
-                    <a:schemeClr val="bg1"/>
-                  </a:solidFill>
-                  <a:prstDash val="solid"/>
-                </a:ln>
-                <a:solidFill>
-                  <a:srgbClr val="FF0000"/>
-                </a:solidFill>
-                <a:effectLst>
-                  <a:outerShdw blurRad="12700" dist="38100" dir="2700000" algn="tl" rotWithShape="0">
-                    <a:schemeClr val="bg1">
-                      <a:lumMod val="50000"/>
-                    </a:schemeClr>
-                  </a:outerShdw>
-                </a:effectLst>
-              </a:rPr>
-              <a:t> </a:t>
-            </a:r>
-            <a:r>
-              <a:rPr lang="en-US" sz="5400" b="1" dirty="0" err="1">
-                <a:ln w="9525">
-                  <a:solidFill>
-                    <a:schemeClr val="bg1"/>
-                  </a:solidFill>
-                  <a:prstDash val="solid"/>
-                </a:ln>
-                <a:solidFill>
-                  <a:srgbClr val="FF0000"/>
-                </a:solidFill>
-                <a:effectLst>
-                  <a:outerShdw blurRad="12700" dist="38100" dir="2700000" algn="tl" rotWithShape="0">
-                    <a:schemeClr val="bg1">
-                      <a:lumMod val="50000"/>
-                    </a:schemeClr>
-                  </a:outerShdw>
-                </a:effectLst>
-              </a:rPr>
-              <a:t>nghe</a:t>
-            </a:r>
-            <a:r>
-              <a:rPr lang="en-US" sz="5400" b="1" dirty="0">
-                <a:ln w="9525">
-                  <a:solidFill>
-                    <a:schemeClr val="bg1"/>
-                  </a:solidFill>
-                  <a:prstDash val="solid"/>
-                </a:ln>
-                <a:solidFill>
-                  <a:srgbClr val="FF0000"/>
-                </a:solidFill>
-                <a:effectLst>
-                  <a:outerShdw blurRad="12700" dist="38100" dir="2700000" algn="tl" rotWithShape="0">
-                    <a:schemeClr val="bg1">
-                      <a:lumMod val="50000"/>
-                    </a:schemeClr>
-                  </a:outerShdw>
-                </a:effectLst>
-              </a:rPr>
-              <a:t> !!!</a:t>
-            </a:r>
-            <a:endParaRPr lang="en-US" sz="5400" b="1" cap="none" spc="0" dirty="0">
-              <a:ln w="9525">
-                <a:solidFill>
-                  <a:schemeClr val="bg1"/>
-                </a:solidFill>
-                <a:prstDash val="solid"/>
-              </a:ln>
-              <a:solidFill>
-                <a:srgbClr val="FF0000"/>
-              </a:solidFill>
+                  </a:gs>
+                </a:gsLst>
+                <a:lin ang="5400000"/>
+              </a:gradFill>
               <a:effectLst>
-                <a:outerShdw blurRad="12700" dist="38100" dir="2700000" algn="tl" rotWithShape="0">
-                  <a:schemeClr val="bg1">
-                    <a:lumMod val="50000"/>
-                  </a:schemeClr>
-                </a:outerShdw>
+                <a:reflection blurRad="6350" stA="53000" endA="300" endPos="35500" dir="5400000" sy="-90000" algn="bl" rotWithShape="0"/>
               </a:effectLst>
+              <a:latin typeface="Times New Roman" panose="02020603050405020304" pitchFamily="18" charset="0"/>
+              <a:cs typeface="Times New Roman" panose="02020603050405020304" pitchFamily="18" charset="0"/>
             </a:endParaRPr>
           </a:p>
         </p:txBody>
       </p:sp>
       <p:pic>
         <p:nvPicPr>
-          <p:cNvPr id="3" name="Graphic 2" descr="Angel face outline outline">
+          <p:cNvPr id="6" name="Content Placeholder 5" descr="A screenshot of a login page&#10;&#10;Description automatically generated">
             <a:extLst>
               <a:ext uri="{FF2B5EF4-FFF2-40B4-BE49-F238E27FC236}">
-                <a16:creationId xmlns:a16="http://schemas.microsoft.com/office/drawing/2014/main" id="{62AB0718-96B6-FC28-60CD-646C9657DDB9}"/>
+                <a16:creationId xmlns:a16="http://schemas.microsoft.com/office/drawing/2014/main" id="{074B9104-DE15-4D0D-D447-2563D1509A31}"/>
               </a:ext>
             </a:extLst>
           </p:cNvPr>
           <p:cNvPicPr>
-            <a:picLocks noChangeAspect="1"/>
+            <a:picLocks noGrp="1" noChangeAspect="1"/>
           </p:cNvPicPr>
-          <p:nvPr/>
+          <p:nvPr>
+            <p:ph idx="1"/>
+          </p:nvPr>
         </p:nvPicPr>
         <p:blipFill>
-          <a:blip r:embed="rId2">
-            <a:extLst>
-              <a:ext uri="{28A0092B-C50C-407E-A947-70E740481C1C}">
-                <a14:useLocalDpi xmlns:a14="http://schemas.microsoft.com/office/drawing/2010/main" val="0"/>
-              </a:ext>
-              <a:ext uri="{96DAC541-7B7A-43D3-8B79-37D633B846F1}">
-                <asvg:svgBlip xmlns:asvg="http://schemas.microsoft.com/office/drawing/2016/SVG/main" r:embed="rId3"/>
-              </a:ext>
-            </a:extLst>
-          </a:blip>
+          <a:blip r:embed="rId2"/>
           <a:stretch>
             <a:fillRect/>
           </a:stretch>
         </p:blipFill>
         <p:spPr>
           <a:xfrm>
-            <a:off x="187889" y="4114800"/>
-            <a:ext cx="3336758" cy="2743200"/>
+            <a:off x="1524168" y="2160588"/>
+            <a:ext cx="6903701" cy="3881437"/>
           </a:xfrm>
           <a:prstGeom prst="rect">
             <a:avLst/>
           </a:prstGeom>
         </p:spPr>
       </p:pic>
-      <p:pic>
-        <p:nvPicPr>
-          <p:cNvPr id="5" name="Graphic 4" descr="Funny face outline outline">
+      <p:sp>
+        <p:nvSpPr>
+          <p:cNvPr id="8" name="TextBox 7">
             <a:extLst>
               <a:ext uri="{FF2B5EF4-FFF2-40B4-BE49-F238E27FC236}">
-                <a16:creationId xmlns:a16="http://schemas.microsoft.com/office/drawing/2014/main" id="{C28F0BE4-B2F2-9C22-345F-88A20607EA1D}"/>
+                <a16:creationId xmlns:a16="http://schemas.microsoft.com/office/drawing/2014/main" id="{1DC3E2F0-DDE7-27D4-D616-E6FA31242FBC}"/>
               </a:ext>
             </a:extLst>
           </p:cNvPr>
-          <p:cNvPicPr>
-            <a:picLocks noChangeAspect="1"/>
-          </p:cNvPicPr>
+          <p:cNvSpPr txBox="1"/>
           <p:nvPr/>
-        </p:nvPicPr>
-        <p:blipFill>
-          <a:blip r:embed="rId4">
-            <a:extLst>
-              <a:ext uri="{28A0092B-C50C-407E-A947-70E740481C1C}">
-                <a14:useLocalDpi xmlns:a14="http://schemas.microsoft.com/office/drawing/2010/main" val="0"/>
-              </a:ext>
-              <a:ext uri="{96DAC541-7B7A-43D3-8B79-37D633B846F1}">
-                <asvg:svgBlip xmlns:asvg="http://schemas.microsoft.com/office/drawing/2016/SVG/main" r:embed="rId5"/>
-              </a:ext>
-            </a:extLst>
-          </a:blip>
-          <a:stretch>
-            <a:fillRect/>
-          </a:stretch>
-        </p:blipFill>
+        </p:nvSpPr>
         <p:spPr>
           <a:xfrm>
-            <a:off x="6809874" y="2306229"/>
-            <a:ext cx="914400" cy="914400"/>
+            <a:off x="2037347" y="1411705"/>
+            <a:ext cx="5470358" cy="369332"/>
           </a:xfrm>
           <a:prstGeom prst="rect">
             <a:avLst/>
           </a:prstGeom>
+          <a:noFill/>
         </p:spPr>
-      </p:pic>
+        <p:txBody>
+          <a:bodyPr wrap="square" rtlCol="0">
+            <a:spAutoFit/>
+          </a:bodyPr>
+          <a:lstStyle/>
+          <a:p>
+            <a:pPr algn="ctr"/>
+            <a:r>
+              <a:rPr lang="en-US" dirty="0"/>
+              <a:t>FORM ĐĂNG NHẬP</a:t>
+            </a:r>
+          </a:p>
+        </p:txBody>
+      </p:sp>
     </p:spTree>
     <p:extLst>
       <p:ext uri="{BB962C8B-B14F-4D97-AF65-F5344CB8AC3E}">
-        <p14:creationId xmlns:p14="http://schemas.microsoft.com/office/powerpoint/2010/main" val="2282157683"/>
+        <p14:creationId xmlns:p14="http://schemas.microsoft.com/office/powerpoint/2010/main" val="726495051"/>
       </p:ext>
     </p:extLst>
   </p:cSld>
   <p:clrMapOvr>
     <a:masterClrMapping/>
   </p:clrMapOvr>
-  <p:transition spd="slow">
-    <p:wipe/>
-  </p:transition>
+  <mc:AlternateContent xmlns:mc="http://schemas.openxmlformats.org/markup-compatibility/2006" xmlns:p14="http://schemas.microsoft.com/office/powerpoint/2010/main">
+    <mc:Choice Requires="p14">
+      <p:transition spd="med" p14:dur="700">
+        <p:fade/>
+      </p:transition>
+    </mc:Choice>
+    <mc:Fallback xmlns="">
+      <p:transition spd="med">
+        <p:fade/>
+      </p:transition>
+    </mc:Fallback>
+  </mc:AlternateContent>
   <p:timing>
     <p:tnLst>
       <p:par>
@@ -13147,7 +16224,7 @@
                             </p:stCondLst>
                             <p:childTnLst>
                               <p:par>
-                                <p:cTn id="5" presetID="42" presetClass="entr" presetSubtype="0" fill="hold" grpId="0" nodeType="clickEffect">
+                                <p:cTn id="5" presetID="6" presetClass="entr" presetSubtype="16" fill="hold" grpId="0" nodeType="clickEffect">
                                   <p:stCondLst>
                                     <p:cond delay="0"/>
                                   </p:stCondLst>
@@ -13160,7 +16237,7 @@
                                           </p:stCondLst>
                                         </p:cTn>
                                         <p:tgtEl>
-                                          <p:spTgt spid="4"/>
+                                          <p:spTgt spid="5"/>
                                         </p:tgtEl>
                                         <p:attrNameLst>
                                           <p:attrName>style.visibility</p:attrName>
@@ -13170,60 +16247,14 @@
                                         <p:strVal val="visible"/>
                                       </p:to>
                                     </p:set>
-                                    <p:animEffect transition="in" filter="fade">
+                                    <p:animEffect transition="in" filter="circle(in)">
                                       <p:cBhvr>
-                                        <p:cTn id="7" dur="1000"/>
+                                        <p:cTn id="7" dur="2000"/>
                                         <p:tgtEl>
-                                          <p:spTgt spid="4"/>
+                                          <p:spTgt spid="5"/>
                                         </p:tgtEl>
                                       </p:cBhvr>
                                     </p:animEffect>
-                                    <p:anim calcmode="lin" valueType="num">
-                                      <p:cBhvr>
-                                        <p:cTn id="8" dur="1000" fill="hold"/>
-                                        <p:tgtEl>
-                                          <p:spTgt spid="4"/>
-                                        </p:tgtEl>
-                                        <p:attrNameLst>
-                                          <p:attrName>ppt_x</p:attrName>
-                                        </p:attrNameLst>
-                                      </p:cBhvr>
-                                      <p:tavLst>
-                                        <p:tav tm="0">
-                                          <p:val>
-                                            <p:strVal val="#ppt_x"/>
-                                          </p:val>
-                                        </p:tav>
-                                        <p:tav tm="100000">
-                                          <p:val>
-                                            <p:strVal val="#ppt_x"/>
-                                          </p:val>
-                                        </p:tav>
-                                      </p:tavLst>
-                                    </p:anim>
-                                    <p:anim calcmode="lin" valueType="num">
-                                      <p:cBhvr>
-                                        <p:cTn id="9" dur="1000" fill="hold"/>
-                                        <p:tgtEl>
-                                          <p:spTgt spid="4"/>
-                                        </p:tgtEl>
-                                        <p:attrNameLst>
-                                          <p:attrName>ppt_y</p:attrName>
-                                        </p:attrNameLst>
-                                      </p:cBhvr>
-                                      <p:tavLst>
-                                        <p:tav tm="0">
-                                          <p:val>
-                                            <p:strVal val="#ppt_y+.1"/>
-                                          </p:val>
-                                        </p:tav>
-                                        <p:tav tm="100000">
-                                          <p:val>
-                                            <p:strVal val="#ppt_y"/>
-                                          </p:val>
-                                        </p:tav>
-                                      </p:tavLst>
-                                    </p:anim>
                                   </p:childTnLst>
                                 </p:cTn>
                               </p:par>
@@ -13255,7 +16286,286 @@
       </p:par>
     </p:tnLst>
     <p:bldLst>
-      <p:bldP spid="4" grpId="0"/>
+      <p:bldP spid="5" grpId="0"/>
+    </p:bldLst>
+  </p:timing>
+</p:sld>
+</file>
+
+<file path=ppt/slides/slide9.xml><?xml version="1.0" encoding="utf-8"?>
+<p:sld xmlns:a="http://schemas.openxmlformats.org/drawingml/2006/main" xmlns:r="http://schemas.openxmlformats.org/officeDocument/2006/relationships" xmlns:p="http://schemas.openxmlformats.org/presentationml/2006/main">
+  <p:cSld>
+    <p:spTree>
+      <p:nvGrpSpPr>
+        <p:cNvPr id="1" name=""/>
+        <p:cNvGrpSpPr/>
+        <p:nvPr/>
+      </p:nvGrpSpPr>
+      <p:grpSpPr>
+        <a:xfrm>
+          <a:off x="0" y="0"/>
+          <a:ext cx="0" cy="0"/>
+          <a:chOff x="0" y="0"/>
+          <a:chExt cx="0" cy="0"/>
+        </a:xfrm>
+      </p:grpSpPr>
+      <p:sp>
+        <p:nvSpPr>
+          <p:cNvPr id="5" name="Rectangle 4"/>
+          <p:cNvSpPr/>
+          <p:nvPr/>
+        </p:nvSpPr>
+        <p:spPr>
+          <a:xfrm>
+            <a:off x="1219201" y="278693"/>
+            <a:ext cx="7333672" cy="707886"/>
+          </a:xfrm>
+          <a:prstGeom prst="rect">
+            <a:avLst/>
+          </a:prstGeom>
+          <a:noFill/>
+        </p:spPr>
+        <p:txBody>
+          <a:bodyPr wrap="square" lIns="91440" tIns="45720" rIns="91440" bIns="45720">
+            <a:spAutoFit/>
+          </a:bodyPr>
+          <a:lstStyle/>
+          <a:p>
+            <a:pPr algn="ctr"/>
+            <a:r>
+              <a:rPr lang="en-US" sz="4000" dirty="0">
+                <a:ln w="0"/>
+                <a:gradFill>
+                  <a:gsLst>
+                    <a:gs pos="0">
+                      <a:schemeClr val="accent5">
+                        <a:lumMod val="50000"/>
+                      </a:schemeClr>
+                    </a:gs>
+                    <a:gs pos="50000">
+                      <a:schemeClr val="accent5"/>
+                    </a:gs>
+                    <a:gs pos="100000">
+                      <a:schemeClr val="accent5">
+                        <a:lumMod val="60000"/>
+                        <a:lumOff val="40000"/>
+                      </a:schemeClr>
+                    </a:gs>
+                  </a:gsLst>
+                  <a:lin ang="5400000"/>
+                </a:gradFill>
+                <a:effectLst>
+                  <a:reflection blurRad="6350" stA="53000" endA="300" endPos="35500" dir="5400000" sy="-90000" algn="bl" rotWithShape="0"/>
+                </a:effectLst>
+                <a:latin typeface="Times New Roman" panose="02020603050405020304" pitchFamily="18" charset="0"/>
+                <a:cs typeface="Times New Roman" panose="02020603050405020304" pitchFamily="18" charset="0"/>
+              </a:rPr>
+              <a:t>V : FORM ỨNG DỤNG</a:t>
+            </a:r>
+            <a:endParaRPr lang="en-US" sz="4000" b="0" cap="none" spc="0" dirty="0">
+              <a:ln w="0"/>
+              <a:gradFill>
+                <a:gsLst>
+                  <a:gs pos="0">
+                    <a:schemeClr val="accent5">
+                      <a:lumMod val="50000"/>
+                    </a:schemeClr>
+                  </a:gs>
+                  <a:gs pos="50000">
+                    <a:schemeClr val="accent5"/>
+                  </a:gs>
+                  <a:gs pos="100000">
+                    <a:schemeClr val="accent5">
+                      <a:lumMod val="60000"/>
+                      <a:lumOff val="40000"/>
+                    </a:schemeClr>
+                  </a:gs>
+                </a:gsLst>
+                <a:lin ang="5400000"/>
+              </a:gradFill>
+              <a:effectLst>
+                <a:reflection blurRad="6350" stA="53000" endA="300" endPos="35500" dir="5400000" sy="-90000" algn="bl" rotWithShape="0"/>
+              </a:effectLst>
+              <a:latin typeface="Times New Roman" panose="02020603050405020304" pitchFamily="18" charset="0"/>
+              <a:cs typeface="Times New Roman" panose="02020603050405020304" pitchFamily="18" charset="0"/>
+            </a:endParaRPr>
+          </a:p>
+        </p:txBody>
+      </p:sp>
+      <p:sp>
+        <p:nvSpPr>
+          <p:cNvPr id="8" name="TextBox 7">
+            <a:extLst>
+              <a:ext uri="{FF2B5EF4-FFF2-40B4-BE49-F238E27FC236}">
+                <a16:creationId xmlns:a16="http://schemas.microsoft.com/office/drawing/2014/main" id="{1DC3E2F0-DDE7-27D4-D616-E6FA31242FBC}"/>
+              </a:ext>
+            </a:extLst>
+          </p:cNvPr>
+          <p:cNvSpPr txBox="1"/>
+          <p:nvPr/>
+        </p:nvSpPr>
+        <p:spPr>
+          <a:xfrm>
+            <a:off x="2037347" y="1411705"/>
+            <a:ext cx="5470358" cy="369332"/>
+          </a:xfrm>
+          <a:prstGeom prst="rect">
+            <a:avLst/>
+          </a:prstGeom>
+          <a:noFill/>
+        </p:spPr>
+        <p:txBody>
+          <a:bodyPr wrap="square" rtlCol="0">
+            <a:spAutoFit/>
+          </a:bodyPr>
+          <a:lstStyle/>
+          <a:p>
+            <a:pPr algn="ctr"/>
+            <a:r>
+              <a:rPr lang="en-US" dirty="0"/>
+              <a:t>FORM TRANG CHỦ</a:t>
+            </a:r>
+          </a:p>
+        </p:txBody>
+      </p:sp>
+      <p:pic>
+        <p:nvPicPr>
+          <p:cNvPr id="4" name="Content Placeholder 3" descr="A screenshot of a computer&#10;&#10;Description automatically generated">
+            <a:extLst>
+              <a:ext uri="{FF2B5EF4-FFF2-40B4-BE49-F238E27FC236}">
+                <a16:creationId xmlns:a16="http://schemas.microsoft.com/office/drawing/2014/main" id="{47845A03-9A28-04FB-2D07-AE2DA4D5FC73}"/>
+              </a:ext>
+            </a:extLst>
+          </p:cNvPr>
+          <p:cNvPicPr>
+            <a:picLocks noGrp="1" noChangeAspect="1"/>
+          </p:cNvPicPr>
+          <p:nvPr>
+            <p:ph idx="1"/>
+          </p:nvPr>
+        </p:nvPicPr>
+        <p:blipFill>
+          <a:blip r:embed="rId2"/>
+          <a:stretch>
+            <a:fillRect/>
+          </a:stretch>
+        </p:blipFill>
+        <p:spPr>
+          <a:xfrm>
+            <a:off x="1524168" y="2160588"/>
+            <a:ext cx="6903701" cy="3881437"/>
+          </a:xfrm>
+          <a:prstGeom prst="rect">
+            <a:avLst/>
+          </a:prstGeom>
+        </p:spPr>
+      </p:pic>
+    </p:spTree>
+    <p:extLst>
+      <p:ext uri="{BB962C8B-B14F-4D97-AF65-F5344CB8AC3E}">
+        <p14:creationId xmlns:p14="http://schemas.microsoft.com/office/powerpoint/2010/main" val="2072202467"/>
+      </p:ext>
+    </p:extLst>
+  </p:cSld>
+  <p:clrMapOvr>
+    <a:masterClrMapping/>
+  </p:clrMapOvr>
+  <mc:AlternateContent xmlns:mc="http://schemas.openxmlformats.org/markup-compatibility/2006" xmlns:p14="http://schemas.microsoft.com/office/powerpoint/2010/main">
+    <mc:Choice Requires="p14">
+      <p:transition spd="med" p14:dur="700">
+        <p:fade/>
+      </p:transition>
+    </mc:Choice>
+    <mc:Fallback xmlns="">
+      <p:transition spd="med">
+        <p:fade/>
+      </p:transition>
+    </mc:Fallback>
+  </mc:AlternateContent>
+  <p:timing>
+    <p:tnLst>
+      <p:par>
+        <p:cTn id="1" dur="indefinite" restart="never" nodeType="tmRoot">
+          <p:childTnLst>
+            <p:seq concurrent="1" nextAc="seek">
+              <p:cTn id="2" dur="indefinite" nodeType="mainSeq">
+                <p:childTnLst>
+                  <p:par>
+                    <p:cTn id="3" fill="hold">
+                      <p:stCondLst>
+                        <p:cond delay="indefinite"/>
+                      </p:stCondLst>
+                      <p:childTnLst>
+                        <p:par>
+                          <p:cTn id="4" fill="hold">
+                            <p:stCondLst>
+                              <p:cond delay="0"/>
+                            </p:stCondLst>
+                            <p:childTnLst>
+                              <p:par>
+                                <p:cTn id="5" presetID="6" presetClass="entr" presetSubtype="16" fill="hold" grpId="0" nodeType="clickEffect">
+                                  <p:stCondLst>
+                                    <p:cond delay="0"/>
+                                  </p:stCondLst>
+                                  <p:childTnLst>
+                                    <p:set>
+                                      <p:cBhvr>
+                                        <p:cTn id="6" dur="1" fill="hold">
+                                          <p:stCondLst>
+                                            <p:cond delay="0"/>
+                                          </p:stCondLst>
+                                        </p:cTn>
+                                        <p:tgtEl>
+                                          <p:spTgt spid="5"/>
+                                        </p:tgtEl>
+                                        <p:attrNameLst>
+                                          <p:attrName>style.visibility</p:attrName>
+                                        </p:attrNameLst>
+                                      </p:cBhvr>
+                                      <p:to>
+                                        <p:strVal val="visible"/>
+                                      </p:to>
+                                    </p:set>
+                                    <p:animEffect transition="in" filter="circle(in)">
+                                      <p:cBhvr>
+                                        <p:cTn id="7" dur="2000"/>
+                                        <p:tgtEl>
+                                          <p:spTgt spid="5"/>
+                                        </p:tgtEl>
+                                      </p:cBhvr>
+                                    </p:animEffect>
+                                  </p:childTnLst>
+                                </p:cTn>
+                              </p:par>
+                            </p:childTnLst>
+                          </p:cTn>
+                        </p:par>
+                      </p:childTnLst>
+                    </p:cTn>
+                  </p:par>
+                </p:childTnLst>
+              </p:cTn>
+              <p:prevCondLst>
+                <p:cond evt="onPrev" delay="0">
+                  <p:tgtEl>
+                    <p:sldTgt/>
+                  </p:tgtEl>
+                </p:cond>
+              </p:prevCondLst>
+              <p:nextCondLst>
+                <p:cond evt="onNext" delay="0">
+                  <p:tgtEl>
+                    <p:sldTgt/>
+                  </p:tgtEl>
+                </p:cond>
+              </p:nextCondLst>
+            </p:seq>
+          </p:childTnLst>
+        </p:cTn>
+      </p:par>
+    </p:tnLst>
+    <p:bldLst>
+      <p:bldP spid="5" grpId="0"/>
     </p:bldLst>
   </p:timing>
 </p:sld>

--- a/Đồ án CNPM.pptx
+++ b/Đồ án CNPM.pptx
@@ -4,6 +4,9 @@
   <p:sldMasterIdLst>
     <p:sldMasterId id="2147483747" r:id="rId1"/>
   </p:sldMasterIdLst>
+  <p:notesMasterIdLst>
+    <p:notesMasterId r:id="rId22"/>
+  </p:notesMasterIdLst>
   <p:sldIdLst>
     <p:sldId id="256" r:id="rId2"/>
     <p:sldId id="283" r:id="rId3"/>
@@ -129,6 +132,439 @@
     </p:ext>
   </p:extLst>
 </p:presentation>
+</file>
+
+<file path=ppt/notesMasters/notesMaster1.xml><?xml version="1.0" encoding="utf-8"?>
+<p:notesMaster xmlns:a="http://schemas.openxmlformats.org/drawingml/2006/main" xmlns:r="http://schemas.openxmlformats.org/officeDocument/2006/relationships" xmlns:p="http://schemas.openxmlformats.org/presentationml/2006/main">
+  <p:cSld>
+    <p:bg>
+      <p:bgRef idx="1001">
+        <a:schemeClr val="bg1"/>
+      </p:bgRef>
+    </p:bg>
+    <p:spTree>
+      <p:nvGrpSpPr>
+        <p:cNvPr id="1" name=""/>
+        <p:cNvGrpSpPr/>
+        <p:nvPr/>
+      </p:nvGrpSpPr>
+      <p:grpSpPr>
+        <a:xfrm>
+          <a:off x="0" y="0"/>
+          <a:ext cx="0" cy="0"/>
+          <a:chOff x="0" y="0"/>
+          <a:chExt cx="0" cy="0"/>
+        </a:xfrm>
+      </p:grpSpPr>
+      <p:sp>
+        <p:nvSpPr>
+          <p:cNvPr id="2" name="Header Placeholder 1"/>
+          <p:cNvSpPr>
+            <a:spLocks noGrp="1"/>
+          </p:cNvSpPr>
+          <p:nvPr>
+            <p:ph type="hdr" sz="quarter"/>
+          </p:nvPr>
+        </p:nvSpPr>
+        <p:spPr>
+          <a:xfrm>
+            <a:off x="0" y="0"/>
+            <a:ext cx="2971800" cy="458788"/>
+          </a:xfrm>
+          <a:prstGeom prst="rect">
+            <a:avLst/>
+          </a:prstGeom>
+        </p:spPr>
+        <p:txBody>
+          <a:bodyPr vert="horz" lIns="91440" tIns="45720" rIns="91440" bIns="45720" rtlCol="0"/>
+          <a:lstStyle>
+            <a:lvl1pPr algn="l">
+              <a:defRPr sz="1200"/>
+            </a:lvl1pPr>
+          </a:lstStyle>
+          <a:p>
+            <a:endParaRPr lang="en-US"/>
+          </a:p>
+        </p:txBody>
+      </p:sp>
+      <p:sp>
+        <p:nvSpPr>
+          <p:cNvPr id="3" name="Date Placeholder 2"/>
+          <p:cNvSpPr>
+            <a:spLocks noGrp="1"/>
+          </p:cNvSpPr>
+          <p:nvPr>
+            <p:ph type="dt" idx="1"/>
+          </p:nvPr>
+        </p:nvSpPr>
+        <p:spPr>
+          <a:xfrm>
+            <a:off x="3884613" y="0"/>
+            <a:ext cx="2971800" cy="458788"/>
+          </a:xfrm>
+          <a:prstGeom prst="rect">
+            <a:avLst/>
+          </a:prstGeom>
+        </p:spPr>
+        <p:txBody>
+          <a:bodyPr vert="horz" lIns="91440" tIns="45720" rIns="91440" bIns="45720" rtlCol="0"/>
+          <a:lstStyle>
+            <a:lvl1pPr algn="r">
+              <a:defRPr sz="1200"/>
+            </a:lvl1pPr>
+          </a:lstStyle>
+          <a:p>
+            <a:fld id="{028009D2-C9D8-4945-B470-E61900D87D65}" type="datetimeFigureOut">
+              <a:rPr lang="en-US" smtClean="0"/>
+              <a:t>5/24/2024</a:t>
+            </a:fld>
+            <a:endParaRPr lang="en-US"/>
+          </a:p>
+        </p:txBody>
+      </p:sp>
+      <p:sp>
+        <p:nvSpPr>
+          <p:cNvPr id="4" name="Slide Image Placeholder 3"/>
+          <p:cNvSpPr>
+            <a:spLocks noGrp="1" noRot="1" noChangeAspect="1"/>
+          </p:cNvSpPr>
+          <p:nvPr>
+            <p:ph type="sldImg" idx="2"/>
+          </p:nvPr>
+        </p:nvSpPr>
+        <p:spPr>
+          <a:xfrm>
+            <a:off x="685800" y="1143000"/>
+            <a:ext cx="5486400" cy="3086100"/>
+          </a:xfrm>
+          <a:prstGeom prst="rect">
+            <a:avLst/>
+          </a:prstGeom>
+          <a:noFill/>
+          <a:ln w="12700">
+            <a:solidFill>
+              <a:prstClr val="black"/>
+            </a:solidFill>
+          </a:ln>
+        </p:spPr>
+        <p:txBody>
+          <a:bodyPr vert="horz" lIns="91440" tIns="45720" rIns="91440" bIns="45720" rtlCol="0" anchor="ctr"/>
+          <a:lstStyle/>
+          <a:p>
+            <a:endParaRPr lang="en-US"/>
+          </a:p>
+        </p:txBody>
+      </p:sp>
+      <p:sp>
+        <p:nvSpPr>
+          <p:cNvPr id="5" name="Notes Placeholder 4"/>
+          <p:cNvSpPr>
+            <a:spLocks noGrp="1"/>
+          </p:cNvSpPr>
+          <p:nvPr>
+            <p:ph type="body" sz="quarter" idx="3"/>
+          </p:nvPr>
+        </p:nvSpPr>
+        <p:spPr>
+          <a:xfrm>
+            <a:off x="685800" y="4400550"/>
+            <a:ext cx="5486400" cy="3600450"/>
+          </a:xfrm>
+          <a:prstGeom prst="rect">
+            <a:avLst/>
+          </a:prstGeom>
+        </p:spPr>
+        <p:txBody>
+          <a:bodyPr vert="horz" lIns="91440" tIns="45720" rIns="91440" bIns="45720" rtlCol="0"/>
+          <a:lstStyle/>
+          <a:p>
+            <a:pPr lvl="0"/>
+            <a:r>
+              <a:rPr lang="en-US"/>
+              <a:t>Click to edit Master text styles</a:t>
+            </a:r>
+          </a:p>
+          <a:p>
+            <a:pPr lvl="1"/>
+            <a:r>
+              <a:rPr lang="en-US"/>
+              <a:t>Second level</a:t>
+            </a:r>
+          </a:p>
+          <a:p>
+            <a:pPr lvl="2"/>
+            <a:r>
+              <a:rPr lang="en-US"/>
+              <a:t>Third level</a:t>
+            </a:r>
+          </a:p>
+          <a:p>
+            <a:pPr lvl="3"/>
+            <a:r>
+              <a:rPr lang="en-US"/>
+              <a:t>Fourth level</a:t>
+            </a:r>
+          </a:p>
+          <a:p>
+            <a:pPr lvl="4"/>
+            <a:r>
+              <a:rPr lang="en-US"/>
+              <a:t>Fifth level</a:t>
+            </a:r>
+          </a:p>
+        </p:txBody>
+      </p:sp>
+      <p:sp>
+        <p:nvSpPr>
+          <p:cNvPr id="6" name="Footer Placeholder 5"/>
+          <p:cNvSpPr>
+            <a:spLocks noGrp="1"/>
+          </p:cNvSpPr>
+          <p:nvPr>
+            <p:ph type="ftr" sz="quarter" idx="4"/>
+          </p:nvPr>
+        </p:nvSpPr>
+        <p:spPr>
+          <a:xfrm>
+            <a:off x="0" y="8685213"/>
+            <a:ext cx="2971800" cy="458787"/>
+          </a:xfrm>
+          <a:prstGeom prst="rect">
+            <a:avLst/>
+          </a:prstGeom>
+        </p:spPr>
+        <p:txBody>
+          <a:bodyPr vert="horz" lIns="91440" tIns="45720" rIns="91440" bIns="45720" rtlCol="0" anchor="b"/>
+          <a:lstStyle>
+            <a:lvl1pPr algn="l">
+              <a:defRPr sz="1200"/>
+            </a:lvl1pPr>
+          </a:lstStyle>
+          <a:p>
+            <a:endParaRPr lang="en-US"/>
+          </a:p>
+        </p:txBody>
+      </p:sp>
+      <p:sp>
+        <p:nvSpPr>
+          <p:cNvPr id="7" name="Slide Number Placeholder 6"/>
+          <p:cNvSpPr>
+            <a:spLocks noGrp="1"/>
+          </p:cNvSpPr>
+          <p:nvPr>
+            <p:ph type="sldNum" sz="quarter" idx="5"/>
+          </p:nvPr>
+        </p:nvSpPr>
+        <p:spPr>
+          <a:xfrm>
+            <a:off x="3884613" y="8685213"/>
+            <a:ext cx="2971800" cy="458787"/>
+          </a:xfrm>
+          <a:prstGeom prst="rect">
+            <a:avLst/>
+          </a:prstGeom>
+        </p:spPr>
+        <p:txBody>
+          <a:bodyPr vert="horz" lIns="91440" tIns="45720" rIns="91440" bIns="45720" rtlCol="0" anchor="b"/>
+          <a:lstStyle>
+            <a:lvl1pPr algn="r">
+              <a:defRPr sz="1200"/>
+            </a:lvl1pPr>
+          </a:lstStyle>
+          <a:p>
+            <a:fld id="{DA3E269C-331D-4D4A-86B1-762EFD9D9488}" type="slidenum">
+              <a:rPr lang="en-US" smtClean="0"/>
+              <a:t>‹#›</a:t>
+            </a:fld>
+            <a:endParaRPr lang="en-US"/>
+          </a:p>
+        </p:txBody>
+      </p:sp>
+    </p:spTree>
+    <p:extLst>
+      <p:ext uri="{BB962C8B-B14F-4D97-AF65-F5344CB8AC3E}">
+        <p14:creationId xmlns:p14="http://schemas.microsoft.com/office/powerpoint/2010/main" val="3359615650"/>
+      </p:ext>
+    </p:extLst>
+  </p:cSld>
+  <p:clrMap bg1="lt1" tx1="dk1" bg2="lt2" tx2="dk2" accent1="accent1" accent2="accent2" accent3="accent3" accent4="accent4" accent5="accent5" accent6="accent6" hlink="hlink" folHlink="folHlink"/>
+  <p:notesStyle>
+    <a:lvl1pPr marL="0" algn="l" defTabSz="914400" rtl="0" eaLnBrk="1" latinLnBrk="0" hangingPunct="1">
+      <a:defRPr sz="1200" kern="1200">
+        <a:solidFill>
+          <a:schemeClr val="tx1"/>
+        </a:solidFill>
+        <a:latin typeface="+mn-lt"/>
+        <a:ea typeface="+mn-ea"/>
+        <a:cs typeface="+mn-cs"/>
+      </a:defRPr>
+    </a:lvl1pPr>
+    <a:lvl2pPr marL="457200" algn="l" defTabSz="914400" rtl="0" eaLnBrk="1" latinLnBrk="0" hangingPunct="1">
+      <a:defRPr sz="1200" kern="1200">
+        <a:solidFill>
+          <a:schemeClr val="tx1"/>
+        </a:solidFill>
+        <a:latin typeface="+mn-lt"/>
+        <a:ea typeface="+mn-ea"/>
+        <a:cs typeface="+mn-cs"/>
+      </a:defRPr>
+    </a:lvl2pPr>
+    <a:lvl3pPr marL="914400" algn="l" defTabSz="914400" rtl="0" eaLnBrk="1" latinLnBrk="0" hangingPunct="1">
+      <a:defRPr sz="1200" kern="1200">
+        <a:solidFill>
+          <a:schemeClr val="tx1"/>
+        </a:solidFill>
+        <a:latin typeface="+mn-lt"/>
+        <a:ea typeface="+mn-ea"/>
+        <a:cs typeface="+mn-cs"/>
+      </a:defRPr>
+    </a:lvl3pPr>
+    <a:lvl4pPr marL="1371600" algn="l" defTabSz="914400" rtl="0" eaLnBrk="1" latinLnBrk="0" hangingPunct="1">
+      <a:defRPr sz="1200" kern="1200">
+        <a:solidFill>
+          <a:schemeClr val="tx1"/>
+        </a:solidFill>
+        <a:latin typeface="+mn-lt"/>
+        <a:ea typeface="+mn-ea"/>
+        <a:cs typeface="+mn-cs"/>
+      </a:defRPr>
+    </a:lvl4pPr>
+    <a:lvl5pPr marL="1828800" algn="l" defTabSz="914400" rtl="0" eaLnBrk="1" latinLnBrk="0" hangingPunct="1">
+      <a:defRPr sz="1200" kern="1200">
+        <a:solidFill>
+          <a:schemeClr val="tx1"/>
+        </a:solidFill>
+        <a:latin typeface="+mn-lt"/>
+        <a:ea typeface="+mn-ea"/>
+        <a:cs typeface="+mn-cs"/>
+      </a:defRPr>
+    </a:lvl5pPr>
+    <a:lvl6pPr marL="2286000" algn="l" defTabSz="914400" rtl="0" eaLnBrk="1" latinLnBrk="0" hangingPunct="1">
+      <a:defRPr sz="1200" kern="1200">
+        <a:solidFill>
+          <a:schemeClr val="tx1"/>
+        </a:solidFill>
+        <a:latin typeface="+mn-lt"/>
+        <a:ea typeface="+mn-ea"/>
+        <a:cs typeface="+mn-cs"/>
+      </a:defRPr>
+    </a:lvl6pPr>
+    <a:lvl7pPr marL="2743200" algn="l" defTabSz="914400" rtl="0" eaLnBrk="1" latinLnBrk="0" hangingPunct="1">
+      <a:defRPr sz="1200" kern="1200">
+        <a:solidFill>
+          <a:schemeClr val="tx1"/>
+        </a:solidFill>
+        <a:latin typeface="+mn-lt"/>
+        <a:ea typeface="+mn-ea"/>
+        <a:cs typeface="+mn-cs"/>
+      </a:defRPr>
+    </a:lvl7pPr>
+    <a:lvl8pPr marL="3200400" algn="l" defTabSz="914400" rtl="0" eaLnBrk="1" latinLnBrk="0" hangingPunct="1">
+      <a:defRPr sz="1200" kern="1200">
+        <a:solidFill>
+          <a:schemeClr val="tx1"/>
+        </a:solidFill>
+        <a:latin typeface="+mn-lt"/>
+        <a:ea typeface="+mn-ea"/>
+        <a:cs typeface="+mn-cs"/>
+      </a:defRPr>
+    </a:lvl8pPr>
+    <a:lvl9pPr marL="3657600" algn="l" defTabSz="914400" rtl="0" eaLnBrk="1" latinLnBrk="0" hangingPunct="1">
+      <a:defRPr sz="1200" kern="1200">
+        <a:solidFill>
+          <a:schemeClr val="tx1"/>
+        </a:solidFill>
+        <a:latin typeface="+mn-lt"/>
+        <a:ea typeface="+mn-ea"/>
+        <a:cs typeface="+mn-cs"/>
+      </a:defRPr>
+    </a:lvl9pPr>
+  </p:notesStyle>
+</p:notesMaster>
+</file>
+
+<file path=ppt/notesSlides/notesSlide1.xml><?xml version="1.0" encoding="utf-8"?>
+<p:notes xmlns:a="http://schemas.openxmlformats.org/drawingml/2006/main" xmlns:r="http://schemas.openxmlformats.org/officeDocument/2006/relationships" xmlns:p="http://schemas.openxmlformats.org/presentationml/2006/main">
+  <p:cSld>
+    <p:spTree>
+      <p:nvGrpSpPr>
+        <p:cNvPr id="1" name=""/>
+        <p:cNvGrpSpPr/>
+        <p:nvPr/>
+      </p:nvGrpSpPr>
+      <p:grpSpPr>
+        <a:xfrm>
+          <a:off x="0" y="0"/>
+          <a:ext cx="0" cy="0"/>
+          <a:chOff x="0" y="0"/>
+          <a:chExt cx="0" cy="0"/>
+        </a:xfrm>
+      </p:grpSpPr>
+      <p:sp>
+        <p:nvSpPr>
+          <p:cNvPr id="2" name="Slide Image Placeholder 1"/>
+          <p:cNvSpPr>
+            <a:spLocks noGrp="1" noRot="1" noChangeAspect="1"/>
+          </p:cNvSpPr>
+          <p:nvPr>
+            <p:ph type="sldImg"/>
+          </p:nvPr>
+        </p:nvSpPr>
+        <p:spPr/>
+      </p:sp>
+      <p:sp>
+        <p:nvSpPr>
+          <p:cNvPr id="3" name="Notes Placeholder 2"/>
+          <p:cNvSpPr>
+            <a:spLocks noGrp="1"/>
+          </p:cNvSpPr>
+          <p:nvPr>
+            <p:ph type="body" idx="1"/>
+          </p:nvPr>
+        </p:nvSpPr>
+        <p:spPr/>
+        <p:txBody>
+          <a:bodyPr/>
+          <a:lstStyle/>
+          <a:p>
+            <a:endParaRPr lang="en-US"/>
+          </a:p>
+        </p:txBody>
+      </p:sp>
+      <p:sp>
+        <p:nvSpPr>
+          <p:cNvPr id="4" name="Slide Number Placeholder 3"/>
+          <p:cNvSpPr>
+            <a:spLocks noGrp="1"/>
+          </p:cNvSpPr>
+          <p:nvPr>
+            <p:ph type="sldNum" sz="quarter" idx="5"/>
+          </p:nvPr>
+        </p:nvSpPr>
+        <p:spPr/>
+        <p:txBody>
+          <a:bodyPr/>
+          <a:lstStyle/>
+          <a:p>
+            <a:fld id="{DA3E269C-331D-4D4A-86B1-762EFD9D9488}" type="slidenum">
+              <a:rPr lang="en-US" smtClean="0"/>
+              <a:t>1</a:t>
+            </a:fld>
+            <a:endParaRPr lang="en-US"/>
+          </a:p>
+        </p:txBody>
+      </p:sp>
+    </p:spTree>
+    <p:extLst>
+      <p:ext uri="{BB962C8B-B14F-4D97-AF65-F5344CB8AC3E}">
+        <p14:creationId xmlns:p14="http://schemas.microsoft.com/office/powerpoint/2010/main" val="1795345861"/>
+      </p:ext>
+    </p:extLst>
+  </p:cSld>
+  <p:clrMapOvr>
+    <a:masterClrMapping/>
+  </p:clrMapOvr>
+</p:notes>
 </file>
 
 <file path=ppt/slideLayouts/slideLayout1.xml><?xml version="1.0" encoding="utf-8"?>
@@ -5860,8 +6296,8 @@
         </p:nvSpPr>
         <p:spPr>
           <a:xfrm>
-            <a:off x="1733069" y="3009947"/>
-            <a:ext cx="7766936" cy="3634868"/>
+            <a:off x="1883986" y="2646531"/>
+            <a:ext cx="7465101" cy="3634868"/>
           </a:xfrm>
         </p:spPr>
         <p:txBody>
@@ -6331,27 +6767,7 @@
                 <a:latin typeface="Times New Roman" panose="02020603050405020304" pitchFamily="18" charset="0"/>
                 <a:cs typeface="Times New Roman" panose="02020603050405020304" pitchFamily="18" charset="0"/>
               </a:rPr>
-              <a:t> Quang </a:t>
-            </a:r>
-            <a:r>
-              <a:rPr lang="en-US" sz="2500" b="1" dirty="0" err="1">
-                <a:solidFill>
-                  <a:schemeClr val="tx1"/>
-                </a:solidFill>
-                <a:latin typeface="Times New Roman" panose="02020603050405020304" pitchFamily="18" charset="0"/>
-                <a:cs typeface="Times New Roman" panose="02020603050405020304" pitchFamily="18" charset="0"/>
-              </a:rPr>
-              <a:t>Phát</a:t>
-            </a:r>
-            <a:r>
-              <a:rPr lang="en-US" sz="2500" b="1" dirty="0">
-                <a:solidFill>
-                  <a:schemeClr val="tx1"/>
-                </a:solidFill>
-                <a:latin typeface="Times New Roman" panose="02020603050405020304" pitchFamily="18" charset="0"/>
-                <a:cs typeface="Times New Roman" panose="02020603050405020304" pitchFamily="18" charset="0"/>
-              </a:rPr>
-              <a:t>	-	</a:t>
+              <a:t> Quang Phát-</a:t>
             </a:r>
             <a:r>
               <a:rPr lang="en-US" b="1" dirty="0">
@@ -6424,7 +6840,7 @@
         </p:nvSpPr>
         <p:spPr>
           <a:xfrm>
-            <a:off x="2342147" y="433137"/>
+            <a:off x="2342147" y="213185"/>
             <a:ext cx="6812388" cy="1015663"/>
           </a:xfrm>
           <a:prstGeom prst="rect">
@@ -6741,7 +7157,7 @@
         </p:nvSpPr>
         <p:spPr>
           <a:xfrm>
-            <a:off x="1883987" y="1595230"/>
+            <a:off x="1883987" y="1228848"/>
             <a:ext cx="7465101" cy="1270859"/>
           </a:xfrm>
           <a:prstGeom prst="rect">
@@ -7682,7 +8098,7 @@
             <a:pPr algn="ctr"/>
             <a:r>
               <a:rPr lang="en-US" dirty="0"/>
-              <a:t>FORM CHỌN VÉ CỦA NGƯỜI ĐẶT VÉ</a:t>
+              <a:t>FORM CHỌN VÉ CHO KHÁCH HÀNG</a:t>
             </a:r>
           </a:p>
         </p:txBody>
@@ -8263,7 +8679,7 @@
             <a:pPr algn="ctr"/>
             <a:r>
               <a:rPr lang="en-US" dirty="0"/>
-              <a:t>FORM THANH TOÁN CHUYẾN ĐI</a:t>
+              <a:t>FORM THANH TOÁN CHO CHUYẾN ĐI</a:t>
             </a:r>
           </a:p>
         </p:txBody>
@@ -8844,7 +9260,7 @@
             <a:pPr algn="ctr"/>
             <a:r>
               <a:rPr lang="en-US" dirty="0"/>
-              <a:t>FORM ĐĂNG KÍ TÀI KHOẢN NGƯỜI ĐẶT VÉ</a:t>
+              <a:t>FORM ĐĂNG KÍ TÀI KHOẢN CHO NHÂN VIÊN ĐẶT VÉ</a:t>
             </a:r>
           </a:p>
         </p:txBody>
@@ -9413,7 +9829,7 @@
             <a:pPr algn="ctr"/>
             <a:r>
               <a:rPr lang="en-US" dirty="0"/>
-              <a:t>FORM QUẢN LÝ VÉ XE XE</a:t>
+              <a:t>FORM QUẢN LÝ VÉ XE</a:t>
             </a:r>
           </a:p>
         </p:txBody>
@@ -9703,7 +10119,7 @@
             <a:pPr algn="ctr"/>
             <a:r>
               <a:rPr lang="en-US" dirty="0"/>
-              <a:t>FORM QUẢN LÝ VÉ  XE</a:t>
+              <a:t>FORM QUẢN LÝ XE</a:t>
             </a:r>
           </a:p>
         </p:txBody>
@@ -10950,7 +11366,7 @@
                 <a:solidFill>
                   <a:srgbClr val="FF0000"/>
                 </a:solidFill>
-                <a:latin typeface="Times New Roman" panose="02020603050405020304" pitchFamily="18" charset="0"/>
+                <a:latin typeface="Trebuchet MS (Body)"/>
                 <a:cs typeface="Times New Roman" panose="02020603050405020304" pitchFamily="18" charset="0"/>
               </a:rPr>
               <a:t>Ứng</a:t>
@@ -10960,7 +11376,7 @@
                 <a:solidFill>
                   <a:srgbClr val="FF0000"/>
                 </a:solidFill>
-                <a:latin typeface="Times New Roman" panose="02020603050405020304" pitchFamily="18" charset="0"/>
+                <a:latin typeface="Trebuchet MS (Body)"/>
                 <a:cs typeface="Times New Roman" panose="02020603050405020304" pitchFamily="18" charset="0"/>
               </a:rPr>
               <a:t> </a:t>
@@ -10970,7 +11386,7 @@
                 <a:solidFill>
                   <a:srgbClr val="FF0000"/>
                 </a:solidFill>
-                <a:latin typeface="Times New Roman" panose="02020603050405020304" pitchFamily="18" charset="0"/>
+                <a:latin typeface="Trebuchet MS (Body)"/>
                 <a:cs typeface="Times New Roman" panose="02020603050405020304" pitchFamily="18" charset="0"/>
               </a:rPr>
               <a:t>dụng</a:t>
@@ -10980,7 +11396,7 @@
                 <a:solidFill>
                   <a:srgbClr val="FF0000"/>
                 </a:solidFill>
-                <a:latin typeface="Times New Roman" panose="02020603050405020304" pitchFamily="18" charset="0"/>
+                <a:latin typeface="Trebuchet MS (Body)"/>
                 <a:cs typeface="Times New Roman" panose="02020603050405020304" pitchFamily="18" charset="0"/>
               </a:rPr>
               <a:t> </a:t>
@@ -10990,7 +11406,7 @@
                 <a:solidFill>
                   <a:srgbClr val="FF0000"/>
                 </a:solidFill>
-                <a:latin typeface="Times New Roman" panose="02020603050405020304" pitchFamily="18" charset="0"/>
+                <a:latin typeface="Trebuchet MS (Body)"/>
                 <a:cs typeface="Times New Roman" panose="02020603050405020304" pitchFamily="18" charset="0"/>
               </a:rPr>
               <a:t>bán</a:t>
@@ -11000,7 +11416,7 @@
                 <a:solidFill>
                   <a:srgbClr val="FF0000"/>
                 </a:solidFill>
-                <a:latin typeface="Times New Roman" panose="02020603050405020304" pitchFamily="18" charset="0"/>
+                <a:latin typeface="Trebuchet MS (Body)"/>
                 <a:cs typeface="Times New Roman" panose="02020603050405020304" pitchFamily="18" charset="0"/>
               </a:rPr>
               <a:t> </a:t>
@@ -11010,7 +11426,7 @@
                 <a:solidFill>
                   <a:srgbClr val="FF0000"/>
                 </a:solidFill>
-                <a:latin typeface="Times New Roman" panose="02020603050405020304" pitchFamily="18" charset="0"/>
+                <a:latin typeface="Trebuchet MS (Body)"/>
                 <a:cs typeface="Times New Roman" panose="02020603050405020304" pitchFamily="18" charset="0"/>
               </a:rPr>
               <a:t>vé</a:t>
@@ -11020,7 +11436,7 @@
                 <a:solidFill>
                   <a:srgbClr val="FF0000"/>
                 </a:solidFill>
-                <a:latin typeface="Times New Roman" panose="02020603050405020304" pitchFamily="18" charset="0"/>
+                <a:latin typeface="Trebuchet MS (Body)"/>
                 <a:cs typeface="Times New Roman" panose="02020603050405020304" pitchFamily="18" charset="0"/>
               </a:rPr>
               <a:t> </a:t>
@@ -11030,7 +11446,7 @@
                 <a:solidFill>
                   <a:srgbClr val="FF0000"/>
                 </a:solidFill>
-                <a:latin typeface="Times New Roman" panose="02020603050405020304" pitchFamily="18" charset="0"/>
+                <a:latin typeface="Trebuchet MS (Body)"/>
                 <a:cs typeface="Times New Roman" panose="02020603050405020304" pitchFamily="18" charset="0"/>
               </a:rPr>
               <a:t>xe</a:t>
@@ -11040,7 +11456,7 @@
                 <a:solidFill>
                   <a:srgbClr val="FF0000"/>
                 </a:solidFill>
-                <a:latin typeface="Times New Roman" panose="02020603050405020304" pitchFamily="18" charset="0"/>
+                <a:latin typeface="Trebuchet MS (Body)"/>
                 <a:cs typeface="Times New Roman" panose="02020603050405020304" pitchFamily="18" charset="0"/>
               </a:rPr>
               <a:t>:   </a:t>
@@ -11944,8 +12360,8 @@
         </p:nvSpPr>
         <p:spPr>
           <a:xfrm>
-            <a:off x="794328" y="639771"/>
-            <a:ext cx="7703128" cy="4247317"/>
+            <a:off x="765452" y="1996932"/>
+            <a:ext cx="8773184" cy="1754326"/>
           </a:xfrm>
           <a:prstGeom prst="rect">
             <a:avLst/>
@@ -11978,7 +12394,7 @@
                   </a:outerShdw>
                 </a:effectLst>
               </a:rPr>
-              <a:t>Muốn</a:t>
+              <a:t>Cảm</a:t>
             </a:r>
             <a:r>
               <a:rPr lang="en-US" sz="5400" b="1" dirty="0">
@@ -12020,7 +12436,7 @@
                   </a:outerShdw>
                 </a:effectLst>
               </a:rPr>
-              <a:t>đi</a:t>
+              <a:t>ơn</a:t>
             </a:r>
             <a:r>
               <a:rPr lang="en-US" sz="5400" b="1" dirty="0">
@@ -12041,7 +12457,7 @@
                   </a:outerShdw>
                 </a:effectLst>
               </a:rPr>
-              <a:t> du </a:t>
+              <a:t> </a:t>
             </a:r>
             <a:r>
               <a:rPr lang="en-US" sz="5400" b="1" dirty="0" err="1">
@@ -12062,7 +12478,7 @@
                   </a:outerShdw>
                 </a:effectLst>
               </a:rPr>
-              <a:t>lịch</a:t>
+              <a:t>thầy</a:t>
             </a:r>
             <a:r>
               <a:rPr lang="en-US" sz="5400" b="1" dirty="0">
@@ -12104,7 +12520,7 @@
                   </a:outerShdw>
                 </a:effectLst>
               </a:rPr>
-              <a:t>đặt</a:t>
+              <a:t>đã</a:t>
             </a:r>
             <a:r>
               <a:rPr lang="en-US" sz="5400" b="1" dirty="0">
@@ -12146,7 +12562,7 @@
                   </a:outerShdw>
                 </a:effectLst>
               </a:rPr>
-              <a:t>xe</a:t>
+              <a:t>xem</a:t>
             </a:r>
             <a:r>
               <a:rPr lang="en-US" sz="5400" b="1" dirty="0">
@@ -12188,7 +12604,7 @@
                   </a:outerShdw>
                 </a:effectLst>
               </a:rPr>
-              <a:t>liên</a:t>
+              <a:t>và</a:t>
             </a:r>
             <a:r>
               <a:rPr lang="en-US" sz="5400" b="1" dirty="0">
@@ -12230,7 +12646,7 @@
                   </a:outerShdw>
                 </a:effectLst>
               </a:rPr>
-              <a:t>hệ</a:t>
+              <a:t>lắng</a:t>
             </a:r>
             <a:r>
               <a:rPr lang="en-US" sz="5400" b="1" dirty="0">
@@ -12272,220 +12688,7 @@
                   </a:outerShdw>
                 </a:effectLst>
               </a:rPr>
-              <a:t>nhóm</a:t>
-            </a:r>
-            <a:r>
-              <a:rPr lang="en-US" sz="5400" b="1" dirty="0">
-                <a:ln w="9525">
-                  <a:solidFill>
-                    <a:schemeClr val="bg1"/>
-                  </a:solidFill>
-                  <a:prstDash val="solid"/>
-                </a:ln>
-                <a:solidFill>
-                  <a:srgbClr val="FF0000"/>
-                </a:solidFill>
-                <a:effectLst>
-                  <a:outerShdw blurRad="12700" dist="38100" dir="2700000" algn="tl" rotWithShape="0">
-                    <a:schemeClr val="bg1">
-                      <a:lumMod val="50000"/>
-                    </a:schemeClr>
-                  </a:outerShdw>
-                </a:effectLst>
-              </a:rPr>
-              <a:t> QB_TTH_KH</a:t>
-            </a:r>
-          </a:p>
-          <a:p>
-            <a:pPr algn="ctr"/>
-            <a:r>
-              <a:rPr lang="en-US" sz="5400" b="1" dirty="0" err="1">
-                <a:ln w="9525">
-                  <a:solidFill>
-                    <a:schemeClr val="bg1"/>
-                  </a:solidFill>
-                  <a:prstDash val="solid"/>
-                </a:ln>
-                <a:solidFill>
-                  <a:srgbClr val="FF0000"/>
-                </a:solidFill>
-                <a:effectLst>
-                  <a:outerShdw blurRad="12700" dist="38100" dir="2700000" algn="tl" rotWithShape="0">
-                    <a:schemeClr val="bg1">
-                      <a:lumMod val="50000"/>
-                    </a:schemeClr>
-                  </a:outerShdw>
-                </a:effectLst>
-              </a:rPr>
-              <a:t>Cảm</a:t>
-            </a:r>
-            <a:r>
-              <a:rPr lang="en-US" sz="5400" b="1" dirty="0">
-                <a:ln w="9525">
-                  <a:solidFill>
-                    <a:schemeClr val="bg1"/>
-                  </a:solidFill>
-                  <a:prstDash val="solid"/>
-                </a:ln>
-                <a:solidFill>
-                  <a:srgbClr val="FF0000"/>
-                </a:solidFill>
-                <a:effectLst>
-                  <a:outerShdw blurRad="12700" dist="38100" dir="2700000" algn="tl" rotWithShape="0">
-                    <a:schemeClr val="bg1">
-                      <a:lumMod val="50000"/>
-                    </a:schemeClr>
-                  </a:outerShdw>
-                </a:effectLst>
-              </a:rPr>
-              <a:t> </a:t>
-            </a:r>
-            <a:r>
-              <a:rPr lang="en-US" sz="5400" b="1" dirty="0" err="1">
-                <a:ln w="9525">
-                  <a:solidFill>
-                    <a:schemeClr val="bg1"/>
-                  </a:solidFill>
-                  <a:prstDash val="solid"/>
-                </a:ln>
-                <a:solidFill>
-                  <a:srgbClr val="FF0000"/>
-                </a:solidFill>
-                <a:effectLst>
-                  <a:outerShdw blurRad="12700" dist="38100" dir="2700000" algn="tl" rotWithShape="0">
-                    <a:schemeClr val="bg1">
-                      <a:lumMod val="50000"/>
-                    </a:schemeClr>
-                  </a:outerShdw>
-                </a:effectLst>
-              </a:rPr>
-              <a:t>ơn</a:t>
-            </a:r>
-            <a:r>
-              <a:rPr lang="en-US" sz="5400" b="1" dirty="0">
-                <a:ln w="9525">
-                  <a:solidFill>
-                    <a:schemeClr val="bg1"/>
-                  </a:solidFill>
-                  <a:prstDash val="solid"/>
-                </a:ln>
-                <a:solidFill>
-                  <a:srgbClr val="FF0000"/>
-                </a:solidFill>
-                <a:effectLst>
-                  <a:outerShdw blurRad="12700" dist="38100" dir="2700000" algn="tl" rotWithShape="0">
-                    <a:schemeClr val="bg1">
-                      <a:lumMod val="50000"/>
-                    </a:schemeClr>
-                  </a:outerShdw>
-                </a:effectLst>
-              </a:rPr>
-              <a:t> </a:t>
-            </a:r>
-            <a:r>
-              <a:rPr lang="en-US" sz="5400" b="1" dirty="0" err="1">
-                <a:ln w="9525">
-                  <a:solidFill>
-                    <a:schemeClr val="bg1"/>
-                  </a:solidFill>
-                  <a:prstDash val="solid"/>
-                </a:ln>
-                <a:solidFill>
-                  <a:srgbClr val="FF0000"/>
-                </a:solidFill>
-                <a:effectLst>
-                  <a:outerShdw blurRad="12700" dist="38100" dir="2700000" algn="tl" rotWithShape="0">
-                    <a:schemeClr val="bg1">
-                      <a:lumMod val="50000"/>
-                    </a:schemeClr>
-                  </a:outerShdw>
-                </a:effectLst>
-              </a:rPr>
-              <a:t>các</a:t>
-            </a:r>
-            <a:r>
-              <a:rPr lang="en-US" sz="5400" b="1" dirty="0">
-                <a:ln w="9525">
-                  <a:solidFill>
-                    <a:schemeClr val="bg1"/>
-                  </a:solidFill>
-                  <a:prstDash val="solid"/>
-                </a:ln>
-                <a:solidFill>
-                  <a:srgbClr val="FF0000"/>
-                </a:solidFill>
-                <a:effectLst>
-                  <a:outerShdw blurRad="12700" dist="38100" dir="2700000" algn="tl" rotWithShape="0">
-                    <a:schemeClr val="bg1">
-                      <a:lumMod val="50000"/>
-                    </a:schemeClr>
-                  </a:outerShdw>
-                </a:effectLst>
-              </a:rPr>
-              <a:t> </a:t>
-            </a:r>
-            <a:r>
-              <a:rPr lang="en-US" sz="5400" b="1" dirty="0" err="1">
-                <a:ln w="9525">
-                  <a:solidFill>
-                    <a:schemeClr val="bg1"/>
-                  </a:solidFill>
-                  <a:prstDash val="solid"/>
-                </a:ln>
-                <a:solidFill>
-                  <a:srgbClr val="FF0000"/>
-                </a:solidFill>
-                <a:effectLst>
-                  <a:outerShdw blurRad="12700" dist="38100" dir="2700000" algn="tl" rotWithShape="0">
-                    <a:schemeClr val="bg1">
-                      <a:lumMod val="50000"/>
-                    </a:schemeClr>
-                  </a:outerShdw>
-                </a:effectLst>
-              </a:rPr>
-              <a:t>bạn</a:t>
-            </a:r>
-            <a:r>
-              <a:rPr lang="en-US" sz="5400" b="1" dirty="0">
-                <a:ln w="9525">
-                  <a:solidFill>
-                    <a:schemeClr val="bg1"/>
-                  </a:solidFill>
-                  <a:prstDash val="solid"/>
-                </a:ln>
-                <a:solidFill>
-                  <a:srgbClr val="FF0000"/>
-                </a:solidFill>
-                <a:effectLst>
-                  <a:outerShdw blurRad="12700" dist="38100" dir="2700000" algn="tl" rotWithShape="0">
-                    <a:schemeClr val="bg1">
-                      <a:lumMod val="50000"/>
-                    </a:schemeClr>
-                  </a:outerShdw>
-                </a:effectLst>
-              </a:rPr>
-              <a:t> </a:t>
-            </a:r>
-            <a:r>
-              <a:rPr lang="en-US" sz="5400" b="1" dirty="0" err="1">
-                <a:ln w="9525">
-                  <a:solidFill>
-                    <a:schemeClr val="bg1"/>
-                  </a:solidFill>
-                  <a:prstDash val="solid"/>
-                </a:ln>
-                <a:solidFill>
-                  <a:srgbClr val="FF0000"/>
-                </a:solidFill>
-                <a:effectLst>
-                  <a:outerShdw blurRad="12700" dist="38100" dir="2700000" algn="tl" rotWithShape="0">
-                    <a:schemeClr val="bg1">
-                      <a:lumMod val="50000"/>
-                    </a:schemeClr>
-                  </a:outerShdw>
-                </a:effectLst>
-              </a:rPr>
-              <a:t>đã</a:t>
+              <a:t>nghe</a:t>
             </a:r>
             <a:r>
               <a:rPr lang="en-US" sz="5400" b="1" dirty="0">
@@ -12646,45 +12849,6 @@
           <a:xfrm>
             <a:off x="187889" y="4114800"/>
             <a:ext cx="3336758" cy="2743200"/>
-          </a:xfrm>
-          <a:prstGeom prst="rect">
-            <a:avLst/>
-          </a:prstGeom>
-        </p:spPr>
-      </p:pic>
-      <p:pic>
-        <p:nvPicPr>
-          <p:cNvPr id="5" name="Graphic 4" descr="Funny face outline outline">
-            <a:extLst>
-              <a:ext uri="{FF2B5EF4-FFF2-40B4-BE49-F238E27FC236}">
-                <a16:creationId xmlns:a16="http://schemas.microsoft.com/office/drawing/2014/main" id="{C28F0BE4-B2F2-9C22-345F-88A20607EA1D}"/>
-              </a:ext>
-            </a:extLst>
-          </p:cNvPr>
-          <p:cNvPicPr>
-            <a:picLocks noChangeAspect="1"/>
-          </p:cNvPicPr>
-          <p:nvPr/>
-        </p:nvPicPr>
-        <p:blipFill>
-          <a:blip r:embed="rId4">
-            <a:extLst>
-              <a:ext uri="{28A0092B-C50C-407E-A947-70E740481C1C}">
-                <a14:useLocalDpi xmlns:a14="http://schemas.microsoft.com/office/drawing/2010/main" val="0"/>
-              </a:ext>
-              <a:ext uri="{96DAC541-7B7A-43D3-8B79-37D633B846F1}">
-                <asvg:svgBlip xmlns:asvg="http://schemas.microsoft.com/office/drawing/2016/SVG/main" r:embed="rId5"/>
-              </a:ext>
-            </a:extLst>
-          </a:blip>
-          <a:stretch>
-            <a:fillRect/>
-          </a:stretch>
-        </p:blipFill>
-        <p:spPr>
-          <a:xfrm>
-            <a:off x="6809874" y="2306229"/>
-            <a:ext cx="914400" cy="914400"/>
           </a:xfrm>
           <a:prstGeom prst="rect">
             <a:avLst/>
@@ -16826,4 +16990,299 @@
     </a:ext>
   </a:extLst>
 </a:theme>
+</file>
+
+<file path=ppt/theme/theme2.xml><?xml version="1.0" encoding="utf-8"?>
+<a:theme xmlns:a="http://schemas.openxmlformats.org/drawingml/2006/main" name="Office Theme">
+  <a:themeElements>
+    <a:clrScheme name="Office">
+      <a:dk1>
+        <a:sysClr val="windowText" lastClr="000000"/>
+      </a:dk1>
+      <a:lt1>
+        <a:sysClr val="window" lastClr="FFFFFF"/>
+      </a:lt1>
+      <a:dk2>
+        <a:srgbClr val="44546A"/>
+      </a:dk2>
+      <a:lt2>
+        <a:srgbClr val="E7E6E6"/>
+      </a:lt2>
+      <a:accent1>
+        <a:srgbClr val="4472C4"/>
+      </a:accent1>
+      <a:accent2>
+        <a:srgbClr val="ED7D31"/>
+      </a:accent2>
+      <a:accent3>
+        <a:srgbClr val="A5A5A5"/>
+      </a:accent3>
+      <a:accent4>
+        <a:srgbClr val="FFC000"/>
+      </a:accent4>
+      <a:accent5>
+        <a:srgbClr val="5B9BD5"/>
+      </a:accent5>
+      <a:accent6>
+        <a:srgbClr val="70AD47"/>
+      </a:accent6>
+      <a:hlink>
+        <a:srgbClr val="0563C1"/>
+      </a:hlink>
+      <a:folHlink>
+        <a:srgbClr val="954F72"/>
+      </a:folHlink>
+    </a:clrScheme>
+    <a:fontScheme name="Office">
+      <a:majorFont>
+        <a:latin typeface="Calibri Light" panose="020F0302020204030204"/>
+        <a:ea typeface=""/>
+        <a:cs typeface=""/>
+        <a:font script="Jpan" typeface="游ゴシック Light"/>
+        <a:font script="Hang" typeface="맑은 고딕"/>
+        <a:font script="Hans" typeface="等线 Light"/>
+        <a:font script="Hant" typeface="新細明體"/>
+        <a:font script="Arab" typeface="Times New Roman"/>
+        <a:font script="Hebr" typeface="Times New Roman"/>
+        <a:font script="Thai" typeface="Angsana New"/>
+        <a:font script="Ethi" typeface="Nyala"/>
+        <a:font script="Beng" typeface="Vrinda"/>
+        <a:font script="Gujr" typeface="Shruti"/>
+        <a:font script="Khmr" typeface="MoolBoran"/>
+        <a:font script="Knda" typeface="Tunga"/>
+        <a:font script="Guru" typeface="Raavi"/>
+        <a:font script="Cans" typeface="Euphemia"/>
+        <a:font script="Cher" typeface="Plantagenet Cherokee"/>
+        <a:font script="Yiii" typeface="Microsoft Yi Baiti"/>
+        <a:font script="Tibt" typeface="Microsoft Himalaya"/>
+        <a:font script="Thaa" typeface="MV Boli"/>
+        <a:font script="Deva" typeface="Mangal"/>
+        <a:font script="Telu" typeface="Gautami"/>
+        <a:font script="Taml" typeface="Latha"/>
+        <a:font script="Syrc" typeface="Estrangelo Edessa"/>
+        <a:font script="Orya" typeface="Kalinga"/>
+        <a:font script="Mlym" typeface="Kartika"/>
+        <a:font script="Laoo" typeface="DokChampa"/>
+        <a:font script="Sinh" typeface="Iskoola Pota"/>
+        <a:font script="Mong" typeface="Mongolian Baiti"/>
+        <a:font script="Viet" typeface="Times New Roman"/>
+        <a:font script="Uigh" typeface="Microsoft Uighur"/>
+        <a:font script="Geor" typeface="Sylfaen"/>
+        <a:font script="Armn" typeface="Arial"/>
+        <a:font script="Bugi" typeface="Leelawadee UI"/>
+        <a:font script="Bopo" typeface="Microsoft JhengHei"/>
+        <a:font script="Java" typeface="Javanese Text"/>
+        <a:font script="Lisu" typeface="Segoe UI"/>
+        <a:font script="Mymr" typeface="Myanmar Text"/>
+        <a:font script="Nkoo" typeface="Ebrima"/>
+        <a:font script="Olck" typeface="Nirmala UI"/>
+        <a:font script="Osma" typeface="Ebrima"/>
+        <a:font script="Phag" typeface="Phagspa"/>
+        <a:font script="Syrn" typeface="Estrangelo Edessa"/>
+        <a:font script="Syrj" typeface="Estrangelo Edessa"/>
+        <a:font script="Syre" typeface="Estrangelo Edessa"/>
+        <a:font script="Sora" typeface="Nirmala UI"/>
+        <a:font script="Tale" typeface="Microsoft Tai Le"/>
+        <a:font script="Talu" typeface="Microsoft New Tai Lue"/>
+        <a:font script="Tfng" typeface="Ebrima"/>
+      </a:majorFont>
+      <a:minorFont>
+        <a:latin typeface="Calibri" panose="020F0502020204030204"/>
+        <a:ea typeface=""/>
+        <a:cs typeface=""/>
+        <a:font script="Jpan" typeface="游ゴシック"/>
+        <a:font script="Hang" typeface="맑은 고딕"/>
+        <a:font script="Hans" typeface="等线"/>
+        <a:font script="Hant" typeface="新細明體"/>
+        <a:font script="Arab" typeface="Arial"/>
+        <a:font script="Hebr" typeface="Arial"/>
+        <a:font script="Thai" typeface="Cordia New"/>
+        <a:font script="Ethi" typeface="Nyala"/>
+        <a:font script="Beng" typeface="Vrinda"/>
+        <a:font script="Gujr" typeface="Shruti"/>
+        <a:font script="Khmr" typeface="DaunPenh"/>
+        <a:font script="Knda" typeface="Tunga"/>
+        <a:font script="Guru" typeface="Raavi"/>
+        <a:font script="Cans" typeface="Euphemia"/>
+        <a:font script="Cher" typeface="Plantagenet Cherokee"/>
+        <a:font script="Yiii" typeface="Microsoft Yi Baiti"/>
+        <a:font script="Tibt" typeface="Microsoft Himalaya"/>
+        <a:font script="Thaa" typeface="MV Boli"/>
+        <a:font script="Deva" typeface="Mangal"/>
+        <a:font script="Telu" typeface="Gautami"/>
+        <a:font script="Taml" typeface="Latha"/>
+        <a:font script="Syrc" typeface="Estrangelo Edessa"/>
+        <a:font script="Orya" typeface="Kalinga"/>
+        <a:font script="Mlym" typeface="Kartika"/>
+        <a:font script="Laoo" typeface="DokChampa"/>
+        <a:font script="Sinh" typeface="Iskoola Pota"/>
+        <a:font script="Mong" typeface="Mongolian Baiti"/>
+        <a:font script="Viet" typeface="Arial"/>
+        <a:font script="Uigh" typeface="Microsoft Uighur"/>
+        <a:font script="Geor" typeface="Sylfaen"/>
+        <a:font script="Armn" typeface="Arial"/>
+        <a:font script="Bugi" typeface="Leelawadee UI"/>
+        <a:font script="Bopo" typeface="Microsoft JhengHei"/>
+        <a:font script="Java" typeface="Javanese Text"/>
+        <a:font script="Lisu" typeface="Segoe UI"/>
+        <a:font script="Mymr" typeface="Myanmar Text"/>
+        <a:font script="Nkoo" typeface="Ebrima"/>
+        <a:font script="Olck" typeface="Nirmala UI"/>
+        <a:font script="Osma" typeface="Ebrima"/>
+        <a:font script="Phag" typeface="Phagspa"/>
+        <a:font script="Syrn" typeface="Estrangelo Edessa"/>
+        <a:font script="Syrj" typeface="Estrangelo Edessa"/>
+        <a:font script="Syre" typeface="Estrangelo Edessa"/>
+        <a:font script="Sora" typeface="Nirmala UI"/>
+        <a:font script="Tale" typeface="Microsoft Tai Le"/>
+        <a:font script="Talu" typeface="Microsoft New Tai Lue"/>
+        <a:font script="Tfng" typeface="Ebrima"/>
+      </a:minorFont>
+    </a:fontScheme>
+    <a:fmtScheme name="Office">
+      <a:fillStyleLst>
+        <a:solidFill>
+          <a:schemeClr val="phClr"/>
+        </a:solidFill>
+        <a:gradFill rotWithShape="1">
+          <a:gsLst>
+            <a:gs pos="0">
+              <a:schemeClr val="phClr">
+                <a:lumMod val="110000"/>
+                <a:satMod val="105000"/>
+                <a:tint val="67000"/>
+              </a:schemeClr>
+            </a:gs>
+            <a:gs pos="50000">
+              <a:schemeClr val="phClr">
+                <a:lumMod val="105000"/>
+                <a:satMod val="103000"/>
+                <a:tint val="73000"/>
+              </a:schemeClr>
+            </a:gs>
+            <a:gs pos="100000">
+              <a:schemeClr val="phClr">
+                <a:lumMod val="105000"/>
+                <a:satMod val="109000"/>
+                <a:tint val="81000"/>
+              </a:schemeClr>
+            </a:gs>
+          </a:gsLst>
+          <a:lin ang="5400000" scaled="0"/>
+        </a:gradFill>
+        <a:gradFill rotWithShape="1">
+          <a:gsLst>
+            <a:gs pos="0">
+              <a:schemeClr val="phClr">
+                <a:satMod val="103000"/>
+                <a:lumMod val="102000"/>
+                <a:tint val="94000"/>
+              </a:schemeClr>
+            </a:gs>
+            <a:gs pos="50000">
+              <a:schemeClr val="phClr">
+                <a:satMod val="110000"/>
+                <a:lumMod val="100000"/>
+                <a:shade val="100000"/>
+              </a:schemeClr>
+            </a:gs>
+            <a:gs pos="100000">
+              <a:schemeClr val="phClr">
+                <a:lumMod val="99000"/>
+                <a:satMod val="120000"/>
+                <a:shade val="78000"/>
+              </a:schemeClr>
+            </a:gs>
+          </a:gsLst>
+          <a:lin ang="5400000" scaled="0"/>
+        </a:gradFill>
+      </a:fillStyleLst>
+      <a:lnStyleLst>
+        <a:ln w="6350" cap="flat" cmpd="sng" algn="ctr">
+          <a:solidFill>
+            <a:schemeClr val="phClr"/>
+          </a:solidFill>
+          <a:prstDash val="solid"/>
+          <a:miter lim="800000"/>
+        </a:ln>
+        <a:ln w="12700" cap="flat" cmpd="sng" algn="ctr">
+          <a:solidFill>
+            <a:schemeClr val="phClr"/>
+          </a:solidFill>
+          <a:prstDash val="solid"/>
+          <a:miter lim="800000"/>
+        </a:ln>
+        <a:ln w="19050" cap="flat" cmpd="sng" algn="ctr">
+          <a:solidFill>
+            <a:schemeClr val="phClr"/>
+          </a:solidFill>
+          <a:prstDash val="solid"/>
+          <a:miter lim="800000"/>
+        </a:ln>
+      </a:lnStyleLst>
+      <a:effectStyleLst>
+        <a:effectStyle>
+          <a:effectLst/>
+        </a:effectStyle>
+        <a:effectStyle>
+          <a:effectLst/>
+        </a:effectStyle>
+        <a:effectStyle>
+          <a:effectLst>
+            <a:outerShdw blurRad="57150" dist="19050" dir="5400000" algn="ctr" rotWithShape="0">
+              <a:srgbClr val="000000">
+                <a:alpha val="63000"/>
+              </a:srgbClr>
+            </a:outerShdw>
+          </a:effectLst>
+        </a:effectStyle>
+      </a:effectStyleLst>
+      <a:bgFillStyleLst>
+        <a:solidFill>
+          <a:schemeClr val="phClr"/>
+        </a:solidFill>
+        <a:solidFill>
+          <a:schemeClr val="phClr">
+            <a:tint val="95000"/>
+            <a:satMod val="170000"/>
+          </a:schemeClr>
+        </a:solidFill>
+        <a:gradFill rotWithShape="1">
+          <a:gsLst>
+            <a:gs pos="0">
+              <a:schemeClr val="phClr">
+                <a:tint val="93000"/>
+                <a:satMod val="150000"/>
+                <a:shade val="98000"/>
+                <a:lumMod val="102000"/>
+              </a:schemeClr>
+            </a:gs>
+            <a:gs pos="50000">
+              <a:schemeClr val="phClr">
+                <a:tint val="98000"/>
+                <a:satMod val="130000"/>
+                <a:shade val="90000"/>
+                <a:lumMod val="103000"/>
+              </a:schemeClr>
+            </a:gs>
+            <a:gs pos="100000">
+              <a:schemeClr val="phClr">
+                <a:shade val="63000"/>
+                <a:satMod val="120000"/>
+              </a:schemeClr>
+            </a:gs>
+          </a:gsLst>
+          <a:lin ang="5400000" scaled="0"/>
+        </a:gradFill>
+      </a:bgFillStyleLst>
+    </a:fmtScheme>
+  </a:themeElements>
+  <a:objectDefaults/>
+  <a:extraClrSchemeLst/>
+  <a:extLst>
+    <a:ext uri="{05A4C25C-085E-4340-85A3-A5531E510DB2}">
+      <thm15:themeFamily xmlns:thm15="http://schemas.microsoft.com/office/thememl/2012/main" name="Office Theme" id="{62F939B6-93AF-4DB8-9C6B-D6C7DFDC589F}" vid="{4A3C46E8-61CC-4603-A589-7422A47A8E4A}"/>
+    </a:ext>
+  </a:extLst>
+</a:theme>
 </file>
--- a/Đồ án CNPM.pptx
+++ b/Đồ án CNPM.pptx
@@ -5,29 +5,31 @@
     <p:sldMasterId id="2147483747" r:id="rId1"/>
   </p:sldMasterIdLst>
   <p:notesMasterIdLst>
-    <p:notesMasterId r:id="rId22"/>
+    <p:notesMasterId r:id="rId24"/>
   </p:notesMasterIdLst>
   <p:sldIdLst>
-    <p:sldId id="256" r:id="rId2"/>
-    <p:sldId id="283" r:id="rId3"/>
-    <p:sldId id="284" r:id="rId4"/>
-    <p:sldId id="285" r:id="rId5"/>
-    <p:sldId id="286" r:id="rId6"/>
-    <p:sldId id="280" r:id="rId7"/>
-    <p:sldId id="282" r:id="rId8"/>
-    <p:sldId id="287" r:id="rId9"/>
-    <p:sldId id="288" r:id="rId10"/>
-    <p:sldId id="289" r:id="rId11"/>
-    <p:sldId id="290" r:id="rId12"/>
-    <p:sldId id="291" r:id="rId13"/>
-    <p:sldId id="292" r:id="rId14"/>
-    <p:sldId id="293" r:id="rId15"/>
-    <p:sldId id="294" r:id="rId16"/>
-    <p:sldId id="295" r:id="rId17"/>
-    <p:sldId id="296" r:id="rId18"/>
-    <p:sldId id="297" r:id="rId19"/>
-    <p:sldId id="298" r:id="rId20"/>
-    <p:sldId id="276" r:id="rId21"/>
+    <p:sldId id="299" r:id="rId2"/>
+    <p:sldId id="256" r:id="rId3"/>
+    <p:sldId id="283" r:id="rId4"/>
+    <p:sldId id="300" r:id="rId5"/>
+    <p:sldId id="284" r:id="rId6"/>
+    <p:sldId id="285" r:id="rId7"/>
+    <p:sldId id="286" r:id="rId8"/>
+    <p:sldId id="280" r:id="rId9"/>
+    <p:sldId id="282" r:id="rId10"/>
+    <p:sldId id="287" r:id="rId11"/>
+    <p:sldId id="288" r:id="rId12"/>
+    <p:sldId id="289" r:id="rId13"/>
+    <p:sldId id="290" r:id="rId14"/>
+    <p:sldId id="291" r:id="rId15"/>
+    <p:sldId id="292" r:id="rId16"/>
+    <p:sldId id="293" r:id="rId17"/>
+    <p:sldId id="294" r:id="rId18"/>
+    <p:sldId id="295" r:id="rId19"/>
+    <p:sldId id="296" r:id="rId20"/>
+    <p:sldId id="297" r:id="rId21"/>
+    <p:sldId id="298" r:id="rId22"/>
+    <p:sldId id="276" r:id="rId23"/>
   </p:sldIdLst>
   <p:sldSz cx="12192000" cy="6858000"/>
   <p:notesSz cx="6858000" cy="9144000"/>
@@ -548,7 +550,7 @@
           <a:p>
             <a:fld id="{DA3E269C-331D-4D4A-86B1-762EFD9D9488}" type="slidenum">
               <a:rPr lang="en-US" smtClean="0"/>
-              <a:t>1</a:t>
+              <a:t>2</a:t>
             </a:fld>
             <a:endParaRPr lang="en-US"/>
           </a:p>
@@ -6286,562 +6288,20 @@
       </p:grpSpPr>
       <p:sp>
         <p:nvSpPr>
-          <p:cNvPr id="3" name="Subtitle 2"/>
-          <p:cNvSpPr>
-            <a:spLocks noGrp="1"/>
-          </p:cNvSpPr>
-          <p:nvPr>
-            <p:ph type="subTitle" idx="1"/>
-          </p:nvPr>
-        </p:nvSpPr>
-        <p:spPr>
-          <a:xfrm>
-            <a:off x="1883986" y="2646531"/>
-            <a:ext cx="7465101" cy="3634868"/>
-          </a:xfrm>
-        </p:spPr>
-        <p:txBody>
-          <a:bodyPr>
-            <a:noAutofit/>
-          </a:bodyPr>
-          <a:lstStyle/>
-          <a:p>
-            <a:pPr algn="l"/>
-            <a:r>
-              <a:rPr lang="en-US" sz="2500" b="1" dirty="0">
-                <a:solidFill>
-                  <a:schemeClr val="tx1">
-                    <a:lumMod val="95000"/>
-                    <a:lumOff val="5000"/>
-                  </a:schemeClr>
-                </a:solidFill>
-                <a:latin typeface="Times New Roman" panose="02020603050405020304" pitchFamily="18" charset="0"/>
-                <a:cs typeface="Times New Roman" panose="02020603050405020304" pitchFamily="18" charset="0"/>
-              </a:rPr>
-              <a:t>GV: </a:t>
-            </a:r>
-            <a:r>
-              <a:rPr lang="en-US" sz="2500" b="1" dirty="0" err="1">
-                <a:solidFill>
-                  <a:schemeClr val="tx1">
-                    <a:lumMod val="95000"/>
-                    <a:lumOff val="5000"/>
-                  </a:schemeClr>
-                </a:solidFill>
-                <a:latin typeface="Times New Roman" panose="02020603050405020304" pitchFamily="18" charset="0"/>
-                <a:cs typeface="Times New Roman" panose="02020603050405020304" pitchFamily="18" charset="0"/>
-              </a:rPr>
-              <a:t>Thầy</a:t>
-            </a:r>
-            <a:r>
-              <a:rPr lang="en-US" sz="2500" b="1" dirty="0">
-                <a:solidFill>
-                  <a:schemeClr val="tx1">
-                    <a:lumMod val="95000"/>
-                    <a:lumOff val="5000"/>
-                  </a:schemeClr>
-                </a:solidFill>
-                <a:latin typeface="Times New Roman" panose="02020603050405020304" pitchFamily="18" charset="0"/>
-                <a:cs typeface="Times New Roman" panose="02020603050405020304" pitchFamily="18" charset="0"/>
-              </a:rPr>
-              <a:t> </a:t>
-            </a:r>
-            <a:r>
-              <a:rPr lang="en-US" sz="2500" b="1" dirty="0" err="1">
-                <a:solidFill>
-                  <a:schemeClr val="tx1">
-                    <a:lumMod val="95000"/>
-                    <a:lumOff val="5000"/>
-                  </a:schemeClr>
-                </a:solidFill>
-                <a:latin typeface="Times New Roman" panose="02020603050405020304" pitchFamily="18" charset="0"/>
-                <a:cs typeface="Times New Roman" panose="02020603050405020304" pitchFamily="18" charset="0"/>
-              </a:rPr>
-              <a:t>Trần</a:t>
-            </a:r>
-            <a:r>
-              <a:rPr lang="en-US" sz="2500" b="1" dirty="0">
-                <a:solidFill>
-                  <a:schemeClr val="tx1">
-                    <a:lumMod val="95000"/>
-                    <a:lumOff val="5000"/>
-                  </a:schemeClr>
-                </a:solidFill>
-                <a:latin typeface="Times New Roman" panose="02020603050405020304" pitchFamily="18" charset="0"/>
-                <a:cs typeface="Times New Roman" panose="02020603050405020304" pitchFamily="18" charset="0"/>
-              </a:rPr>
-              <a:t> Thanh </a:t>
-            </a:r>
-            <a:r>
-              <a:rPr lang="en-US" sz="2500" b="1" dirty="0" err="1">
-                <a:solidFill>
-                  <a:schemeClr val="tx1">
-                    <a:lumMod val="95000"/>
-                    <a:lumOff val="5000"/>
-                  </a:schemeClr>
-                </a:solidFill>
-                <a:latin typeface="Times New Roman" panose="02020603050405020304" pitchFamily="18" charset="0"/>
-                <a:cs typeface="Times New Roman" panose="02020603050405020304" pitchFamily="18" charset="0"/>
-              </a:rPr>
-              <a:t>Nhã</a:t>
-            </a:r>
-            <a:endParaRPr lang="en-US" sz="2500" b="1" dirty="0">
-              <a:solidFill>
-                <a:schemeClr val="tx1">
-                  <a:lumMod val="95000"/>
-                  <a:lumOff val="5000"/>
-                </a:schemeClr>
-              </a:solidFill>
-              <a:latin typeface="Times New Roman" panose="02020603050405020304" pitchFamily="18" charset="0"/>
-              <a:cs typeface="Times New Roman" panose="02020603050405020304" pitchFamily="18" charset="0"/>
-            </a:endParaRPr>
-          </a:p>
-          <a:p>
-            <a:pPr algn="l"/>
-            <a:r>
-              <a:rPr lang="en-US" sz="2500" b="1" dirty="0">
-                <a:solidFill>
-                  <a:schemeClr val="tx1">
-                    <a:lumMod val="95000"/>
-                    <a:lumOff val="5000"/>
-                  </a:schemeClr>
-                </a:solidFill>
-                <a:latin typeface="Times New Roman" panose="02020603050405020304" pitchFamily="18" charset="0"/>
-                <a:cs typeface="Times New Roman" panose="02020603050405020304" pitchFamily="18" charset="0"/>
-              </a:rPr>
-              <a:t>Thành </a:t>
-            </a:r>
-            <a:r>
-              <a:rPr lang="en-US" sz="2500" b="1" dirty="0" err="1">
-                <a:solidFill>
-                  <a:schemeClr val="tx1">
-                    <a:lumMod val="95000"/>
-                    <a:lumOff val="5000"/>
-                  </a:schemeClr>
-                </a:solidFill>
-                <a:latin typeface="Times New Roman" panose="02020603050405020304" pitchFamily="18" charset="0"/>
-                <a:cs typeface="Times New Roman" panose="02020603050405020304" pitchFamily="18" charset="0"/>
-              </a:rPr>
-              <a:t>viên</a:t>
-            </a:r>
-            <a:r>
-              <a:rPr lang="en-US" sz="2500" b="1" dirty="0">
-                <a:solidFill>
-                  <a:schemeClr val="tx1">
-                    <a:lumMod val="95000"/>
-                    <a:lumOff val="5000"/>
-                  </a:schemeClr>
-                </a:solidFill>
-                <a:latin typeface="Times New Roman" panose="02020603050405020304" pitchFamily="18" charset="0"/>
-                <a:cs typeface="Times New Roman" panose="02020603050405020304" pitchFamily="18" charset="0"/>
-              </a:rPr>
-              <a:t>: </a:t>
-            </a:r>
-          </a:p>
-          <a:p>
-            <a:pPr algn="l"/>
-            <a:r>
-              <a:rPr lang="en-US" sz="2500" b="1" dirty="0">
-                <a:solidFill>
-                  <a:schemeClr val="tx1">
-                    <a:lumMod val="95000"/>
-                    <a:lumOff val="5000"/>
-                  </a:schemeClr>
-                </a:solidFill>
-                <a:latin typeface="Times New Roman" panose="02020603050405020304" pitchFamily="18" charset="0"/>
-                <a:cs typeface="Times New Roman" panose="02020603050405020304" pitchFamily="18" charset="0"/>
-              </a:rPr>
-              <a:t>- </a:t>
-            </a:r>
-            <a:r>
-              <a:rPr lang="en-US" sz="2500" b="1" dirty="0" err="1">
-                <a:solidFill>
-                  <a:schemeClr val="tx1">
-                    <a:lumMod val="95000"/>
-                    <a:lumOff val="5000"/>
-                  </a:schemeClr>
-                </a:solidFill>
-                <a:latin typeface="Times New Roman" panose="02020603050405020304" pitchFamily="18" charset="0"/>
-                <a:cs typeface="Times New Roman" panose="02020603050405020304" pitchFamily="18" charset="0"/>
-              </a:rPr>
-              <a:t>Đặng</a:t>
-            </a:r>
-            <a:r>
-              <a:rPr lang="en-US" sz="2500" b="1" dirty="0">
-                <a:solidFill>
-                  <a:schemeClr val="tx1">
-                    <a:lumMod val="95000"/>
-                    <a:lumOff val="5000"/>
-                  </a:schemeClr>
-                </a:solidFill>
-                <a:latin typeface="Times New Roman" panose="02020603050405020304" pitchFamily="18" charset="0"/>
-                <a:cs typeface="Times New Roman" panose="02020603050405020304" pitchFamily="18" charset="0"/>
-              </a:rPr>
-              <a:t> Minh </a:t>
-            </a:r>
-            <a:r>
-              <a:rPr lang="en-US" sz="2500" b="1" dirty="0" err="1">
-                <a:solidFill>
-                  <a:schemeClr val="tx1"/>
-                </a:solidFill>
-                <a:latin typeface="Times New Roman" panose="02020603050405020304" pitchFamily="18" charset="0"/>
-                <a:cs typeface="Times New Roman" panose="02020603050405020304" pitchFamily="18" charset="0"/>
-              </a:rPr>
-              <a:t>Nghĩa</a:t>
-            </a:r>
-            <a:r>
-              <a:rPr lang="en-US" sz="2500" b="1" dirty="0">
-                <a:solidFill>
-                  <a:schemeClr val="tx1"/>
-                </a:solidFill>
-                <a:latin typeface="Times New Roman" panose="02020603050405020304" pitchFamily="18" charset="0"/>
-                <a:cs typeface="Times New Roman" panose="02020603050405020304" pitchFamily="18" charset="0"/>
-              </a:rPr>
-              <a:t>  - </a:t>
-            </a:r>
-            <a:r>
-              <a:rPr lang="en-US" b="1" dirty="0">
-                <a:solidFill>
-                  <a:schemeClr val="tx1"/>
-                </a:solidFill>
-              </a:rPr>
-              <a:t>DH52111357</a:t>
-            </a:r>
-            <a:endParaRPr lang="en-US" sz="2500" b="1" dirty="0">
-              <a:solidFill>
-                <a:schemeClr val="tx1"/>
-              </a:solidFill>
-              <a:latin typeface="Times New Roman" panose="02020603050405020304" pitchFamily="18" charset="0"/>
-              <a:cs typeface="Times New Roman" panose="02020603050405020304" pitchFamily="18" charset="0"/>
-            </a:endParaRPr>
-          </a:p>
-          <a:p>
-            <a:pPr algn="l"/>
-            <a:r>
-              <a:rPr lang="en-US" sz="2500" b="1" dirty="0">
-                <a:solidFill>
-                  <a:schemeClr val="tx1">
-                    <a:lumMod val="95000"/>
-                    <a:lumOff val="5000"/>
-                  </a:schemeClr>
-                </a:solidFill>
-                <a:latin typeface="Times New Roman" panose="02020603050405020304" pitchFamily="18" charset="0"/>
-                <a:cs typeface="Times New Roman" panose="02020603050405020304" pitchFamily="18" charset="0"/>
-              </a:rPr>
-              <a:t>- </a:t>
-            </a:r>
-            <a:r>
-              <a:rPr lang="en-US" sz="2500" b="1" dirty="0" err="1">
-                <a:solidFill>
-                  <a:schemeClr val="tx1">
-                    <a:lumMod val="95000"/>
-                    <a:lumOff val="5000"/>
-                  </a:schemeClr>
-                </a:solidFill>
-                <a:latin typeface="Times New Roman" panose="02020603050405020304" pitchFamily="18" charset="0"/>
-                <a:cs typeface="Times New Roman" panose="02020603050405020304" pitchFamily="18" charset="0"/>
-              </a:rPr>
-              <a:t>Nguyễn</a:t>
-            </a:r>
-            <a:r>
-              <a:rPr lang="en-US" sz="2500" b="1" dirty="0">
-                <a:solidFill>
-                  <a:schemeClr val="tx1">
-                    <a:lumMod val="95000"/>
-                    <a:lumOff val="5000"/>
-                  </a:schemeClr>
-                </a:solidFill>
-                <a:latin typeface="Times New Roman" panose="02020603050405020304" pitchFamily="18" charset="0"/>
-                <a:cs typeface="Times New Roman" panose="02020603050405020304" pitchFamily="18" charset="0"/>
-              </a:rPr>
-              <a:t> Chí </a:t>
-            </a:r>
-            <a:r>
-              <a:rPr lang="en-US" sz="2500" b="1" dirty="0" err="1">
-                <a:solidFill>
-                  <a:schemeClr val="tx1">
-                    <a:lumMod val="95000"/>
-                    <a:lumOff val="5000"/>
-                  </a:schemeClr>
-                </a:solidFill>
-                <a:latin typeface="Times New Roman" panose="02020603050405020304" pitchFamily="18" charset="0"/>
-                <a:cs typeface="Times New Roman" panose="02020603050405020304" pitchFamily="18" charset="0"/>
-              </a:rPr>
-              <a:t>Đức</a:t>
-            </a:r>
-            <a:r>
-              <a:rPr lang="en-US" sz="2500" b="1" dirty="0">
-                <a:solidFill>
-                  <a:schemeClr val="tx1">
-                    <a:lumMod val="95000"/>
-                    <a:lumOff val="5000"/>
-                  </a:schemeClr>
-                </a:solidFill>
-                <a:latin typeface="Times New Roman" panose="02020603050405020304" pitchFamily="18" charset="0"/>
-                <a:cs typeface="Times New Roman" panose="02020603050405020304" pitchFamily="18" charset="0"/>
-              </a:rPr>
-              <a:t>	- </a:t>
-            </a:r>
-            <a:r>
-              <a:rPr lang="en-US" b="1" dirty="0">
-                <a:solidFill>
-                  <a:schemeClr val="tx1"/>
-                </a:solidFill>
-              </a:rPr>
-              <a:t>DH52110821</a:t>
-            </a:r>
-            <a:endParaRPr lang="en-US" sz="2500" b="1" dirty="0">
-              <a:solidFill>
-                <a:schemeClr val="tx1"/>
-              </a:solidFill>
-              <a:latin typeface="Times New Roman" panose="02020603050405020304" pitchFamily="18" charset="0"/>
-              <a:cs typeface="Times New Roman" panose="02020603050405020304" pitchFamily="18" charset="0"/>
-            </a:endParaRPr>
-          </a:p>
-          <a:p>
-            <a:pPr algn="l"/>
-            <a:r>
-              <a:rPr lang="en-US" sz="2500" b="1" dirty="0">
-                <a:solidFill>
-                  <a:schemeClr val="tx1">
-                    <a:lumMod val="95000"/>
-                    <a:lumOff val="5000"/>
-                  </a:schemeClr>
-                </a:solidFill>
-                <a:latin typeface="Times New Roman" panose="02020603050405020304" pitchFamily="18" charset="0"/>
-                <a:cs typeface="Times New Roman" panose="02020603050405020304" pitchFamily="18" charset="0"/>
-              </a:rPr>
-              <a:t>- </a:t>
-            </a:r>
-            <a:r>
-              <a:rPr lang="en-US" sz="2500" b="1" dirty="0" err="1">
-                <a:solidFill>
-                  <a:schemeClr val="tx1">
-                    <a:lumMod val="95000"/>
-                    <a:lumOff val="5000"/>
-                  </a:schemeClr>
-                </a:solidFill>
-                <a:latin typeface="Times New Roman" panose="02020603050405020304" pitchFamily="18" charset="0"/>
-                <a:cs typeface="Times New Roman" panose="02020603050405020304" pitchFamily="18" charset="0"/>
-              </a:rPr>
-              <a:t>Nguyễn</a:t>
-            </a:r>
-            <a:r>
-              <a:rPr lang="en-US" sz="2500" b="1" dirty="0">
-                <a:solidFill>
-                  <a:schemeClr val="tx1">
-                    <a:lumMod val="95000"/>
-                    <a:lumOff val="5000"/>
-                  </a:schemeClr>
-                </a:solidFill>
-                <a:latin typeface="Times New Roman" panose="02020603050405020304" pitchFamily="18" charset="0"/>
-                <a:cs typeface="Times New Roman" panose="02020603050405020304" pitchFamily="18" charset="0"/>
-              </a:rPr>
-              <a:t> </a:t>
-            </a:r>
-            <a:r>
-              <a:rPr lang="en-US" sz="2500" b="1" dirty="0" err="1">
-                <a:solidFill>
-                  <a:schemeClr val="tx1">
-                    <a:lumMod val="95000"/>
-                    <a:lumOff val="5000"/>
-                  </a:schemeClr>
-                </a:solidFill>
-                <a:latin typeface="Times New Roman" panose="02020603050405020304" pitchFamily="18" charset="0"/>
-                <a:cs typeface="Times New Roman" panose="02020603050405020304" pitchFamily="18" charset="0"/>
-              </a:rPr>
-              <a:t>Ái</a:t>
-            </a:r>
-            <a:r>
-              <a:rPr lang="en-US" sz="2500" b="1" dirty="0">
-                <a:solidFill>
-                  <a:schemeClr val="tx1">
-                    <a:lumMod val="95000"/>
-                    <a:lumOff val="5000"/>
-                  </a:schemeClr>
-                </a:solidFill>
-                <a:latin typeface="Times New Roman" panose="02020603050405020304" pitchFamily="18" charset="0"/>
-                <a:cs typeface="Times New Roman" panose="02020603050405020304" pitchFamily="18" charset="0"/>
-              </a:rPr>
-              <a:t> </a:t>
-            </a:r>
-            <a:r>
-              <a:rPr lang="en-US" sz="2500" b="1" dirty="0" err="1">
-                <a:solidFill>
-                  <a:schemeClr val="tx1">
-                    <a:lumMod val="95000"/>
-                    <a:lumOff val="5000"/>
-                  </a:schemeClr>
-                </a:solidFill>
-                <a:latin typeface="Times New Roman" panose="02020603050405020304" pitchFamily="18" charset="0"/>
-                <a:cs typeface="Times New Roman" panose="02020603050405020304" pitchFamily="18" charset="0"/>
-              </a:rPr>
-              <a:t>Thiềm</a:t>
-            </a:r>
-            <a:r>
-              <a:rPr lang="en-US" sz="2500" b="1" dirty="0">
-                <a:solidFill>
-                  <a:schemeClr val="tx1">
-                    <a:lumMod val="95000"/>
-                    <a:lumOff val="5000"/>
-                  </a:schemeClr>
-                </a:solidFill>
-                <a:latin typeface="Times New Roman" panose="02020603050405020304" pitchFamily="18" charset="0"/>
-                <a:cs typeface="Times New Roman" panose="02020603050405020304" pitchFamily="18" charset="0"/>
-              </a:rPr>
-              <a:t> </a:t>
-            </a:r>
-            <a:r>
-              <a:rPr lang="en-US" sz="2500" b="1" dirty="0" err="1">
-                <a:solidFill>
-                  <a:schemeClr val="tx1">
-                    <a:lumMod val="95000"/>
-                    <a:lumOff val="5000"/>
-                  </a:schemeClr>
-                </a:solidFill>
-                <a:latin typeface="Times New Roman" panose="02020603050405020304" pitchFamily="18" charset="0"/>
-                <a:cs typeface="Times New Roman" panose="02020603050405020304" pitchFamily="18" charset="0"/>
-              </a:rPr>
-              <a:t>Định</a:t>
-            </a:r>
-            <a:r>
-              <a:rPr lang="en-US" sz="2500" b="1" dirty="0">
-                <a:solidFill>
-                  <a:schemeClr val="tx1">
-                    <a:lumMod val="95000"/>
-                    <a:lumOff val="5000"/>
-                  </a:schemeClr>
-                </a:solidFill>
-                <a:latin typeface="Times New Roman" panose="02020603050405020304" pitchFamily="18" charset="0"/>
-                <a:cs typeface="Times New Roman" panose="02020603050405020304" pitchFamily="18" charset="0"/>
-              </a:rPr>
-              <a:t> </a:t>
-            </a:r>
-            <a:r>
-              <a:rPr lang="en-US" b="1" dirty="0"/>
-              <a:t>– </a:t>
-            </a:r>
-            <a:r>
-              <a:rPr lang="en-US" b="1" dirty="0">
-                <a:solidFill>
-                  <a:schemeClr val="tx1"/>
-                </a:solidFill>
-              </a:rPr>
-              <a:t>DH52110805</a:t>
-            </a:r>
-            <a:endParaRPr lang="en-US" sz="2500" b="1" dirty="0">
-              <a:solidFill>
-                <a:schemeClr val="tx1"/>
-              </a:solidFill>
-              <a:latin typeface="Times New Roman" panose="02020603050405020304" pitchFamily="18" charset="0"/>
-              <a:cs typeface="Times New Roman" panose="02020603050405020304" pitchFamily="18" charset="0"/>
-            </a:endParaRPr>
-          </a:p>
-          <a:p>
-            <a:pPr algn="l"/>
-            <a:r>
-              <a:rPr lang="en-US" sz="2500" b="1" dirty="0">
-                <a:solidFill>
-                  <a:schemeClr val="tx1"/>
-                </a:solidFill>
-                <a:latin typeface="Times New Roman" panose="02020603050405020304" pitchFamily="18" charset="0"/>
-                <a:cs typeface="Times New Roman" panose="02020603050405020304" pitchFamily="18" charset="0"/>
-              </a:rPr>
-              <a:t>- </a:t>
-            </a:r>
-            <a:r>
-              <a:rPr lang="en-US" sz="2500" b="1" dirty="0" err="1">
-                <a:solidFill>
-                  <a:schemeClr val="tx1"/>
-                </a:solidFill>
-                <a:latin typeface="Times New Roman" panose="02020603050405020304" pitchFamily="18" charset="0"/>
-                <a:cs typeface="Times New Roman" panose="02020603050405020304" pitchFamily="18" charset="0"/>
-              </a:rPr>
-              <a:t>Trương</a:t>
-            </a:r>
-            <a:r>
-              <a:rPr lang="en-US" sz="2500" b="1" dirty="0">
-                <a:solidFill>
-                  <a:schemeClr val="tx1"/>
-                </a:solidFill>
-                <a:latin typeface="Times New Roman" panose="02020603050405020304" pitchFamily="18" charset="0"/>
-                <a:cs typeface="Times New Roman" panose="02020603050405020304" pitchFamily="18" charset="0"/>
-              </a:rPr>
-              <a:t> Quang Phát-</a:t>
-            </a:r>
-            <a:r>
-              <a:rPr lang="en-US" b="1" dirty="0">
-                <a:solidFill>
-                  <a:schemeClr val="tx1"/>
-                </a:solidFill>
-              </a:rPr>
-              <a:t>DH52111481</a:t>
-            </a:r>
-          </a:p>
-          <a:p>
-            <a:pPr algn="l"/>
-            <a:endParaRPr lang="en-US" sz="2500" b="1" dirty="0">
-              <a:solidFill>
-                <a:schemeClr val="tx1">
-                  <a:lumMod val="95000"/>
-                  <a:lumOff val="5000"/>
-                </a:schemeClr>
-              </a:solidFill>
-              <a:latin typeface="Times New Roman" panose="02020603050405020304" pitchFamily="18" charset="0"/>
-              <a:cs typeface="Times New Roman" panose="02020603050405020304" pitchFamily="18" charset="0"/>
-            </a:endParaRPr>
-          </a:p>
-          <a:p>
-            <a:pPr algn="l"/>
-            <a:r>
-              <a:rPr lang="en-US" sz="2500" b="1" dirty="0" err="1">
-                <a:solidFill>
-                  <a:schemeClr val="tx1">
-                    <a:lumMod val="95000"/>
-                    <a:lumOff val="5000"/>
-                  </a:schemeClr>
-                </a:solidFill>
-                <a:latin typeface="Times New Roman" panose="02020603050405020304" pitchFamily="18" charset="0"/>
-                <a:cs typeface="Times New Roman" panose="02020603050405020304" pitchFamily="18" charset="0"/>
-              </a:rPr>
-              <a:t>Lớp</a:t>
-            </a:r>
-            <a:r>
-              <a:rPr lang="en-US" sz="2500" b="1" dirty="0">
-                <a:solidFill>
-                  <a:schemeClr val="tx1">
-                    <a:lumMod val="95000"/>
-                    <a:lumOff val="5000"/>
-                  </a:schemeClr>
-                </a:solidFill>
-                <a:latin typeface="Times New Roman" panose="02020603050405020304" pitchFamily="18" charset="0"/>
-                <a:cs typeface="Times New Roman" panose="02020603050405020304" pitchFamily="18" charset="0"/>
-              </a:rPr>
-              <a:t>: D21_TH09 </a:t>
-            </a:r>
-            <a:endParaRPr lang="en-US" sz="2500" dirty="0">
-              <a:solidFill>
-                <a:schemeClr val="tx1">
-                  <a:lumMod val="95000"/>
-                  <a:lumOff val="5000"/>
-                </a:schemeClr>
-              </a:solidFill>
-              <a:latin typeface="Times New Roman" panose="02020603050405020304" pitchFamily="18" charset="0"/>
-              <a:cs typeface="Times New Roman" panose="02020603050405020304" pitchFamily="18" charset="0"/>
-            </a:endParaRPr>
-          </a:p>
-        </p:txBody>
-      </p:sp>
-      <p:sp>
-        <p:nvSpPr>
-          <p:cNvPr id="8" name="Rectangle 7"/>
+          <p:cNvPr id="4" name="Rectangle 3">
+            <a:extLst>
+              <a:ext uri="{FF2B5EF4-FFF2-40B4-BE49-F238E27FC236}">
+                <a16:creationId xmlns:a16="http://schemas.microsoft.com/office/drawing/2014/main" id="{FF139558-E334-EA9E-5F28-05928C36C1C5}"/>
+              </a:ext>
+            </a:extLst>
+          </p:cNvPr>
           <p:cNvSpPr/>
           <p:nvPr/>
         </p:nvSpPr>
         <p:spPr>
           <a:xfrm>
-            <a:off x="2342147" y="213185"/>
-            <a:ext cx="6812388" cy="1015663"/>
+            <a:off x="518815" y="-534642"/>
+            <a:ext cx="9787466" cy="2308324"/>
           </a:xfrm>
           <a:prstGeom prst="rect">
             <a:avLst/>
@@ -6849,13 +6309,13 @@
           <a:noFill/>
         </p:spPr>
         <p:txBody>
-          <a:bodyPr wrap="square" lIns="91440" tIns="45720" rIns="91440" bIns="45720">
+          <a:bodyPr wrap="square" lIns="91440" tIns="45720" rIns="91440" bIns="45720" anchor="ctr">
             <a:spAutoFit/>
           </a:bodyPr>
           <a:lstStyle/>
           <a:p>
             <a:pPr algn="ctr"/>
-            <a:endParaRPr lang="en-US" sz="3000" b="1" dirty="0">
+            <a:endParaRPr lang="en-US" sz="7200" b="1" dirty="0">
               <a:ln w="13462">
                 <a:solidFill>
                   <a:schemeClr val="bg1"/>
@@ -6878,9 +6338,8 @@
             </a:endParaRPr>
           </a:p>
           <a:p>
-            <a:pPr algn="ctr"/>
-            <a:r>
-              <a:rPr lang="en-US" sz="3000" b="1" dirty="0">
+            <a:r>
+              <a:rPr lang="en-US" sz="7200" b="1" dirty="0">
                 <a:ln w="13462">
                   <a:solidFill>
                     <a:schemeClr val="bg1"/>
@@ -6904,7 +6363,7 @@
               <a:t>Môn </a:t>
             </a:r>
             <a:r>
-              <a:rPr lang="en-US" sz="3000" b="1" dirty="0" err="1">
+              <a:rPr lang="en-US" sz="7200" b="1" dirty="0" err="1">
                 <a:ln w="13462">
                   <a:solidFill>
                     <a:schemeClr val="bg1"/>
@@ -6928,7 +6387,7 @@
               <a:t>học</a:t>
             </a:r>
             <a:r>
-              <a:rPr lang="en-US" sz="3000" b="1" dirty="0">
+              <a:rPr lang="en-US" sz="7200" b="1" dirty="0">
                 <a:ln w="13462">
                   <a:solidFill>
                     <a:schemeClr val="bg1"/>
@@ -6949,10 +6408,41 @@
                 <a:latin typeface="Times New Roman" panose="02020603050405020304" pitchFamily="18" charset="0"/>
                 <a:cs typeface="Times New Roman" panose="02020603050405020304" pitchFamily="18" charset="0"/>
               </a:rPr>
-              <a:t> : </a:t>
-            </a:r>
-            <a:r>
-              <a:rPr lang="en-US" sz="3000" b="1" dirty="0" err="1">
+              <a:t> :</a:t>
+            </a:r>
+          </a:p>
+        </p:txBody>
+      </p:sp>
+      <p:sp>
+        <p:nvSpPr>
+          <p:cNvPr id="5" name="TextBox 4">
+            <a:extLst>
+              <a:ext uri="{FF2B5EF4-FFF2-40B4-BE49-F238E27FC236}">
+                <a16:creationId xmlns:a16="http://schemas.microsoft.com/office/drawing/2014/main" id="{7706B7C4-F591-244D-1EE9-C1651B89BBE0}"/>
+              </a:ext>
+            </a:extLst>
+          </p:cNvPr>
+          <p:cNvSpPr txBox="1"/>
+          <p:nvPr/>
+        </p:nvSpPr>
+        <p:spPr>
+          <a:xfrm>
+            <a:off x="2452532" y="1858396"/>
+            <a:ext cx="7446839" cy="923330"/>
+          </a:xfrm>
+          <a:prstGeom prst="rect">
+            <a:avLst/>
+          </a:prstGeom>
+          <a:noFill/>
+        </p:spPr>
+        <p:txBody>
+          <a:bodyPr wrap="square" rtlCol="0">
+            <a:spAutoFit/>
+          </a:bodyPr>
+          <a:lstStyle/>
+          <a:p>
+            <a:r>
+              <a:rPr lang="en-US" sz="5400" b="1" dirty="0" err="1">
                 <a:ln w="13462">
                   <a:solidFill>
                     <a:schemeClr val="bg1"/>
@@ -6976,7 +6466,7 @@
               <a:t>Công</a:t>
             </a:r>
             <a:r>
-              <a:rPr lang="en-US" sz="3000" b="1" dirty="0">
+              <a:rPr lang="en-US" sz="5400" b="1" dirty="0">
                 <a:ln w="13462">
                   <a:solidFill>
                     <a:schemeClr val="bg1"/>
@@ -7000,7 +6490,7 @@
               <a:t> </a:t>
             </a:r>
             <a:r>
-              <a:rPr lang="en-US" sz="3000" b="1" dirty="0" err="1">
+              <a:rPr lang="en-US" sz="5400" b="1" dirty="0" err="1">
                 <a:ln w="13462">
                   <a:solidFill>
                     <a:schemeClr val="bg1"/>
@@ -7024,7 +6514,7 @@
               <a:t>nghệ</a:t>
             </a:r>
             <a:r>
-              <a:rPr lang="en-US" sz="3000" b="1" dirty="0">
+              <a:rPr lang="en-US" sz="5400" b="1" dirty="0">
                 <a:ln w="13462">
                   <a:solidFill>
                     <a:schemeClr val="bg1"/>
@@ -7048,7 +6538,7 @@
               <a:t> </a:t>
             </a:r>
             <a:r>
-              <a:rPr lang="en-US" sz="3000" b="1" dirty="0" err="1">
+              <a:rPr lang="en-US" sz="5400" b="1" dirty="0" err="1">
                 <a:ln w="13462">
                   <a:solidFill>
                     <a:schemeClr val="bg1"/>
@@ -7072,7 +6562,7 @@
               <a:t>phần</a:t>
             </a:r>
             <a:r>
-              <a:rPr lang="en-US" sz="3000" b="1" dirty="0">
+              <a:rPr lang="en-US" sz="5400" b="1" dirty="0">
                 <a:ln w="13462">
                   <a:solidFill>
                     <a:schemeClr val="bg1"/>
@@ -7096,7 +6586,7 @@
               <a:t> </a:t>
             </a:r>
             <a:r>
-              <a:rPr lang="en-US" sz="3000" b="1" dirty="0" err="1">
+              <a:rPr lang="en-US" sz="5400" b="1" dirty="0" err="1">
                 <a:ln w="13462">
                   <a:solidFill>
                     <a:schemeClr val="bg1"/>
@@ -7119,24 +6609,336 @@
               </a:rPr>
               <a:t>mềm</a:t>
             </a:r>
-            <a:endParaRPr lang="en-US" sz="3000" b="1" dirty="0">
-              <a:ln w="13462">
-                <a:solidFill>
-                  <a:schemeClr val="bg1"/>
-                </a:solidFill>
-                <a:prstDash val="solid"/>
-              </a:ln>
+            <a:endParaRPr lang="en-US" sz="5400" dirty="0"/>
+          </a:p>
+        </p:txBody>
+      </p:sp>
+      <p:pic>
+        <p:nvPicPr>
+          <p:cNvPr id="7" name="Picture 6">
+            <a:extLst>
+              <a:ext uri="{FF2B5EF4-FFF2-40B4-BE49-F238E27FC236}">
+                <a16:creationId xmlns:a16="http://schemas.microsoft.com/office/drawing/2014/main" id="{A908E2EB-0AB7-4406-D22E-19A4358B96A2}"/>
+              </a:ext>
+            </a:extLst>
+          </p:cNvPr>
+          <p:cNvPicPr>
+            <a:picLocks noChangeAspect="1"/>
+          </p:cNvPicPr>
+          <p:nvPr/>
+        </p:nvPicPr>
+        <p:blipFill>
+          <a:blip r:embed="rId2">
+            <a:extLst>
+              <a:ext uri="{28A0092B-C50C-407E-A947-70E740481C1C}">
+                <a14:useLocalDpi xmlns:a14="http://schemas.microsoft.com/office/drawing/2010/main" val="0"/>
+              </a:ext>
+            </a:extLst>
+          </a:blip>
+          <a:stretch>
+            <a:fillRect/>
+          </a:stretch>
+        </p:blipFill>
+        <p:spPr>
+          <a:xfrm>
+            <a:off x="281282" y="3683935"/>
+            <a:ext cx="2308324" cy="2308324"/>
+          </a:xfrm>
+          <a:prstGeom prst="ellipse">
+            <a:avLst/>
+          </a:prstGeom>
+          <a:ln w="63500" cap="rnd">
+            <a:noFill/>
+          </a:ln>
+          <a:effectLst>
+            <a:outerShdw blurRad="381000" dist="292100" dir="5400000" sx="-80000" sy="-18000" rotWithShape="0">
+              <a:srgbClr val="000000">
+                <a:alpha val="22000"/>
+              </a:srgbClr>
+            </a:outerShdw>
+          </a:effectLst>
+          <a:scene3d>
+            <a:camera prst="orthographicFront"/>
+            <a:lightRig rig="contrasting" dir="t">
+              <a:rot lat="0" lon="0" rev="3000000"/>
+            </a:lightRig>
+          </a:scene3d>
+          <a:sp3d contourW="7620">
+            <a:bevelT w="95250" h="31750"/>
+            <a:contourClr>
+              <a:srgbClr val="333333"/>
+            </a:contourClr>
+          </a:sp3d>
+        </p:spPr>
+      </p:pic>
+      <p:sp>
+        <p:nvSpPr>
+          <p:cNvPr id="8" name="TextBox 7">
+            <a:extLst>
+              <a:ext uri="{FF2B5EF4-FFF2-40B4-BE49-F238E27FC236}">
+                <a16:creationId xmlns:a16="http://schemas.microsoft.com/office/drawing/2014/main" id="{423A4E9E-46C7-F065-5193-7CA1AC2A5736}"/>
+              </a:ext>
+            </a:extLst>
+          </p:cNvPr>
+          <p:cNvSpPr txBox="1"/>
+          <p:nvPr/>
+        </p:nvSpPr>
+        <p:spPr>
+          <a:xfrm>
+            <a:off x="2869971" y="3537666"/>
+            <a:ext cx="7446839" cy="1077218"/>
+          </a:xfrm>
+          <a:prstGeom prst="rect">
+            <a:avLst/>
+          </a:prstGeom>
+          <a:noFill/>
+        </p:spPr>
+        <p:txBody>
+          <a:bodyPr wrap="square" rtlCol="0">
+            <a:spAutoFit/>
+          </a:bodyPr>
+          <a:lstStyle/>
+          <a:p>
+            <a:r>
+              <a:rPr lang="en-US" sz="3200" dirty="0" err="1">
+                <a:solidFill>
+                  <a:schemeClr val="tx1">
+                    <a:lumMod val="85000"/>
+                    <a:lumOff val="15000"/>
+                  </a:schemeClr>
+                </a:solidFill>
+                <a:latin typeface="Times New Roman" panose="02020603050405020304" pitchFamily="18" charset="0"/>
+                <a:cs typeface="Times New Roman" panose="02020603050405020304" pitchFamily="18" charset="0"/>
+              </a:rPr>
+              <a:t>Đề</a:t>
+            </a:r>
+            <a:r>
+              <a:rPr lang="en-US" sz="3200" dirty="0">
+                <a:solidFill>
+                  <a:schemeClr val="tx1">
+                    <a:lumMod val="85000"/>
+                    <a:lumOff val="15000"/>
+                  </a:schemeClr>
+                </a:solidFill>
+                <a:latin typeface="Times New Roman" panose="02020603050405020304" pitchFamily="18" charset="0"/>
+                <a:cs typeface="Times New Roman" panose="02020603050405020304" pitchFamily="18" charset="0"/>
+              </a:rPr>
+              <a:t> </a:t>
+            </a:r>
+            <a:r>
+              <a:rPr lang="en-US" sz="3200" dirty="0" err="1">
+                <a:solidFill>
+                  <a:schemeClr val="tx1">
+                    <a:lumMod val="85000"/>
+                    <a:lumOff val="15000"/>
+                  </a:schemeClr>
+                </a:solidFill>
+                <a:latin typeface="Times New Roman" panose="02020603050405020304" pitchFamily="18" charset="0"/>
+                <a:cs typeface="Times New Roman" panose="02020603050405020304" pitchFamily="18" charset="0"/>
+              </a:rPr>
+              <a:t>tài</a:t>
+            </a:r>
+            <a:r>
+              <a:rPr lang="en-US" sz="3200" dirty="0">
+                <a:solidFill>
+                  <a:schemeClr val="tx1">
+                    <a:lumMod val="85000"/>
+                    <a:lumOff val="15000"/>
+                  </a:schemeClr>
+                </a:solidFill>
+                <a:latin typeface="Times New Roman" panose="02020603050405020304" pitchFamily="18" charset="0"/>
+                <a:cs typeface="Times New Roman" panose="02020603050405020304" pitchFamily="18" charset="0"/>
+              </a:rPr>
+              <a:t>:          </a:t>
+            </a:r>
+            <a:r>
+              <a:rPr lang="en-US" sz="3200" dirty="0" err="1">
+                <a:solidFill>
+                  <a:schemeClr val="tx1">
+                    <a:lumMod val="85000"/>
+                    <a:lumOff val="15000"/>
+                  </a:schemeClr>
+                </a:solidFill>
+                <a:latin typeface="Times New Roman" panose="02020603050405020304" pitchFamily="18" charset="0"/>
+                <a:cs typeface="Times New Roman" panose="02020603050405020304" pitchFamily="18" charset="0"/>
+              </a:rPr>
+              <a:t>Xây</a:t>
+            </a:r>
+            <a:r>
+              <a:rPr lang="en-US" sz="3200" dirty="0">
+                <a:solidFill>
+                  <a:schemeClr val="tx1">
+                    <a:lumMod val="85000"/>
+                    <a:lumOff val="15000"/>
+                  </a:schemeClr>
+                </a:solidFill>
+                <a:latin typeface="Times New Roman" panose="02020603050405020304" pitchFamily="18" charset="0"/>
+                <a:cs typeface="Times New Roman" panose="02020603050405020304" pitchFamily="18" charset="0"/>
+              </a:rPr>
+              <a:t> </a:t>
+            </a:r>
+            <a:r>
+              <a:rPr lang="en-US" sz="3200" dirty="0" err="1">
+                <a:solidFill>
+                  <a:schemeClr val="tx1">
+                    <a:lumMod val="85000"/>
+                    <a:lumOff val="15000"/>
+                  </a:schemeClr>
+                </a:solidFill>
+                <a:latin typeface="Times New Roman" panose="02020603050405020304" pitchFamily="18" charset="0"/>
+                <a:cs typeface="Times New Roman" panose="02020603050405020304" pitchFamily="18" charset="0"/>
+              </a:rPr>
+              <a:t>dựng</a:t>
+            </a:r>
+            <a:r>
+              <a:rPr lang="en-US" sz="3200" dirty="0">
+                <a:solidFill>
+                  <a:schemeClr val="tx1">
+                    <a:lumMod val="85000"/>
+                    <a:lumOff val="15000"/>
+                  </a:schemeClr>
+                </a:solidFill>
+                <a:latin typeface="Times New Roman" panose="02020603050405020304" pitchFamily="18" charset="0"/>
+                <a:cs typeface="Times New Roman" panose="02020603050405020304" pitchFamily="18" charset="0"/>
+              </a:rPr>
+              <a:t> </a:t>
+            </a:r>
+            <a:r>
+              <a:rPr lang="en-US" sz="3200" dirty="0" err="1">
+                <a:solidFill>
+                  <a:schemeClr val="tx1">
+                    <a:lumMod val="85000"/>
+                    <a:lumOff val="15000"/>
+                  </a:schemeClr>
+                </a:solidFill>
+                <a:latin typeface="Times New Roman" panose="02020603050405020304" pitchFamily="18" charset="0"/>
+                <a:cs typeface="Times New Roman" panose="02020603050405020304" pitchFamily="18" charset="0"/>
+              </a:rPr>
+              <a:t>phần</a:t>
+            </a:r>
+            <a:r>
+              <a:rPr lang="en-US" sz="3200" dirty="0">
+                <a:solidFill>
+                  <a:schemeClr val="tx1">
+                    <a:lumMod val="85000"/>
+                    <a:lumOff val="15000"/>
+                  </a:schemeClr>
+                </a:solidFill>
+                <a:latin typeface="Times New Roman" panose="02020603050405020304" pitchFamily="18" charset="0"/>
+                <a:cs typeface="Times New Roman" panose="02020603050405020304" pitchFamily="18" charset="0"/>
+              </a:rPr>
+              <a:t> </a:t>
+            </a:r>
+            <a:r>
+              <a:rPr lang="en-US" sz="3200" dirty="0" err="1">
+                <a:solidFill>
+                  <a:schemeClr val="tx1">
+                    <a:lumMod val="85000"/>
+                    <a:lumOff val="15000"/>
+                  </a:schemeClr>
+                </a:solidFill>
+                <a:latin typeface="Times New Roman" panose="02020603050405020304" pitchFamily="18" charset="0"/>
+                <a:cs typeface="Times New Roman" panose="02020603050405020304" pitchFamily="18" charset="0"/>
+              </a:rPr>
+              <a:t>mềm</a:t>
+            </a:r>
+            <a:r>
+              <a:rPr lang="en-US" sz="3200" dirty="0">
+                <a:solidFill>
+                  <a:schemeClr val="tx1">
+                    <a:lumMod val="85000"/>
+                    <a:lumOff val="15000"/>
+                  </a:schemeClr>
+                </a:solidFill>
+                <a:latin typeface="Times New Roman" panose="02020603050405020304" pitchFamily="18" charset="0"/>
+                <a:cs typeface="Times New Roman" panose="02020603050405020304" pitchFamily="18" charset="0"/>
+              </a:rPr>
+              <a:t> </a:t>
+            </a:r>
+            <a:r>
+              <a:rPr lang="en-US" sz="3200" dirty="0" err="1">
+                <a:solidFill>
+                  <a:schemeClr val="tx1">
+                    <a:lumMod val="85000"/>
+                    <a:lumOff val="15000"/>
+                  </a:schemeClr>
+                </a:solidFill>
+                <a:latin typeface="Times New Roman" panose="02020603050405020304" pitchFamily="18" charset="0"/>
+                <a:cs typeface="Times New Roman" panose="02020603050405020304" pitchFamily="18" charset="0"/>
+              </a:rPr>
+              <a:t>bán</a:t>
+            </a:r>
+            <a:r>
+              <a:rPr lang="en-US" sz="3200" dirty="0">
+                <a:solidFill>
+                  <a:schemeClr val="tx1">
+                    <a:lumMod val="85000"/>
+                    <a:lumOff val="15000"/>
+                  </a:schemeClr>
+                </a:solidFill>
+                <a:latin typeface="Times New Roman" panose="02020603050405020304" pitchFamily="18" charset="0"/>
+                <a:cs typeface="Times New Roman" panose="02020603050405020304" pitchFamily="18" charset="0"/>
+              </a:rPr>
+              <a:t> </a:t>
+            </a:r>
+            <a:r>
+              <a:rPr lang="en-US" sz="3200" dirty="0" err="1">
+                <a:solidFill>
+                  <a:schemeClr val="tx1">
+                    <a:lumMod val="85000"/>
+                    <a:lumOff val="15000"/>
+                  </a:schemeClr>
+                </a:solidFill>
+                <a:latin typeface="Times New Roman" panose="02020603050405020304" pitchFamily="18" charset="0"/>
+                <a:cs typeface="Times New Roman" panose="02020603050405020304" pitchFamily="18" charset="0"/>
+              </a:rPr>
+              <a:t>vé</a:t>
+            </a:r>
+            <a:r>
+              <a:rPr lang="en-US" sz="3200" dirty="0">
+                <a:solidFill>
+                  <a:schemeClr val="tx1">
+                    <a:lumMod val="85000"/>
+                    <a:lumOff val="15000"/>
+                  </a:schemeClr>
+                </a:solidFill>
+                <a:latin typeface="Times New Roman" panose="02020603050405020304" pitchFamily="18" charset="0"/>
+                <a:cs typeface="Times New Roman" panose="02020603050405020304" pitchFamily="18" charset="0"/>
+              </a:rPr>
+              <a:t> </a:t>
+            </a:r>
+            <a:r>
+              <a:rPr lang="en-US" sz="3200" dirty="0" err="1">
+                <a:solidFill>
+                  <a:schemeClr val="tx1">
+                    <a:lumMod val="85000"/>
+                    <a:lumOff val="15000"/>
+                  </a:schemeClr>
+                </a:solidFill>
+                <a:latin typeface="Times New Roman" panose="02020603050405020304" pitchFamily="18" charset="0"/>
+                <a:cs typeface="Times New Roman" panose="02020603050405020304" pitchFamily="18" charset="0"/>
+              </a:rPr>
+              <a:t>xe</a:t>
+            </a:r>
+            <a:endParaRPr lang="en-US" sz="3200" dirty="0">
               <a:solidFill>
                 <a:schemeClr val="tx1">
                   <a:lumMod val="85000"/>
                   <a:lumOff val="15000"/>
                 </a:schemeClr>
               </a:solidFill>
-              <a:effectLst>
-                <a:outerShdw dist="38100" dir="2700000" algn="bl" rotWithShape="0">
-                  <a:schemeClr val="accent5"/>
-                </a:outerShdw>
-              </a:effectLst>
+              <a:latin typeface="Times New Roman" panose="02020603050405020304" pitchFamily="18" charset="0"/>
+              <a:cs typeface="Times New Roman" panose="02020603050405020304" pitchFamily="18" charset="0"/>
+            </a:endParaRPr>
+          </a:p>
+          <a:p>
+            <a:endParaRPr lang="en-US" sz="3200" dirty="0">
+              <a:solidFill>
+                <a:schemeClr val="tx1">
+                  <a:lumMod val="85000"/>
+                  <a:lumOff val="15000"/>
+                </a:schemeClr>
+              </a:solidFill>
               <a:latin typeface="Times New Roman" panose="02020603050405020304" pitchFamily="18" charset="0"/>
               <a:cs typeface="Times New Roman" panose="02020603050405020304" pitchFamily="18" charset="0"/>
             </a:endParaRPr>
@@ -7145,194 +6947,215 @@
       </p:sp>
       <p:sp>
         <p:nvSpPr>
-          <p:cNvPr id="2" name="Rectangle 1">
+          <p:cNvPr id="10" name="TextBox 9">
             <a:extLst>
               <a:ext uri="{FF2B5EF4-FFF2-40B4-BE49-F238E27FC236}">
-                <a16:creationId xmlns:a16="http://schemas.microsoft.com/office/drawing/2014/main" id="{CC1F1F14-C2DA-6E3F-39BD-4CBE7E51E5F1}"/>
+                <a16:creationId xmlns:a16="http://schemas.microsoft.com/office/drawing/2014/main" id="{AF23BC4A-E3E9-B1F0-37F9-5734192A4B95}"/>
               </a:ext>
             </a:extLst>
           </p:cNvPr>
-          <p:cNvSpPr/>
+          <p:cNvSpPr txBox="1"/>
           <p:nvPr/>
         </p:nvSpPr>
         <p:spPr>
           <a:xfrm>
-            <a:off x="1883987" y="1228848"/>
-            <a:ext cx="7465101" cy="1270859"/>
+            <a:off x="2869971" y="4545710"/>
+            <a:ext cx="7446839" cy="584775"/>
           </a:xfrm>
           <a:prstGeom prst="rect">
             <a:avLst/>
           </a:prstGeom>
+          <a:noFill/>
         </p:spPr>
-        <p:style>
-          <a:lnRef idx="2">
-            <a:schemeClr val="accent6"/>
-          </a:lnRef>
-          <a:fillRef idx="1">
-            <a:schemeClr val="lt1"/>
-          </a:fillRef>
-          <a:effectRef idx="0">
-            <a:schemeClr val="accent6"/>
-          </a:effectRef>
-          <a:fontRef idx="minor">
-            <a:schemeClr val="dk1"/>
-          </a:fontRef>
-        </p:style>
         <p:txBody>
-          <a:bodyPr rtlCol="0" anchor="ctr"/>
+          <a:bodyPr wrap="square" rtlCol="0">
+            <a:spAutoFit/>
+          </a:bodyPr>
           <a:lstStyle/>
           <a:p>
-            <a:pPr algn="ctr"/>
-            <a:r>
-              <a:rPr lang="en-US" sz="2500" dirty="0" err="1">
-                <a:solidFill>
-                  <a:schemeClr val="accent5">
-                    <a:lumMod val="60000"/>
-                    <a:lumOff val="40000"/>
+            <a:r>
+              <a:rPr lang="en-US" sz="3200" dirty="0" err="1">
+                <a:solidFill>
+                  <a:schemeClr val="tx1">
+                    <a:lumMod val="85000"/>
+                    <a:lumOff val="15000"/>
                   </a:schemeClr>
                 </a:solidFill>
-              </a:rPr>
-              <a:t>Đồ</a:t>
-            </a:r>
-            <a:r>
-              <a:rPr lang="en-US" sz="2500" dirty="0">
-                <a:solidFill>
-                  <a:schemeClr val="accent5">
-                    <a:lumMod val="60000"/>
-                    <a:lumOff val="40000"/>
+                <a:latin typeface="Times New Roman" panose="02020603050405020304" pitchFamily="18" charset="0"/>
+                <a:cs typeface="Times New Roman" panose="02020603050405020304" pitchFamily="18" charset="0"/>
+              </a:rPr>
+              <a:t>Tên</a:t>
+            </a:r>
+            <a:r>
+              <a:rPr lang="en-US" sz="3200" dirty="0">
+                <a:solidFill>
+                  <a:schemeClr val="tx1">
+                    <a:lumMod val="85000"/>
+                    <a:lumOff val="15000"/>
                   </a:schemeClr>
                 </a:solidFill>
+                <a:latin typeface="Times New Roman" panose="02020603050405020304" pitchFamily="18" charset="0"/>
+                <a:cs typeface="Times New Roman" panose="02020603050405020304" pitchFamily="18" charset="0"/>
               </a:rPr>
               <a:t> </a:t>
             </a:r>
             <a:r>
-              <a:rPr lang="en-US" sz="2500" dirty="0" err="1">
-                <a:solidFill>
-                  <a:schemeClr val="accent5">
-                    <a:lumMod val="60000"/>
-                    <a:lumOff val="40000"/>
+              <a:rPr lang="en-US" sz="3200" dirty="0" err="1">
+                <a:solidFill>
+                  <a:schemeClr val="tx1">
+                    <a:lumMod val="85000"/>
+                    <a:lumOff val="15000"/>
                   </a:schemeClr>
                 </a:solidFill>
-              </a:rPr>
-              <a:t>án</a:t>
-            </a:r>
-            <a:r>
-              <a:rPr lang="en-US" sz="2500" dirty="0">
-                <a:solidFill>
-                  <a:schemeClr val="accent5">
-                    <a:lumMod val="60000"/>
-                    <a:lumOff val="40000"/>
+                <a:latin typeface="Times New Roman" panose="02020603050405020304" pitchFamily="18" charset="0"/>
+                <a:cs typeface="Times New Roman" panose="02020603050405020304" pitchFamily="18" charset="0"/>
+              </a:rPr>
+              <a:t>nhóm</a:t>
+            </a:r>
+            <a:r>
+              <a:rPr lang="en-US" sz="3200" dirty="0">
+                <a:solidFill>
+                  <a:schemeClr val="tx1">
+                    <a:lumMod val="85000"/>
+                    <a:lumOff val="15000"/>
                   </a:schemeClr>
                 </a:solidFill>
+                <a:latin typeface="Times New Roman" panose="02020603050405020304" pitchFamily="18" charset="0"/>
+                <a:cs typeface="Times New Roman" panose="02020603050405020304" pitchFamily="18" charset="0"/>
+              </a:rPr>
+              <a:t>:   QB_TTH_KH</a:t>
+            </a:r>
+          </a:p>
+        </p:txBody>
+      </p:sp>
+      <p:sp>
+        <p:nvSpPr>
+          <p:cNvPr id="11" name="TextBox 10">
+            <a:extLst>
+              <a:ext uri="{FF2B5EF4-FFF2-40B4-BE49-F238E27FC236}">
+                <a16:creationId xmlns:a16="http://schemas.microsoft.com/office/drawing/2014/main" id="{EFA854D9-BA54-D120-F7D5-ABB2F4D3B2FC}"/>
+              </a:ext>
+            </a:extLst>
+          </p:cNvPr>
+          <p:cNvSpPr txBox="1"/>
+          <p:nvPr/>
+        </p:nvSpPr>
+        <p:spPr>
+          <a:xfrm>
+            <a:off x="2869970" y="5599920"/>
+            <a:ext cx="7446839" cy="584775"/>
+          </a:xfrm>
+          <a:prstGeom prst="rect">
+            <a:avLst/>
+          </a:prstGeom>
+          <a:noFill/>
+        </p:spPr>
+        <p:txBody>
+          <a:bodyPr wrap="square" rtlCol="0">
+            <a:spAutoFit/>
+          </a:bodyPr>
+          <a:lstStyle/>
+          <a:p>
+            <a:r>
+              <a:rPr lang="en-US" sz="3200" dirty="0" err="1">
+                <a:solidFill>
+                  <a:schemeClr val="tx1">
+                    <a:lumMod val="85000"/>
+                    <a:lumOff val="15000"/>
+                  </a:schemeClr>
+                </a:solidFill>
+                <a:latin typeface="Times New Roman" panose="02020603050405020304" pitchFamily="18" charset="0"/>
+                <a:cs typeface="Times New Roman" panose="02020603050405020304" pitchFamily="18" charset="0"/>
+              </a:rPr>
+              <a:t>Giảng</a:t>
+            </a:r>
+            <a:r>
+              <a:rPr lang="en-US" sz="3200" dirty="0">
+                <a:solidFill>
+                  <a:schemeClr val="tx1">
+                    <a:lumMod val="85000"/>
+                    <a:lumOff val="15000"/>
+                  </a:schemeClr>
+                </a:solidFill>
+                <a:latin typeface="Times New Roman" panose="02020603050405020304" pitchFamily="18" charset="0"/>
+                <a:cs typeface="Times New Roman" panose="02020603050405020304" pitchFamily="18" charset="0"/>
               </a:rPr>
               <a:t> </a:t>
             </a:r>
             <a:r>
-              <a:rPr lang="en-US" sz="2500" dirty="0" err="1">
-                <a:solidFill>
-                  <a:schemeClr val="accent5">
-                    <a:lumMod val="60000"/>
-                    <a:lumOff val="40000"/>
+              <a:rPr lang="en-US" sz="3200" dirty="0" err="1">
+                <a:solidFill>
+                  <a:schemeClr val="tx1">
+                    <a:lumMod val="85000"/>
+                    <a:lumOff val="15000"/>
                   </a:schemeClr>
                 </a:solidFill>
-              </a:rPr>
-              <a:t>Quản</a:t>
-            </a:r>
-            <a:r>
-              <a:rPr lang="en-US" sz="2500" dirty="0">
-                <a:solidFill>
-                  <a:schemeClr val="accent5">
-                    <a:lumMod val="60000"/>
-                    <a:lumOff val="40000"/>
+                <a:latin typeface="Times New Roman" panose="02020603050405020304" pitchFamily="18" charset="0"/>
+                <a:cs typeface="Times New Roman" panose="02020603050405020304" pitchFamily="18" charset="0"/>
+              </a:rPr>
+              <a:t>viên</a:t>
+            </a:r>
+            <a:r>
+              <a:rPr lang="en-US" sz="3200" dirty="0">
+                <a:solidFill>
+                  <a:schemeClr val="tx1">
+                    <a:lumMod val="85000"/>
+                    <a:lumOff val="15000"/>
                   </a:schemeClr>
                 </a:solidFill>
-              </a:rPr>
-              <a:t> </a:t>
-            </a:r>
-            <a:r>
-              <a:rPr lang="en-US" sz="2500" dirty="0" err="1">
-                <a:solidFill>
-                  <a:schemeClr val="accent5">
-                    <a:lumMod val="60000"/>
-                    <a:lumOff val="40000"/>
+                <a:latin typeface="Times New Roman" panose="02020603050405020304" pitchFamily="18" charset="0"/>
+                <a:cs typeface="Times New Roman" panose="02020603050405020304" pitchFamily="18" charset="0"/>
+              </a:rPr>
+              <a:t>:  </a:t>
+            </a:r>
+            <a:r>
+              <a:rPr lang="en-US" sz="3200" dirty="0" err="1">
+                <a:solidFill>
+                  <a:schemeClr val="tx1">
+                    <a:lumMod val="85000"/>
+                    <a:lumOff val="15000"/>
                   </a:schemeClr>
                 </a:solidFill>
-              </a:rPr>
-              <a:t>lý</a:t>
-            </a:r>
-            <a:r>
-              <a:rPr lang="en-US" sz="2500" dirty="0">
-                <a:solidFill>
-                  <a:schemeClr val="accent5">
-                    <a:lumMod val="60000"/>
-                    <a:lumOff val="40000"/>
+                <a:latin typeface="Times New Roman" panose="02020603050405020304" pitchFamily="18" charset="0"/>
+                <a:cs typeface="Times New Roman" panose="02020603050405020304" pitchFamily="18" charset="0"/>
+              </a:rPr>
+              <a:t>Trần</a:t>
+            </a:r>
+            <a:r>
+              <a:rPr lang="en-US" sz="3200" dirty="0">
+                <a:solidFill>
+                  <a:schemeClr val="tx1">
+                    <a:lumMod val="85000"/>
+                    <a:lumOff val="15000"/>
                   </a:schemeClr>
                 </a:solidFill>
-              </a:rPr>
-              <a:t> </a:t>
-            </a:r>
-            <a:r>
-              <a:rPr lang="en-US" sz="2500" dirty="0" err="1">
-                <a:solidFill>
-                  <a:schemeClr val="accent5">
-                    <a:lumMod val="60000"/>
-                    <a:lumOff val="40000"/>
+                <a:latin typeface="Times New Roman" panose="02020603050405020304" pitchFamily="18" charset="0"/>
+                <a:cs typeface="Times New Roman" panose="02020603050405020304" pitchFamily="18" charset="0"/>
+              </a:rPr>
+              <a:t> Thanh </a:t>
+            </a:r>
+            <a:r>
+              <a:rPr lang="en-US" sz="3200" dirty="0" err="1">
+                <a:solidFill>
+                  <a:schemeClr val="tx1">
+                    <a:lumMod val="85000"/>
+                    <a:lumOff val="15000"/>
                   </a:schemeClr>
                 </a:solidFill>
-              </a:rPr>
-              <a:t>bán</a:t>
-            </a:r>
-            <a:r>
-              <a:rPr lang="en-US" sz="2500" dirty="0">
-                <a:solidFill>
-                  <a:schemeClr val="accent5">
-                    <a:lumMod val="60000"/>
-                    <a:lumOff val="40000"/>
-                  </a:schemeClr>
-                </a:solidFill>
-              </a:rPr>
-              <a:t> </a:t>
-            </a:r>
-            <a:r>
-              <a:rPr lang="en-US" sz="2500" dirty="0" err="1">
-                <a:solidFill>
-                  <a:schemeClr val="accent5">
-                    <a:lumMod val="60000"/>
-                    <a:lumOff val="40000"/>
-                  </a:schemeClr>
-                </a:solidFill>
-              </a:rPr>
-              <a:t>vé</a:t>
-            </a:r>
-            <a:r>
-              <a:rPr lang="en-US" sz="2500" dirty="0">
-                <a:solidFill>
-                  <a:schemeClr val="accent5">
-                    <a:lumMod val="60000"/>
-                    <a:lumOff val="40000"/>
-                  </a:schemeClr>
-                </a:solidFill>
-              </a:rPr>
-              <a:t> </a:t>
-            </a:r>
-            <a:r>
-              <a:rPr lang="en-US" sz="2500" dirty="0" err="1">
-                <a:solidFill>
-                  <a:schemeClr val="accent5">
-                    <a:lumMod val="60000"/>
-                    <a:lumOff val="40000"/>
-                  </a:schemeClr>
-                </a:solidFill>
-              </a:rPr>
-              <a:t>xe</a:t>
-            </a:r>
-            <a:endParaRPr lang="en-US" sz="2500" dirty="0">
+                <a:latin typeface="Times New Roman" panose="02020603050405020304" pitchFamily="18" charset="0"/>
+                <a:cs typeface="Times New Roman" panose="02020603050405020304" pitchFamily="18" charset="0"/>
+              </a:rPr>
+              <a:t>Nhã</a:t>
+            </a:r>
+            <a:endParaRPr lang="en-US" sz="3200" dirty="0">
               <a:solidFill>
-                <a:schemeClr val="accent5">
-                  <a:lumMod val="60000"/>
-                  <a:lumOff val="40000"/>
+                <a:schemeClr val="tx1">
+                  <a:lumMod val="85000"/>
+                  <a:lumOff val="15000"/>
                 </a:schemeClr>
               </a:solidFill>
+              <a:latin typeface="Times New Roman" panose="02020603050405020304" pitchFamily="18" charset="0"/>
+              <a:cs typeface="Times New Roman" panose="02020603050405020304" pitchFamily="18" charset="0"/>
             </a:endParaRPr>
           </a:p>
         </p:txBody>
@@ -7340,16 +7163,206 @@
     </p:spTree>
     <p:extLst>
       <p:ext uri="{BB962C8B-B14F-4D97-AF65-F5344CB8AC3E}">
-        <p14:creationId xmlns:p14="http://schemas.microsoft.com/office/powerpoint/2010/main" val="2984970611"/>
+        <p14:creationId xmlns:p14="http://schemas.microsoft.com/office/powerpoint/2010/main" val="321680184"/>
       </p:ext>
     </p:extLst>
   </p:cSld>
   <p:clrMapOvr>
     <a:masterClrMapping/>
   </p:clrMapOvr>
-  <p:transition spd="slow">
-    <p:wipe/>
-  </p:transition>
+</p:sld>
+</file>
+
+<file path=ppt/slides/slide10.xml><?xml version="1.0" encoding="utf-8"?>
+<p:sld xmlns:a="http://schemas.openxmlformats.org/drawingml/2006/main" xmlns:r="http://schemas.openxmlformats.org/officeDocument/2006/relationships" xmlns:p="http://schemas.openxmlformats.org/presentationml/2006/main">
+  <p:cSld>
+    <p:spTree>
+      <p:nvGrpSpPr>
+        <p:cNvPr id="1" name=""/>
+        <p:cNvGrpSpPr/>
+        <p:nvPr/>
+      </p:nvGrpSpPr>
+      <p:grpSpPr>
+        <a:xfrm>
+          <a:off x="0" y="0"/>
+          <a:ext cx="0" cy="0"/>
+          <a:chOff x="0" y="0"/>
+          <a:chExt cx="0" cy="0"/>
+        </a:xfrm>
+      </p:grpSpPr>
+      <p:sp>
+        <p:nvSpPr>
+          <p:cNvPr id="5" name="Rectangle 4"/>
+          <p:cNvSpPr/>
+          <p:nvPr/>
+        </p:nvSpPr>
+        <p:spPr>
+          <a:xfrm>
+            <a:off x="1219201" y="278693"/>
+            <a:ext cx="7333672" cy="707886"/>
+          </a:xfrm>
+          <a:prstGeom prst="rect">
+            <a:avLst/>
+          </a:prstGeom>
+          <a:noFill/>
+        </p:spPr>
+        <p:txBody>
+          <a:bodyPr wrap="square" lIns="91440" tIns="45720" rIns="91440" bIns="45720">
+            <a:spAutoFit/>
+          </a:bodyPr>
+          <a:lstStyle/>
+          <a:p>
+            <a:pPr algn="ctr"/>
+            <a:r>
+              <a:rPr lang="en-US" sz="4000" dirty="0">
+                <a:ln w="0"/>
+                <a:gradFill>
+                  <a:gsLst>
+                    <a:gs pos="0">
+                      <a:schemeClr val="accent5">
+                        <a:lumMod val="50000"/>
+                      </a:schemeClr>
+                    </a:gs>
+                    <a:gs pos="50000">
+                      <a:schemeClr val="accent5"/>
+                    </a:gs>
+                    <a:gs pos="100000">
+                      <a:schemeClr val="accent5">
+                        <a:lumMod val="60000"/>
+                        <a:lumOff val="40000"/>
+                      </a:schemeClr>
+                    </a:gs>
+                  </a:gsLst>
+                  <a:lin ang="5400000"/>
+                </a:gradFill>
+                <a:effectLst>
+                  <a:reflection blurRad="6350" stA="53000" endA="300" endPos="35500" dir="5400000" sy="-90000" algn="bl" rotWithShape="0"/>
+                </a:effectLst>
+                <a:latin typeface="Times New Roman" panose="02020603050405020304" pitchFamily="18" charset="0"/>
+                <a:cs typeface="Times New Roman" panose="02020603050405020304" pitchFamily="18" charset="0"/>
+              </a:rPr>
+              <a:t>V : FORM ỨNG DỤNG</a:t>
+            </a:r>
+            <a:endParaRPr lang="en-US" sz="4000" b="0" cap="none" spc="0" dirty="0">
+              <a:ln w="0"/>
+              <a:gradFill>
+                <a:gsLst>
+                  <a:gs pos="0">
+                    <a:schemeClr val="accent5">
+                      <a:lumMod val="50000"/>
+                    </a:schemeClr>
+                  </a:gs>
+                  <a:gs pos="50000">
+                    <a:schemeClr val="accent5"/>
+                  </a:gs>
+                  <a:gs pos="100000">
+                    <a:schemeClr val="accent5">
+                      <a:lumMod val="60000"/>
+                      <a:lumOff val="40000"/>
+                    </a:schemeClr>
+                  </a:gs>
+                </a:gsLst>
+                <a:lin ang="5400000"/>
+              </a:gradFill>
+              <a:effectLst>
+                <a:reflection blurRad="6350" stA="53000" endA="300" endPos="35500" dir="5400000" sy="-90000" algn="bl" rotWithShape="0"/>
+              </a:effectLst>
+              <a:latin typeface="Times New Roman" panose="02020603050405020304" pitchFamily="18" charset="0"/>
+              <a:cs typeface="Times New Roman" panose="02020603050405020304" pitchFamily="18" charset="0"/>
+            </a:endParaRPr>
+          </a:p>
+        </p:txBody>
+      </p:sp>
+      <p:pic>
+        <p:nvPicPr>
+          <p:cNvPr id="6" name="Content Placeholder 5" descr="A screenshot of a login page&#10;&#10;Description automatically generated">
+            <a:extLst>
+              <a:ext uri="{FF2B5EF4-FFF2-40B4-BE49-F238E27FC236}">
+                <a16:creationId xmlns:a16="http://schemas.microsoft.com/office/drawing/2014/main" id="{074B9104-DE15-4D0D-D447-2563D1509A31}"/>
+              </a:ext>
+            </a:extLst>
+          </p:cNvPr>
+          <p:cNvPicPr>
+            <a:picLocks noGrp="1" noChangeAspect="1"/>
+          </p:cNvPicPr>
+          <p:nvPr>
+            <p:ph idx="1"/>
+          </p:nvPr>
+        </p:nvPicPr>
+        <p:blipFill>
+          <a:blip r:embed="rId2"/>
+          <a:stretch>
+            <a:fillRect/>
+          </a:stretch>
+        </p:blipFill>
+        <p:spPr>
+          <a:xfrm>
+            <a:off x="1524168" y="2160588"/>
+            <a:ext cx="6903701" cy="3881437"/>
+          </a:xfrm>
+          <a:prstGeom prst="rect">
+            <a:avLst/>
+          </a:prstGeom>
+        </p:spPr>
+      </p:pic>
+      <p:sp>
+        <p:nvSpPr>
+          <p:cNvPr id="8" name="TextBox 7">
+            <a:extLst>
+              <a:ext uri="{FF2B5EF4-FFF2-40B4-BE49-F238E27FC236}">
+                <a16:creationId xmlns:a16="http://schemas.microsoft.com/office/drawing/2014/main" id="{1DC3E2F0-DDE7-27D4-D616-E6FA31242FBC}"/>
+              </a:ext>
+            </a:extLst>
+          </p:cNvPr>
+          <p:cNvSpPr txBox="1"/>
+          <p:nvPr/>
+        </p:nvSpPr>
+        <p:spPr>
+          <a:xfrm>
+            <a:off x="2037347" y="1411705"/>
+            <a:ext cx="5470358" cy="369332"/>
+          </a:xfrm>
+          <a:prstGeom prst="rect">
+            <a:avLst/>
+          </a:prstGeom>
+          <a:noFill/>
+        </p:spPr>
+        <p:txBody>
+          <a:bodyPr wrap="square" rtlCol="0">
+            <a:spAutoFit/>
+          </a:bodyPr>
+          <a:lstStyle/>
+          <a:p>
+            <a:pPr algn="ctr"/>
+            <a:r>
+              <a:rPr lang="en-US" dirty="0"/>
+              <a:t>FORM ĐĂNG NHẬP</a:t>
+            </a:r>
+          </a:p>
+        </p:txBody>
+      </p:sp>
+    </p:spTree>
+    <p:extLst>
+      <p:ext uri="{BB962C8B-B14F-4D97-AF65-F5344CB8AC3E}">
+        <p14:creationId xmlns:p14="http://schemas.microsoft.com/office/powerpoint/2010/main" val="726495051"/>
+      </p:ext>
+    </p:extLst>
+  </p:cSld>
+  <p:clrMapOvr>
+    <a:masterClrMapping/>
+  </p:clrMapOvr>
+  <mc:AlternateContent xmlns:mc="http://schemas.openxmlformats.org/markup-compatibility/2006" xmlns:p14="http://schemas.microsoft.com/office/powerpoint/2010/main">
+    <mc:Choice Requires="p14">
+      <p:transition spd="med" p14:dur="700">
+        <p:fade/>
+      </p:transition>
+    </mc:Choice>
+    <mc:Fallback xmlns="">
+      <p:transition spd="med">
+        <p:fade/>
+      </p:transition>
+    </mc:Fallback>
+  </mc:AlternateContent>
   <p:timing>
     <p:tnLst>
       <p:par>
@@ -7371,7 +7384,7 @@
                             </p:stCondLst>
                             <p:childTnLst>
                               <p:par>
-                                <p:cTn id="5" presetID="42" presetClass="entr" presetSubtype="0" fill="hold" grpId="0" nodeType="clickEffect">
+                                <p:cTn id="5" presetID="6" presetClass="entr" presetSubtype="16" fill="hold" grpId="0" nodeType="clickEffect">
                                   <p:stCondLst>
                                     <p:cond delay="0"/>
                                   </p:stCondLst>
@@ -7384,106 +7397,7 @@
                                           </p:stCondLst>
                                         </p:cTn>
                                         <p:tgtEl>
-                                          <p:spTgt spid="8"/>
-                                        </p:tgtEl>
-                                        <p:attrNameLst>
-                                          <p:attrName>style.visibility</p:attrName>
-                                        </p:attrNameLst>
-                                      </p:cBhvr>
-                                      <p:to>
-                                        <p:strVal val="visible"/>
-                                      </p:to>
-                                    </p:set>
-                                    <p:animEffect transition="in" filter="fade">
-                                      <p:cBhvr>
-                                        <p:cTn id="7" dur="1000"/>
-                                        <p:tgtEl>
-                                          <p:spTgt spid="8"/>
-                                        </p:tgtEl>
-                                      </p:cBhvr>
-                                    </p:animEffect>
-                                    <p:anim calcmode="lin" valueType="num">
-                                      <p:cBhvr>
-                                        <p:cTn id="8" dur="1000" fill="hold"/>
-                                        <p:tgtEl>
-                                          <p:spTgt spid="8"/>
-                                        </p:tgtEl>
-                                        <p:attrNameLst>
-                                          <p:attrName>ppt_x</p:attrName>
-                                        </p:attrNameLst>
-                                      </p:cBhvr>
-                                      <p:tavLst>
-                                        <p:tav tm="0">
-                                          <p:val>
-                                            <p:strVal val="#ppt_x"/>
-                                          </p:val>
-                                        </p:tav>
-                                        <p:tav tm="100000">
-                                          <p:val>
-                                            <p:strVal val="#ppt_x"/>
-                                          </p:val>
-                                        </p:tav>
-                                      </p:tavLst>
-                                    </p:anim>
-                                    <p:anim calcmode="lin" valueType="num">
-                                      <p:cBhvr>
-                                        <p:cTn id="9" dur="1000" fill="hold"/>
-                                        <p:tgtEl>
-                                          <p:spTgt spid="8"/>
-                                        </p:tgtEl>
-                                        <p:attrNameLst>
-                                          <p:attrName>ppt_y</p:attrName>
-                                        </p:attrNameLst>
-                                      </p:cBhvr>
-                                      <p:tavLst>
-                                        <p:tav tm="0">
-                                          <p:val>
-                                            <p:strVal val="#ppt_y+.1"/>
-                                          </p:val>
-                                        </p:tav>
-                                        <p:tav tm="100000">
-                                          <p:val>
-                                            <p:strVal val="#ppt_y"/>
-                                          </p:val>
-                                        </p:tav>
-                                      </p:tavLst>
-                                    </p:anim>
-                                  </p:childTnLst>
-                                </p:cTn>
-                              </p:par>
-                            </p:childTnLst>
-                          </p:cTn>
-                        </p:par>
-                      </p:childTnLst>
-                    </p:cTn>
-                  </p:par>
-                  <p:par>
-                    <p:cTn id="10" fill="hold">
-                      <p:stCondLst>
-                        <p:cond delay="indefinite"/>
-                      </p:stCondLst>
-                      <p:childTnLst>
-                        <p:par>
-                          <p:cTn id="11" fill="hold">
-                            <p:stCondLst>
-                              <p:cond delay="0"/>
-                            </p:stCondLst>
-                            <p:childTnLst>
-                              <p:par>
-                                <p:cTn id="12" presetID="6" presetClass="entr" presetSubtype="16" fill="hold" grpId="0" nodeType="clickEffect">
-                                  <p:stCondLst>
-                                    <p:cond delay="0"/>
-                                  </p:stCondLst>
-                                  <p:childTnLst>
-                                    <p:set>
-                                      <p:cBhvr>
-                                        <p:cTn id="13" dur="1" fill="hold">
-                                          <p:stCondLst>
-                                            <p:cond delay="0"/>
-                                          </p:stCondLst>
-                                        </p:cTn>
-                                        <p:tgtEl>
-                                          <p:spTgt spid="2"/>
+                                          <p:spTgt spid="5"/>
                                         </p:tgtEl>
                                         <p:attrNameLst>
                                           <p:attrName>style.visibility</p:attrName>
@@ -7495,436 +7409,9 @@
                                     </p:set>
                                     <p:animEffect transition="in" filter="circle(in)">
                                       <p:cBhvr>
-                                        <p:cTn id="14" dur="2000"/>
+                                        <p:cTn id="7" dur="2000"/>
                                         <p:tgtEl>
-                                          <p:spTgt spid="2"/>
-                                        </p:tgtEl>
-                                      </p:cBhvr>
-                                    </p:animEffect>
-                                  </p:childTnLst>
-                                </p:cTn>
-                              </p:par>
-                            </p:childTnLst>
-                          </p:cTn>
-                        </p:par>
-                      </p:childTnLst>
-                    </p:cTn>
-                  </p:par>
-                  <p:par>
-                    <p:cTn id="15" fill="hold">
-                      <p:stCondLst>
-                        <p:cond delay="indefinite"/>
-                      </p:stCondLst>
-                      <p:childTnLst>
-                        <p:par>
-                          <p:cTn id="16" fill="hold">
-                            <p:stCondLst>
-                              <p:cond delay="0"/>
-                            </p:stCondLst>
-                            <p:childTnLst>
-                              <p:par>
-                                <p:cTn id="17" presetID="16" presetClass="entr" presetSubtype="21" fill="hold" grpId="0" nodeType="clickEffect">
-                                  <p:stCondLst>
-                                    <p:cond delay="0"/>
-                                  </p:stCondLst>
-                                  <p:childTnLst>
-                                    <p:set>
-                                      <p:cBhvr>
-                                        <p:cTn id="18" dur="1" fill="hold">
-                                          <p:stCondLst>
-                                            <p:cond delay="0"/>
-                                          </p:stCondLst>
-                                        </p:cTn>
-                                        <p:tgtEl>
-                                          <p:spTgt spid="3">
-                                            <p:txEl>
-                                              <p:pRg st="0" end="0"/>
-                                            </p:txEl>
-                                          </p:spTgt>
-                                        </p:tgtEl>
-                                        <p:attrNameLst>
-                                          <p:attrName>style.visibility</p:attrName>
-                                        </p:attrNameLst>
-                                      </p:cBhvr>
-                                      <p:to>
-                                        <p:strVal val="visible"/>
-                                      </p:to>
-                                    </p:set>
-                                    <p:animEffect transition="in" filter="barn(inVertical)">
-                                      <p:cBhvr>
-                                        <p:cTn id="19" dur="500"/>
-                                        <p:tgtEl>
-                                          <p:spTgt spid="3">
-                                            <p:txEl>
-                                              <p:pRg st="0" end="0"/>
-                                            </p:txEl>
-                                          </p:spTgt>
-                                        </p:tgtEl>
-                                      </p:cBhvr>
-                                    </p:animEffect>
-                                  </p:childTnLst>
-                                </p:cTn>
-                              </p:par>
-                            </p:childTnLst>
-                          </p:cTn>
-                        </p:par>
-                      </p:childTnLst>
-                    </p:cTn>
-                  </p:par>
-                  <p:par>
-                    <p:cTn id="20" fill="hold">
-                      <p:stCondLst>
-                        <p:cond delay="indefinite"/>
-                      </p:stCondLst>
-                      <p:childTnLst>
-                        <p:par>
-                          <p:cTn id="21" fill="hold">
-                            <p:stCondLst>
-                              <p:cond delay="0"/>
-                            </p:stCondLst>
-                            <p:childTnLst>
-                              <p:par>
-                                <p:cTn id="22" presetID="16" presetClass="entr" presetSubtype="21" fill="hold" grpId="0" nodeType="clickEffect">
-                                  <p:stCondLst>
-                                    <p:cond delay="0"/>
-                                  </p:stCondLst>
-                                  <p:childTnLst>
-                                    <p:set>
-                                      <p:cBhvr>
-                                        <p:cTn id="23" dur="1" fill="hold">
-                                          <p:stCondLst>
-                                            <p:cond delay="0"/>
-                                          </p:stCondLst>
-                                        </p:cTn>
-                                        <p:tgtEl>
-                                          <p:spTgt spid="3">
-                                            <p:txEl>
-                                              <p:pRg st="1" end="1"/>
-                                            </p:txEl>
-                                          </p:spTgt>
-                                        </p:tgtEl>
-                                        <p:attrNameLst>
-                                          <p:attrName>style.visibility</p:attrName>
-                                        </p:attrNameLst>
-                                      </p:cBhvr>
-                                      <p:to>
-                                        <p:strVal val="visible"/>
-                                      </p:to>
-                                    </p:set>
-                                    <p:animEffect transition="in" filter="barn(inVertical)">
-                                      <p:cBhvr>
-                                        <p:cTn id="24" dur="500"/>
-                                        <p:tgtEl>
-                                          <p:spTgt spid="3">
-                                            <p:txEl>
-                                              <p:pRg st="1" end="1"/>
-                                            </p:txEl>
-                                          </p:spTgt>
-                                        </p:tgtEl>
-                                      </p:cBhvr>
-                                    </p:animEffect>
-                                  </p:childTnLst>
-                                </p:cTn>
-                              </p:par>
-                            </p:childTnLst>
-                          </p:cTn>
-                        </p:par>
-                      </p:childTnLst>
-                    </p:cTn>
-                  </p:par>
-                  <p:par>
-                    <p:cTn id="25" fill="hold">
-                      <p:stCondLst>
-                        <p:cond delay="indefinite"/>
-                      </p:stCondLst>
-                      <p:childTnLst>
-                        <p:par>
-                          <p:cTn id="26" fill="hold">
-                            <p:stCondLst>
-                              <p:cond delay="0"/>
-                            </p:stCondLst>
-                            <p:childTnLst>
-                              <p:par>
-                                <p:cTn id="27" presetID="16" presetClass="entr" presetSubtype="21" fill="hold" grpId="0" nodeType="clickEffect">
-                                  <p:stCondLst>
-                                    <p:cond delay="0"/>
-                                  </p:stCondLst>
-                                  <p:childTnLst>
-                                    <p:set>
-                                      <p:cBhvr>
-                                        <p:cTn id="28" dur="1" fill="hold">
-                                          <p:stCondLst>
-                                            <p:cond delay="0"/>
-                                          </p:stCondLst>
-                                        </p:cTn>
-                                        <p:tgtEl>
-                                          <p:spTgt spid="3">
-                                            <p:txEl>
-                                              <p:pRg st="2" end="2"/>
-                                            </p:txEl>
-                                          </p:spTgt>
-                                        </p:tgtEl>
-                                        <p:attrNameLst>
-                                          <p:attrName>style.visibility</p:attrName>
-                                        </p:attrNameLst>
-                                      </p:cBhvr>
-                                      <p:to>
-                                        <p:strVal val="visible"/>
-                                      </p:to>
-                                    </p:set>
-                                    <p:animEffect transition="in" filter="barn(inVertical)">
-                                      <p:cBhvr>
-                                        <p:cTn id="29" dur="500"/>
-                                        <p:tgtEl>
-                                          <p:spTgt spid="3">
-                                            <p:txEl>
-                                              <p:pRg st="2" end="2"/>
-                                            </p:txEl>
-                                          </p:spTgt>
-                                        </p:tgtEl>
-                                      </p:cBhvr>
-                                    </p:animEffect>
-                                  </p:childTnLst>
-                                </p:cTn>
-                              </p:par>
-                            </p:childTnLst>
-                          </p:cTn>
-                        </p:par>
-                      </p:childTnLst>
-                    </p:cTn>
-                  </p:par>
-                  <p:par>
-                    <p:cTn id="30" fill="hold">
-                      <p:stCondLst>
-                        <p:cond delay="indefinite"/>
-                      </p:stCondLst>
-                      <p:childTnLst>
-                        <p:par>
-                          <p:cTn id="31" fill="hold">
-                            <p:stCondLst>
-                              <p:cond delay="0"/>
-                            </p:stCondLst>
-                            <p:childTnLst>
-                              <p:par>
-                                <p:cTn id="32" presetID="16" presetClass="entr" presetSubtype="21" fill="hold" grpId="0" nodeType="clickEffect">
-                                  <p:stCondLst>
-                                    <p:cond delay="0"/>
-                                  </p:stCondLst>
-                                  <p:childTnLst>
-                                    <p:set>
-                                      <p:cBhvr>
-                                        <p:cTn id="33" dur="1" fill="hold">
-                                          <p:stCondLst>
-                                            <p:cond delay="0"/>
-                                          </p:stCondLst>
-                                        </p:cTn>
-                                        <p:tgtEl>
-                                          <p:spTgt spid="3">
-                                            <p:txEl>
-                                              <p:pRg st="3" end="3"/>
-                                            </p:txEl>
-                                          </p:spTgt>
-                                        </p:tgtEl>
-                                        <p:attrNameLst>
-                                          <p:attrName>style.visibility</p:attrName>
-                                        </p:attrNameLst>
-                                      </p:cBhvr>
-                                      <p:to>
-                                        <p:strVal val="visible"/>
-                                      </p:to>
-                                    </p:set>
-                                    <p:animEffect transition="in" filter="barn(inVertical)">
-                                      <p:cBhvr>
-                                        <p:cTn id="34" dur="500"/>
-                                        <p:tgtEl>
-                                          <p:spTgt spid="3">
-                                            <p:txEl>
-                                              <p:pRg st="3" end="3"/>
-                                            </p:txEl>
-                                          </p:spTgt>
-                                        </p:tgtEl>
-                                      </p:cBhvr>
-                                    </p:animEffect>
-                                  </p:childTnLst>
-                                </p:cTn>
-                              </p:par>
-                            </p:childTnLst>
-                          </p:cTn>
-                        </p:par>
-                      </p:childTnLst>
-                    </p:cTn>
-                  </p:par>
-                  <p:par>
-                    <p:cTn id="35" fill="hold">
-                      <p:stCondLst>
-                        <p:cond delay="indefinite"/>
-                      </p:stCondLst>
-                      <p:childTnLst>
-                        <p:par>
-                          <p:cTn id="36" fill="hold">
-                            <p:stCondLst>
-                              <p:cond delay="0"/>
-                            </p:stCondLst>
-                            <p:childTnLst>
-                              <p:par>
-                                <p:cTn id="37" presetID="16" presetClass="entr" presetSubtype="21" fill="hold" grpId="0" nodeType="clickEffect">
-                                  <p:stCondLst>
-                                    <p:cond delay="0"/>
-                                  </p:stCondLst>
-                                  <p:childTnLst>
-                                    <p:set>
-                                      <p:cBhvr>
-                                        <p:cTn id="38" dur="1" fill="hold">
-                                          <p:stCondLst>
-                                            <p:cond delay="0"/>
-                                          </p:stCondLst>
-                                        </p:cTn>
-                                        <p:tgtEl>
-                                          <p:spTgt spid="3">
-                                            <p:txEl>
-                                              <p:pRg st="4" end="4"/>
-                                            </p:txEl>
-                                          </p:spTgt>
-                                        </p:tgtEl>
-                                        <p:attrNameLst>
-                                          <p:attrName>style.visibility</p:attrName>
-                                        </p:attrNameLst>
-                                      </p:cBhvr>
-                                      <p:to>
-                                        <p:strVal val="visible"/>
-                                      </p:to>
-                                    </p:set>
-                                    <p:animEffect transition="in" filter="barn(inVertical)">
-                                      <p:cBhvr>
-                                        <p:cTn id="39" dur="500"/>
-                                        <p:tgtEl>
-                                          <p:spTgt spid="3">
-                                            <p:txEl>
-                                              <p:pRg st="4" end="4"/>
-                                            </p:txEl>
-                                          </p:spTgt>
-                                        </p:tgtEl>
-                                      </p:cBhvr>
-                                    </p:animEffect>
-                                  </p:childTnLst>
-                                </p:cTn>
-                              </p:par>
-                            </p:childTnLst>
-                          </p:cTn>
-                        </p:par>
-                      </p:childTnLst>
-                    </p:cTn>
-                  </p:par>
-                  <p:par>
-                    <p:cTn id="40" fill="hold">
-                      <p:stCondLst>
-                        <p:cond delay="indefinite"/>
-                      </p:stCondLst>
-                      <p:childTnLst>
-                        <p:par>
-                          <p:cTn id="41" fill="hold">
-                            <p:stCondLst>
-                              <p:cond delay="0"/>
-                            </p:stCondLst>
-                            <p:childTnLst>
-                              <p:par>
-                                <p:cTn id="42" presetID="16" presetClass="entr" presetSubtype="21" fill="hold" grpId="0" nodeType="clickEffect">
-                                  <p:stCondLst>
-                                    <p:cond delay="0"/>
-                                  </p:stCondLst>
-                                  <p:childTnLst>
-                                    <p:set>
-                                      <p:cBhvr>
-                                        <p:cTn id="43" dur="1" fill="hold">
-                                          <p:stCondLst>
-                                            <p:cond delay="0"/>
-                                          </p:stCondLst>
-                                        </p:cTn>
-                                        <p:tgtEl>
-                                          <p:spTgt spid="3">
-                                            <p:txEl>
-                                              <p:pRg st="5" end="5"/>
-                                            </p:txEl>
-                                          </p:spTgt>
-                                        </p:tgtEl>
-                                        <p:attrNameLst>
-                                          <p:attrName>style.visibility</p:attrName>
-                                        </p:attrNameLst>
-                                      </p:cBhvr>
-                                      <p:to>
-                                        <p:strVal val="visible"/>
-                                      </p:to>
-                                    </p:set>
-                                    <p:animEffect transition="in" filter="barn(inVertical)">
-                                      <p:cBhvr>
-                                        <p:cTn id="44" dur="500"/>
-                                        <p:tgtEl>
-                                          <p:spTgt spid="3">
-                                            <p:txEl>
-                                              <p:pRg st="5" end="5"/>
-                                            </p:txEl>
-                                          </p:spTgt>
-                                        </p:tgtEl>
-                                      </p:cBhvr>
-                                    </p:animEffect>
-                                  </p:childTnLst>
-                                </p:cTn>
-                              </p:par>
-                            </p:childTnLst>
-                          </p:cTn>
-                        </p:par>
-                      </p:childTnLst>
-                    </p:cTn>
-                  </p:par>
-                  <p:par>
-                    <p:cTn id="45" fill="hold">
-                      <p:stCondLst>
-                        <p:cond delay="indefinite"/>
-                      </p:stCondLst>
-                      <p:childTnLst>
-                        <p:par>
-                          <p:cTn id="46" fill="hold">
-                            <p:stCondLst>
-                              <p:cond delay="0"/>
-                            </p:stCondLst>
-                            <p:childTnLst>
-                              <p:par>
-                                <p:cTn id="47" presetID="16" presetClass="entr" presetSubtype="21" fill="hold" grpId="0" nodeType="clickEffect">
-                                  <p:stCondLst>
-                                    <p:cond delay="0"/>
-                                  </p:stCondLst>
-                                  <p:childTnLst>
-                                    <p:set>
-                                      <p:cBhvr>
-                                        <p:cTn id="48" dur="1" fill="hold">
-                                          <p:stCondLst>
-                                            <p:cond delay="0"/>
-                                          </p:stCondLst>
-                                        </p:cTn>
-                                        <p:tgtEl>
-                                          <p:spTgt spid="3">
-                                            <p:txEl>
-                                              <p:pRg st="7" end="7"/>
-                                            </p:txEl>
-                                          </p:spTgt>
-                                        </p:tgtEl>
-                                        <p:attrNameLst>
-                                          <p:attrName>style.visibility</p:attrName>
-                                        </p:attrNameLst>
-                                      </p:cBhvr>
-                                      <p:to>
-                                        <p:strVal val="visible"/>
-                                      </p:to>
-                                    </p:set>
-                                    <p:animEffect transition="in" filter="barn(inVertical)">
-                                      <p:cBhvr>
-                                        <p:cTn id="49" dur="500"/>
-                                        <p:tgtEl>
-                                          <p:spTgt spid="3">
-                                            <p:txEl>
-                                              <p:pRg st="7" end="7"/>
-                                            </p:txEl>
-                                          </p:spTgt>
+                                          <p:spTgt spid="5"/>
                                         </p:tgtEl>
                                       </p:cBhvr>
                                     </p:animEffect>
@@ -7959,15 +7446,292 @@
       </p:par>
     </p:tnLst>
     <p:bldLst>
-      <p:bldP spid="3" grpId="0" uiExpand="1" build="p"/>
-      <p:bldP spid="8" grpId="0"/>
-      <p:bldP spid="2" grpId="0" animBg="1"/>
+      <p:bldP spid="5" grpId="0"/>
     </p:bldLst>
   </p:timing>
 </p:sld>
 </file>
 
-<file path=ppt/slides/slide10.xml><?xml version="1.0" encoding="utf-8"?>
+<file path=ppt/slides/slide11.xml><?xml version="1.0" encoding="utf-8"?>
+<p:sld xmlns:a="http://schemas.openxmlformats.org/drawingml/2006/main" xmlns:r="http://schemas.openxmlformats.org/officeDocument/2006/relationships" xmlns:p="http://schemas.openxmlformats.org/presentationml/2006/main">
+  <p:cSld>
+    <p:spTree>
+      <p:nvGrpSpPr>
+        <p:cNvPr id="1" name=""/>
+        <p:cNvGrpSpPr/>
+        <p:nvPr/>
+      </p:nvGrpSpPr>
+      <p:grpSpPr>
+        <a:xfrm>
+          <a:off x="0" y="0"/>
+          <a:ext cx="0" cy="0"/>
+          <a:chOff x="0" y="0"/>
+          <a:chExt cx="0" cy="0"/>
+        </a:xfrm>
+      </p:grpSpPr>
+      <p:sp>
+        <p:nvSpPr>
+          <p:cNvPr id="5" name="Rectangle 4"/>
+          <p:cNvSpPr/>
+          <p:nvPr/>
+        </p:nvSpPr>
+        <p:spPr>
+          <a:xfrm>
+            <a:off x="1219201" y="278693"/>
+            <a:ext cx="7333672" cy="707886"/>
+          </a:xfrm>
+          <a:prstGeom prst="rect">
+            <a:avLst/>
+          </a:prstGeom>
+          <a:noFill/>
+        </p:spPr>
+        <p:txBody>
+          <a:bodyPr wrap="square" lIns="91440" tIns="45720" rIns="91440" bIns="45720">
+            <a:spAutoFit/>
+          </a:bodyPr>
+          <a:lstStyle/>
+          <a:p>
+            <a:pPr algn="ctr"/>
+            <a:r>
+              <a:rPr lang="en-US" sz="4000" dirty="0">
+                <a:ln w="0"/>
+                <a:gradFill>
+                  <a:gsLst>
+                    <a:gs pos="0">
+                      <a:schemeClr val="accent5">
+                        <a:lumMod val="50000"/>
+                      </a:schemeClr>
+                    </a:gs>
+                    <a:gs pos="50000">
+                      <a:schemeClr val="accent5"/>
+                    </a:gs>
+                    <a:gs pos="100000">
+                      <a:schemeClr val="accent5">
+                        <a:lumMod val="60000"/>
+                        <a:lumOff val="40000"/>
+                      </a:schemeClr>
+                    </a:gs>
+                  </a:gsLst>
+                  <a:lin ang="5400000"/>
+                </a:gradFill>
+                <a:effectLst>
+                  <a:reflection blurRad="6350" stA="53000" endA="300" endPos="35500" dir="5400000" sy="-90000" algn="bl" rotWithShape="0"/>
+                </a:effectLst>
+                <a:latin typeface="Times New Roman" panose="02020603050405020304" pitchFamily="18" charset="0"/>
+                <a:cs typeface="Times New Roman" panose="02020603050405020304" pitchFamily="18" charset="0"/>
+              </a:rPr>
+              <a:t>V : FORM ỨNG DỤNG</a:t>
+            </a:r>
+            <a:endParaRPr lang="en-US" sz="4000" b="0" cap="none" spc="0" dirty="0">
+              <a:ln w="0"/>
+              <a:gradFill>
+                <a:gsLst>
+                  <a:gs pos="0">
+                    <a:schemeClr val="accent5">
+                      <a:lumMod val="50000"/>
+                    </a:schemeClr>
+                  </a:gs>
+                  <a:gs pos="50000">
+                    <a:schemeClr val="accent5"/>
+                  </a:gs>
+                  <a:gs pos="100000">
+                    <a:schemeClr val="accent5">
+                      <a:lumMod val="60000"/>
+                      <a:lumOff val="40000"/>
+                    </a:schemeClr>
+                  </a:gs>
+                </a:gsLst>
+                <a:lin ang="5400000"/>
+              </a:gradFill>
+              <a:effectLst>
+                <a:reflection blurRad="6350" stA="53000" endA="300" endPos="35500" dir="5400000" sy="-90000" algn="bl" rotWithShape="0"/>
+              </a:effectLst>
+              <a:latin typeface="Times New Roman" panose="02020603050405020304" pitchFamily="18" charset="0"/>
+              <a:cs typeface="Times New Roman" panose="02020603050405020304" pitchFamily="18" charset="0"/>
+            </a:endParaRPr>
+          </a:p>
+        </p:txBody>
+      </p:sp>
+      <p:sp>
+        <p:nvSpPr>
+          <p:cNvPr id="8" name="TextBox 7">
+            <a:extLst>
+              <a:ext uri="{FF2B5EF4-FFF2-40B4-BE49-F238E27FC236}">
+                <a16:creationId xmlns:a16="http://schemas.microsoft.com/office/drawing/2014/main" id="{1DC3E2F0-DDE7-27D4-D616-E6FA31242FBC}"/>
+              </a:ext>
+            </a:extLst>
+          </p:cNvPr>
+          <p:cNvSpPr txBox="1"/>
+          <p:nvPr/>
+        </p:nvSpPr>
+        <p:spPr>
+          <a:xfrm>
+            <a:off x="2037347" y="1411705"/>
+            <a:ext cx="5470358" cy="369332"/>
+          </a:xfrm>
+          <a:prstGeom prst="rect">
+            <a:avLst/>
+          </a:prstGeom>
+          <a:noFill/>
+        </p:spPr>
+        <p:txBody>
+          <a:bodyPr wrap="square" rtlCol="0">
+            <a:spAutoFit/>
+          </a:bodyPr>
+          <a:lstStyle/>
+          <a:p>
+            <a:pPr algn="ctr"/>
+            <a:r>
+              <a:rPr lang="en-US" dirty="0"/>
+              <a:t>FORM TRANG CHỦ</a:t>
+            </a:r>
+          </a:p>
+        </p:txBody>
+      </p:sp>
+      <p:pic>
+        <p:nvPicPr>
+          <p:cNvPr id="4" name="Content Placeholder 3" descr="A screenshot of a computer&#10;&#10;Description automatically generated">
+            <a:extLst>
+              <a:ext uri="{FF2B5EF4-FFF2-40B4-BE49-F238E27FC236}">
+                <a16:creationId xmlns:a16="http://schemas.microsoft.com/office/drawing/2014/main" id="{47845A03-9A28-04FB-2D07-AE2DA4D5FC73}"/>
+              </a:ext>
+            </a:extLst>
+          </p:cNvPr>
+          <p:cNvPicPr>
+            <a:picLocks noGrp="1" noChangeAspect="1"/>
+          </p:cNvPicPr>
+          <p:nvPr>
+            <p:ph idx="1"/>
+          </p:nvPr>
+        </p:nvPicPr>
+        <p:blipFill>
+          <a:blip r:embed="rId2"/>
+          <a:stretch>
+            <a:fillRect/>
+          </a:stretch>
+        </p:blipFill>
+        <p:spPr>
+          <a:xfrm>
+            <a:off x="1524168" y="2160588"/>
+            <a:ext cx="6903701" cy="3881437"/>
+          </a:xfrm>
+          <a:prstGeom prst="rect">
+            <a:avLst/>
+          </a:prstGeom>
+        </p:spPr>
+      </p:pic>
+    </p:spTree>
+    <p:extLst>
+      <p:ext uri="{BB962C8B-B14F-4D97-AF65-F5344CB8AC3E}">
+        <p14:creationId xmlns:p14="http://schemas.microsoft.com/office/powerpoint/2010/main" val="2072202467"/>
+      </p:ext>
+    </p:extLst>
+  </p:cSld>
+  <p:clrMapOvr>
+    <a:masterClrMapping/>
+  </p:clrMapOvr>
+  <mc:AlternateContent xmlns:mc="http://schemas.openxmlformats.org/markup-compatibility/2006" xmlns:p14="http://schemas.microsoft.com/office/powerpoint/2010/main">
+    <mc:Choice Requires="p14">
+      <p:transition spd="med" p14:dur="700">
+        <p:fade/>
+      </p:transition>
+    </mc:Choice>
+    <mc:Fallback xmlns="">
+      <p:transition spd="med">
+        <p:fade/>
+      </p:transition>
+    </mc:Fallback>
+  </mc:AlternateContent>
+  <p:timing>
+    <p:tnLst>
+      <p:par>
+        <p:cTn id="1" dur="indefinite" restart="never" nodeType="tmRoot">
+          <p:childTnLst>
+            <p:seq concurrent="1" nextAc="seek">
+              <p:cTn id="2" dur="indefinite" nodeType="mainSeq">
+                <p:childTnLst>
+                  <p:par>
+                    <p:cTn id="3" fill="hold">
+                      <p:stCondLst>
+                        <p:cond delay="indefinite"/>
+                      </p:stCondLst>
+                      <p:childTnLst>
+                        <p:par>
+                          <p:cTn id="4" fill="hold">
+                            <p:stCondLst>
+                              <p:cond delay="0"/>
+                            </p:stCondLst>
+                            <p:childTnLst>
+                              <p:par>
+                                <p:cTn id="5" presetID="6" presetClass="entr" presetSubtype="16" fill="hold" grpId="0" nodeType="clickEffect">
+                                  <p:stCondLst>
+                                    <p:cond delay="0"/>
+                                  </p:stCondLst>
+                                  <p:childTnLst>
+                                    <p:set>
+                                      <p:cBhvr>
+                                        <p:cTn id="6" dur="1" fill="hold">
+                                          <p:stCondLst>
+                                            <p:cond delay="0"/>
+                                          </p:stCondLst>
+                                        </p:cTn>
+                                        <p:tgtEl>
+                                          <p:spTgt spid="5"/>
+                                        </p:tgtEl>
+                                        <p:attrNameLst>
+                                          <p:attrName>style.visibility</p:attrName>
+                                        </p:attrNameLst>
+                                      </p:cBhvr>
+                                      <p:to>
+                                        <p:strVal val="visible"/>
+                                      </p:to>
+                                    </p:set>
+                                    <p:animEffect transition="in" filter="circle(in)">
+                                      <p:cBhvr>
+                                        <p:cTn id="7" dur="2000"/>
+                                        <p:tgtEl>
+                                          <p:spTgt spid="5"/>
+                                        </p:tgtEl>
+                                      </p:cBhvr>
+                                    </p:animEffect>
+                                  </p:childTnLst>
+                                </p:cTn>
+                              </p:par>
+                            </p:childTnLst>
+                          </p:cTn>
+                        </p:par>
+                      </p:childTnLst>
+                    </p:cTn>
+                  </p:par>
+                </p:childTnLst>
+              </p:cTn>
+              <p:prevCondLst>
+                <p:cond evt="onPrev" delay="0">
+                  <p:tgtEl>
+                    <p:sldTgt/>
+                  </p:tgtEl>
+                </p:cond>
+              </p:prevCondLst>
+              <p:nextCondLst>
+                <p:cond evt="onNext" delay="0">
+                  <p:tgtEl>
+                    <p:sldTgt/>
+                  </p:tgtEl>
+                </p:cond>
+              </p:nextCondLst>
+            </p:seq>
+          </p:childTnLst>
+        </p:cTn>
+      </p:par>
+    </p:tnLst>
+    <p:bldLst>
+      <p:bldP spid="5" grpId="0"/>
+    </p:bldLst>
+  </p:timing>
+</p:sld>
+</file>
+
+<file path=ppt/slides/slide12.xml><?xml version="1.0" encoding="utf-8"?>
 <p:sld xmlns:a="http://schemas.openxmlformats.org/drawingml/2006/main" xmlns:r="http://schemas.openxmlformats.org/officeDocument/2006/relationships" xmlns:p="http://schemas.openxmlformats.org/presentationml/2006/main">
   <p:cSld>
     <p:spTree>
@@ -8246,7 +8010,7 @@
 </p:sld>
 </file>
 
-<file path=ppt/slides/slide11.xml><?xml version="1.0" encoding="utf-8"?>
+<file path=ppt/slides/slide13.xml><?xml version="1.0" encoding="utf-8"?>
 <p:sld xmlns:a="http://schemas.openxmlformats.org/drawingml/2006/main" xmlns:r="http://schemas.openxmlformats.org/officeDocument/2006/relationships" xmlns:p="http://schemas.openxmlformats.org/presentationml/2006/main">
   <p:cSld>
     <p:spTree>
@@ -8548,7 +8312,7 @@
 </p:sld>
 </file>
 
-<file path=ppt/slides/slide12.xml><?xml version="1.0" encoding="utf-8"?>
+<file path=ppt/slides/slide14.xml><?xml version="1.0" encoding="utf-8"?>
 <p:sld xmlns:a="http://schemas.openxmlformats.org/drawingml/2006/main" xmlns:r="http://schemas.openxmlformats.org/officeDocument/2006/relationships" xmlns:p="http://schemas.openxmlformats.org/presentationml/2006/main">
   <p:cSld>
     <p:spTree>
@@ -8850,7 +8614,7 @@
 </p:sld>
 </file>
 
-<file path=ppt/slides/slide13.xml><?xml version="1.0" encoding="utf-8"?>
+<file path=ppt/slides/slide15.xml><?xml version="1.0" encoding="utf-8"?>
 <p:sld xmlns:a="http://schemas.openxmlformats.org/drawingml/2006/main" xmlns:r="http://schemas.openxmlformats.org/officeDocument/2006/relationships" xmlns:p="http://schemas.openxmlformats.org/presentationml/2006/main">
   <p:cSld>
     <p:spTree>
@@ -9129,7 +8893,7 @@
 </p:sld>
 </file>
 
-<file path=ppt/slides/slide14.xml><?xml version="1.0" encoding="utf-8"?>
+<file path=ppt/slides/slide16.xml><?xml version="1.0" encoding="utf-8"?>
 <p:sld xmlns:a="http://schemas.openxmlformats.org/drawingml/2006/main" xmlns:r="http://schemas.openxmlformats.org/officeDocument/2006/relationships" xmlns:p="http://schemas.openxmlformats.org/presentationml/2006/main">
   <p:cSld>
     <p:spTree>
@@ -9408,7 +9172,7 @@
 </p:sld>
 </file>
 
-<file path=ppt/slides/slide15.xml><?xml version="1.0" encoding="utf-8"?>
+<file path=ppt/slides/slide17.xml><?xml version="1.0" encoding="utf-8"?>
 <p:sld xmlns:a="http://schemas.openxmlformats.org/drawingml/2006/main" xmlns:r="http://schemas.openxmlformats.org/officeDocument/2006/relationships" xmlns:p="http://schemas.openxmlformats.org/presentationml/2006/main">
   <p:cSld>
     <p:spTree>
@@ -9698,7 +9462,7 @@
 </p:sld>
 </file>
 
-<file path=ppt/slides/slide16.xml><?xml version="1.0" encoding="utf-8"?>
+<file path=ppt/slides/slide18.xml><?xml version="1.0" encoding="utf-8"?>
 <p:sld xmlns:a="http://schemas.openxmlformats.org/drawingml/2006/main" xmlns:r="http://schemas.openxmlformats.org/officeDocument/2006/relationships" xmlns:p="http://schemas.openxmlformats.org/presentationml/2006/main">
   <p:cSld>
     <p:spTree>
@@ -9988,7 +9752,7 @@
 </p:sld>
 </file>
 
-<file path=ppt/slides/slide17.xml><?xml version="1.0" encoding="utf-8"?>
+<file path=ppt/slides/slide19.xml><?xml version="1.0" encoding="utf-8"?>
 <p:sld xmlns:a="http://schemas.openxmlformats.org/drawingml/2006/main" xmlns:r="http://schemas.openxmlformats.org/officeDocument/2006/relationships" xmlns:p="http://schemas.openxmlformats.org/presentationml/2006/main">
   <p:cSld>
     <p:spTree>
@@ -10278,7 +10042,1109 @@
 </p:sld>
 </file>
 
-<file path=ppt/slides/slide18.xml><?xml version="1.0" encoding="utf-8"?>
+<file path=ppt/slides/slide2.xml><?xml version="1.0" encoding="utf-8"?>
+<p:sld xmlns:a="http://schemas.openxmlformats.org/drawingml/2006/main" xmlns:r="http://schemas.openxmlformats.org/officeDocument/2006/relationships" xmlns:p="http://schemas.openxmlformats.org/presentationml/2006/main">
+  <p:cSld>
+    <p:spTree>
+      <p:nvGrpSpPr>
+        <p:cNvPr id="1" name=""/>
+        <p:cNvGrpSpPr/>
+        <p:nvPr/>
+      </p:nvGrpSpPr>
+      <p:grpSpPr>
+        <a:xfrm>
+          <a:off x="0" y="0"/>
+          <a:ext cx="0" cy="0"/>
+          <a:chOff x="0" y="0"/>
+          <a:chExt cx="0" cy="0"/>
+        </a:xfrm>
+      </p:grpSpPr>
+      <p:sp>
+        <p:nvSpPr>
+          <p:cNvPr id="9" name="Rectangle 8">
+            <a:extLst>
+              <a:ext uri="{FF2B5EF4-FFF2-40B4-BE49-F238E27FC236}">
+                <a16:creationId xmlns:a16="http://schemas.microsoft.com/office/drawing/2014/main" id="{39E72512-3029-D6FE-15D7-4A4D0D6F4EB5}"/>
+              </a:ext>
+            </a:extLst>
+          </p:cNvPr>
+          <p:cNvSpPr/>
+          <p:nvPr/>
+        </p:nvSpPr>
+        <p:spPr>
+          <a:xfrm>
+            <a:off x="821323" y="-940278"/>
+            <a:ext cx="9787466" cy="2308324"/>
+          </a:xfrm>
+          <a:prstGeom prst="rect">
+            <a:avLst/>
+          </a:prstGeom>
+          <a:noFill/>
+        </p:spPr>
+        <p:txBody>
+          <a:bodyPr wrap="square" lIns="91440" tIns="45720" rIns="91440" bIns="45720" anchor="ctr">
+            <a:spAutoFit/>
+          </a:bodyPr>
+          <a:lstStyle/>
+          <a:p>
+            <a:pPr algn="ctr"/>
+            <a:endParaRPr lang="en-US" sz="7200" b="1" dirty="0">
+              <a:ln w="13462">
+                <a:solidFill>
+                  <a:schemeClr val="bg1"/>
+                </a:solidFill>
+                <a:prstDash val="solid"/>
+              </a:ln>
+              <a:solidFill>
+                <a:schemeClr val="tx1">
+                  <a:lumMod val="85000"/>
+                  <a:lumOff val="15000"/>
+                </a:schemeClr>
+              </a:solidFill>
+              <a:effectLst>
+                <a:outerShdw dist="38100" dir="2700000" algn="bl" rotWithShape="0">
+                  <a:schemeClr val="accent5"/>
+                </a:outerShdw>
+              </a:effectLst>
+              <a:latin typeface="Times New Roman" panose="02020603050405020304" pitchFamily="18" charset="0"/>
+              <a:cs typeface="Times New Roman" panose="02020603050405020304" pitchFamily="18" charset="0"/>
+            </a:endParaRPr>
+          </a:p>
+          <a:p>
+            <a:r>
+              <a:rPr lang="en-US" sz="7200" b="1" dirty="0">
+                <a:ln w="13462">
+                  <a:solidFill>
+                    <a:schemeClr val="bg1"/>
+                  </a:solidFill>
+                  <a:prstDash val="solid"/>
+                </a:ln>
+                <a:solidFill>
+                  <a:schemeClr val="tx1">
+                    <a:lumMod val="85000"/>
+                    <a:lumOff val="15000"/>
+                  </a:schemeClr>
+                </a:solidFill>
+                <a:effectLst>
+                  <a:outerShdw dist="38100" dir="2700000" algn="bl" rotWithShape="0">
+                    <a:schemeClr val="accent5"/>
+                  </a:outerShdw>
+                </a:effectLst>
+                <a:latin typeface="Times New Roman" panose="02020603050405020304" pitchFamily="18" charset="0"/>
+                <a:cs typeface="Times New Roman" panose="02020603050405020304" pitchFamily="18" charset="0"/>
+              </a:rPr>
+              <a:t>Thành </a:t>
+            </a:r>
+            <a:r>
+              <a:rPr lang="en-US" sz="7200" b="1" dirty="0" err="1">
+                <a:ln w="13462">
+                  <a:solidFill>
+                    <a:schemeClr val="bg1"/>
+                  </a:solidFill>
+                  <a:prstDash val="solid"/>
+                </a:ln>
+                <a:solidFill>
+                  <a:schemeClr val="tx1">
+                    <a:lumMod val="85000"/>
+                    <a:lumOff val="15000"/>
+                  </a:schemeClr>
+                </a:solidFill>
+                <a:effectLst>
+                  <a:outerShdw dist="38100" dir="2700000" algn="bl" rotWithShape="0">
+                    <a:schemeClr val="accent5"/>
+                  </a:outerShdw>
+                </a:effectLst>
+                <a:latin typeface="Times New Roman" panose="02020603050405020304" pitchFamily="18" charset="0"/>
+                <a:cs typeface="Times New Roman" panose="02020603050405020304" pitchFamily="18" charset="0"/>
+              </a:rPr>
+              <a:t>viên</a:t>
+            </a:r>
+            <a:r>
+              <a:rPr lang="en-US" sz="7200" b="1" dirty="0">
+                <a:ln w="13462">
+                  <a:solidFill>
+                    <a:schemeClr val="bg1"/>
+                  </a:solidFill>
+                  <a:prstDash val="solid"/>
+                </a:ln>
+                <a:solidFill>
+                  <a:schemeClr val="tx1">
+                    <a:lumMod val="85000"/>
+                    <a:lumOff val="15000"/>
+                  </a:schemeClr>
+                </a:solidFill>
+                <a:effectLst>
+                  <a:outerShdw dist="38100" dir="2700000" algn="bl" rotWithShape="0">
+                    <a:schemeClr val="accent5"/>
+                  </a:outerShdw>
+                </a:effectLst>
+                <a:latin typeface="Times New Roman" panose="02020603050405020304" pitchFamily="18" charset="0"/>
+                <a:cs typeface="Times New Roman" panose="02020603050405020304" pitchFamily="18" charset="0"/>
+              </a:rPr>
+              <a:t>:</a:t>
+            </a:r>
+          </a:p>
+        </p:txBody>
+      </p:sp>
+      <p:sp>
+        <p:nvSpPr>
+          <p:cNvPr id="10" name="TextBox 9">
+            <a:extLst>
+              <a:ext uri="{FF2B5EF4-FFF2-40B4-BE49-F238E27FC236}">
+                <a16:creationId xmlns:a16="http://schemas.microsoft.com/office/drawing/2014/main" id="{A9874BA1-DCE9-38A5-D822-6D3BB64D95CD}"/>
+              </a:ext>
+            </a:extLst>
+          </p:cNvPr>
+          <p:cNvSpPr txBox="1"/>
+          <p:nvPr/>
+        </p:nvSpPr>
+        <p:spPr>
+          <a:xfrm>
+            <a:off x="649445" y="2844225"/>
+            <a:ext cx="4149595" cy="584775"/>
+          </a:xfrm>
+          <a:prstGeom prst="rect">
+            <a:avLst/>
+          </a:prstGeom>
+          <a:noFill/>
+        </p:spPr>
+        <p:txBody>
+          <a:bodyPr wrap="square" rtlCol="0">
+            <a:spAutoFit/>
+          </a:bodyPr>
+          <a:lstStyle/>
+          <a:p>
+            <a:r>
+              <a:rPr lang="en-US" sz="3200" dirty="0" err="1">
+                <a:solidFill>
+                  <a:schemeClr val="tx1">
+                    <a:lumMod val="85000"/>
+                    <a:lumOff val="15000"/>
+                  </a:schemeClr>
+                </a:solidFill>
+                <a:latin typeface="Times New Roman" panose="02020603050405020304" pitchFamily="18" charset="0"/>
+                <a:cs typeface="Times New Roman" panose="02020603050405020304" pitchFamily="18" charset="0"/>
+              </a:rPr>
+              <a:t>Đặng</a:t>
+            </a:r>
+            <a:r>
+              <a:rPr lang="en-US" sz="3200" dirty="0">
+                <a:solidFill>
+                  <a:schemeClr val="tx1">
+                    <a:lumMod val="85000"/>
+                    <a:lumOff val="15000"/>
+                  </a:schemeClr>
+                </a:solidFill>
+                <a:latin typeface="Times New Roman" panose="02020603050405020304" pitchFamily="18" charset="0"/>
+                <a:cs typeface="Times New Roman" panose="02020603050405020304" pitchFamily="18" charset="0"/>
+              </a:rPr>
+              <a:t> Minh </a:t>
+            </a:r>
+            <a:r>
+              <a:rPr lang="en-US" sz="3200" dirty="0" err="1">
+                <a:solidFill>
+                  <a:schemeClr val="tx1">
+                    <a:lumMod val="85000"/>
+                    <a:lumOff val="15000"/>
+                  </a:schemeClr>
+                </a:solidFill>
+                <a:latin typeface="Times New Roman" panose="02020603050405020304" pitchFamily="18" charset="0"/>
+                <a:cs typeface="Times New Roman" panose="02020603050405020304" pitchFamily="18" charset="0"/>
+              </a:rPr>
+              <a:t>Nghĩa</a:t>
+            </a:r>
+            <a:r>
+              <a:rPr lang="en-US" sz="3200" dirty="0">
+                <a:solidFill>
+                  <a:schemeClr val="tx1">
+                    <a:lumMod val="85000"/>
+                    <a:lumOff val="15000"/>
+                  </a:schemeClr>
+                </a:solidFill>
+                <a:latin typeface="Times New Roman" panose="02020603050405020304" pitchFamily="18" charset="0"/>
+                <a:cs typeface="Times New Roman" panose="02020603050405020304" pitchFamily="18" charset="0"/>
+              </a:rPr>
+              <a:t> (C) </a:t>
+            </a:r>
+          </a:p>
+        </p:txBody>
+      </p:sp>
+      <p:sp>
+        <p:nvSpPr>
+          <p:cNvPr id="11" name="TextBox 10">
+            <a:extLst>
+              <a:ext uri="{FF2B5EF4-FFF2-40B4-BE49-F238E27FC236}">
+                <a16:creationId xmlns:a16="http://schemas.microsoft.com/office/drawing/2014/main" id="{3DC94FD8-32B7-1733-5B5F-522336B665B6}"/>
+              </a:ext>
+            </a:extLst>
+          </p:cNvPr>
+          <p:cNvSpPr txBox="1"/>
+          <p:nvPr/>
+        </p:nvSpPr>
+        <p:spPr>
+          <a:xfrm>
+            <a:off x="1537874" y="1987690"/>
+            <a:ext cx="1947847" cy="584775"/>
+          </a:xfrm>
+          <a:prstGeom prst="rect">
+            <a:avLst/>
+          </a:prstGeom>
+          <a:noFill/>
+        </p:spPr>
+        <p:txBody>
+          <a:bodyPr wrap="square" rtlCol="0">
+            <a:spAutoFit/>
+          </a:bodyPr>
+          <a:lstStyle/>
+          <a:p>
+            <a:pPr algn="ctr"/>
+            <a:r>
+              <a:rPr lang="en-US" sz="3200" b="1" dirty="0" err="1">
+                <a:solidFill>
+                  <a:schemeClr val="tx1">
+                    <a:lumMod val="85000"/>
+                    <a:lumOff val="15000"/>
+                  </a:schemeClr>
+                </a:solidFill>
+                <a:latin typeface="Times New Roman" panose="02020603050405020304" pitchFamily="18" charset="0"/>
+                <a:cs typeface="Times New Roman" panose="02020603050405020304" pitchFamily="18" charset="0"/>
+              </a:rPr>
+              <a:t>Họ</a:t>
+            </a:r>
+            <a:r>
+              <a:rPr lang="en-US" sz="3200" b="1" dirty="0">
+                <a:solidFill>
+                  <a:schemeClr val="tx1">
+                    <a:lumMod val="85000"/>
+                    <a:lumOff val="15000"/>
+                  </a:schemeClr>
+                </a:solidFill>
+                <a:latin typeface="Times New Roman" panose="02020603050405020304" pitchFamily="18" charset="0"/>
+                <a:cs typeface="Times New Roman" panose="02020603050405020304" pitchFamily="18" charset="0"/>
+              </a:rPr>
+              <a:t> </a:t>
+            </a:r>
+            <a:r>
+              <a:rPr lang="en-US" sz="3200" b="1" dirty="0" err="1">
+                <a:solidFill>
+                  <a:schemeClr val="tx1">
+                    <a:lumMod val="85000"/>
+                    <a:lumOff val="15000"/>
+                  </a:schemeClr>
+                </a:solidFill>
+                <a:latin typeface="Times New Roman" panose="02020603050405020304" pitchFamily="18" charset="0"/>
+                <a:cs typeface="Times New Roman" panose="02020603050405020304" pitchFamily="18" charset="0"/>
+              </a:rPr>
+              <a:t>và</a:t>
+            </a:r>
+            <a:r>
+              <a:rPr lang="en-US" sz="3200" b="1" dirty="0">
+                <a:solidFill>
+                  <a:schemeClr val="tx1">
+                    <a:lumMod val="85000"/>
+                    <a:lumOff val="15000"/>
+                  </a:schemeClr>
+                </a:solidFill>
+                <a:latin typeface="Times New Roman" panose="02020603050405020304" pitchFamily="18" charset="0"/>
+                <a:cs typeface="Times New Roman" panose="02020603050405020304" pitchFamily="18" charset="0"/>
+              </a:rPr>
+              <a:t> </a:t>
+            </a:r>
+            <a:r>
+              <a:rPr lang="en-US" sz="3200" b="1" dirty="0" err="1">
+                <a:solidFill>
+                  <a:schemeClr val="tx1">
+                    <a:lumMod val="85000"/>
+                    <a:lumOff val="15000"/>
+                  </a:schemeClr>
+                </a:solidFill>
+                <a:latin typeface="Times New Roman" panose="02020603050405020304" pitchFamily="18" charset="0"/>
+                <a:cs typeface="Times New Roman" panose="02020603050405020304" pitchFamily="18" charset="0"/>
+              </a:rPr>
+              <a:t>tên</a:t>
+            </a:r>
+            <a:endParaRPr lang="en-US" sz="3200" b="1" dirty="0">
+              <a:solidFill>
+                <a:schemeClr val="tx1">
+                  <a:lumMod val="85000"/>
+                  <a:lumOff val="15000"/>
+                </a:schemeClr>
+              </a:solidFill>
+              <a:latin typeface="Times New Roman" panose="02020603050405020304" pitchFamily="18" charset="0"/>
+              <a:cs typeface="Times New Roman" panose="02020603050405020304" pitchFamily="18" charset="0"/>
+            </a:endParaRPr>
+          </a:p>
+        </p:txBody>
+      </p:sp>
+      <p:sp>
+        <p:nvSpPr>
+          <p:cNvPr id="12" name="TextBox 11">
+            <a:extLst>
+              <a:ext uri="{FF2B5EF4-FFF2-40B4-BE49-F238E27FC236}">
+                <a16:creationId xmlns:a16="http://schemas.microsoft.com/office/drawing/2014/main" id="{E2F20437-90D8-8267-4B2D-21F1B86ACC6E}"/>
+              </a:ext>
+            </a:extLst>
+          </p:cNvPr>
+          <p:cNvSpPr txBox="1"/>
+          <p:nvPr/>
+        </p:nvSpPr>
+        <p:spPr>
+          <a:xfrm>
+            <a:off x="5152566" y="1983873"/>
+            <a:ext cx="1781696" cy="584775"/>
+          </a:xfrm>
+          <a:prstGeom prst="rect">
+            <a:avLst/>
+          </a:prstGeom>
+          <a:noFill/>
+        </p:spPr>
+        <p:txBody>
+          <a:bodyPr wrap="square" rtlCol="0">
+            <a:spAutoFit/>
+          </a:bodyPr>
+          <a:lstStyle/>
+          <a:p>
+            <a:pPr algn="ctr"/>
+            <a:r>
+              <a:rPr lang="en-US" sz="3200" b="1" dirty="0">
+                <a:solidFill>
+                  <a:schemeClr val="tx1">
+                    <a:lumMod val="85000"/>
+                    <a:lumOff val="15000"/>
+                  </a:schemeClr>
+                </a:solidFill>
+                <a:latin typeface="Times New Roman" panose="02020603050405020304" pitchFamily="18" charset="0"/>
+                <a:cs typeface="Times New Roman" panose="02020603050405020304" pitchFamily="18" charset="0"/>
+              </a:rPr>
+              <a:t>MSSV</a:t>
+            </a:r>
+          </a:p>
+        </p:txBody>
+      </p:sp>
+      <p:sp>
+        <p:nvSpPr>
+          <p:cNvPr id="13" name="TextBox 12">
+            <a:extLst>
+              <a:ext uri="{FF2B5EF4-FFF2-40B4-BE49-F238E27FC236}">
+                <a16:creationId xmlns:a16="http://schemas.microsoft.com/office/drawing/2014/main" id="{DE97FC6A-FF1B-8A74-E635-7C94C2D67614}"/>
+              </a:ext>
+            </a:extLst>
+          </p:cNvPr>
+          <p:cNvSpPr txBox="1"/>
+          <p:nvPr/>
+        </p:nvSpPr>
+        <p:spPr>
+          <a:xfrm>
+            <a:off x="8038424" y="1973558"/>
+            <a:ext cx="1278660" cy="584775"/>
+          </a:xfrm>
+          <a:prstGeom prst="rect">
+            <a:avLst/>
+          </a:prstGeom>
+          <a:noFill/>
+        </p:spPr>
+        <p:txBody>
+          <a:bodyPr wrap="square" rtlCol="0">
+            <a:spAutoFit/>
+          </a:bodyPr>
+          <a:lstStyle/>
+          <a:p>
+            <a:pPr algn="ctr"/>
+            <a:r>
+              <a:rPr lang="en-US" sz="3200" b="1" dirty="0" err="1">
+                <a:solidFill>
+                  <a:schemeClr val="tx1">
+                    <a:lumMod val="85000"/>
+                    <a:lumOff val="15000"/>
+                  </a:schemeClr>
+                </a:solidFill>
+                <a:latin typeface="Times New Roman" panose="02020603050405020304" pitchFamily="18" charset="0"/>
+                <a:cs typeface="Times New Roman" panose="02020603050405020304" pitchFamily="18" charset="0"/>
+              </a:rPr>
+              <a:t>Lớp</a:t>
+            </a:r>
+            <a:endParaRPr lang="en-US" sz="3200" b="1" dirty="0">
+              <a:solidFill>
+                <a:schemeClr val="tx1">
+                  <a:lumMod val="85000"/>
+                  <a:lumOff val="15000"/>
+                </a:schemeClr>
+              </a:solidFill>
+              <a:latin typeface="Times New Roman" panose="02020603050405020304" pitchFamily="18" charset="0"/>
+              <a:cs typeface="Times New Roman" panose="02020603050405020304" pitchFamily="18" charset="0"/>
+            </a:endParaRPr>
+          </a:p>
+        </p:txBody>
+      </p:sp>
+      <p:sp>
+        <p:nvSpPr>
+          <p:cNvPr id="18" name="TextBox 17">
+            <a:extLst>
+              <a:ext uri="{FF2B5EF4-FFF2-40B4-BE49-F238E27FC236}">
+                <a16:creationId xmlns:a16="http://schemas.microsoft.com/office/drawing/2014/main" id="{A37E3601-C057-1496-FD9F-B13482C4F6C6}"/>
+              </a:ext>
+            </a:extLst>
+          </p:cNvPr>
+          <p:cNvSpPr txBox="1"/>
+          <p:nvPr/>
+        </p:nvSpPr>
+        <p:spPr>
+          <a:xfrm>
+            <a:off x="649445" y="3756256"/>
+            <a:ext cx="4149595" cy="584775"/>
+          </a:xfrm>
+          <a:prstGeom prst="rect">
+            <a:avLst/>
+          </a:prstGeom>
+          <a:noFill/>
+        </p:spPr>
+        <p:txBody>
+          <a:bodyPr wrap="square" rtlCol="0">
+            <a:spAutoFit/>
+          </a:bodyPr>
+          <a:lstStyle/>
+          <a:p>
+            <a:r>
+              <a:rPr lang="en-US" sz="3200" dirty="0" err="1">
+                <a:solidFill>
+                  <a:schemeClr val="tx1">
+                    <a:lumMod val="85000"/>
+                    <a:lumOff val="15000"/>
+                  </a:schemeClr>
+                </a:solidFill>
+                <a:latin typeface="Times New Roman" panose="02020603050405020304" pitchFamily="18" charset="0"/>
+                <a:cs typeface="Times New Roman" panose="02020603050405020304" pitchFamily="18" charset="0"/>
+              </a:rPr>
+              <a:t>Trương</a:t>
+            </a:r>
+            <a:r>
+              <a:rPr lang="en-US" sz="3200" dirty="0">
+                <a:solidFill>
+                  <a:schemeClr val="tx1">
+                    <a:lumMod val="85000"/>
+                    <a:lumOff val="15000"/>
+                  </a:schemeClr>
+                </a:solidFill>
+                <a:latin typeface="Times New Roman" panose="02020603050405020304" pitchFamily="18" charset="0"/>
+                <a:cs typeface="Times New Roman" panose="02020603050405020304" pitchFamily="18" charset="0"/>
+              </a:rPr>
+              <a:t> Quang </a:t>
+            </a:r>
+            <a:r>
+              <a:rPr lang="en-US" sz="3200" dirty="0" err="1">
+                <a:solidFill>
+                  <a:schemeClr val="tx1">
+                    <a:lumMod val="85000"/>
+                    <a:lumOff val="15000"/>
+                  </a:schemeClr>
+                </a:solidFill>
+                <a:latin typeface="Times New Roman" panose="02020603050405020304" pitchFamily="18" charset="0"/>
+                <a:cs typeface="Times New Roman" panose="02020603050405020304" pitchFamily="18" charset="0"/>
+              </a:rPr>
+              <a:t>Phát</a:t>
+            </a:r>
+            <a:endParaRPr lang="en-US" sz="3200" dirty="0">
+              <a:solidFill>
+                <a:schemeClr val="tx1">
+                  <a:lumMod val="85000"/>
+                  <a:lumOff val="15000"/>
+                </a:schemeClr>
+              </a:solidFill>
+              <a:latin typeface="Times New Roman" panose="02020603050405020304" pitchFamily="18" charset="0"/>
+              <a:cs typeface="Times New Roman" panose="02020603050405020304" pitchFamily="18" charset="0"/>
+            </a:endParaRPr>
+          </a:p>
+        </p:txBody>
+      </p:sp>
+      <p:sp>
+        <p:nvSpPr>
+          <p:cNvPr id="19" name="TextBox 18">
+            <a:extLst>
+              <a:ext uri="{FF2B5EF4-FFF2-40B4-BE49-F238E27FC236}">
+                <a16:creationId xmlns:a16="http://schemas.microsoft.com/office/drawing/2014/main" id="{F53B790C-8EBC-69FA-A455-07726F869D21}"/>
+              </a:ext>
+            </a:extLst>
+          </p:cNvPr>
+          <p:cNvSpPr txBox="1"/>
+          <p:nvPr/>
+        </p:nvSpPr>
+        <p:spPr>
+          <a:xfrm>
+            <a:off x="649445" y="4724512"/>
+            <a:ext cx="4149595" cy="584775"/>
+          </a:xfrm>
+          <a:prstGeom prst="rect">
+            <a:avLst/>
+          </a:prstGeom>
+          <a:noFill/>
+        </p:spPr>
+        <p:txBody>
+          <a:bodyPr wrap="square" rtlCol="0">
+            <a:spAutoFit/>
+          </a:bodyPr>
+          <a:lstStyle/>
+          <a:p>
+            <a:r>
+              <a:rPr lang="en-US" sz="3200" dirty="0" err="1">
+                <a:solidFill>
+                  <a:schemeClr val="tx1">
+                    <a:lumMod val="85000"/>
+                    <a:lumOff val="15000"/>
+                  </a:schemeClr>
+                </a:solidFill>
+                <a:latin typeface="Times New Roman" panose="02020603050405020304" pitchFamily="18" charset="0"/>
+                <a:cs typeface="Times New Roman" panose="02020603050405020304" pitchFamily="18" charset="0"/>
+              </a:rPr>
+              <a:t>Nguyễn</a:t>
+            </a:r>
+            <a:r>
+              <a:rPr lang="en-US" sz="3200" dirty="0">
+                <a:solidFill>
+                  <a:schemeClr val="tx1">
+                    <a:lumMod val="85000"/>
+                    <a:lumOff val="15000"/>
+                  </a:schemeClr>
+                </a:solidFill>
+                <a:latin typeface="Times New Roman" panose="02020603050405020304" pitchFamily="18" charset="0"/>
+                <a:cs typeface="Times New Roman" panose="02020603050405020304" pitchFamily="18" charset="0"/>
+              </a:rPr>
+              <a:t> Chí </a:t>
+            </a:r>
+            <a:r>
+              <a:rPr lang="en-US" sz="3200" dirty="0" err="1">
+                <a:solidFill>
+                  <a:schemeClr val="tx1">
+                    <a:lumMod val="85000"/>
+                    <a:lumOff val="15000"/>
+                  </a:schemeClr>
+                </a:solidFill>
+                <a:latin typeface="Times New Roman" panose="02020603050405020304" pitchFamily="18" charset="0"/>
+                <a:cs typeface="Times New Roman" panose="02020603050405020304" pitchFamily="18" charset="0"/>
+              </a:rPr>
+              <a:t>Đức</a:t>
+            </a:r>
+            <a:endParaRPr lang="en-US" sz="3200" dirty="0">
+              <a:solidFill>
+                <a:schemeClr val="tx1">
+                  <a:lumMod val="85000"/>
+                  <a:lumOff val="15000"/>
+                </a:schemeClr>
+              </a:solidFill>
+              <a:latin typeface="Times New Roman" panose="02020603050405020304" pitchFamily="18" charset="0"/>
+              <a:cs typeface="Times New Roman" panose="02020603050405020304" pitchFamily="18" charset="0"/>
+            </a:endParaRPr>
+          </a:p>
+        </p:txBody>
+      </p:sp>
+      <p:sp>
+        <p:nvSpPr>
+          <p:cNvPr id="20" name="TextBox 19">
+            <a:extLst>
+              <a:ext uri="{FF2B5EF4-FFF2-40B4-BE49-F238E27FC236}">
+                <a16:creationId xmlns:a16="http://schemas.microsoft.com/office/drawing/2014/main" id="{CF618C46-8AA6-346C-A4FA-F9B288274CBD}"/>
+              </a:ext>
+            </a:extLst>
+          </p:cNvPr>
+          <p:cNvSpPr txBox="1"/>
+          <p:nvPr/>
+        </p:nvSpPr>
+        <p:spPr>
+          <a:xfrm>
+            <a:off x="649445" y="5715685"/>
+            <a:ext cx="4149595" cy="584775"/>
+          </a:xfrm>
+          <a:prstGeom prst="rect">
+            <a:avLst/>
+          </a:prstGeom>
+          <a:noFill/>
+        </p:spPr>
+        <p:txBody>
+          <a:bodyPr wrap="square" rtlCol="0">
+            <a:spAutoFit/>
+          </a:bodyPr>
+          <a:lstStyle/>
+          <a:p>
+            <a:r>
+              <a:rPr lang="en-US" sz="3200" dirty="0" err="1">
+                <a:solidFill>
+                  <a:schemeClr val="tx1">
+                    <a:lumMod val="85000"/>
+                    <a:lumOff val="15000"/>
+                  </a:schemeClr>
+                </a:solidFill>
+                <a:latin typeface="Times New Roman" panose="02020603050405020304" pitchFamily="18" charset="0"/>
+                <a:cs typeface="Times New Roman" panose="02020603050405020304" pitchFamily="18" charset="0"/>
+              </a:rPr>
+              <a:t>Nguyễn</a:t>
+            </a:r>
+            <a:r>
+              <a:rPr lang="en-US" sz="3200" dirty="0">
+                <a:solidFill>
+                  <a:schemeClr val="tx1">
+                    <a:lumMod val="85000"/>
+                    <a:lumOff val="15000"/>
+                  </a:schemeClr>
+                </a:solidFill>
+                <a:latin typeface="Times New Roman" panose="02020603050405020304" pitchFamily="18" charset="0"/>
+                <a:cs typeface="Times New Roman" panose="02020603050405020304" pitchFamily="18" charset="0"/>
+              </a:rPr>
+              <a:t> </a:t>
+            </a:r>
+            <a:r>
+              <a:rPr lang="en-US" sz="3200" dirty="0" err="1">
+                <a:solidFill>
+                  <a:schemeClr val="tx1">
+                    <a:lumMod val="85000"/>
+                    <a:lumOff val="15000"/>
+                  </a:schemeClr>
+                </a:solidFill>
+                <a:latin typeface="Times New Roman" panose="02020603050405020304" pitchFamily="18" charset="0"/>
+                <a:cs typeface="Times New Roman" panose="02020603050405020304" pitchFamily="18" charset="0"/>
+              </a:rPr>
+              <a:t>Ái</a:t>
+            </a:r>
+            <a:r>
+              <a:rPr lang="en-US" sz="3200" dirty="0">
+                <a:solidFill>
+                  <a:schemeClr val="tx1">
+                    <a:lumMod val="85000"/>
+                    <a:lumOff val="15000"/>
+                  </a:schemeClr>
+                </a:solidFill>
+                <a:latin typeface="Times New Roman" panose="02020603050405020304" pitchFamily="18" charset="0"/>
+                <a:cs typeface="Times New Roman" panose="02020603050405020304" pitchFamily="18" charset="0"/>
+              </a:rPr>
+              <a:t> </a:t>
+            </a:r>
+            <a:r>
+              <a:rPr lang="en-US" sz="3200" dirty="0" err="1">
+                <a:solidFill>
+                  <a:schemeClr val="tx1">
+                    <a:lumMod val="85000"/>
+                    <a:lumOff val="15000"/>
+                  </a:schemeClr>
+                </a:solidFill>
+                <a:latin typeface="Times New Roman" panose="02020603050405020304" pitchFamily="18" charset="0"/>
+                <a:cs typeface="Times New Roman" panose="02020603050405020304" pitchFamily="18" charset="0"/>
+              </a:rPr>
+              <a:t>Thiềm</a:t>
+            </a:r>
+            <a:r>
+              <a:rPr lang="en-US" sz="3200" dirty="0">
+                <a:solidFill>
+                  <a:schemeClr val="tx1">
+                    <a:lumMod val="85000"/>
+                    <a:lumOff val="15000"/>
+                  </a:schemeClr>
+                </a:solidFill>
+                <a:latin typeface="Times New Roman" panose="02020603050405020304" pitchFamily="18" charset="0"/>
+                <a:cs typeface="Times New Roman" panose="02020603050405020304" pitchFamily="18" charset="0"/>
+              </a:rPr>
+              <a:t> </a:t>
+            </a:r>
+            <a:r>
+              <a:rPr lang="en-US" sz="3200" dirty="0" err="1">
+                <a:solidFill>
+                  <a:schemeClr val="tx1">
+                    <a:lumMod val="85000"/>
+                    <a:lumOff val="15000"/>
+                  </a:schemeClr>
+                </a:solidFill>
+                <a:latin typeface="Times New Roman" panose="02020603050405020304" pitchFamily="18" charset="0"/>
+                <a:cs typeface="Times New Roman" panose="02020603050405020304" pitchFamily="18" charset="0"/>
+              </a:rPr>
+              <a:t>Định</a:t>
+            </a:r>
+            <a:endParaRPr lang="en-US" sz="3200" dirty="0">
+              <a:solidFill>
+                <a:schemeClr val="tx1">
+                  <a:lumMod val="85000"/>
+                  <a:lumOff val="15000"/>
+                </a:schemeClr>
+              </a:solidFill>
+              <a:latin typeface="Times New Roman" panose="02020603050405020304" pitchFamily="18" charset="0"/>
+              <a:cs typeface="Times New Roman" panose="02020603050405020304" pitchFamily="18" charset="0"/>
+            </a:endParaRPr>
+          </a:p>
+        </p:txBody>
+      </p:sp>
+      <p:sp>
+        <p:nvSpPr>
+          <p:cNvPr id="24" name="TextBox 23">
+            <a:extLst>
+              <a:ext uri="{FF2B5EF4-FFF2-40B4-BE49-F238E27FC236}">
+                <a16:creationId xmlns:a16="http://schemas.microsoft.com/office/drawing/2014/main" id="{3ABAF3B4-FEF8-9003-F2E4-7D8A070E1685}"/>
+              </a:ext>
+            </a:extLst>
+          </p:cNvPr>
+          <p:cNvSpPr txBox="1"/>
+          <p:nvPr/>
+        </p:nvSpPr>
+        <p:spPr>
+          <a:xfrm>
+            <a:off x="4735331" y="2844225"/>
+            <a:ext cx="2671165" cy="584775"/>
+          </a:xfrm>
+          <a:prstGeom prst="rect">
+            <a:avLst/>
+          </a:prstGeom>
+          <a:noFill/>
+        </p:spPr>
+        <p:txBody>
+          <a:bodyPr wrap="square" rtlCol="0">
+            <a:spAutoFit/>
+          </a:bodyPr>
+          <a:lstStyle/>
+          <a:p>
+            <a:pPr algn="ctr"/>
+            <a:r>
+              <a:rPr lang="en-US" sz="3200" dirty="0">
+                <a:solidFill>
+                  <a:schemeClr val="tx1">
+                    <a:lumMod val="85000"/>
+                    <a:lumOff val="15000"/>
+                  </a:schemeClr>
+                </a:solidFill>
+                <a:latin typeface="Times New Roman" panose="02020603050405020304" pitchFamily="18" charset="0"/>
+                <a:cs typeface="Times New Roman" panose="02020603050405020304" pitchFamily="18" charset="0"/>
+              </a:rPr>
+              <a:t>DH52111357</a:t>
+            </a:r>
+          </a:p>
+        </p:txBody>
+      </p:sp>
+      <p:sp>
+        <p:nvSpPr>
+          <p:cNvPr id="25" name="TextBox 24">
+            <a:extLst>
+              <a:ext uri="{FF2B5EF4-FFF2-40B4-BE49-F238E27FC236}">
+                <a16:creationId xmlns:a16="http://schemas.microsoft.com/office/drawing/2014/main" id="{B15272A2-3522-E746-A52C-CE224B8F77A1}"/>
+              </a:ext>
+            </a:extLst>
+          </p:cNvPr>
+          <p:cNvSpPr txBox="1"/>
+          <p:nvPr/>
+        </p:nvSpPr>
+        <p:spPr>
+          <a:xfrm>
+            <a:off x="4735331" y="3752439"/>
+            <a:ext cx="2671165" cy="584775"/>
+          </a:xfrm>
+          <a:prstGeom prst="rect">
+            <a:avLst/>
+          </a:prstGeom>
+          <a:noFill/>
+        </p:spPr>
+        <p:txBody>
+          <a:bodyPr wrap="square" rtlCol="0">
+            <a:spAutoFit/>
+          </a:bodyPr>
+          <a:lstStyle/>
+          <a:p>
+            <a:pPr algn="ctr"/>
+            <a:r>
+              <a:rPr lang="en-US" sz="3200" dirty="0">
+                <a:solidFill>
+                  <a:schemeClr val="tx1">
+                    <a:lumMod val="85000"/>
+                    <a:lumOff val="15000"/>
+                  </a:schemeClr>
+                </a:solidFill>
+                <a:latin typeface="Times New Roman" panose="02020603050405020304" pitchFamily="18" charset="0"/>
+                <a:cs typeface="Times New Roman" panose="02020603050405020304" pitchFamily="18" charset="0"/>
+              </a:rPr>
+              <a:t>DH52111481</a:t>
+            </a:r>
+          </a:p>
+        </p:txBody>
+      </p:sp>
+      <p:sp>
+        <p:nvSpPr>
+          <p:cNvPr id="26" name="TextBox 25">
+            <a:extLst>
+              <a:ext uri="{FF2B5EF4-FFF2-40B4-BE49-F238E27FC236}">
+                <a16:creationId xmlns:a16="http://schemas.microsoft.com/office/drawing/2014/main" id="{6E008218-93BE-AC8E-2440-9435314AF082}"/>
+              </a:ext>
+            </a:extLst>
+          </p:cNvPr>
+          <p:cNvSpPr txBox="1"/>
+          <p:nvPr/>
+        </p:nvSpPr>
+        <p:spPr>
+          <a:xfrm>
+            <a:off x="4735330" y="4764579"/>
+            <a:ext cx="2671165" cy="584775"/>
+          </a:xfrm>
+          <a:prstGeom prst="rect">
+            <a:avLst/>
+          </a:prstGeom>
+          <a:noFill/>
+        </p:spPr>
+        <p:txBody>
+          <a:bodyPr wrap="square" rtlCol="0">
+            <a:spAutoFit/>
+          </a:bodyPr>
+          <a:lstStyle/>
+          <a:p>
+            <a:pPr algn="ctr"/>
+            <a:r>
+              <a:rPr lang="en-US" sz="3200" dirty="0">
+                <a:solidFill>
+                  <a:schemeClr val="tx1">
+                    <a:lumMod val="85000"/>
+                    <a:lumOff val="15000"/>
+                  </a:schemeClr>
+                </a:solidFill>
+                <a:latin typeface="Times New Roman" panose="02020603050405020304" pitchFamily="18" charset="0"/>
+                <a:cs typeface="Times New Roman" panose="02020603050405020304" pitchFamily="18" charset="0"/>
+              </a:rPr>
+              <a:t>DH52110821</a:t>
+            </a:r>
+          </a:p>
+        </p:txBody>
+      </p:sp>
+      <p:sp>
+        <p:nvSpPr>
+          <p:cNvPr id="27" name="TextBox 26">
+            <a:extLst>
+              <a:ext uri="{FF2B5EF4-FFF2-40B4-BE49-F238E27FC236}">
+                <a16:creationId xmlns:a16="http://schemas.microsoft.com/office/drawing/2014/main" id="{303E6339-18E9-14A6-19B4-13E67BC9C0A7}"/>
+              </a:ext>
+            </a:extLst>
+          </p:cNvPr>
+          <p:cNvSpPr txBox="1"/>
+          <p:nvPr/>
+        </p:nvSpPr>
+        <p:spPr>
+          <a:xfrm>
+            <a:off x="4735330" y="5712398"/>
+            <a:ext cx="2671165" cy="584775"/>
+          </a:xfrm>
+          <a:prstGeom prst="rect">
+            <a:avLst/>
+          </a:prstGeom>
+          <a:noFill/>
+        </p:spPr>
+        <p:txBody>
+          <a:bodyPr wrap="square" rtlCol="0">
+            <a:spAutoFit/>
+          </a:bodyPr>
+          <a:lstStyle/>
+          <a:p>
+            <a:pPr algn="ctr"/>
+            <a:r>
+              <a:rPr lang="en-US" sz="3200" dirty="0">
+                <a:solidFill>
+                  <a:schemeClr val="tx1">
+                    <a:lumMod val="85000"/>
+                    <a:lumOff val="15000"/>
+                  </a:schemeClr>
+                </a:solidFill>
+                <a:latin typeface="Times New Roman" panose="02020603050405020304" pitchFamily="18" charset="0"/>
+                <a:cs typeface="Times New Roman" panose="02020603050405020304" pitchFamily="18" charset="0"/>
+              </a:rPr>
+              <a:t>DH52110805</a:t>
+            </a:r>
+          </a:p>
+        </p:txBody>
+      </p:sp>
+      <p:sp>
+        <p:nvSpPr>
+          <p:cNvPr id="28" name="TextBox 27">
+            <a:extLst>
+              <a:ext uri="{FF2B5EF4-FFF2-40B4-BE49-F238E27FC236}">
+                <a16:creationId xmlns:a16="http://schemas.microsoft.com/office/drawing/2014/main" id="{946C2DB0-123E-FB74-7582-ABE299F75EC4}"/>
+              </a:ext>
+            </a:extLst>
+          </p:cNvPr>
+          <p:cNvSpPr txBox="1"/>
+          <p:nvPr/>
+        </p:nvSpPr>
+        <p:spPr>
+          <a:xfrm>
+            <a:off x="7342172" y="2844224"/>
+            <a:ext cx="2671165" cy="584775"/>
+          </a:xfrm>
+          <a:prstGeom prst="rect">
+            <a:avLst/>
+          </a:prstGeom>
+          <a:noFill/>
+        </p:spPr>
+        <p:txBody>
+          <a:bodyPr wrap="square" rtlCol="0">
+            <a:spAutoFit/>
+          </a:bodyPr>
+          <a:lstStyle/>
+          <a:p>
+            <a:pPr algn="ctr"/>
+            <a:r>
+              <a:rPr lang="en-US" sz="3200" dirty="0">
+                <a:solidFill>
+                  <a:schemeClr val="tx1">
+                    <a:lumMod val="85000"/>
+                    <a:lumOff val="15000"/>
+                  </a:schemeClr>
+                </a:solidFill>
+                <a:latin typeface="Times New Roman" panose="02020603050405020304" pitchFamily="18" charset="0"/>
+                <a:cs typeface="Times New Roman" panose="02020603050405020304" pitchFamily="18" charset="0"/>
+              </a:rPr>
+              <a:t>D21_TH09</a:t>
+            </a:r>
+          </a:p>
+        </p:txBody>
+      </p:sp>
+      <p:sp>
+        <p:nvSpPr>
+          <p:cNvPr id="29" name="TextBox 28">
+            <a:extLst>
+              <a:ext uri="{FF2B5EF4-FFF2-40B4-BE49-F238E27FC236}">
+                <a16:creationId xmlns:a16="http://schemas.microsoft.com/office/drawing/2014/main" id="{E60BBCE1-5A45-AA35-2724-FEFA56B24B92}"/>
+              </a:ext>
+            </a:extLst>
+          </p:cNvPr>
+          <p:cNvSpPr txBox="1"/>
+          <p:nvPr/>
+        </p:nvSpPr>
+        <p:spPr>
+          <a:xfrm>
+            <a:off x="7342172" y="3748622"/>
+            <a:ext cx="2671165" cy="584775"/>
+          </a:xfrm>
+          <a:prstGeom prst="rect">
+            <a:avLst/>
+          </a:prstGeom>
+          <a:noFill/>
+        </p:spPr>
+        <p:txBody>
+          <a:bodyPr wrap="square" rtlCol="0">
+            <a:spAutoFit/>
+          </a:bodyPr>
+          <a:lstStyle/>
+          <a:p>
+            <a:pPr algn="ctr"/>
+            <a:r>
+              <a:rPr lang="en-US" sz="3200" dirty="0">
+                <a:solidFill>
+                  <a:schemeClr val="tx1">
+                    <a:lumMod val="85000"/>
+                    <a:lumOff val="15000"/>
+                  </a:schemeClr>
+                </a:solidFill>
+                <a:latin typeface="Times New Roman" panose="02020603050405020304" pitchFamily="18" charset="0"/>
+                <a:cs typeface="Times New Roman" panose="02020603050405020304" pitchFamily="18" charset="0"/>
+              </a:rPr>
+              <a:t>D21_TH09</a:t>
+            </a:r>
+          </a:p>
+        </p:txBody>
+      </p:sp>
+      <p:sp>
+        <p:nvSpPr>
+          <p:cNvPr id="30" name="TextBox 29">
+            <a:extLst>
+              <a:ext uri="{FF2B5EF4-FFF2-40B4-BE49-F238E27FC236}">
+                <a16:creationId xmlns:a16="http://schemas.microsoft.com/office/drawing/2014/main" id="{4876D92B-2155-E528-E5B6-0C7CCF695780}"/>
+              </a:ext>
+            </a:extLst>
+          </p:cNvPr>
+          <p:cNvSpPr txBox="1"/>
+          <p:nvPr/>
+        </p:nvSpPr>
+        <p:spPr>
+          <a:xfrm>
+            <a:off x="7342172" y="4743190"/>
+            <a:ext cx="2671165" cy="584775"/>
+          </a:xfrm>
+          <a:prstGeom prst="rect">
+            <a:avLst/>
+          </a:prstGeom>
+          <a:noFill/>
+        </p:spPr>
+        <p:txBody>
+          <a:bodyPr wrap="square" rtlCol="0">
+            <a:spAutoFit/>
+          </a:bodyPr>
+          <a:lstStyle/>
+          <a:p>
+            <a:pPr algn="ctr"/>
+            <a:r>
+              <a:rPr lang="en-US" sz="3200" dirty="0">
+                <a:solidFill>
+                  <a:schemeClr val="tx1">
+                    <a:lumMod val="85000"/>
+                    <a:lumOff val="15000"/>
+                  </a:schemeClr>
+                </a:solidFill>
+                <a:latin typeface="Times New Roman" panose="02020603050405020304" pitchFamily="18" charset="0"/>
+                <a:cs typeface="Times New Roman" panose="02020603050405020304" pitchFamily="18" charset="0"/>
+              </a:rPr>
+              <a:t>D21_TH09</a:t>
+            </a:r>
+          </a:p>
+        </p:txBody>
+      </p:sp>
+      <p:sp>
+        <p:nvSpPr>
+          <p:cNvPr id="31" name="TextBox 30">
+            <a:extLst>
+              <a:ext uri="{FF2B5EF4-FFF2-40B4-BE49-F238E27FC236}">
+                <a16:creationId xmlns:a16="http://schemas.microsoft.com/office/drawing/2014/main" id="{A2F17021-EC8F-3DFC-BDED-5B146B1741F4}"/>
+              </a:ext>
+            </a:extLst>
+          </p:cNvPr>
+          <p:cNvSpPr txBox="1"/>
+          <p:nvPr/>
+        </p:nvSpPr>
+        <p:spPr>
+          <a:xfrm>
+            <a:off x="7342172" y="5647588"/>
+            <a:ext cx="2671165" cy="584775"/>
+          </a:xfrm>
+          <a:prstGeom prst="rect">
+            <a:avLst/>
+          </a:prstGeom>
+          <a:noFill/>
+        </p:spPr>
+        <p:txBody>
+          <a:bodyPr wrap="square" rtlCol="0">
+            <a:spAutoFit/>
+          </a:bodyPr>
+          <a:lstStyle/>
+          <a:p>
+            <a:pPr algn="ctr"/>
+            <a:r>
+              <a:rPr lang="en-US" sz="3200" dirty="0">
+                <a:solidFill>
+                  <a:schemeClr val="tx1">
+                    <a:lumMod val="85000"/>
+                    <a:lumOff val="15000"/>
+                  </a:schemeClr>
+                </a:solidFill>
+                <a:latin typeface="Times New Roman" panose="02020603050405020304" pitchFamily="18" charset="0"/>
+                <a:cs typeface="Times New Roman" panose="02020603050405020304" pitchFamily="18" charset="0"/>
+              </a:rPr>
+              <a:t>D21_TH09</a:t>
+            </a:r>
+          </a:p>
+        </p:txBody>
+      </p:sp>
+    </p:spTree>
+    <p:extLst>
+      <p:ext uri="{BB962C8B-B14F-4D97-AF65-F5344CB8AC3E}">
+        <p14:creationId xmlns:p14="http://schemas.microsoft.com/office/powerpoint/2010/main" val="2984970611"/>
+      </p:ext>
+    </p:extLst>
+  </p:cSld>
+  <p:clrMapOvr>
+    <a:masterClrMapping/>
+  </p:clrMapOvr>
+  <p:transition spd="slow">
+    <p:wipe/>
+  </p:transition>
+</p:sld>
+</file>
+
+<file path=ppt/slides/slide20.xml><?xml version="1.0" encoding="utf-8"?>
 <p:sld xmlns:a="http://schemas.openxmlformats.org/drawingml/2006/main" xmlns:r="http://schemas.openxmlformats.org/officeDocument/2006/relationships" xmlns:p="http://schemas.openxmlformats.org/presentationml/2006/main">
   <p:cSld>
     <p:spTree>
@@ -10568,7 +11434,7 @@
 </p:sld>
 </file>
 
-<file path=ppt/slides/slide19.xml><?xml version="1.0" encoding="utf-8"?>
+<file path=ppt/slides/slide21.xml><?xml version="1.0" encoding="utf-8"?>
 <p:sld xmlns:a="http://schemas.openxmlformats.org/drawingml/2006/main" xmlns:r="http://schemas.openxmlformats.org/officeDocument/2006/relationships" xmlns:p="http://schemas.openxmlformats.org/presentationml/2006/main">
   <p:cSld>
     <p:spTree>
@@ -10858,1484 +11724,7 @@
 </p:sld>
 </file>
 
-<file path=ppt/slides/slide2.xml><?xml version="1.0" encoding="utf-8"?>
-<p:sld xmlns:a="http://schemas.openxmlformats.org/drawingml/2006/main" xmlns:r="http://schemas.openxmlformats.org/officeDocument/2006/relationships" xmlns:p="http://schemas.openxmlformats.org/presentationml/2006/main">
-  <p:cSld>
-    <p:spTree>
-      <p:nvGrpSpPr>
-        <p:cNvPr id="1" name=""/>
-        <p:cNvGrpSpPr/>
-        <p:nvPr/>
-      </p:nvGrpSpPr>
-      <p:grpSpPr>
-        <a:xfrm>
-          <a:off x="0" y="0"/>
-          <a:ext cx="0" cy="0"/>
-          <a:chOff x="0" y="0"/>
-          <a:chExt cx="0" cy="0"/>
-        </a:xfrm>
-      </p:grpSpPr>
-      <p:sp>
-        <p:nvSpPr>
-          <p:cNvPr id="8" name="Rectangle 7"/>
-          <p:cNvSpPr/>
-          <p:nvPr/>
-        </p:nvSpPr>
-        <p:spPr>
-          <a:xfrm>
-            <a:off x="2264208" y="512134"/>
-            <a:ext cx="6890327" cy="1323439"/>
-          </a:xfrm>
-          <a:prstGeom prst="rect">
-            <a:avLst/>
-          </a:prstGeom>
-          <a:noFill/>
-        </p:spPr>
-        <p:txBody>
-          <a:bodyPr wrap="square" lIns="91440" tIns="45720" rIns="91440" bIns="45720">
-            <a:spAutoFit/>
-          </a:bodyPr>
-          <a:lstStyle/>
-          <a:p>
-            <a:pPr algn="ctr"/>
-            <a:endParaRPr lang="en-US" sz="4000" b="1" dirty="0">
-              <a:ln w="13462">
-                <a:solidFill>
-                  <a:schemeClr val="bg1"/>
-                </a:solidFill>
-                <a:prstDash val="solid"/>
-              </a:ln>
-              <a:solidFill>
-                <a:schemeClr val="tx1">
-                  <a:lumMod val="85000"/>
-                  <a:lumOff val="15000"/>
-                </a:schemeClr>
-              </a:solidFill>
-              <a:effectLst>
-                <a:outerShdw dist="38100" dir="2700000" algn="bl" rotWithShape="0">
-                  <a:schemeClr val="accent5"/>
-                </a:outerShdw>
-              </a:effectLst>
-              <a:latin typeface="Times New Roman" panose="02020603050405020304" pitchFamily="18" charset="0"/>
-              <a:cs typeface="Times New Roman" panose="02020603050405020304" pitchFamily="18" charset="0"/>
-            </a:endParaRPr>
-          </a:p>
-          <a:p>
-            <a:pPr algn="ctr"/>
-            <a:r>
-              <a:rPr lang="en-US" sz="4000" dirty="0">
-                <a:ln w="0"/>
-                <a:gradFill>
-                  <a:gsLst>
-                    <a:gs pos="0">
-                      <a:schemeClr val="accent5">
-                        <a:lumMod val="50000"/>
-                      </a:schemeClr>
-                    </a:gs>
-                    <a:gs pos="50000">
-                      <a:schemeClr val="accent5"/>
-                    </a:gs>
-                    <a:gs pos="100000">
-                      <a:schemeClr val="accent5">
-                        <a:lumMod val="60000"/>
-                        <a:lumOff val="40000"/>
-                      </a:schemeClr>
-                    </a:gs>
-                  </a:gsLst>
-                  <a:lin ang="5400000"/>
-                </a:gradFill>
-                <a:effectLst>
-                  <a:reflection blurRad="6350" stA="53000" endA="300" endPos="35500" dir="5400000" sy="-90000" algn="bl" rotWithShape="0"/>
-                </a:effectLst>
-                <a:latin typeface="Times New Roman" panose="02020603050405020304" pitchFamily="18" charset="0"/>
-                <a:cs typeface="Times New Roman" panose="02020603050405020304" pitchFamily="18" charset="0"/>
-              </a:rPr>
-              <a:t>I. </a:t>
-            </a:r>
-            <a:r>
-              <a:rPr lang="en-US" sz="4000" dirty="0" err="1">
-                <a:ln w="0"/>
-                <a:gradFill>
-                  <a:gsLst>
-                    <a:gs pos="0">
-                      <a:schemeClr val="accent5">
-                        <a:lumMod val="50000"/>
-                      </a:schemeClr>
-                    </a:gs>
-                    <a:gs pos="50000">
-                      <a:schemeClr val="accent5"/>
-                    </a:gs>
-                    <a:gs pos="100000">
-                      <a:schemeClr val="accent5">
-                        <a:lumMod val="60000"/>
-                        <a:lumOff val="40000"/>
-                      </a:schemeClr>
-                    </a:gs>
-                  </a:gsLst>
-                  <a:lin ang="5400000"/>
-                </a:gradFill>
-                <a:effectLst>
-                  <a:reflection blurRad="6350" stA="53000" endA="300" endPos="35500" dir="5400000" sy="-90000" algn="bl" rotWithShape="0"/>
-                </a:effectLst>
-                <a:latin typeface="Times New Roman" panose="02020603050405020304" pitchFamily="18" charset="0"/>
-                <a:cs typeface="Times New Roman" panose="02020603050405020304" pitchFamily="18" charset="0"/>
-              </a:rPr>
-              <a:t>Giới</a:t>
-            </a:r>
-            <a:r>
-              <a:rPr lang="en-US" sz="4000" dirty="0">
-                <a:ln w="0"/>
-                <a:gradFill>
-                  <a:gsLst>
-                    <a:gs pos="0">
-                      <a:schemeClr val="accent5">
-                        <a:lumMod val="50000"/>
-                      </a:schemeClr>
-                    </a:gs>
-                    <a:gs pos="50000">
-                      <a:schemeClr val="accent5"/>
-                    </a:gs>
-                    <a:gs pos="100000">
-                      <a:schemeClr val="accent5">
-                        <a:lumMod val="60000"/>
-                        <a:lumOff val="40000"/>
-                      </a:schemeClr>
-                    </a:gs>
-                  </a:gsLst>
-                  <a:lin ang="5400000"/>
-                </a:gradFill>
-                <a:effectLst>
-                  <a:reflection blurRad="6350" stA="53000" endA="300" endPos="35500" dir="5400000" sy="-90000" algn="bl" rotWithShape="0"/>
-                </a:effectLst>
-                <a:latin typeface="Times New Roman" panose="02020603050405020304" pitchFamily="18" charset="0"/>
-                <a:cs typeface="Times New Roman" panose="02020603050405020304" pitchFamily="18" charset="0"/>
-              </a:rPr>
-              <a:t> </a:t>
-            </a:r>
-            <a:r>
-              <a:rPr lang="en-US" sz="4000" dirty="0" err="1">
-                <a:ln w="0"/>
-                <a:gradFill>
-                  <a:gsLst>
-                    <a:gs pos="0">
-                      <a:schemeClr val="accent5">
-                        <a:lumMod val="50000"/>
-                      </a:schemeClr>
-                    </a:gs>
-                    <a:gs pos="50000">
-                      <a:schemeClr val="accent5"/>
-                    </a:gs>
-                    <a:gs pos="100000">
-                      <a:schemeClr val="accent5">
-                        <a:lumMod val="60000"/>
-                        <a:lumOff val="40000"/>
-                      </a:schemeClr>
-                    </a:gs>
-                  </a:gsLst>
-                  <a:lin ang="5400000"/>
-                </a:gradFill>
-                <a:effectLst>
-                  <a:reflection blurRad="6350" stA="53000" endA="300" endPos="35500" dir="5400000" sy="-90000" algn="bl" rotWithShape="0"/>
-                </a:effectLst>
-                <a:latin typeface="Times New Roman" panose="02020603050405020304" pitchFamily="18" charset="0"/>
-                <a:cs typeface="Times New Roman" panose="02020603050405020304" pitchFamily="18" charset="0"/>
-              </a:rPr>
-              <a:t>thiệu</a:t>
-            </a:r>
-            <a:r>
-              <a:rPr lang="en-US" sz="4000" dirty="0">
-                <a:ln w="0"/>
-                <a:gradFill>
-                  <a:gsLst>
-                    <a:gs pos="0">
-                      <a:schemeClr val="accent5">
-                        <a:lumMod val="50000"/>
-                      </a:schemeClr>
-                    </a:gs>
-                    <a:gs pos="50000">
-                      <a:schemeClr val="accent5"/>
-                    </a:gs>
-                    <a:gs pos="100000">
-                      <a:schemeClr val="accent5">
-                        <a:lumMod val="60000"/>
-                        <a:lumOff val="40000"/>
-                      </a:schemeClr>
-                    </a:gs>
-                  </a:gsLst>
-                  <a:lin ang="5400000"/>
-                </a:gradFill>
-                <a:effectLst>
-                  <a:reflection blurRad="6350" stA="53000" endA="300" endPos="35500" dir="5400000" sy="-90000" algn="bl" rotWithShape="0"/>
-                </a:effectLst>
-                <a:latin typeface="Times New Roman" panose="02020603050405020304" pitchFamily="18" charset="0"/>
-                <a:cs typeface="Times New Roman" panose="02020603050405020304" pitchFamily="18" charset="0"/>
-              </a:rPr>
-              <a:t> </a:t>
-            </a:r>
-            <a:r>
-              <a:rPr lang="en-US" sz="4000" dirty="0" err="1">
-                <a:ln w="0"/>
-                <a:gradFill>
-                  <a:gsLst>
-                    <a:gs pos="0">
-                      <a:schemeClr val="accent5">
-                        <a:lumMod val="50000"/>
-                      </a:schemeClr>
-                    </a:gs>
-                    <a:gs pos="50000">
-                      <a:schemeClr val="accent5"/>
-                    </a:gs>
-                    <a:gs pos="100000">
-                      <a:schemeClr val="accent5">
-                        <a:lumMod val="60000"/>
-                        <a:lumOff val="40000"/>
-                      </a:schemeClr>
-                    </a:gs>
-                  </a:gsLst>
-                  <a:lin ang="5400000"/>
-                </a:gradFill>
-                <a:effectLst>
-                  <a:reflection blurRad="6350" stA="53000" endA="300" endPos="35500" dir="5400000" sy="-90000" algn="bl" rotWithShape="0"/>
-                </a:effectLst>
-                <a:latin typeface="Times New Roman" panose="02020603050405020304" pitchFamily="18" charset="0"/>
-                <a:cs typeface="Times New Roman" panose="02020603050405020304" pitchFamily="18" charset="0"/>
-              </a:rPr>
-              <a:t>dự</a:t>
-            </a:r>
-            <a:r>
-              <a:rPr lang="en-US" sz="4000" dirty="0">
-                <a:ln w="0"/>
-                <a:gradFill>
-                  <a:gsLst>
-                    <a:gs pos="0">
-                      <a:schemeClr val="accent5">
-                        <a:lumMod val="50000"/>
-                      </a:schemeClr>
-                    </a:gs>
-                    <a:gs pos="50000">
-                      <a:schemeClr val="accent5"/>
-                    </a:gs>
-                    <a:gs pos="100000">
-                      <a:schemeClr val="accent5">
-                        <a:lumMod val="60000"/>
-                        <a:lumOff val="40000"/>
-                      </a:schemeClr>
-                    </a:gs>
-                  </a:gsLst>
-                  <a:lin ang="5400000"/>
-                </a:gradFill>
-                <a:effectLst>
-                  <a:reflection blurRad="6350" stA="53000" endA="300" endPos="35500" dir="5400000" sy="-90000" algn="bl" rotWithShape="0"/>
-                </a:effectLst>
-                <a:latin typeface="Times New Roman" panose="02020603050405020304" pitchFamily="18" charset="0"/>
-                <a:cs typeface="Times New Roman" panose="02020603050405020304" pitchFamily="18" charset="0"/>
-              </a:rPr>
-              <a:t> </a:t>
-            </a:r>
-            <a:r>
-              <a:rPr lang="en-US" sz="4000" dirty="0" err="1">
-                <a:ln w="0"/>
-                <a:gradFill>
-                  <a:gsLst>
-                    <a:gs pos="0">
-                      <a:schemeClr val="accent5">
-                        <a:lumMod val="50000"/>
-                      </a:schemeClr>
-                    </a:gs>
-                    <a:gs pos="50000">
-                      <a:schemeClr val="accent5"/>
-                    </a:gs>
-                    <a:gs pos="100000">
-                      <a:schemeClr val="accent5">
-                        <a:lumMod val="60000"/>
-                        <a:lumOff val="40000"/>
-                      </a:schemeClr>
-                    </a:gs>
-                  </a:gsLst>
-                  <a:lin ang="5400000"/>
-                </a:gradFill>
-                <a:effectLst>
-                  <a:reflection blurRad="6350" stA="53000" endA="300" endPos="35500" dir="5400000" sy="-90000" algn="bl" rotWithShape="0"/>
-                </a:effectLst>
-                <a:latin typeface="Times New Roman" panose="02020603050405020304" pitchFamily="18" charset="0"/>
-                <a:cs typeface="Times New Roman" panose="02020603050405020304" pitchFamily="18" charset="0"/>
-              </a:rPr>
-              <a:t>án</a:t>
-            </a:r>
-            <a:r>
-              <a:rPr lang="en-US" sz="4000" dirty="0">
-                <a:ln w="0"/>
-                <a:gradFill>
-                  <a:gsLst>
-                    <a:gs pos="0">
-                      <a:schemeClr val="accent5">
-                        <a:lumMod val="50000"/>
-                      </a:schemeClr>
-                    </a:gs>
-                    <a:gs pos="50000">
-                      <a:schemeClr val="accent5"/>
-                    </a:gs>
-                    <a:gs pos="100000">
-                      <a:schemeClr val="accent5">
-                        <a:lumMod val="60000"/>
-                        <a:lumOff val="40000"/>
-                      </a:schemeClr>
-                    </a:gs>
-                  </a:gsLst>
-                  <a:lin ang="5400000"/>
-                </a:gradFill>
-                <a:effectLst>
-                  <a:reflection blurRad="6350" stA="53000" endA="300" endPos="35500" dir="5400000" sy="-90000" algn="bl" rotWithShape="0"/>
-                </a:effectLst>
-                <a:latin typeface="Times New Roman" panose="02020603050405020304" pitchFamily="18" charset="0"/>
-                <a:cs typeface="Times New Roman" panose="02020603050405020304" pitchFamily="18" charset="0"/>
-              </a:rPr>
-              <a:t> </a:t>
-            </a:r>
-            <a:r>
-              <a:rPr lang="en-US" sz="4000" dirty="0" err="1">
-                <a:ln w="0"/>
-                <a:gradFill>
-                  <a:gsLst>
-                    <a:gs pos="0">
-                      <a:schemeClr val="accent5">
-                        <a:lumMod val="50000"/>
-                      </a:schemeClr>
-                    </a:gs>
-                    <a:gs pos="50000">
-                      <a:schemeClr val="accent5"/>
-                    </a:gs>
-                    <a:gs pos="100000">
-                      <a:schemeClr val="accent5">
-                        <a:lumMod val="60000"/>
-                        <a:lumOff val="40000"/>
-                      </a:schemeClr>
-                    </a:gs>
-                  </a:gsLst>
-                  <a:lin ang="5400000"/>
-                </a:gradFill>
-                <a:effectLst>
-                  <a:reflection blurRad="6350" stA="53000" endA="300" endPos="35500" dir="5400000" sy="-90000" algn="bl" rotWithShape="0"/>
-                </a:effectLst>
-                <a:latin typeface="Times New Roman" panose="02020603050405020304" pitchFamily="18" charset="0"/>
-                <a:cs typeface="Times New Roman" panose="02020603050405020304" pitchFamily="18" charset="0"/>
-              </a:rPr>
-              <a:t>phần</a:t>
-            </a:r>
-            <a:r>
-              <a:rPr lang="en-US" sz="4000" dirty="0">
-                <a:ln w="0"/>
-                <a:gradFill>
-                  <a:gsLst>
-                    <a:gs pos="0">
-                      <a:schemeClr val="accent5">
-                        <a:lumMod val="50000"/>
-                      </a:schemeClr>
-                    </a:gs>
-                    <a:gs pos="50000">
-                      <a:schemeClr val="accent5"/>
-                    </a:gs>
-                    <a:gs pos="100000">
-                      <a:schemeClr val="accent5">
-                        <a:lumMod val="60000"/>
-                        <a:lumOff val="40000"/>
-                      </a:schemeClr>
-                    </a:gs>
-                  </a:gsLst>
-                  <a:lin ang="5400000"/>
-                </a:gradFill>
-                <a:effectLst>
-                  <a:reflection blurRad="6350" stA="53000" endA="300" endPos="35500" dir="5400000" sy="-90000" algn="bl" rotWithShape="0"/>
-                </a:effectLst>
-                <a:latin typeface="Times New Roman" panose="02020603050405020304" pitchFamily="18" charset="0"/>
-                <a:cs typeface="Times New Roman" panose="02020603050405020304" pitchFamily="18" charset="0"/>
-              </a:rPr>
-              <a:t> </a:t>
-            </a:r>
-            <a:r>
-              <a:rPr lang="en-US" sz="4000" dirty="0" err="1">
-                <a:ln w="0"/>
-                <a:gradFill>
-                  <a:gsLst>
-                    <a:gs pos="0">
-                      <a:schemeClr val="accent5">
-                        <a:lumMod val="50000"/>
-                      </a:schemeClr>
-                    </a:gs>
-                    <a:gs pos="50000">
-                      <a:schemeClr val="accent5"/>
-                    </a:gs>
-                    <a:gs pos="100000">
-                      <a:schemeClr val="accent5">
-                        <a:lumMod val="60000"/>
-                        <a:lumOff val="40000"/>
-                      </a:schemeClr>
-                    </a:gs>
-                  </a:gsLst>
-                  <a:lin ang="5400000"/>
-                </a:gradFill>
-                <a:effectLst>
-                  <a:reflection blurRad="6350" stA="53000" endA="300" endPos="35500" dir="5400000" sy="-90000" algn="bl" rotWithShape="0"/>
-                </a:effectLst>
-                <a:latin typeface="Times New Roman" panose="02020603050405020304" pitchFamily="18" charset="0"/>
-                <a:cs typeface="Times New Roman" panose="02020603050405020304" pitchFamily="18" charset="0"/>
-              </a:rPr>
-              <a:t>mềm</a:t>
-            </a:r>
-            <a:endParaRPr lang="en-US" sz="4000" dirty="0">
-              <a:ln w="0"/>
-              <a:gradFill>
-                <a:gsLst>
-                  <a:gs pos="0">
-                    <a:schemeClr val="accent5">
-                      <a:lumMod val="50000"/>
-                    </a:schemeClr>
-                  </a:gs>
-                  <a:gs pos="50000">
-                    <a:schemeClr val="accent5"/>
-                  </a:gs>
-                  <a:gs pos="100000">
-                    <a:schemeClr val="accent5">
-                      <a:lumMod val="60000"/>
-                      <a:lumOff val="40000"/>
-                    </a:schemeClr>
-                  </a:gs>
-                </a:gsLst>
-                <a:lin ang="5400000"/>
-              </a:gradFill>
-              <a:effectLst>
-                <a:reflection blurRad="6350" stA="53000" endA="300" endPos="35500" dir="5400000" sy="-90000" algn="bl" rotWithShape="0"/>
-              </a:effectLst>
-              <a:latin typeface="Times New Roman" panose="02020603050405020304" pitchFamily="18" charset="0"/>
-              <a:cs typeface="Times New Roman" panose="02020603050405020304" pitchFamily="18" charset="0"/>
-            </a:endParaRPr>
-          </a:p>
-        </p:txBody>
-      </p:sp>
-      <p:sp>
-        <p:nvSpPr>
-          <p:cNvPr id="2" name="Rectangle 1">
-            <a:extLst>
-              <a:ext uri="{FF2B5EF4-FFF2-40B4-BE49-F238E27FC236}">
-                <a16:creationId xmlns:a16="http://schemas.microsoft.com/office/drawing/2014/main" id="{CC1F1F14-C2DA-6E3F-39BD-4CBE7E51E5F1}"/>
-              </a:ext>
-            </a:extLst>
-          </p:cNvPr>
-          <p:cNvSpPr/>
-          <p:nvPr/>
-        </p:nvSpPr>
-        <p:spPr>
-          <a:xfrm>
-            <a:off x="1840351" y="2164914"/>
-            <a:ext cx="7465101" cy="3036673"/>
-          </a:xfrm>
-          <a:prstGeom prst="rect">
-            <a:avLst/>
-          </a:prstGeom>
-        </p:spPr>
-        <p:style>
-          <a:lnRef idx="2">
-            <a:schemeClr val="accent6"/>
-          </a:lnRef>
-          <a:fillRef idx="1">
-            <a:schemeClr val="lt1"/>
-          </a:fillRef>
-          <a:effectRef idx="0">
-            <a:schemeClr val="accent6"/>
-          </a:effectRef>
-          <a:fontRef idx="minor">
-            <a:schemeClr val="dk1"/>
-          </a:fontRef>
-        </p:style>
-        <p:txBody>
-          <a:bodyPr rtlCol="0" anchor="ctr"/>
-          <a:lstStyle/>
-          <a:p>
-            <a:r>
-              <a:rPr lang="en-US" dirty="0">
-                <a:solidFill>
-                  <a:srgbClr val="FF0000"/>
-                </a:solidFill>
-                <a:latin typeface="Times New Roman" panose="02020603050405020304" pitchFamily="18" charset="0"/>
-                <a:cs typeface="Times New Roman" panose="02020603050405020304" pitchFamily="18" charset="0"/>
-              </a:rPr>
-              <a:t> </a:t>
-            </a:r>
-            <a:r>
-              <a:rPr lang="en-US" dirty="0" err="1">
-                <a:solidFill>
-                  <a:srgbClr val="FF0000"/>
-                </a:solidFill>
-                <a:latin typeface="Trebuchet MS (Body)"/>
-                <a:cs typeface="Times New Roman" panose="02020603050405020304" pitchFamily="18" charset="0"/>
-              </a:rPr>
-              <a:t>Ứng</a:t>
-            </a:r>
-            <a:r>
-              <a:rPr lang="en-US" dirty="0">
-                <a:solidFill>
-                  <a:srgbClr val="FF0000"/>
-                </a:solidFill>
-                <a:latin typeface="Trebuchet MS (Body)"/>
-                <a:cs typeface="Times New Roman" panose="02020603050405020304" pitchFamily="18" charset="0"/>
-              </a:rPr>
-              <a:t> </a:t>
-            </a:r>
-            <a:r>
-              <a:rPr lang="en-US" dirty="0" err="1">
-                <a:solidFill>
-                  <a:srgbClr val="FF0000"/>
-                </a:solidFill>
-                <a:latin typeface="Trebuchet MS (Body)"/>
-                <a:cs typeface="Times New Roman" panose="02020603050405020304" pitchFamily="18" charset="0"/>
-              </a:rPr>
-              <a:t>dụng</a:t>
-            </a:r>
-            <a:r>
-              <a:rPr lang="en-US" dirty="0">
-                <a:solidFill>
-                  <a:srgbClr val="FF0000"/>
-                </a:solidFill>
-                <a:latin typeface="Trebuchet MS (Body)"/>
-                <a:cs typeface="Times New Roman" panose="02020603050405020304" pitchFamily="18" charset="0"/>
-              </a:rPr>
-              <a:t> </a:t>
-            </a:r>
-            <a:r>
-              <a:rPr lang="en-US" dirty="0" err="1">
-                <a:solidFill>
-                  <a:srgbClr val="FF0000"/>
-                </a:solidFill>
-                <a:latin typeface="Trebuchet MS (Body)"/>
-                <a:cs typeface="Times New Roman" panose="02020603050405020304" pitchFamily="18" charset="0"/>
-              </a:rPr>
-              <a:t>bán</a:t>
-            </a:r>
-            <a:r>
-              <a:rPr lang="en-US" dirty="0">
-                <a:solidFill>
-                  <a:srgbClr val="FF0000"/>
-                </a:solidFill>
-                <a:latin typeface="Trebuchet MS (Body)"/>
-                <a:cs typeface="Times New Roman" panose="02020603050405020304" pitchFamily="18" charset="0"/>
-              </a:rPr>
-              <a:t> </a:t>
-            </a:r>
-            <a:r>
-              <a:rPr lang="en-US" dirty="0" err="1">
-                <a:solidFill>
-                  <a:srgbClr val="FF0000"/>
-                </a:solidFill>
-                <a:latin typeface="Trebuchet MS (Body)"/>
-                <a:cs typeface="Times New Roman" panose="02020603050405020304" pitchFamily="18" charset="0"/>
-              </a:rPr>
-              <a:t>vé</a:t>
-            </a:r>
-            <a:r>
-              <a:rPr lang="en-US" dirty="0">
-                <a:solidFill>
-                  <a:srgbClr val="FF0000"/>
-                </a:solidFill>
-                <a:latin typeface="Trebuchet MS (Body)"/>
-                <a:cs typeface="Times New Roman" panose="02020603050405020304" pitchFamily="18" charset="0"/>
-              </a:rPr>
-              <a:t> </a:t>
-            </a:r>
-            <a:r>
-              <a:rPr lang="en-US" dirty="0" err="1">
-                <a:solidFill>
-                  <a:srgbClr val="FF0000"/>
-                </a:solidFill>
-                <a:latin typeface="Trebuchet MS (Body)"/>
-                <a:cs typeface="Times New Roman" panose="02020603050405020304" pitchFamily="18" charset="0"/>
-              </a:rPr>
-              <a:t>xe</a:t>
-            </a:r>
-            <a:r>
-              <a:rPr lang="en-US" dirty="0">
-                <a:solidFill>
-                  <a:srgbClr val="FF0000"/>
-                </a:solidFill>
-                <a:latin typeface="Trebuchet MS (Body)"/>
-                <a:cs typeface="Times New Roman" panose="02020603050405020304" pitchFamily="18" charset="0"/>
-              </a:rPr>
-              <a:t>:   </a:t>
-            </a:r>
-            <a:r>
-              <a:rPr lang="en-US" dirty="0" err="1"/>
-              <a:t>Là</a:t>
-            </a:r>
-            <a:r>
-              <a:rPr lang="en-US" dirty="0"/>
-              <a:t> </a:t>
-            </a:r>
-            <a:r>
-              <a:rPr lang="en-US" dirty="0" err="1"/>
-              <a:t>một</a:t>
-            </a:r>
-            <a:r>
-              <a:rPr lang="en-US" dirty="0"/>
-              <a:t> </a:t>
-            </a:r>
-            <a:r>
-              <a:rPr lang="en-US" dirty="0" err="1"/>
-              <a:t>hệ</a:t>
-            </a:r>
-            <a:r>
-              <a:rPr lang="en-US" dirty="0"/>
-              <a:t> </a:t>
-            </a:r>
-            <a:r>
-              <a:rPr lang="en-US" dirty="0" err="1"/>
-              <a:t>thống</a:t>
-            </a:r>
-            <a:r>
-              <a:rPr lang="en-US" dirty="0"/>
-              <a:t> </a:t>
-            </a:r>
-            <a:r>
-              <a:rPr lang="en-US" dirty="0" err="1"/>
-              <a:t>phần</a:t>
-            </a:r>
-            <a:r>
-              <a:rPr lang="en-US" dirty="0"/>
-              <a:t> </a:t>
-            </a:r>
-            <a:r>
-              <a:rPr lang="en-US" dirty="0" err="1"/>
-              <a:t>mềm</a:t>
-            </a:r>
-            <a:r>
-              <a:rPr lang="en-US" dirty="0"/>
-              <a:t> </a:t>
-            </a:r>
-            <a:r>
-              <a:rPr lang="en-US" dirty="0" err="1"/>
-              <a:t>giúp</a:t>
-            </a:r>
-            <a:r>
-              <a:rPr lang="en-US" dirty="0"/>
-              <a:t> </a:t>
-            </a:r>
-            <a:r>
-              <a:rPr lang="en-US" dirty="0" err="1"/>
-              <a:t>người</a:t>
-            </a:r>
-            <a:r>
-              <a:rPr lang="en-US" dirty="0"/>
-              <a:t> dung </a:t>
-            </a:r>
-            <a:r>
-              <a:rPr lang="en-US" dirty="0" err="1"/>
-              <a:t>có</a:t>
-            </a:r>
-            <a:r>
-              <a:rPr lang="en-US" dirty="0"/>
-              <a:t> </a:t>
-            </a:r>
-            <a:r>
-              <a:rPr lang="en-US" dirty="0" err="1"/>
-              <a:t>thể</a:t>
-            </a:r>
-            <a:r>
-              <a:rPr lang="en-US" dirty="0"/>
-              <a:t> </a:t>
-            </a:r>
-            <a:r>
-              <a:rPr lang="en-US" dirty="0" err="1"/>
-              <a:t>thuận</a:t>
-            </a:r>
-            <a:r>
-              <a:rPr lang="en-US" dirty="0"/>
-              <a:t> </a:t>
-            </a:r>
-            <a:r>
-              <a:rPr lang="en-US" dirty="0" err="1"/>
-              <a:t>tiện</a:t>
-            </a:r>
-            <a:r>
-              <a:rPr lang="en-US" dirty="0"/>
-              <a:t> </a:t>
-            </a:r>
-            <a:r>
-              <a:rPr lang="en-US" dirty="0" err="1"/>
-              <a:t>đặt</a:t>
-            </a:r>
-            <a:r>
-              <a:rPr lang="en-US" dirty="0"/>
-              <a:t> </a:t>
-            </a:r>
-            <a:r>
-              <a:rPr lang="en-US" dirty="0" err="1"/>
-              <a:t>vé</a:t>
-            </a:r>
-            <a:r>
-              <a:rPr lang="en-US" dirty="0"/>
-              <a:t> </a:t>
-            </a:r>
-            <a:r>
-              <a:rPr lang="en-US" dirty="0" err="1"/>
-              <a:t>xe</a:t>
-            </a:r>
-            <a:r>
-              <a:rPr lang="en-US" dirty="0"/>
-              <a:t> </a:t>
-            </a:r>
-            <a:r>
-              <a:rPr lang="en-US" dirty="0" err="1"/>
-              <a:t>để</a:t>
-            </a:r>
-            <a:r>
-              <a:rPr lang="en-US" dirty="0"/>
-              <a:t> </a:t>
-            </a:r>
-            <a:r>
-              <a:rPr lang="en-US" dirty="0" err="1"/>
-              <a:t>đến</a:t>
-            </a:r>
-            <a:r>
-              <a:rPr lang="en-US" dirty="0"/>
-              <a:t> </a:t>
-            </a:r>
-            <a:r>
-              <a:rPr lang="en-US" dirty="0" err="1"/>
-              <a:t>nơi</a:t>
-            </a:r>
-            <a:r>
-              <a:rPr lang="en-US" dirty="0"/>
-              <a:t> </a:t>
-            </a:r>
-            <a:r>
-              <a:rPr lang="en-US" dirty="0" err="1"/>
-              <a:t>cần</a:t>
-            </a:r>
-            <a:r>
-              <a:rPr lang="en-US" dirty="0"/>
-              <a:t> </a:t>
-            </a:r>
-            <a:r>
-              <a:rPr lang="en-US" dirty="0" err="1"/>
-              <a:t>muốn,giúp</a:t>
-            </a:r>
-            <a:r>
-              <a:rPr lang="en-US" dirty="0"/>
-              <a:t> </a:t>
-            </a:r>
-            <a:r>
-              <a:rPr lang="en-US" dirty="0" err="1"/>
-              <a:t>quản</a:t>
-            </a:r>
-            <a:r>
-              <a:rPr lang="en-US" dirty="0"/>
-              <a:t> </a:t>
-            </a:r>
-            <a:r>
-              <a:rPr lang="en-US" dirty="0" err="1"/>
-              <a:t>lý</a:t>
-            </a:r>
-            <a:r>
-              <a:rPr lang="en-US" dirty="0"/>
-              <a:t> </a:t>
-            </a:r>
-            <a:r>
-              <a:rPr lang="en-US" dirty="0" err="1"/>
-              <a:t>toàn</a:t>
-            </a:r>
-            <a:r>
-              <a:rPr lang="en-US" dirty="0"/>
-              <a:t> </a:t>
-            </a:r>
-            <a:r>
-              <a:rPr lang="en-US" dirty="0" err="1"/>
-              <a:t>bộ</a:t>
-            </a:r>
-            <a:r>
-              <a:rPr lang="en-US" dirty="0"/>
-              <a:t> </a:t>
-            </a:r>
-            <a:r>
-              <a:rPr lang="en-US" dirty="0" err="1"/>
-              <a:t>quy</a:t>
-            </a:r>
-            <a:r>
-              <a:rPr lang="en-US" dirty="0"/>
-              <a:t> </a:t>
-            </a:r>
-            <a:r>
-              <a:rPr lang="en-US" dirty="0" err="1"/>
-              <a:t>trình</a:t>
-            </a:r>
-            <a:r>
-              <a:rPr lang="en-US" dirty="0"/>
-              <a:t> </a:t>
-            </a:r>
-            <a:r>
-              <a:rPr lang="en-US" dirty="0" err="1"/>
-              <a:t>bán</a:t>
-            </a:r>
-            <a:r>
-              <a:rPr lang="en-US" dirty="0"/>
-              <a:t> </a:t>
-            </a:r>
-            <a:r>
-              <a:rPr lang="en-US" dirty="0" err="1"/>
-              <a:t>vé</a:t>
-            </a:r>
-            <a:r>
-              <a:rPr lang="en-US" dirty="0"/>
-              <a:t> </a:t>
-            </a:r>
-            <a:r>
-              <a:rPr lang="en-US" dirty="0" err="1"/>
-              <a:t>xe,giúp</a:t>
-            </a:r>
-            <a:r>
-              <a:rPr lang="en-US" dirty="0"/>
-              <a:t> admin </a:t>
-            </a:r>
-            <a:r>
-              <a:rPr lang="en-US" dirty="0" err="1"/>
-              <a:t>quản</a:t>
-            </a:r>
-            <a:r>
-              <a:rPr lang="en-US" dirty="0"/>
-              <a:t> </a:t>
-            </a:r>
-            <a:r>
-              <a:rPr lang="en-US" dirty="0" err="1"/>
-              <a:t>lý</a:t>
-            </a:r>
-            <a:r>
-              <a:rPr lang="en-US" dirty="0"/>
-              <a:t> </a:t>
-            </a:r>
-            <a:r>
-              <a:rPr lang="en-US" dirty="0" err="1"/>
-              <a:t>tuyến</a:t>
-            </a:r>
-            <a:r>
-              <a:rPr lang="en-US" dirty="0"/>
-              <a:t> </a:t>
-            </a:r>
-            <a:r>
-              <a:rPr lang="en-US" dirty="0" err="1"/>
-              <a:t>xe,chuyến</a:t>
-            </a:r>
-            <a:r>
-              <a:rPr lang="en-US" dirty="0"/>
-              <a:t> </a:t>
-            </a:r>
-            <a:r>
-              <a:rPr lang="en-US" dirty="0" err="1"/>
-              <a:t>xe</a:t>
-            </a:r>
-            <a:r>
-              <a:rPr lang="en-US" dirty="0"/>
-              <a:t>, </a:t>
-            </a:r>
-            <a:r>
-              <a:rPr lang="en-US" dirty="0" err="1"/>
-              <a:t>khách</a:t>
-            </a:r>
-            <a:r>
-              <a:rPr lang="en-US" dirty="0"/>
-              <a:t> </a:t>
-            </a:r>
-            <a:r>
-              <a:rPr lang="en-US" dirty="0" err="1"/>
-              <a:t>hàng</a:t>
-            </a:r>
-            <a:r>
-              <a:rPr lang="en-US" dirty="0"/>
-              <a:t>, </a:t>
-            </a:r>
-            <a:r>
-              <a:rPr lang="en-US" dirty="0" err="1"/>
-              <a:t>quản</a:t>
-            </a:r>
-            <a:r>
-              <a:rPr lang="en-US" dirty="0"/>
-              <a:t> </a:t>
-            </a:r>
-            <a:r>
-              <a:rPr lang="en-US" dirty="0" err="1"/>
-              <a:t>lý</a:t>
-            </a:r>
-            <a:r>
-              <a:rPr lang="en-US" dirty="0"/>
-              <a:t> </a:t>
-            </a:r>
-            <a:r>
-              <a:rPr lang="en-US" dirty="0" err="1"/>
-              <a:t>xe,quản</a:t>
-            </a:r>
-            <a:r>
-              <a:rPr lang="en-US" dirty="0"/>
-              <a:t> </a:t>
-            </a:r>
-            <a:r>
-              <a:rPr lang="en-US" dirty="0" err="1"/>
-              <a:t>lý</a:t>
-            </a:r>
-            <a:r>
-              <a:rPr lang="en-US" dirty="0"/>
-              <a:t> </a:t>
-            </a:r>
-            <a:r>
-              <a:rPr lang="en-US" dirty="0" err="1"/>
-              <a:t>nhân</a:t>
-            </a:r>
-            <a:r>
-              <a:rPr lang="en-US" dirty="0"/>
-              <a:t> </a:t>
-            </a:r>
-            <a:r>
-              <a:rPr lang="en-US" dirty="0" err="1"/>
-              <a:t>viên,một</a:t>
-            </a:r>
-            <a:r>
-              <a:rPr lang="en-US" dirty="0"/>
-              <a:t> </a:t>
-            </a:r>
-            <a:r>
-              <a:rPr lang="en-US" dirty="0" err="1"/>
-              <a:t>hệ</a:t>
-            </a:r>
-            <a:r>
-              <a:rPr lang="en-US" dirty="0"/>
-              <a:t> </a:t>
-            </a:r>
-            <a:r>
-              <a:rPr lang="en-US" dirty="0" err="1"/>
-              <a:t>thống</a:t>
-            </a:r>
-            <a:r>
-              <a:rPr lang="en-US" dirty="0"/>
-              <a:t> </a:t>
-            </a:r>
-            <a:r>
-              <a:rPr lang="en-US" dirty="0" err="1"/>
-              <a:t>phần</a:t>
-            </a:r>
-            <a:r>
-              <a:rPr lang="en-US" dirty="0"/>
-              <a:t> </a:t>
-            </a:r>
-            <a:r>
-              <a:rPr lang="en-US" dirty="0" err="1"/>
-              <a:t>mềm</a:t>
-            </a:r>
-            <a:r>
-              <a:rPr lang="en-US" dirty="0"/>
-              <a:t> </a:t>
-            </a:r>
-            <a:r>
-              <a:rPr lang="en-US" dirty="0" err="1"/>
-              <a:t>giúp</a:t>
-            </a:r>
-            <a:r>
-              <a:rPr lang="en-US" dirty="0"/>
-              <a:t> </a:t>
-            </a:r>
-            <a:r>
-              <a:rPr lang="en-US" dirty="0" err="1"/>
-              <a:t>người</a:t>
-            </a:r>
-            <a:r>
-              <a:rPr lang="en-US" dirty="0"/>
-              <a:t> dung </a:t>
-            </a:r>
-            <a:r>
-              <a:rPr lang="en-US" dirty="0" err="1"/>
-              <a:t>có</a:t>
-            </a:r>
-            <a:r>
-              <a:rPr lang="en-US" dirty="0"/>
-              <a:t> </a:t>
-            </a:r>
-            <a:r>
-              <a:rPr lang="en-US" dirty="0" err="1"/>
-              <a:t>thể</a:t>
-            </a:r>
-            <a:r>
-              <a:rPr lang="en-US" dirty="0"/>
-              <a:t> </a:t>
-            </a:r>
-            <a:r>
-              <a:rPr lang="en-US" dirty="0" err="1"/>
-              <a:t>thuận</a:t>
-            </a:r>
-            <a:r>
-              <a:rPr lang="en-US" dirty="0"/>
-              <a:t> </a:t>
-            </a:r>
-            <a:r>
-              <a:rPr lang="en-US" dirty="0" err="1"/>
-              <a:t>tiện</a:t>
-            </a:r>
-            <a:r>
-              <a:rPr lang="en-US" dirty="0"/>
-              <a:t> </a:t>
-            </a:r>
-            <a:r>
-              <a:rPr lang="en-US" dirty="0" err="1"/>
-              <a:t>đặt</a:t>
-            </a:r>
-            <a:r>
-              <a:rPr lang="en-US" dirty="0"/>
-              <a:t> </a:t>
-            </a:r>
-            <a:r>
-              <a:rPr lang="en-US" dirty="0" err="1"/>
-              <a:t>vé</a:t>
-            </a:r>
-            <a:r>
-              <a:rPr lang="en-US" dirty="0"/>
-              <a:t> </a:t>
-            </a:r>
-            <a:r>
-              <a:rPr lang="en-US" dirty="0" err="1"/>
-              <a:t>xe</a:t>
-            </a:r>
-            <a:r>
-              <a:rPr lang="en-US" dirty="0"/>
-              <a:t> </a:t>
-            </a:r>
-            <a:r>
-              <a:rPr lang="en-US" dirty="0" err="1"/>
-              <a:t>để</a:t>
-            </a:r>
-            <a:r>
-              <a:rPr lang="en-US" dirty="0"/>
-              <a:t> </a:t>
-            </a:r>
-            <a:r>
-              <a:rPr lang="en-US" dirty="0" err="1"/>
-              <a:t>đến</a:t>
-            </a:r>
-            <a:r>
-              <a:rPr lang="en-US" dirty="0"/>
-              <a:t> </a:t>
-            </a:r>
-            <a:r>
-              <a:rPr lang="en-US" dirty="0" err="1"/>
-              <a:t>nơi</a:t>
-            </a:r>
-            <a:r>
-              <a:rPr lang="en-US" dirty="0"/>
-              <a:t> </a:t>
-            </a:r>
-            <a:r>
-              <a:rPr lang="en-US" dirty="0" err="1"/>
-              <a:t>cần</a:t>
-            </a:r>
-            <a:r>
-              <a:rPr lang="en-US" dirty="0"/>
-              <a:t> </a:t>
-            </a:r>
-            <a:r>
-              <a:rPr lang="en-US" dirty="0" err="1"/>
-              <a:t>muốn,giúp</a:t>
-            </a:r>
-            <a:r>
-              <a:rPr lang="en-US" dirty="0"/>
-              <a:t> </a:t>
-            </a:r>
-            <a:r>
-              <a:rPr lang="en-US" dirty="0" err="1"/>
-              <a:t>quản</a:t>
-            </a:r>
-            <a:r>
-              <a:rPr lang="en-US" dirty="0"/>
-              <a:t> </a:t>
-            </a:r>
-            <a:r>
-              <a:rPr lang="en-US" dirty="0" err="1"/>
-              <a:t>lý</a:t>
-            </a:r>
-            <a:r>
-              <a:rPr lang="en-US" dirty="0"/>
-              <a:t> </a:t>
-            </a:r>
-            <a:r>
-              <a:rPr lang="en-US" dirty="0" err="1"/>
-              <a:t>toàn</a:t>
-            </a:r>
-            <a:r>
-              <a:rPr lang="en-US" dirty="0"/>
-              <a:t> </a:t>
-            </a:r>
-            <a:r>
-              <a:rPr lang="en-US" dirty="0" err="1"/>
-              <a:t>bộ</a:t>
-            </a:r>
-            <a:r>
-              <a:rPr lang="en-US" dirty="0"/>
-              <a:t> </a:t>
-            </a:r>
-            <a:r>
-              <a:rPr lang="en-US" dirty="0" err="1"/>
-              <a:t>quy</a:t>
-            </a:r>
-            <a:r>
-              <a:rPr lang="en-US" dirty="0"/>
-              <a:t> </a:t>
-            </a:r>
-            <a:r>
-              <a:rPr lang="en-US" dirty="0" err="1"/>
-              <a:t>trình</a:t>
-            </a:r>
-            <a:r>
-              <a:rPr lang="en-US" dirty="0"/>
-              <a:t> </a:t>
-            </a:r>
-            <a:r>
-              <a:rPr lang="en-US" dirty="0" err="1"/>
-              <a:t>bán</a:t>
-            </a:r>
-            <a:r>
-              <a:rPr lang="en-US" dirty="0"/>
-              <a:t> </a:t>
-            </a:r>
-            <a:r>
-              <a:rPr lang="en-US" dirty="0" err="1"/>
-              <a:t>vé</a:t>
-            </a:r>
-            <a:r>
-              <a:rPr lang="en-US" dirty="0"/>
-              <a:t> </a:t>
-            </a:r>
-            <a:r>
-              <a:rPr lang="en-US" dirty="0" err="1"/>
-              <a:t>xe,giúp</a:t>
-            </a:r>
-            <a:r>
-              <a:rPr lang="en-US" dirty="0"/>
-              <a:t> admin </a:t>
-            </a:r>
-            <a:r>
-              <a:rPr lang="en-US" dirty="0" err="1"/>
-              <a:t>quản</a:t>
-            </a:r>
-            <a:r>
-              <a:rPr lang="en-US" dirty="0"/>
-              <a:t> </a:t>
-            </a:r>
-            <a:r>
-              <a:rPr lang="en-US" dirty="0" err="1"/>
-              <a:t>lý</a:t>
-            </a:r>
-            <a:r>
-              <a:rPr lang="en-US" dirty="0"/>
-              <a:t> </a:t>
-            </a:r>
-            <a:r>
-              <a:rPr lang="en-US" dirty="0" err="1"/>
-              <a:t>tuyến</a:t>
-            </a:r>
-            <a:r>
-              <a:rPr lang="en-US" dirty="0"/>
-              <a:t> </a:t>
-            </a:r>
-            <a:r>
-              <a:rPr lang="en-US" dirty="0" err="1"/>
-              <a:t>xe,chuyến</a:t>
-            </a:r>
-            <a:r>
-              <a:rPr lang="en-US" dirty="0"/>
-              <a:t> </a:t>
-            </a:r>
-            <a:r>
-              <a:rPr lang="en-US" dirty="0" err="1"/>
-              <a:t>xe</a:t>
-            </a:r>
-            <a:r>
-              <a:rPr lang="en-US" dirty="0"/>
-              <a:t>, </a:t>
-            </a:r>
-            <a:r>
-              <a:rPr lang="en-US" dirty="0" err="1"/>
-              <a:t>khách</a:t>
-            </a:r>
-            <a:r>
-              <a:rPr lang="en-US" dirty="0"/>
-              <a:t> </a:t>
-            </a:r>
-            <a:r>
-              <a:rPr lang="en-US" dirty="0" err="1"/>
-              <a:t>hàng</a:t>
-            </a:r>
-            <a:r>
-              <a:rPr lang="en-US" dirty="0"/>
-              <a:t>, </a:t>
-            </a:r>
-            <a:r>
-              <a:rPr lang="en-US" dirty="0" err="1"/>
-              <a:t>quản</a:t>
-            </a:r>
-            <a:r>
-              <a:rPr lang="en-US" dirty="0"/>
-              <a:t> </a:t>
-            </a:r>
-            <a:r>
-              <a:rPr lang="en-US" dirty="0" err="1"/>
-              <a:t>lý</a:t>
-            </a:r>
-            <a:r>
-              <a:rPr lang="en-US" dirty="0"/>
-              <a:t> </a:t>
-            </a:r>
-            <a:r>
-              <a:rPr lang="en-US" dirty="0" err="1"/>
-              <a:t>xe,quản</a:t>
-            </a:r>
-            <a:r>
-              <a:rPr lang="en-US" dirty="0"/>
-              <a:t> </a:t>
-            </a:r>
-            <a:r>
-              <a:rPr lang="en-US" dirty="0" err="1"/>
-              <a:t>lý</a:t>
-            </a:r>
-            <a:r>
-              <a:rPr lang="en-US" dirty="0"/>
-              <a:t> </a:t>
-            </a:r>
-            <a:r>
-              <a:rPr lang="en-US" dirty="0" err="1"/>
-              <a:t>nhân</a:t>
-            </a:r>
-            <a:r>
-              <a:rPr lang="en-US" dirty="0"/>
-              <a:t> </a:t>
-            </a:r>
-            <a:r>
-              <a:rPr lang="en-US" dirty="0" err="1"/>
-              <a:t>viên</a:t>
-            </a:r>
-            <a:endParaRPr lang="en-US" dirty="0"/>
-          </a:p>
-          <a:p>
-            <a:pPr lvl="0"/>
-            <a:endParaRPr lang="en-US" dirty="0"/>
-          </a:p>
-          <a:p>
-            <a:endParaRPr lang="en-US" dirty="0"/>
-          </a:p>
-          <a:p>
-            <a:endParaRPr lang="en-US" dirty="0">
-              <a:solidFill>
-                <a:srgbClr val="FF0000"/>
-              </a:solidFill>
-              <a:latin typeface="Times New Roman" panose="02020603050405020304" pitchFamily="18" charset="0"/>
-              <a:cs typeface="Times New Roman" panose="02020603050405020304" pitchFamily="18" charset="0"/>
-            </a:endParaRPr>
-          </a:p>
-        </p:txBody>
-      </p:sp>
-    </p:spTree>
-    <p:extLst>
-      <p:ext uri="{BB962C8B-B14F-4D97-AF65-F5344CB8AC3E}">
-        <p14:creationId xmlns:p14="http://schemas.microsoft.com/office/powerpoint/2010/main" val="3348076573"/>
-      </p:ext>
-    </p:extLst>
-  </p:cSld>
-  <p:clrMapOvr>
-    <a:masterClrMapping/>
-  </p:clrMapOvr>
-  <p:transition spd="slow">
-    <p:wipe/>
-  </p:transition>
-  <p:timing>
-    <p:tnLst>
-      <p:par>
-        <p:cTn id="1" dur="indefinite" restart="never" nodeType="tmRoot">
-          <p:childTnLst>
-            <p:seq concurrent="1" nextAc="seek">
-              <p:cTn id="2" dur="indefinite" nodeType="mainSeq">
-                <p:childTnLst>
-                  <p:par>
-                    <p:cTn id="3" fill="hold">
-                      <p:stCondLst>
-                        <p:cond delay="indefinite"/>
-                      </p:stCondLst>
-                      <p:childTnLst>
-                        <p:par>
-                          <p:cTn id="4" fill="hold">
-                            <p:stCondLst>
-                              <p:cond delay="0"/>
-                            </p:stCondLst>
-                            <p:childTnLst>
-                              <p:par>
-                                <p:cTn id="5" presetID="42" presetClass="entr" presetSubtype="0" fill="hold" grpId="0" nodeType="clickEffect">
-                                  <p:stCondLst>
-                                    <p:cond delay="0"/>
-                                  </p:stCondLst>
-                                  <p:childTnLst>
-                                    <p:set>
-                                      <p:cBhvr>
-                                        <p:cTn id="6" dur="1" fill="hold">
-                                          <p:stCondLst>
-                                            <p:cond delay="0"/>
-                                          </p:stCondLst>
-                                        </p:cTn>
-                                        <p:tgtEl>
-                                          <p:spTgt spid="8"/>
-                                        </p:tgtEl>
-                                        <p:attrNameLst>
-                                          <p:attrName>style.visibility</p:attrName>
-                                        </p:attrNameLst>
-                                      </p:cBhvr>
-                                      <p:to>
-                                        <p:strVal val="visible"/>
-                                      </p:to>
-                                    </p:set>
-                                    <p:animEffect transition="in" filter="fade">
-                                      <p:cBhvr>
-                                        <p:cTn id="7" dur="1000"/>
-                                        <p:tgtEl>
-                                          <p:spTgt spid="8"/>
-                                        </p:tgtEl>
-                                      </p:cBhvr>
-                                    </p:animEffect>
-                                    <p:anim calcmode="lin" valueType="num">
-                                      <p:cBhvr>
-                                        <p:cTn id="8" dur="1000" fill="hold"/>
-                                        <p:tgtEl>
-                                          <p:spTgt spid="8"/>
-                                        </p:tgtEl>
-                                        <p:attrNameLst>
-                                          <p:attrName>ppt_x</p:attrName>
-                                        </p:attrNameLst>
-                                      </p:cBhvr>
-                                      <p:tavLst>
-                                        <p:tav tm="0">
-                                          <p:val>
-                                            <p:strVal val="#ppt_x"/>
-                                          </p:val>
-                                        </p:tav>
-                                        <p:tav tm="100000">
-                                          <p:val>
-                                            <p:strVal val="#ppt_x"/>
-                                          </p:val>
-                                        </p:tav>
-                                      </p:tavLst>
-                                    </p:anim>
-                                    <p:anim calcmode="lin" valueType="num">
-                                      <p:cBhvr>
-                                        <p:cTn id="9" dur="1000" fill="hold"/>
-                                        <p:tgtEl>
-                                          <p:spTgt spid="8"/>
-                                        </p:tgtEl>
-                                        <p:attrNameLst>
-                                          <p:attrName>ppt_y</p:attrName>
-                                        </p:attrNameLst>
-                                      </p:cBhvr>
-                                      <p:tavLst>
-                                        <p:tav tm="0">
-                                          <p:val>
-                                            <p:strVal val="#ppt_y+.1"/>
-                                          </p:val>
-                                        </p:tav>
-                                        <p:tav tm="100000">
-                                          <p:val>
-                                            <p:strVal val="#ppt_y"/>
-                                          </p:val>
-                                        </p:tav>
-                                      </p:tavLst>
-                                    </p:anim>
-                                  </p:childTnLst>
-                                </p:cTn>
-                              </p:par>
-                            </p:childTnLst>
-                          </p:cTn>
-                        </p:par>
-                      </p:childTnLst>
-                    </p:cTn>
-                  </p:par>
-                  <p:par>
-                    <p:cTn id="10" fill="hold">
-                      <p:stCondLst>
-                        <p:cond delay="indefinite"/>
-                      </p:stCondLst>
-                      <p:childTnLst>
-                        <p:par>
-                          <p:cTn id="11" fill="hold">
-                            <p:stCondLst>
-                              <p:cond delay="0"/>
-                            </p:stCondLst>
-                            <p:childTnLst>
-                              <p:par>
-                                <p:cTn id="12" presetID="6" presetClass="entr" presetSubtype="16" fill="hold" grpId="0" nodeType="clickEffect">
-                                  <p:stCondLst>
-                                    <p:cond delay="0"/>
-                                  </p:stCondLst>
-                                  <p:childTnLst>
-                                    <p:set>
-                                      <p:cBhvr>
-                                        <p:cTn id="13" dur="1" fill="hold">
-                                          <p:stCondLst>
-                                            <p:cond delay="0"/>
-                                          </p:stCondLst>
-                                        </p:cTn>
-                                        <p:tgtEl>
-                                          <p:spTgt spid="2"/>
-                                        </p:tgtEl>
-                                        <p:attrNameLst>
-                                          <p:attrName>style.visibility</p:attrName>
-                                        </p:attrNameLst>
-                                      </p:cBhvr>
-                                      <p:to>
-                                        <p:strVal val="visible"/>
-                                      </p:to>
-                                    </p:set>
-                                    <p:animEffect transition="in" filter="circle(in)">
-                                      <p:cBhvr>
-                                        <p:cTn id="14" dur="2000"/>
-                                        <p:tgtEl>
-                                          <p:spTgt spid="2"/>
-                                        </p:tgtEl>
-                                      </p:cBhvr>
-                                    </p:animEffect>
-                                  </p:childTnLst>
-                                </p:cTn>
-                              </p:par>
-                            </p:childTnLst>
-                          </p:cTn>
-                        </p:par>
-                      </p:childTnLst>
-                    </p:cTn>
-                  </p:par>
-                </p:childTnLst>
-              </p:cTn>
-              <p:prevCondLst>
-                <p:cond evt="onPrev" delay="0">
-                  <p:tgtEl>
-                    <p:sldTgt/>
-                  </p:tgtEl>
-                </p:cond>
-              </p:prevCondLst>
-              <p:nextCondLst>
-                <p:cond evt="onNext" delay="0">
-                  <p:tgtEl>
-                    <p:sldTgt/>
-                  </p:tgtEl>
-                </p:cond>
-              </p:nextCondLst>
-            </p:seq>
-          </p:childTnLst>
-        </p:cTn>
-      </p:par>
-    </p:tnLst>
-    <p:bldLst>
-      <p:bldP spid="8" grpId="0"/>
-      <p:bldP spid="2" grpId="0" animBg="1"/>
-    </p:bldLst>
-  </p:timing>
-</p:sld>
-</file>
-
-<file path=ppt/slides/slide20.xml><?xml version="1.0" encoding="utf-8"?>
+<file path=ppt/slides/slide22.xml><?xml version="1.0" encoding="utf-8"?>
 <p:sld xmlns:a="http://schemas.openxmlformats.org/drawingml/2006/main" xmlns:r="http://schemas.openxmlformats.org/officeDocument/2006/relationships" xmlns:p="http://schemas.openxmlformats.org/presentationml/2006/main">
   <p:cSld>
     <p:spTree>
@@ -13028,6 +12417,1516 @@
         </p:nvSpPr>
         <p:spPr>
           <a:xfrm>
+            <a:off x="820418" y="-367891"/>
+            <a:ext cx="8369324" cy="1754326"/>
+          </a:xfrm>
+          <a:prstGeom prst="rect">
+            <a:avLst/>
+          </a:prstGeom>
+          <a:noFill/>
+        </p:spPr>
+        <p:txBody>
+          <a:bodyPr wrap="square" lIns="91440" tIns="45720" rIns="91440" bIns="45720">
+            <a:spAutoFit/>
+          </a:bodyPr>
+          <a:lstStyle/>
+          <a:p>
+            <a:pPr algn="ctr"/>
+            <a:endParaRPr lang="en-US" sz="5400" b="1" dirty="0">
+              <a:ln w="13462">
+                <a:solidFill>
+                  <a:schemeClr val="bg1"/>
+                </a:solidFill>
+                <a:prstDash val="solid"/>
+              </a:ln>
+              <a:solidFill>
+                <a:schemeClr val="tx1">
+                  <a:lumMod val="85000"/>
+                  <a:lumOff val="15000"/>
+                </a:schemeClr>
+              </a:solidFill>
+              <a:effectLst>
+                <a:outerShdw dist="38100" dir="2700000" algn="bl" rotWithShape="0">
+                  <a:schemeClr val="accent5"/>
+                </a:outerShdw>
+              </a:effectLst>
+              <a:latin typeface="Times New Roman" panose="02020603050405020304" pitchFamily="18" charset="0"/>
+              <a:cs typeface="Times New Roman" panose="02020603050405020304" pitchFamily="18" charset="0"/>
+            </a:endParaRPr>
+          </a:p>
+          <a:p>
+            <a:r>
+              <a:rPr lang="en-US" sz="5400" dirty="0">
+                <a:ln w="0"/>
+                <a:gradFill>
+                  <a:gsLst>
+                    <a:gs pos="0">
+                      <a:schemeClr val="accent5">
+                        <a:lumMod val="50000"/>
+                      </a:schemeClr>
+                    </a:gs>
+                    <a:gs pos="50000">
+                      <a:schemeClr val="accent5"/>
+                    </a:gs>
+                    <a:gs pos="100000">
+                      <a:schemeClr val="accent5">
+                        <a:lumMod val="60000"/>
+                        <a:lumOff val="40000"/>
+                      </a:schemeClr>
+                    </a:gs>
+                  </a:gsLst>
+                  <a:lin ang="5400000"/>
+                </a:gradFill>
+                <a:effectLst>
+                  <a:reflection blurRad="6350" stA="53000" endA="300" endPos="35500" dir="5400000" sy="-90000" algn="bl" rotWithShape="0"/>
+                </a:effectLst>
+                <a:latin typeface="Times New Roman" panose="02020603050405020304" pitchFamily="18" charset="0"/>
+                <a:cs typeface="Times New Roman" panose="02020603050405020304" pitchFamily="18" charset="0"/>
+              </a:rPr>
+              <a:t>I. </a:t>
+            </a:r>
+            <a:r>
+              <a:rPr lang="en-US" sz="5400" dirty="0" err="1">
+                <a:ln w="0"/>
+                <a:gradFill>
+                  <a:gsLst>
+                    <a:gs pos="0">
+                      <a:schemeClr val="accent5">
+                        <a:lumMod val="50000"/>
+                      </a:schemeClr>
+                    </a:gs>
+                    <a:gs pos="50000">
+                      <a:schemeClr val="accent5"/>
+                    </a:gs>
+                    <a:gs pos="100000">
+                      <a:schemeClr val="accent5">
+                        <a:lumMod val="60000"/>
+                        <a:lumOff val="40000"/>
+                      </a:schemeClr>
+                    </a:gs>
+                  </a:gsLst>
+                  <a:lin ang="5400000"/>
+                </a:gradFill>
+                <a:effectLst>
+                  <a:reflection blurRad="6350" stA="53000" endA="300" endPos="35500" dir="5400000" sy="-90000" algn="bl" rotWithShape="0"/>
+                </a:effectLst>
+                <a:latin typeface="Times New Roman" panose="02020603050405020304" pitchFamily="18" charset="0"/>
+                <a:cs typeface="Times New Roman" panose="02020603050405020304" pitchFamily="18" charset="0"/>
+              </a:rPr>
+              <a:t>Giới</a:t>
+            </a:r>
+            <a:r>
+              <a:rPr lang="en-US" sz="5400" dirty="0">
+                <a:ln w="0"/>
+                <a:gradFill>
+                  <a:gsLst>
+                    <a:gs pos="0">
+                      <a:schemeClr val="accent5">
+                        <a:lumMod val="50000"/>
+                      </a:schemeClr>
+                    </a:gs>
+                    <a:gs pos="50000">
+                      <a:schemeClr val="accent5"/>
+                    </a:gs>
+                    <a:gs pos="100000">
+                      <a:schemeClr val="accent5">
+                        <a:lumMod val="60000"/>
+                        <a:lumOff val="40000"/>
+                      </a:schemeClr>
+                    </a:gs>
+                  </a:gsLst>
+                  <a:lin ang="5400000"/>
+                </a:gradFill>
+                <a:effectLst>
+                  <a:reflection blurRad="6350" stA="53000" endA="300" endPos="35500" dir="5400000" sy="-90000" algn="bl" rotWithShape="0"/>
+                </a:effectLst>
+                <a:latin typeface="Times New Roman" panose="02020603050405020304" pitchFamily="18" charset="0"/>
+                <a:cs typeface="Times New Roman" panose="02020603050405020304" pitchFamily="18" charset="0"/>
+              </a:rPr>
+              <a:t> </a:t>
+            </a:r>
+            <a:r>
+              <a:rPr lang="en-US" sz="5400" dirty="0" err="1">
+                <a:ln w="0"/>
+                <a:gradFill>
+                  <a:gsLst>
+                    <a:gs pos="0">
+                      <a:schemeClr val="accent5">
+                        <a:lumMod val="50000"/>
+                      </a:schemeClr>
+                    </a:gs>
+                    <a:gs pos="50000">
+                      <a:schemeClr val="accent5"/>
+                    </a:gs>
+                    <a:gs pos="100000">
+                      <a:schemeClr val="accent5">
+                        <a:lumMod val="60000"/>
+                        <a:lumOff val="40000"/>
+                      </a:schemeClr>
+                    </a:gs>
+                  </a:gsLst>
+                  <a:lin ang="5400000"/>
+                </a:gradFill>
+                <a:effectLst>
+                  <a:reflection blurRad="6350" stA="53000" endA="300" endPos="35500" dir="5400000" sy="-90000" algn="bl" rotWithShape="0"/>
+                </a:effectLst>
+                <a:latin typeface="Times New Roman" panose="02020603050405020304" pitchFamily="18" charset="0"/>
+                <a:cs typeface="Times New Roman" panose="02020603050405020304" pitchFamily="18" charset="0"/>
+              </a:rPr>
+              <a:t>thiệu</a:t>
+            </a:r>
+            <a:r>
+              <a:rPr lang="en-US" sz="5400" dirty="0">
+                <a:ln w="0"/>
+                <a:gradFill>
+                  <a:gsLst>
+                    <a:gs pos="0">
+                      <a:schemeClr val="accent5">
+                        <a:lumMod val="50000"/>
+                      </a:schemeClr>
+                    </a:gs>
+                    <a:gs pos="50000">
+                      <a:schemeClr val="accent5"/>
+                    </a:gs>
+                    <a:gs pos="100000">
+                      <a:schemeClr val="accent5">
+                        <a:lumMod val="60000"/>
+                        <a:lumOff val="40000"/>
+                      </a:schemeClr>
+                    </a:gs>
+                  </a:gsLst>
+                  <a:lin ang="5400000"/>
+                </a:gradFill>
+                <a:effectLst>
+                  <a:reflection blurRad="6350" stA="53000" endA="300" endPos="35500" dir="5400000" sy="-90000" algn="bl" rotWithShape="0"/>
+                </a:effectLst>
+                <a:latin typeface="Times New Roman" panose="02020603050405020304" pitchFamily="18" charset="0"/>
+                <a:cs typeface="Times New Roman" panose="02020603050405020304" pitchFamily="18" charset="0"/>
+              </a:rPr>
+              <a:t> </a:t>
+            </a:r>
+            <a:r>
+              <a:rPr lang="en-US" sz="5400" dirty="0" err="1">
+                <a:ln w="0"/>
+                <a:gradFill>
+                  <a:gsLst>
+                    <a:gs pos="0">
+                      <a:schemeClr val="accent5">
+                        <a:lumMod val="50000"/>
+                      </a:schemeClr>
+                    </a:gs>
+                    <a:gs pos="50000">
+                      <a:schemeClr val="accent5"/>
+                    </a:gs>
+                    <a:gs pos="100000">
+                      <a:schemeClr val="accent5">
+                        <a:lumMod val="60000"/>
+                        <a:lumOff val="40000"/>
+                      </a:schemeClr>
+                    </a:gs>
+                  </a:gsLst>
+                  <a:lin ang="5400000"/>
+                </a:gradFill>
+                <a:effectLst>
+                  <a:reflection blurRad="6350" stA="53000" endA="300" endPos="35500" dir="5400000" sy="-90000" algn="bl" rotWithShape="0"/>
+                </a:effectLst>
+                <a:latin typeface="Times New Roman" panose="02020603050405020304" pitchFamily="18" charset="0"/>
+                <a:cs typeface="Times New Roman" panose="02020603050405020304" pitchFamily="18" charset="0"/>
+              </a:rPr>
+              <a:t>dự</a:t>
+            </a:r>
+            <a:r>
+              <a:rPr lang="en-US" sz="5400" dirty="0">
+                <a:ln w="0"/>
+                <a:gradFill>
+                  <a:gsLst>
+                    <a:gs pos="0">
+                      <a:schemeClr val="accent5">
+                        <a:lumMod val="50000"/>
+                      </a:schemeClr>
+                    </a:gs>
+                    <a:gs pos="50000">
+                      <a:schemeClr val="accent5"/>
+                    </a:gs>
+                    <a:gs pos="100000">
+                      <a:schemeClr val="accent5">
+                        <a:lumMod val="60000"/>
+                        <a:lumOff val="40000"/>
+                      </a:schemeClr>
+                    </a:gs>
+                  </a:gsLst>
+                  <a:lin ang="5400000"/>
+                </a:gradFill>
+                <a:effectLst>
+                  <a:reflection blurRad="6350" stA="53000" endA="300" endPos="35500" dir="5400000" sy="-90000" algn="bl" rotWithShape="0"/>
+                </a:effectLst>
+                <a:latin typeface="Times New Roman" panose="02020603050405020304" pitchFamily="18" charset="0"/>
+                <a:cs typeface="Times New Roman" panose="02020603050405020304" pitchFamily="18" charset="0"/>
+              </a:rPr>
+              <a:t> </a:t>
+            </a:r>
+            <a:r>
+              <a:rPr lang="en-US" sz="5400" dirty="0" err="1">
+                <a:ln w="0"/>
+                <a:gradFill>
+                  <a:gsLst>
+                    <a:gs pos="0">
+                      <a:schemeClr val="accent5">
+                        <a:lumMod val="50000"/>
+                      </a:schemeClr>
+                    </a:gs>
+                    <a:gs pos="50000">
+                      <a:schemeClr val="accent5"/>
+                    </a:gs>
+                    <a:gs pos="100000">
+                      <a:schemeClr val="accent5">
+                        <a:lumMod val="60000"/>
+                        <a:lumOff val="40000"/>
+                      </a:schemeClr>
+                    </a:gs>
+                  </a:gsLst>
+                  <a:lin ang="5400000"/>
+                </a:gradFill>
+                <a:effectLst>
+                  <a:reflection blurRad="6350" stA="53000" endA="300" endPos="35500" dir="5400000" sy="-90000" algn="bl" rotWithShape="0"/>
+                </a:effectLst>
+                <a:latin typeface="Times New Roman" panose="02020603050405020304" pitchFamily="18" charset="0"/>
+                <a:cs typeface="Times New Roman" panose="02020603050405020304" pitchFamily="18" charset="0"/>
+              </a:rPr>
+              <a:t>án</a:t>
+            </a:r>
+            <a:r>
+              <a:rPr lang="en-US" sz="5400" dirty="0">
+                <a:ln w="0"/>
+                <a:gradFill>
+                  <a:gsLst>
+                    <a:gs pos="0">
+                      <a:schemeClr val="accent5">
+                        <a:lumMod val="50000"/>
+                      </a:schemeClr>
+                    </a:gs>
+                    <a:gs pos="50000">
+                      <a:schemeClr val="accent5"/>
+                    </a:gs>
+                    <a:gs pos="100000">
+                      <a:schemeClr val="accent5">
+                        <a:lumMod val="60000"/>
+                        <a:lumOff val="40000"/>
+                      </a:schemeClr>
+                    </a:gs>
+                  </a:gsLst>
+                  <a:lin ang="5400000"/>
+                </a:gradFill>
+                <a:effectLst>
+                  <a:reflection blurRad="6350" stA="53000" endA="300" endPos="35500" dir="5400000" sy="-90000" algn="bl" rotWithShape="0"/>
+                </a:effectLst>
+                <a:latin typeface="Times New Roman" panose="02020603050405020304" pitchFamily="18" charset="0"/>
+                <a:cs typeface="Times New Roman" panose="02020603050405020304" pitchFamily="18" charset="0"/>
+              </a:rPr>
+              <a:t> </a:t>
+            </a:r>
+            <a:r>
+              <a:rPr lang="en-US" sz="5400" dirty="0" err="1">
+                <a:ln w="0"/>
+                <a:gradFill>
+                  <a:gsLst>
+                    <a:gs pos="0">
+                      <a:schemeClr val="accent5">
+                        <a:lumMod val="50000"/>
+                      </a:schemeClr>
+                    </a:gs>
+                    <a:gs pos="50000">
+                      <a:schemeClr val="accent5"/>
+                    </a:gs>
+                    <a:gs pos="100000">
+                      <a:schemeClr val="accent5">
+                        <a:lumMod val="60000"/>
+                        <a:lumOff val="40000"/>
+                      </a:schemeClr>
+                    </a:gs>
+                  </a:gsLst>
+                  <a:lin ang="5400000"/>
+                </a:gradFill>
+                <a:effectLst>
+                  <a:reflection blurRad="6350" stA="53000" endA="300" endPos="35500" dir="5400000" sy="-90000" algn="bl" rotWithShape="0"/>
+                </a:effectLst>
+                <a:latin typeface="Times New Roman" panose="02020603050405020304" pitchFamily="18" charset="0"/>
+                <a:cs typeface="Times New Roman" panose="02020603050405020304" pitchFamily="18" charset="0"/>
+              </a:rPr>
+              <a:t>phần</a:t>
+            </a:r>
+            <a:r>
+              <a:rPr lang="en-US" sz="5400" dirty="0">
+                <a:ln w="0"/>
+                <a:gradFill>
+                  <a:gsLst>
+                    <a:gs pos="0">
+                      <a:schemeClr val="accent5">
+                        <a:lumMod val="50000"/>
+                      </a:schemeClr>
+                    </a:gs>
+                    <a:gs pos="50000">
+                      <a:schemeClr val="accent5"/>
+                    </a:gs>
+                    <a:gs pos="100000">
+                      <a:schemeClr val="accent5">
+                        <a:lumMod val="60000"/>
+                        <a:lumOff val="40000"/>
+                      </a:schemeClr>
+                    </a:gs>
+                  </a:gsLst>
+                  <a:lin ang="5400000"/>
+                </a:gradFill>
+                <a:effectLst>
+                  <a:reflection blurRad="6350" stA="53000" endA="300" endPos="35500" dir="5400000" sy="-90000" algn="bl" rotWithShape="0"/>
+                </a:effectLst>
+                <a:latin typeface="Times New Roman" panose="02020603050405020304" pitchFamily="18" charset="0"/>
+                <a:cs typeface="Times New Roman" panose="02020603050405020304" pitchFamily="18" charset="0"/>
+              </a:rPr>
+              <a:t> </a:t>
+            </a:r>
+            <a:r>
+              <a:rPr lang="en-US" sz="5400" dirty="0" err="1">
+                <a:ln w="0"/>
+                <a:gradFill>
+                  <a:gsLst>
+                    <a:gs pos="0">
+                      <a:schemeClr val="accent5">
+                        <a:lumMod val="50000"/>
+                      </a:schemeClr>
+                    </a:gs>
+                    <a:gs pos="50000">
+                      <a:schemeClr val="accent5"/>
+                    </a:gs>
+                    <a:gs pos="100000">
+                      <a:schemeClr val="accent5">
+                        <a:lumMod val="60000"/>
+                        <a:lumOff val="40000"/>
+                      </a:schemeClr>
+                    </a:gs>
+                  </a:gsLst>
+                  <a:lin ang="5400000"/>
+                </a:gradFill>
+                <a:effectLst>
+                  <a:reflection blurRad="6350" stA="53000" endA="300" endPos="35500" dir="5400000" sy="-90000" algn="bl" rotWithShape="0"/>
+                </a:effectLst>
+                <a:latin typeface="Times New Roman" panose="02020603050405020304" pitchFamily="18" charset="0"/>
+                <a:cs typeface="Times New Roman" panose="02020603050405020304" pitchFamily="18" charset="0"/>
+              </a:rPr>
+              <a:t>mềm</a:t>
+            </a:r>
+            <a:endParaRPr lang="en-US" sz="5400" dirty="0">
+              <a:ln w="0"/>
+              <a:gradFill>
+                <a:gsLst>
+                  <a:gs pos="0">
+                    <a:schemeClr val="accent5">
+                      <a:lumMod val="50000"/>
+                    </a:schemeClr>
+                  </a:gs>
+                  <a:gs pos="50000">
+                    <a:schemeClr val="accent5"/>
+                  </a:gs>
+                  <a:gs pos="100000">
+                    <a:schemeClr val="accent5">
+                      <a:lumMod val="60000"/>
+                      <a:lumOff val="40000"/>
+                    </a:schemeClr>
+                  </a:gs>
+                </a:gsLst>
+                <a:lin ang="5400000"/>
+              </a:gradFill>
+              <a:effectLst>
+                <a:reflection blurRad="6350" stA="53000" endA="300" endPos="35500" dir="5400000" sy="-90000" algn="bl" rotWithShape="0"/>
+              </a:effectLst>
+              <a:latin typeface="Times New Roman" panose="02020603050405020304" pitchFamily="18" charset="0"/>
+              <a:cs typeface="Times New Roman" panose="02020603050405020304" pitchFamily="18" charset="0"/>
+            </a:endParaRPr>
+          </a:p>
+        </p:txBody>
+      </p:sp>
+      <p:sp>
+        <p:nvSpPr>
+          <p:cNvPr id="2" name="Rectangle 1">
+            <a:extLst>
+              <a:ext uri="{FF2B5EF4-FFF2-40B4-BE49-F238E27FC236}">
+                <a16:creationId xmlns:a16="http://schemas.microsoft.com/office/drawing/2014/main" id="{CC1F1F14-C2DA-6E3F-39BD-4CBE7E51E5F1}"/>
+              </a:ext>
+            </a:extLst>
+          </p:cNvPr>
+          <p:cNvSpPr/>
+          <p:nvPr/>
+        </p:nvSpPr>
+        <p:spPr>
+          <a:xfrm>
+            <a:off x="939701" y="1766152"/>
+            <a:ext cx="8250041" cy="4682773"/>
+          </a:xfrm>
+          <a:prstGeom prst="rect">
+            <a:avLst/>
+          </a:prstGeom>
+        </p:spPr>
+        <p:style>
+          <a:lnRef idx="2">
+            <a:schemeClr val="accent6"/>
+          </a:lnRef>
+          <a:fillRef idx="1">
+            <a:schemeClr val="lt1"/>
+          </a:fillRef>
+          <a:effectRef idx="0">
+            <a:schemeClr val="accent6"/>
+          </a:effectRef>
+          <a:fontRef idx="minor">
+            <a:schemeClr val="dk1"/>
+          </a:fontRef>
+        </p:style>
+        <p:txBody>
+          <a:bodyPr rtlCol="0" anchor="ctr"/>
+          <a:lstStyle/>
+          <a:p>
+            <a:pPr algn="just"/>
+            <a:r>
+              <a:rPr lang="en-US" sz="4400" dirty="0" err="1">
+                <a:solidFill>
+                  <a:srgbClr val="FF0000"/>
+                </a:solidFill>
+                <a:latin typeface="Times New Roman" panose="02020603050405020304" pitchFamily="18" charset="0"/>
+                <a:cs typeface="Times New Roman" panose="02020603050405020304" pitchFamily="18" charset="0"/>
+              </a:rPr>
+              <a:t>Phần</a:t>
+            </a:r>
+            <a:r>
+              <a:rPr lang="en-US" sz="4400" dirty="0">
+                <a:solidFill>
+                  <a:srgbClr val="FF0000"/>
+                </a:solidFill>
+                <a:latin typeface="Times New Roman" panose="02020603050405020304" pitchFamily="18" charset="0"/>
+                <a:cs typeface="Times New Roman" panose="02020603050405020304" pitchFamily="18" charset="0"/>
+              </a:rPr>
+              <a:t> </a:t>
+            </a:r>
+            <a:r>
+              <a:rPr lang="en-US" sz="4400" dirty="0" err="1">
+                <a:solidFill>
+                  <a:srgbClr val="FF0000"/>
+                </a:solidFill>
+                <a:latin typeface="Times New Roman" panose="02020603050405020304" pitchFamily="18" charset="0"/>
+                <a:cs typeface="Times New Roman" panose="02020603050405020304" pitchFamily="18" charset="0"/>
+              </a:rPr>
+              <a:t>mềm</a:t>
+            </a:r>
+            <a:r>
+              <a:rPr lang="en-US" sz="4400" dirty="0">
+                <a:solidFill>
+                  <a:srgbClr val="FF0000"/>
+                </a:solidFill>
+                <a:latin typeface="Times New Roman" panose="02020603050405020304" pitchFamily="18" charset="0"/>
+                <a:cs typeface="Times New Roman" panose="02020603050405020304" pitchFamily="18" charset="0"/>
+              </a:rPr>
+              <a:t> </a:t>
+            </a:r>
+            <a:r>
+              <a:rPr lang="en-US" sz="4400" dirty="0" err="1">
+                <a:solidFill>
+                  <a:srgbClr val="FF0000"/>
+                </a:solidFill>
+                <a:latin typeface="Times New Roman" panose="02020603050405020304" pitchFamily="18" charset="0"/>
+                <a:cs typeface="Times New Roman" panose="02020603050405020304" pitchFamily="18" charset="0"/>
+              </a:rPr>
+              <a:t>bán</a:t>
+            </a:r>
+            <a:r>
+              <a:rPr lang="en-US" sz="4400" dirty="0">
+                <a:solidFill>
+                  <a:srgbClr val="FF0000"/>
+                </a:solidFill>
+                <a:latin typeface="Times New Roman" panose="02020603050405020304" pitchFamily="18" charset="0"/>
+                <a:cs typeface="Times New Roman" panose="02020603050405020304" pitchFamily="18" charset="0"/>
+              </a:rPr>
+              <a:t> </a:t>
+            </a:r>
+            <a:r>
+              <a:rPr lang="en-US" sz="4400" dirty="0" err="1">
+                <a:solidFill>
+                  <a:srgbClr val="FF0000"/>
+                </a:solidFill>
+                <a:latin typeface="Times New Roman" panose="02020603050405020304" pitchFamily="18" charset="0"/>
+                <a:cs typeface="Times New Roman" panose="02020603050405020304" pitchFamily="18" charset="0"/>
+              </a:rPr>
+              <a:t>vé</a:t>
+            </a:r>
+            <a:r>
+              <a:rPr lang="en-US" sz="4400" dirty="0">
+                <a:solidFill>
+                  <a:srgbClr val="FF0000"/>
+                </a:solidFill>
+                <a:latin typeface="Times New Roman" panose="02020603050405020304" pitchFamily="18" charset="0"/>
+                <a:cs typeface="Times New Roman" panose="02020603050405020304" pitchFamily="18" charset="0"/>
+              </a:rPr>
+              <a:t> </a:t>
+            </a:r>
+            <a:r>
+              <a:rPr lang="en-US" sz="4400" dirty="0" err="1">
+                <a:solidFill>
+                  <a:srgbClr val="FF0000"/>
+                </a:solidFill>
+                <a:latin typeface="Times New Roman" panose="02020603050405020304" pitchFamily="18" charset="0"/>
+                <a:cs typeface="Times New Roman" panose="02020603050405020304" pitchFamily="18" charset="0"/>
+              </a:rPr>
+              <a:t>xe</a:t>
+            </a:r>
+            <a:r>
+              <a:rPr lang="en-US" sz="4400" dirty="0">
+                <a:solidFill>
+                  <a:srgbClr val="FF0000"/>
+                </a:solidFill>
+                <a:latin typeface="Times New Roman" panose="02020603050405020304" pitchFamily="18" charset="0"/>
+                <a:cs typeface="Times New Roman" panose="02020603050405020304" pitchFamily="18" charset="0"/>
+              </a:rPr>
+              <a:t>:</a:t>
+            </a:r>
+            <a:r>
+              <a:rPr lang="en-US" sz="3600" dirty="0">
+                <a:solidFill>
+                  <a:srgbClr val="FF0000"/>
+                </a:solidFill>
+                <a:latin typeface="Times New Roman" panose="02020603050405020304" pitchFamily="18" charset="0"/>
+                <a:cs typeface="Times New Roman" panose="02020603050405020304" pitchFamily="18" charset="0"/>
+              </a:rPr>
+              <a:t> </a:t>
+            </a:r>
+            <a:r>
+              <a:rPr lang="vi-VN" sz="2800" dirty="0">
+                <a:solidFill>
+                  <a:schemeClr val="tx1">
+                    <a:lumMod val="85000"/>
+                    <a:lumOff val="15000"/>
+                  </a:schemeClr>
+                </a:solidFill>
+                <a:latin typeface="Times New Roman" panose="02020603050405020304" pitchFamily="18" charset="0"/>
+                <a:cs typeface="Times New Roman" panose="02020603050405020304" pitchFamily="18" charset="0"/>
+              </a:rPr>
+              <a:t>Là một ứng dụng được thiết kế để quản lý quá trình bán vé và quản lý hành trình cho các chuyến xe của nhà xe. Với giao diện thân thiện và tính linh hoạt, phần mềm này giúp nhà xe tăng cường hiệu suất, tối ưu hóa quy trình bán</a:t>
+            </a:r>
+            <a:r>
+              <a:rPr lang="en-US" sz="2800" dirty="0">
+                <a:solidFill>
+                  <a:schemeClr val="tx1">
+                    <a:lumMod val="85000"/>
+                    <a:lumOff val="15000"/>
+                  </a:schemeClr>
+                </a:solidFill>
+                <a:latin typeface="Times New Roman" panose="02020603050405020304" pitchFamily="18" charset="0"/>
+                <a:cs typeface="Times New Roman" panose="02020603050405020304" pitchFamily="18" charset="0"/>
+              </a:rPr>
+              <a:t>, </a:t>
+            </a:r>
+            <a:r>
+              <a:rPr lang="en-US" sz="2800" dirty="0" err="1">
+                <a:solidFill>
+                  <a:schemeClr val="tx1">
+                    <a:lumMod val="85000"/>
+                    <a:lumOff val="15000"/>
+                  </a:schemeClr>
+                </a:solidFill>
+                <a:latin typeface="Times New Roman" panose="02020603050405020304" pitchFamily="18" charset="0"/>
+                <a:cs typeface="Times New Roman" panose="02020603050405020304" pitchFamily="18" charset="0"/>
+              </a:rPr>
+              <a:t>quản</a:t>
+            </a:r>
+            <a:r>
+              <a:rPr lang="en-US" sz="2800" dirty="0">
+                <a:solidFill>
+                  <a:schemeClr val="tx1">
+                    <a:lumMod val="85000"/>
+                    <a:lumOff val="15000"/>
+                  </a:schemeClr>
+                </a:solidFill>
+                <a:latin typeface="Times New Roman" panose="02020603050405020304" pitchFamily="18" charset="0"/>
+                <a:cs typeface="Times New Roman" panose="02020603050405020304" pitchFamily="18" charset="0"/>
+              </a:rPr>
+              <a:t> </a:t>
+            </a:r>
+            <a:r>
+              <a:rPr lang="en-US" sz="2800" dirty="0" err="1">
+                <a:solidFill>
+                  <a:schemeClr val="tx1">
+                    <a:lumMod val="85000"/>
+                    <a:lumOff val="15000"/>
+                  </a:schemeClr>
+                </a:solidFill>
+                <a:latin typeface="Times New Roman" panose="02020603050405020304" pitchFamily="18" charset="0"/>
+                <a:cs typeface="Times New Roman" panose="02020603050405020304" pitchFamily="18" charset="0"/>
+              </a:rPr>
+              <a:t>lý</a:t>
+            </a:r>
+            <a:r>
+              <a:rPr lang="vi-VN" sz="2800" dirty="0">
+                <a:solidFill>
+                  <a:schemeClr val="tx1">
+                    <a:lumMod val="85000"/>
+                    <a:lumOff val="15000"/>
+                  </a:schemeClr>
+                </a:solidFill>
+                <a:latin typeface="Times New Roman" panose="02020603050405020304" pitchFamily="18" charset="0"/>
+                <a:cs typeface="Times New Roman" panose="02020603050405020304" pitchFamily="18" charset="0"/>
+              </a:rPr>
+              <a:t> vé và nâng cao trải nghiệm của khách hàng.</a:t>
+            </a:r>
+            <a:endParaRPr lang="en-US" sz="2800" dirty="0">
+              <a:solidFill>
+                <a:schemeClr val="tx1">
+                  <a:lumMod val="85000"/>
+                  <a:lumOff val="15000"/>
+                </a:schemeClr>
+              </a:solidFill>
+              <a:latin typeface="Times New Roman" panose="02020603050405020304" pitchFamily="18" charset="0"/>
+              <a:cs typeface="Times New Roman" panose="02020603050405020304" pitchFamily="18" charset="0"/>
+            </a:endParaRPr>
+          </a:p>
+          <a:p>
+            <a:pPr algn="just"/>
+            <a:endParaRPr lang="en-US" sz="2800" dirty="0">
+              <a:solidFill>
+                <a:schemeClr val="tx1">
+                  <a:lumMod val="85000"/>
+                  <a:lumOff val="15000"/>
+                </a:schemeClr>
+              </a:solidFill>
+              <a:latin typeface="Times New Roman" panose="02020603050405020304" pitchFamily="18" charset="0"/>
+              <a:cs typeface="Times New Roman" panose="02020603050405020304" pitchFamily="18" charset="0"/>
+            </a:endParaRPr>
+          </a:p>
+        </p:txBody>
+      </p:sp>
+    </p:spTree>
+    <p:extLst>
+      <p:ext uri="{BB962C8B-B14F-4D97-AF65-F5344CB8AC3E}">
+        <p14:creationId xmlns:p14="http://schemas.microsoft.com/office/powerpoint/2010/main" val="3348076573"/>
+      </p:ext>
+    </p:extLst>
+  </p:cSld>
+  <p:clrMapOvr>
+    <a:masterClrMapping/>
+  </p:clrMapOvr>
+  <p:transition spd="slow">
+    <p:wipe/>
+  </p:transition>
+  <p:timing>
+    <p:tnLst>
+      <p:par>
+        <p:cTn id="1" dur="indefinite" restart="never" nodeType="tmRoot">
+          <p:childTnLst>
+            <p:seq concurrent="1" nextAc="seek">
+              <p:cTn id="2" dur="indefinite" nodeType="mainSeq">
+                <p:childTnLst>
+                  <p:par>
+                    <p:cTn id="3" fill="hold">
+                      <p:stCondLst>
+                        <p:cond delay="indefinite"/>
+                      </p:stCondLst>
+                      <p:childTnLst>
+                        <p:par>
+                          <p:cTn id="4" fill="hold">
+                            <p:stCondLst>
+                              <p:cond delay="0"/>
+                            </p:stCondLst>
+                            <p:childTnLst>
+                              <p:par>
+                                <p:cTn id="5" presetID="42" presetClass="entr" presetSubtype="0" fill="hold" grpId="0" nodeType="clickEffect">
+                                  <p:stCondLst>
+                                    <p:cond delay="0"/>
+                                  </p:stCondLst>
+                                  <p:childTnLst>
+                                    <p:set>
+                                      <p:cBhvr>
+                                        <p:cTn id="6" dur="1" fill="hold">
+                                          <p:stCondLst>
+                                            <p:cond delay="0"/>
+                                          </p:stCondLst>
+                                        </p:cTn>
+                                        <p:tgtEl>
+                                          <p:spTgt spid="8"/>
+                                        </p:tgtEl>
+                                        <p:attrNameLst>
+                                          <p:attrName>style.visibility</p:attrName>
+                                        </p:attrNameLst>
+                                      </p:cBhvr>
+                                      <p:to>
+                                        <p:strVal val="visible"/>
+                                      </p:to>
+                                    </p:set>
+                                    <p:animEffect transition="in" filter="fade">
+                                      <p:cBhvr>
+                                        <p:cTn id="7" dur="1000"/>
+                                        <p:tgtEl>
+                                          <p:spTgt spid="8"/>
+                                        </p:tgtEl>
+                                      </p:cBhvr>
+                                    </p:animEffect>
+                                    <p:anim calcmode="lin" valueType="num">
+                                      <p:cBhvr>
+                                        <p:cTn id="8" dur="1000" fill="hold"/>
+                                        <p:tgtEl>
+                                          <p:spTgt spid="8"/>
+                                        </p:tgtEl>
+                                        <p:attrNameLst>
+                                          <p:attrName>ppt_x</p:attrName>
+                                        </p:attrNameLst>
+                                      </p:cBhvr>
+                                      <p:tavLst>
+                                        <p:tav tm="0">
+                                          <p:val>
+                                            <p:strVal val="#ppt_x"/>
+                                          </p:val>
+                                        </p:tav>
+                                        <p:tav tm="100000">
+                                          <p:val>
+                                            <p:strVal val="#ppt_x"/>
+                                          </p:val>
+                                        </p:tav>
+                                      </p:tavLst>
+                                    </p:anim>
+                                    <p:anim calcmode="lin" valueType="num">
+                                      <p:cBhvr>
+                                        <p:cTn id="9" dur="1000" fill="hold"/>
+                                        <p:tgtEl>
+                                          <p:spTgt spid="8"/>
+                                        </p:tgtEl>
+                                        <p:attrNameLst>
+                                          <p:attrName>ppt_y</p:attrName>
+                                        </p:attrNameLst>
+                                      </p:cBhvr>
+                                      <p:tavLst>
+                                        <p:tav tm="0">
+                                          <p:val>
+                                            <p:strVal val="#ppt_y+.1"/>
+                                          </p:val>
+                                        </p:tav>
+                                        <p:tav tm="100000">
+                                          <p:val>
+                                            <p:strVal val="#ppt_y"/>
+                                          </p:val>
+                                        </p:tav>
+                                      </p:tavLst>
+                                    </p:anim>
+                                  </p:childTnLst>
+                                </p:cTn>
+                              </p:par>
+                            </p:childTnLst>
+                          </p:cTn>
+                        </p:par>
+                      </p:childTnLst>
+                    </p:cTn>
+                  </p:par>
+                  <p:par>
+                    <p:cTn id="10" fill="hold">
+                      <p:stCondLst>
+                        <p:cond delay="indefinite"/>
+                      </p:stCondLst>
+                      <p:childTnLst>
+                        <p:par>
+                          <p:cTn id="11" fill="hold">
+                            <p:stCondLst>
+                              <p:cond delay="0"/>
+                            </p:stCondLst>
+                            <p:childTnLst>
+                              <p:par>
+                                <p:cTn id="12" presetID="6" presetClass="entr" presetSubtype="16" fill="hold" grpId="0" nodeType="clickEffect">
+                                  <p:stCondLst>
+                                    <p:cond delay="0"/>
+                                  </p:stCondLst>
+                                  <p:childTnLst>
+                                    <p:set>
+                                      <p:cBhvr>
+                                        <p:cTn id="13" dur="1" fill="hold">
+                                          <p:stCondLst>
+                                            <p:cond delay="0"/>
+                                          </p:stCondLst>
+                                        </p:cTn>
+                                        <p:tgtEl>
+                                          <p:spTgt spid="2"/>
+                                        </p:tgtEl>
+                                        <p:attrNameLst>
+                                          <p:attrName>style.visibility</p:attrName>
+                                        </p:attrNameLst>
+                                      </p:cBhvr>
+                                      <p:to>
+                                        <p:strVal val="visible"/>
+                                      </p:to>
+                                    </p:set>
+                                    <p:animEffect transition="in" filter="circle(in)">
+                                      <p:cBhvr>
+                                        <p:cTn id="14" dur="2000"/>
+                                        <p:tgtEl>
+                                          <p:spTgt spid="2"/>
+                                        </p:tgtEl>
+                                      </p:cBhvr>
+                                    </p:animEffect>
+                                  </p:childTnLst>
+                                </p:cTn>
+                              </p:par>
+                            </p:childTnLst>
+                          </p:cTn>
+                        </p:par>
+                      </p:childTnLst>
+                    </p:cTn>
+                  </p:par>
+                </p:childTnLst>
+              </p:cTn>
+              <p:prevCondLst>
+                <p:cond evt="onPrev" delay="0">
+                  <p:tgtEl>
+                    <p:sldTgt/>
+                  </p:tgtEl>
+                </p:cond>
+              </p:prevCondLst>
+              <p:nextCondLst>
+                <p:cond evt="onNext" delay="0">
+                  <p:tgtEl>
+                    <p:sldTgt/>
+                  </p:tgtEl>
+                </p:cond>
+              </p:nextCondLst>
+            </p:seq>
+          </p:childTnLst>
+        </p:cTn>
+      </p:par>
+    </p:tnLst>
+    <p:bldLst>
+      <p:bldP spid="8" grpId="0"/>
+      <p:bldP spid="2" grpId="0" animBg="1"/>
+    </p:bldLst>
+  </p:timing>
+</p:sld>
+</file>
+
+<file path=ppt/slides/slide4.xml><?xml version="1.0" encoding="utf-8"?>
+<p:sld xmlns:a="http://schemas.openxmlformats.org/drawingml/2006/main" xmlns:r="http://schemas.openxmlformats.org/officeDocument/2006/relationships" xmlns:p="http://schemas.openxmlformats.org/presentationml/2006/main">
+  <p:cSld>
+    <p:spTree>
+      <p:nvGrpSpPr>
+        <p:cNvPr id="1" name=""/>
+        <p:cNvGrpSpPr/>
+        <p:nvPr/>
+      </p:nvGrpSpPr>
+      <p:grpSpPr>
+        <a:xfrm>
+          <a:off x="0" y="0"/>
+          <a:ext cx="0" cy="0"/>
+          <a:chOff x="0" y="0"/>
+          <a:chExt cx="0" cy="0"/>
+        </a:xfrm>
+      </p:grpSpPr>
+      <p:sp>
+        <p:nvSpPr>
+          <p:cNvPr id="8" name="Rectangle 7"/>
+          <p:cNvSpPr/>
+          <p:nvPr/>
+        </p:nvSpPr>
+        <p:spPr>
+          <a:xfrm>
+            <a:off x="820418" y="-367891"/>
+            <a:ext cx="8369324" cy="1754326"/>
+          </a:xfrm>
+          <a:prstGeom prst="rect">
+            <a:avLst/>
+          </a:prstGeom>
+          <a:noFill/>
+        </p:spPr>
+        <p:txBody>
+          <a:bodyPr wrap="square" lIns="91440" tIns="45720" rIns="91440" bIns="45720">
+            <a:spAutoFit/>
+          </a:bodyPr>
+          <a:lstStyle/>
+          <a:p>
+            <a:pPr algn="ctr"/>
+            <a:endParaRPr lang="en-US" sz="5400" b="1" dirty="0">
+              <a:ln w="13462">
+                <a:solidFill>
+                  <a:schemeClr val="bg1"/>
+                </a:solidFill>
+                <a:prstDash val="solid"/>
+              </a:ln>
+              <a:solidFill>
+                <a:schemeClr val="tx1">
+                  <a:lumMod val="85000"/>
+                  <a:lumOff val="15000"/>
+                </a:schemeClr>
+              </a:solidFill>
+              <a:effectLst>
+                <a:outerShdw dist="38100" dir="2700000" algn="bl" rotWithShape="0">
+                  <a:schemeClr val="accent5"/>
+                </a:outerShdw>
+              </a:effectLst>
+              <a:latin typeface="Times New Roman" panose="02020603050405020304" pitchFamily="18" charset="0"/>
+              <a:cs typeface="Times New Roman" panose="02020603050405020304" pitchFamily="18" charset="0"/>
+            </a:endParaRPr>
+          </a:p>
+          <a:p>
+            <a:r>
+              <a:rPr lang="en-US" sz="5400" dirty="0">
+                <a:ln w="0"/>
+                <a:gradFill>
+                  <a:gsLst>
+                    <a:gs pos="0">
+                      <a:schemeClr val="accent5">
+                        <a:lumMod val="50000"/>
+                      </a:schemeClr>
+                    </a:gs>
+                    <a:gs pos="50000">
+                      <a:schemeClr val="accent5"/>
+                    </a:gs>
+                    <a:gs pos="100000">
+                      <a:schemeClr val="accent5">
+                        <a:lumMod val="60000"/>
+                        <a:lumOff val="40000"/>
+                      </a:schemeClr>
+                    </a:gs>
+                  </a:gsLst>
+                  <a:lin ang="5400000"/>
+                </a:gradFill>
+                <a:effectLst>
+                  <a:reflection blurRad="6350" stA="53000" endA="300" endPos="35500" dir="5400000" sy="-90000" algn="bl" rotWithShape="0"/>
+                </a:effectLst>
+                <a:latin typeface="Times New Roman" panose="02020603050405020304" pitchFamily="18" charset="0"/>
+                <a:cs typeface="Times New Roman" panose="02020603050405020304" pitchFamily="18" charset="0"/>
+              </a:rPr>
+              <a:t>I. </a:t>
+            </a:r>
+            <a:r>
+              <a:rPr lang="en-US" sz="5400" dirty="0" err="1">
+                <a:ln w="0"/>
+                <a:gradFill>
+                  <a:gsLst>
+                    <a:gs pos="0">
+                      <a:schemeClr val="accent5">
+                        <a:lumMod val="50000"/>
+                      </a:schemeClr>
+                    </a:gs>
+                    <a:gs pos="50000">
+                      <a:schemeClr val="accent5"/>
+                    </a:gs>
+                    <a:gs pos="100000">
+                      <a:schemeClr val="accent5">
+                        <a:lumMod val="60000"/>
+                        <a:lumOff val="40000"/>
+                      </a:schemeClr>
+                    </a:gs>
+                  </a:gsLst>
+                  <a:lin ang="5400000"/>
+                </a:gradFill>
+                <a:effectLst>
+                  <a:reflection blurRad="6350" stA="53000" endA="300" endPos="35500" dir="5400000" sy="-90000" algn="bl" rotWithShape="0"/>
+                </a:effectLst>
+                <a:latin typeface="Times New Roman" panose="02020603050405020304" pitchFamily="18" charset="0"/>
+                <a:cs typeface="Times New Roman" panose="02020603050405020304" pitchFamily="18" charset="0"/>
+              </a:rPr>
+              <a:t>Giới</a:t>
+            </a:r>
+            <a:r>
+              <a:rPr lang="en-US" sz="5400" dirty="0">
+                <a:ln w="0"/>
+                <a:gradFill>
+                  <a:gsLst>
+                    <a:gs pos="0">
+                      <a:schemeClr val="accent5">
+                        <a:lumMod val="50000"/>
+                      </a:schemeClr>
+                    </a:gs>
+                    <a:gs pos="50000">
+                      <a:schemeClr val="accent5"/>
+                    </a:gs>
+                    <a:gs pos="100000">
+                      <a:schemeClr val="accent5">
+                        <a:lumMod val="60000"/>
+                        <a:lumOff val="40000"/>
+                      </a:schemeClr>
+                    </a:gs>
+                  </a:gsLst>
+                  <a:lin ang="5400000"/>
+                </a:gradFill>
+                <a:effectLst>
+                  <a:reflection blurRad="6350" stA="53000" endA="300" endPos="35500" dir="5400000" sy="-90000" algn="bl" rotWithShape="0"/>
+                </a:effectLst>
+                <a:latin typeface="Times New Roman" panose="02020603050405020304" pitchFamily="18" charset="0"/>
+                <a:cs typeface="Times New Roman" panose="02020603050405020304" pitchFamily="18" charset="0"/>
+              </a:rPr>
+              <a:t> </a:t>
+            </a:r>
+            <a:r>
+              <a:rPr lang="en-US" sz="5400" dirty="0" err="1">
+                <a:ln w="0"/>
+                <a:gradFill>
+                  <a:gsLst>
+                    <a:gs pos="0">
+                      <a:schemeClr val="accent5">
+                        <a:lumMod val="50000"/>
+                      </a:schemeClr>
+                    </a:gs>
+                    <a:gs pos="50000">
+                      <a:schemeClr val="accent5"/>
+                    </a:gs>
+                    <a:gs pos="100000">
+                      <a:schemeClr val="accent5">
+                        <a:lumMod val="60000"/>
+                        <a:lumOff val="40000"/>
+                      </a:schemeClr>
+                    </a:gs>
+                  </a:gsLst>
+                  <a:lin ang="5400000"/>
+                </a:gradFill>
+                <a:effectLst>
+                  <a:reflection blurRad="6350" stA="53000" endA="300" endPos="35500" dir="5400000" sy="-90000" algn="bl" rotWithShape="0"/>
+                </a:effectLst>
+                <a:latin typeface="Times New Roman" panose="02020603050405020304" pitchFamily="18" charset="0"/>
+                <a:cs typeface="Times New Roman" panose="02020603050405020304" pitchFamily="18" charset="0"/>
+              </a:rPr>
+              <a:t>thiệu</a:t>
+            </a:r>
+            <a:r>
+              <a:rPr lang="en-US" sz="5400" dirty="0">
+                <a:ln w="0"/>
+                <a:gradFill>
+                  <a:gsLst>
+                    <a:gs pos="0">
+                      <a:schemeClr val="accent5">
+                        <a:lumMod val="50000"/>
+                      </a:schemeClr>
+                    </a:gs>
+                    <a:gs pos="50000">
+                      <a:schemeClr val="accent5"/>
+                    </a:gs>
+                    <a:gs pos="100000">
+                      <a:schemeClr val="accent5">
+                        <a:lumMod val="60000"/>
+                        <a:lumOff val="40000"/>
+                      </a:schemeClr>
+                    </a:gs>
+                  </a:gsLst>
+                  <a:lin ang="5400000"/>
+                </a:gradFill>
+                <a:effectLst>
+                  <a:reflection blurRad="6350" stA="53000" endA="300" endPos="35500" dir="5400000" sy="-90000" algn="bl" rotWithShape="0"/>
+                </a:effectLst>
+                <a:latin typeface="Times New Roman" panose="02020603050405020304" pitchFamily="18" charset="0"/>
+                <a:cs typeface="Times New Roman" panose="02020603050405020304" pitchFamily="18" charset="0"/>
+              </a:rPr>
+              <a:t> </a:t>
+            </a:r>
+            <a:r>
+              <a:rPr lang="en-US" sz="5400" dirty="0" err="1">
+                <a:ln w="0"/>
+                <a:gradFill>
+                  <a:gsLst>
+                    <a:gs pos="0">
+                      <a:schemeClr val="accent5">
+                        <a:lumMod val="50000"/>
+                      </a:schemeClr>
+                    </a:gs>
+                    <a:gs pos="50000">
+                      <a:schemeClr val="accent5"/>
+                    </a:gs>
+                    <a:gs pos="100000">
+                      <a:schemeClr val="accent5">
+                        <a:lumMod val="60000"/>
+                        <a:lumOff val="40000"/>
+                      </a:schemeClr>
+                    </a:gs>
+                  </a:gsLst>
+                  <a:lin ang="5400000"/>
+                </a:gradFill>
+                <a:effectLst>
+                  <a:reflection blurRad="6350" stA="53000" endA="300" endPos="35500" dir="5400000" sy="-90000" algn="bl" rotWithShape="0"/>
+                </a:effectLst>
+                <a:latin typeface="Times New Roman" panose="02020603050405020304" pitchFamily="18" charset="0"/>
+                <a:cs typeface="Times New Roman" panose="02020603050405020304" pitchFamily="18" charset="0"/>
+              </a:rPr>
+              <a:t>dự</a:t>
+            </a:r>
+            <a:r>
+              <a:rPr lang="en-US" sz="5400" dirty="0">
+                <a:ln w="0"/>
+                <a:gradFill>
+                  <a:gsLst>
+                    <a:gs pos="0">
+                      <a:schemeClr val="accent5">
+                        <a:lumMod val="50000"/>
+                      </a:schemeClr>
+                    </a:gs>
+                    <a:gs pos="50000">
+                      <a:schemeClr val="accent5"/>
+                    </a:gs>
+                    <a:gs pos="100000">
+                      <a:schemeClr val="accent5">
+                        <a:lumMod val="60000"/>
+                        <a:lumOff val="40000"/>
+                      </a:schemeClr>
+                    </a:gs>
+                  </a:gsLst>
+                  <a:lin ang="5400000"/>
+                </a:gradFill>
+                <a:effectLst>
+                  <a:reflection blurRad="6350" stA="53000" endA="300" endPos="35500" dir="5400000" sy="-90000" algn="bl" rotWithShape="0"/>
+                </a:effectLst>
+                <a:latin typeface="Times New Roman" panose="02020603050405020304" pitchFamily="18" charset="0"/>
+                <a:cs typeface="Times New Roman" panose="02020603050405020304" pitchFamily="18" charset="0"/>
+              </a:rPr>
+              <a:t> </a:t>
+            </a:r>
+            <a:r>
+              <a:rPr lang="en-US" sz="5400" dirty="0" err="1">
+                <a:ln w="0"/>
+                <a:gradFill>
+                  <a:gsLst>
+                    <a:gs pos="0">
+                      <a:schemeClr val="accent5">
+                        <a:lumMod val="50000"/>
+                      </a:schemeClr>
+                    </a:gs>
+                    <a:gs pos="50000">
+                      <a:schemeClr val="accent5"/>
+                    </a:gs>
+                    <a:gs pos="100000">
+                      <a:schemeClr val="accent5">
+                        <a:lumMod val="60000"/>
+                        <a:lumOff val="40000"/>
+                      </a:schemeClr>
+                    </a:gs>
+                  </a:gsLst>
+                  <a:lin ang="5400000"/>
+                </a:gradFill>
+                <a:effectLst>
+                  <a:reflection blurRad="6350" stA="53000" endA="300" endPos="35500" dir="5400000" sy="-90000" algn="bl" rotWithShape="0"/>
+                </a:effectLst>
+                <a:latin typeface="Times New Roman" panose="02020603050405020304" pitchFamily="18" charset="0"/>
+                <a:cs typeface="Times New Roman" panose="02020603050405020304" pitchFamily="18" charset="0"/>
+              </a:rPr>
+              <a:t>án</a:t>
+            </a:r>
+            <a:r>
+              <a:rPr lang="en-US" sz="5400" dirty="0">
+                <a:ln w="0"/>
+                <a:gradFill>
+                  <a:gsLst>
+                    <a:gs pos="0">
+                      <a:schemeClr val="accent5">
+                        <a:lumMod val="50000"/>
+                      </a:schemeClr>
+                    </a:gs>
+                    <a:gs pos="50000">
+                      <a:schemeClr val="accent5"/>
+                    </a:gs>
+                    <a:gs pos="100000">
+                      <a:schemeClr val="accent5">
+                        <a:lumMod val="60000"/>
+                        <a:lumOff val="40000"/>
+                      </a:schemeClr>
+                    </a:gs>
+                  </a:gsLst>
+                  <a:lin ang="5400000"/>
+                </a:gradFill>
+                <a:effectLst>
+                  <a:reflection blurRad="6350" stA="53000" endA="300" endPos="35500" dir="5400000" sy="-90000" algn="bl" rotWithShape="0"/>
+                </a:effectLst>
+                <a:latin typeface="Times New Roman" panose="02020603050405020304" pitchFamily="18" charset="0"/>
+                <a:cs typeface="Times New Roman" panose="02020603050405020304" pitchFamily="18" charset="0"/>
+              </a:rPr>
+              <a:t> </a:t>
+            </a:r>
+            <a:r>
+              <a:rPr lang="en-US" sz="5400" dirty="0" err="1">
+                <a:ln w="0"/>
+                <a:gradFill>
+                  <a:gsLst>
+                    <a:gs pos="0">
+                      <a:schemeClr val="accent5">
+                        <a:lumMod val="50000"/>
+                      </a:schemeClr>
+                    </a:gs>
+                    <a:gs pos="50000">
+                      <a:schemeClr val="accent5"/>
+                    </a:gs>
+                    <a:gs pos="100000">
+                      <a:schemeClr val="accent5">
+                        <a:lumMod val="60000"/>
+                        <a:lumOff val="40000"/>
+                      </a:schemeClr>
+                    </a:gs>
+                  </a:gsLst>
+                  <a:lin ang="5400000"/>
+                </a:gradFill>
+                <a:effectLst>
+                  <a:reflection blurRad="6350" stA="53000" endA="300" endPos="35500" dir="5400000" sy="-90000" algn="bl" rotWithShape="0"/>
+                </a:effectLst>
+                <a:latin typeface="Times New Roman" panose="02020603050405020304" pitchFamily="18" charset="0"/>
+                <a:cs typeface="Times New Roman" panose="02020603050405020304" pitchFamily="18" charset="0"/>
+              </a:rPr>
+              <a:t>phần</a:t>
+            </a:r>
+            <a:r>
+              <a:rPr lang="en-US" sz="5400" dirty="0">
+                <a:ln w="0"/>
+                <a:gradFill>
+                  <a:gsLst>
+                    <a:gs pos="0">
+                      <a:schemeClr val="accent5">
+                        <a:lumMod val="50000"/>
+                      </a:schemeClr>
+                    </a:gs>
+                    <a:gs pos="50000">
+                      <a:schemeClr val="accent5"/>
+                    </a:gs>
+                    <a:gs pos="100000">
+                      <a:schemeClr val="accent5">
+                        <a:lumMod val="60000"/>
+                        <a:lumOff val="40000"/>
+                      </a:schemeClr>
+                    </a:gs>
+                  </a:gsLst>
+                  <a:lin ang="5400000"/>
+                </a:gradFill>
+                <a:effectLst>
+                  <a:reflection blurRad="6350" stA="53000" endA="300" endPos="35500" dir="5400000" sy="-90000" algn="bl" rotWithShape="0"/>
+                </a:effectLst>
+                <a:latin typeface="Times New Roman" panose="02020603050405020304" pitchFamily="18" charset="0"/>
+                <a:cs typeface="Times New Roman" panose="02020603050405020304" pitchFamily="18" charset="0"/>
+              </a:rPr>
+              <a:t> </a:t>
+            </a:r>
+            <a:r>
+              <a:rPr lang="en-US" sz="5400" dirty="0" err="1">
+                <a:ln w="0"/>
+                <a:gradFill>
+                  <a:gsLst>
+                    <a:gs pos="0">
+                      <a:schemeClr val="accent5">
+                        <a:lumMod val="50000"/>
+                      </a:schemeClr>
+                    </a:gs>
+                    <a:gs pos="50000">
+                      <a:schemeClr val="accent5"/>
+                    </a:gs>
+                    <a:gs pos="100000">
+                      <a:schemeClr val="accent5">
+                        <a:lumMod val="60000"/>
+                        <a:lumOff val="40000"/>
+                      </a:schemeClr>
+                    </a:gs>
+                  </a:gsLst>
+                  <a:lin ang="5400000"/>
+                </a:gradFill>
+                <a:effectLst>
+                  <a:reflection blurRad="6350" stA="53000" endA="300" endPos="35500" dir="5400000" sy="-90000" algn="bl" rotWithShape="0"/>
+                </a:effectLst>
+                <a:latin typeface="Times New Roman" panose="02020603050405020304" pitchFamily="18" charset="0"/>
+                <a:cs typeface="Times New Roman" panose="02020603050405020304" pitchFamily="18" charset="0"/>
+              </a:rPr>
+              <a:t>mềm</a:t>
+            </a:r>
+            <a:endParaRPr lang="en-US" sz="5400" dirty="0">
+              <a:ln w="0"/>
+              <a:gradFill>
+                <a:gsLst>
+                  <a:gs pos="0">
+                    <a:schemeClr val="accent5">
+                      <a:lumMod val="50000"/>
+                    </a:schemeClr>
+                  </a:gs>
+                  <a:gs pos="50000">
+                    <a:schemeClr val="accent5"/>
+                  </a:gs>
+                  <a:gs pos="100000">
+                    <a:schemeClr val="accent5">
+                      <a:lumMod val="60000"/>
+                      <a:lumOff val="40000"/>
+                    </a:schemeClr>
+                  </a:gs>
+                </a:gsLst>
+                <a:lin ang="5400000"/>
+              </a:gradFill>
+              <a:effectLst>
+                <a:reflection blurRad="6350" stA="53000" endA="300" endPos="35500" dir="5400000" sy="-90000" algn="bl" rotWithShape="0"/>
+              </a:effectLst>
+              <a:latin typeface="Times New Roman" panose="02020603050405020304" pitchFamily="18" charset="0"/>
+              <a:cs typeface="Times New Roman" panose="02020603050405020304" pitchFamily="18" charset="0"/>
+            </a:endParaRPr>
+          </a:p>
+        </p:txBody>
+      </p:sp>
+    </p:spTree>
+    <p:extLst>
+      <p:ext uri="{BB962C8B-B14F-4D97-AF65-F5344CB8AC3E}">
+        <p14:creationId xmlns:p14="http://schemas.microsoft.com/office/powerpoint/2010/main" val="1963384746"/>
+      </p:ext>
+    </p:extLst>
+  </p:cSld>
+  <p:clrMapOvr>
+    <a:masterClrMapping/>
+  </p:clrMapOvr>
+  <p:transition spd="slow">
+    <p:wipe/>
+  </p:transition>
+  <p:timing>
+    <p:tnLst>
+      <p:par>
+        <p:cTn id="1" dur="indefinite" restart="never" nodeType="tmRoot">
+          <p:childTnLst>
+            <p:seq concurrent="1" nextAc="seek">
+              <p:cTn id="2" dur="indefinite" nodeType="mainSeq">
+                <p:childTnLst>
+                  <p:par>
+                    <p:cTn id="3" fill="hold">
+                      <p:stCondLst>
+                        <p:cond delay="indefinite"/>
+                      </p:stCondLst>
+                      <p:childTnLst>
+                        <p:par>
+                          <p:cTn id="4" fill="hold">
+                            <p:stCondLst>
+                              <p:cond delay="0"/>
+                            </p:stCondLst>
+                            <p:childTnLst>
+                              <p:par>
+                                <p:cTn id="5" presetID="42" presetClass="entr" presetSubtype="0" fill="hold" grpId="0" nodeType="clickEffect">
+                                  <p:stCondLst>
+                                    <p:cond delay="0"/>
+                                  </p:stCondLst>
+                                  <p:childTnLst>
+                                    <p:set>
+                                      <p:cBhvr>
+                                        <p:cTn id="6" dur="1" fill="hold">
+                                          <p:stCondLst>
+                                            <p:cond delay="0"/>
+                                          </p:stCondLst>
+                                        </p:cTn>
+                                        <p:tgtEl>
+                                          <p:spTgt spid="8"/>
+                                        </p:tgtEl>
+                                        <p:attrNameLst>
+                                          <p:attrName>style.visibility</p:attrName>
+                                        </p:attrNameLst>
+                                      </p:cBhvr>
+                                      <p:to>
+                                        <p:strVal val="visible"/>
+                                      </p:to>
+                                    </p:set>
+                                    <p:animEffect transition="in" filter="fade">
+                                      <p:cBhvr>
+                                        <p:cTn id="7" dur="1000"/>
+                                        <p:tgtEl>
+                                          <p:spTgt spid="8"/>
+                                        </p:tgtEl>
+                                      </p:cBhvr>
+                                    </p:animEffect>
+                                    <p:anim calcmode="lin" valueType="num">
+                                      <p:cBhvr>
+                                        <p:cTn id="8" dur="1000" fill="hold"/>
+                                        <p:tgtEl>
+                                          <p:spTgt spid="8"/>
+                                        </p:tgtEl>
+                                        <p:attrNameLst>
+                                          <p:attrName>ppt_x</p:attrName>
+                                        </p:attrNameLst>
+                                      </p:cBhvr>
+                                      <p:tavLst>
+                                        <p:tav tm="0">
+                                          <p:val>
+                                            <p:strVal val="#ppt_x"/>
+                                          </p:val>
+                                        </p:tav>
+                                        <p:tav tm="100000">
+                                          <p:val>
+                                            <p:strVal val="#ppt_x"/>
+                                          </p:val>
+                                        </p:tav>
+                                      </p:tavLst>
+                                    </p:anim>
+                                    <p:anim calcmode="lin" valueType="num">
+                                      <p:cBhvr>
+                                        <p:cTn id="9" dur="1000" fill="hold"/>
+                                        <p:tgtEl>
+                                          <p:spTgt spid="8"/>
+                                        </p:tgtEl>
+                                        <p:attrNameLst>
+                                          <p:attrName>ppt_y</p:attrName>
+                                        </p:attrNameLst>
+                                      </p:cBhvr>
+                                      <p:tavLst>
+                                        <p:tav tm="0">
+                                          <p:val>
+                                            <p:strVal val="#ppt_y+.1"/>
+                                          </p:val>
+                                        </p:tav>
+                                        <p:tav tm="100000">
+                                          <p:val>
+                                            <p:strVal val="#ppt_y"/>
+                                          </p:val>
+                                        </p:tav>
+                                      </p:tavLst>
+                                    </p:anim>
+                                  </p:childTnLst>
+                                </p:cTn>
+                              </p:par>
+                            </p:childTnLst>
+                          </p:cTn>
+                        </p:par>
+                      </p:childTnLst>
+                    </p:cTn>
+                  </p:par>
+                </p:childTnLst>
+              </p:cTn>
+              <p:prevCondLst>
+                <p:cond evt="onPrev" delay="0">
+                  <p:tgtEl>
+                    <p:sldTgt/>
+                  </p:tgtEl>
+                </p:cond>
+              </p:prevCondLst>
+              <p:nextCondLst>
+                <p:cond evt="onNext" delay="0">
+                  <p:tgtEl>
+                    <p:sldTgt/>
+                  </p:tgtEl>
+                </p:cond>
+              </p:nextCondLst>
+            </p:seq>
+          </p:childTnLst>
+        </p:cTn>
+      </p:par>
+    </p:tnLst>
+    <p:bldLst>
+      <p:bldP spid="8" grpId="0"/>
+    </p:bldLst>
+  </p:timing>
+</p:sld>
+</file>
+
+<file path=ppt/slides/slide5.xml><?xml version="1.0" encoding="utf-8"?>
+<p:sld xmlns:a="http://schemas.openxmlformats.org/drawingml/2006/main" xmlns:r="http://schemas.openxmlformats.org/officeDocument/2006/relationships" xmlns:p="http://schemas.openxmlformats.org/presentationml/2006/main">
+  <p:cSld>
+    <p:spTree>
+      <p:nvGrpSpPr>
+        <p:cNvPr id="1" name=""/>
+        <p:cNvGrpSpPr/>
+        <p:nvPr/>
+      </p:nvGrpSpPr>
+      <p:grpSpPr>
+        <a:xfrm>
+          <a:off x="0" y="0"/>
+          <a:ext cx="0" cy="0"/>
+          <a:chOff x="0" y="0"/>
+          <a:chExt cx="0" cy="0"/>
+        </a:xfrm>
+      </p:grpSpPr>
+      <p:sp>
+        <p:nvSpPr>
+          <p:cNvPr id="8" name="Rectangle 7"/>
+          <p:cNvSpPr/>
+          <p:nvPr/>
+        </p:nvSpPr>
+        <p:spPr>
+          <a:xfrm>
             <a:off x="2264208" y="497144"/>
             <a:ext cx="6890327" cy="707886"/>
           </a:xfrm>
@@ -13423,7 +14322,7 @@
           <a:p>
             <a:r>
               <a:rPr lang="en-US" sz="2500" dirty="0" err="1"/>
-              <a:t>Ước</a:t>
+              <a:t>Người</a:t>
             </a:r>
             <a:r>
               <a:rPr lang="en-US" sz="2500" dirty="0"/>
@@ -13431,7 +14330,7 @@
             </a:r>
             <a:r>
               <a:rPr lang="en-US" sz="2500" dirty="0" err="1"/>
-              <a:t>lượng</a:t>
+              <a:t>tham</a:t>
             </a:r>
             <a:r>
               <a:rPr lang="en-US" sz="2500" dirty="0"/>
@@ -13439,7 +14338,15 @@
             </a:r>
             <a:r>
               <a:rPr lang="en-US" sz="2500" dirty="0" err="1"/>
-              <a:t>người</a:t>
+              <a:t>gia</a:t>
+            </a:r>
+            <a:r>
+              <a:rPr lang="en-US" sz="2500" dirty="0"/>
+              <a:t>: 4 </a:t>
+            </a:r>
+            <a:r>
+              <a:rPr lang="en-US" sz="2500" dirty="0" err="1"/>
+              <a:t>thành</a:t>
             </a:r>
             <a:r>
               <a:rPr lang="en-US" sz="2500" dirty="0"/>
@@ -13447,23 +14354,41 @@
             </a:r>
             <a:r>
               <a:rPr lang="en-US" sz="2500" dirty="0" err="1"/>
-              <a:t>tham</a:t>
+              <a:t>viên</a:t>
             </a:r>
             <a:r>
               <a:rPr lang="en-US" sz="2500" dirty="0"/>
               <a:t> </a:t>
             </a:r>
+          </a:p>
+          <a:p>
             <a:r>
               <a:rPr lang="en-US" sz="2500" dirty="0" err="1"/>
-              <a:t>gia</a:t>
+              <a:t>Đặng</a:t>
             </a:r>
             <a:r>
               <a:rPr lang="en-US" sz="2500" dirty="0"/>
-              <a:t>: 4 </a:t>
+              <a:t> Minh </a:t>
             </a:r>
             <a:r>
               <a:rPr lang="en-US" sz="2500" dirty="0" err="1"/>
-              <a:t>thành</a:t>
+              <a:t>Nghĩa,Nguyễn</a:t>
+            </a:r>
+            <a:r>
+              <a:rPr lang="en-US" sz="2500" dirty="0"/>
+              <a:t> Chí </a:t>
+            </a:r>
+            <a:r>
+              <a:rPr lang="en-US" sz="2500" dirty="0" err="1"/>
+              <a:t>Đức</a:t>
+            </a:r>
+            <a:r>
+              <a:rPr lang="en-US" sz="2500" dirty="0"/>
+              <a:t>, </a:t>
+            </a:r>
+            <a:r>
+              <a:rPr lang="en-US" sz="2500" dirty="0" err="1"/>
+              <a:t>Nguyễn</a:t>
             </a:r>
             <a:r>
               <a:rPr lang="en-US" sz="2500" dirty="0"/>
@@ -13471,41 +14396,15 @@
             </a:r>
             <a:r>
               <a:rPr lang="en-US" sz="2500" dirty="0" err="1"/>
-              <a:t>viên</a:t>
+              <a:t>Ái</a:t>
             </a:r>
             <a:r>
               <a:rPr lang="en-US" sz="2500" dirty="0"/>
               <a:t> </a:t>
             </a:r>
-          </a:p>
-          <a:p>
             <a:r>
               <a:rPr lang="en-US" sz="2500" dirty="0" err="1"/>
-              <a:t>Đặng</a:t>
-            </a:r>
-            <a:r>
-              <a:rPr lang="en-US" sz="2500" dirty="0"/>
-              <a:t> Minh </a:t>
-            </a:r>
-            <a:r>
-              <a:rPr lang="en-US" sz="2500" dirty="0" err="1"/>
-              <a:t>Nghĩa,Nguyễn</a:t>
-            </a:r>
-            <a:r>
-              <a:rPr lang="en-US" sz="2500" dirty="0"/>
-              <a:t> Chí </a:t>
-            </a:r>
-            <a:r>
-              <a:rPr lang="en-US" sz="2500" dirty="0" err="1"/>
-              <a:t>Đức</a:t>
-            </a:r>
-            <a:r>
-              <a:rPr lang="en-US" sz="2500" dirty="0"/>
-              <a:t>, </a:t>
-            </a:r>
-            <a:r>
-              <a:rPr lang="en-US" sz="2500" dirty="0" err="1"/>
-              <a:t>Nguyễn</a:t>
+              <a:t>Thiềm</a:t>
             </a:r>
             <a:r>
               <a:rPr lang="en-US" sz="2500" dirty="0"/>
@@ -13513,22 +14412,6 @@
             </a:r>
             <a:r>
               <a:rPr lang="en-US" sz="2500" dirty="0" err="1"/>
-              <a:t>Ái</a:t>
-            </a:r>
-            <a:r>
-              <a:rPr lang="en-US" sz="2500" dirty="0"/>
-              <a:t> </a:t>
-            </a:r>
-            <a:r>
-              <a:rPr lang="en-US" sz="2500" dirty="0" err="1"/>
-              <a:t>Thiềm</a:t>
-            </a:r>
-            <a:r>
-              <a:rPr lang="en-US" sz="2500" dirty="0"/>
-              <a:t> </a:t>
-            </a:r>
-            <a:r>
-              <a:rPr lang="en-US" sz="2500" dirty="0" err="1"/>
               <a:t>Định,Trương</a:t>
             </a:r>
             <a:r>
@@ -13539,10 +14422,7 @@
               <a:rPr lang="en-US" sz="2500" dirty="0" err="1"/>
               <a:t>Phát</a:t>
             </a:r>
-            <a:r>
-              <a:rPr lang="en-US" sz="2500" dirty="0"/>
-              <a:t>)</a:t>
-            </a:r>
+            <a:endParaRPr lang="en-US" sz="2500" dirty="0"/>
           </a:p>
         </p:txBody>
       </p:sp>
@@ -13748,7 +14628,7 @@
 </p:sld>
 </file>
 
-<file path=ppt/slides/slide4.xml><?xml version="1.0" encoding="utf-8"?>
+<file path=ppt/slides/slide6.xml><?xml version="1.0" encoding="utf-8"?>
 <p:sld xmlns:a="http://schemas.openxmlformats.org/drawingml/2006/main" xmlns:r="http://schemas.openxmlformats.org/officeDocument/2006/relationships" xmlns:p="http://schemas.openxmlformats.org/presentationml/2006/main">
   <p:cSld>
     <p:spTree>
@@ -14852,7 +15732,7 @@
 </p:sld>
 </file>
 
-<file path=ppt/slides/slide5.xml><?xml version="1.0" encoding="utf-8"?>
+<file path=ppt/slides/slide7.xml><?xml version="1.0" encoding="utf-8"?>
 <p:sld xmlns:a="http://schemas.openxmlformats.org/drawingml/2006/main" xmlns:r="http://schemas.openxmlformats.org/officeDocument/2006/relationships" xmlns:p="http://schemas.openxmlformats.org/presentationml/2006/main">
   <p:cSld>
     <p:spTree>
@@ -15183,7 +16063,7 @@
 </p:sld>
 </file>
 
-<file path=ppt/slides/slide6.xml><?xml version="1.0" encoding="utf-8"?>
+<file path=ppt/slides/slide8.xml><?xml version="1.0" encoding="utf-8"?>
 <p:sld xmlns:a="http://schemas.openxmlformats.org/drawingml/2006/main" xmlns:r="http://schemas.openxmlformats.org/officeDocument/2006/relationships" xmlns:p="http://schemas.openxmlformats.org/presentationml/2006/main">
   <p:cSld>
     <p:spTree>
@@ -15514,7 +16394,7 @@
 </p:sld>
 </file>
 
-<file path=ppt/slides/slide7.xml><?xml version="1.0" encoding="utf-8"?>
+<file path=ppt/slides/slide9.xml><?xml version="1.0" encoding="utf-8"?>
 <p:sld xmlns:a="http://schemas.openxmlformats.org/drawingml/2006/main" xmlns:r="http://schemas.openxmlformats.org/officeDocument/2006/relationships" xmlns:p="http://schemas.openxmlformats.org/presentationml/2006/main">
   <p:cSld>
     <p:spTree>
@@ -16070,564 +16950,6 @@
     <p:extLst>
       <p:ext uri="{BB962C8B-B14F-4D97-AF65-F5344CB8AC3E}">
         <p14:creationId xmlns:p14="http://schemas.microsoft.com/office/powerpoint/2010/main" val="4089320555"/>
-      </p:ext>
-    </p:extLst>
-  </p:cSld>
-  <p:clrMapOvr>
-    <a:masterClrMapping/>
-  </p:clrMapOvr>
-  <mc:AlternateContent xmlns:mc="http://schemas.openxmlformats.org/markup-compatibility/2006" xmlns:p14="http://schemas.microsoft.com/office/powerpoint/2010/main">
-    <mc:Choice Requires="p14">
-      <p:transition spd="med" p14:dur="700">
-        <p:fade/>
-      </p:transition>
-    </mc:Choice>
-    <mc:Fallback xmlns="">
-      <p:transition spd="med">
-        <p:fade/>
-      </p:transition>
-    </mc:Fallback>
-  </mc:AlternateContent>
-  <p:timing>
-    <p:tnLst>
-      <p:par>
-        <p:cTn id="1" dur="indefinite" restart="never" nodeType="tmRoot">
-          <p:childTnLst>
-            <p:seq concurrent="1" nextAc="seek">
-              <p:cTn id="2" dur="indefinite" nodeType="mainSeq">
-                <p:childTnLst>
-                  <p:par>
-                    <p:cTn id="3" fill="hold">
-                      <p:stCondLst>
-                        <p:cond delay="indefinite"/>
-                      </p:stCondLst>
-                      <p:childTnLst>
-                        <p:par>
-                          <p:cTn id="4" fill="hold">
-                            <p:stCondLst>
-                              <p:cond delay="0"/>
-                            </p:stCondLst>
-                            <p:childTnLst>
-                              <p:par>
-                                <p:cTn id="5" presetID="6" presetClass="entr" presetSubtype="16" fill="hold" grpId="0" nodeType="clickEffect">
-                                  <p:stCondLst>
-                                    <p:cond delay="0"/>
-                                  </p:stCondLst>
-                                  <p:childTnLst>
-                                    <p:set>
-                                      <p:cBhvr>
-                                        <p:cTn id="6" dur="1" fill="hold">
-                                          <p:stCondLst>
-                                            <p:cond delay="0"/>
-                                          </p:stCondLst>
-                                        </p:cTn>
-                                        <p:tgtEl>
-                                          <p:spTgt spid="5"/>
-                                        </p:tgtEl>
-                                        <p:attrNameLst>
-                                          <p:attrName>style.visibility</p:attrName>
-                                        </p:attrNameLst>
-                                      </p:cBhvr>
-                                      <p:to>
-                                        <p:strVal val="visible"/>
-                                      </p:to>
-                                    </p:set>
-                                    <p:animEffect transition="in" filter="circle(in)">
-                                      <p:cBhvr>
-                                        <p:cTn id="7" dur="2000"/>
-                                        <p:tgtEl>
-                                          <p:spTgt spid="5"/>
-                                        </p:tgtEl>
-                                      </p:cBhvr>
-                                    </p:animEffect>
-                                  </p:childTnLst>
-                                </p:cTn>
-                              </p:par>
-                            </p:childTnLst>
-                          </p:cTn>
-                        </p:par>
-                      </p:childTnLst>
-                    </p:cTn>
-                  </p:par>
-                </p:childTnLst>
-              </p:cTn>
-              <p:prevCondLst>
-                <p:cond evt="onPrev" delay="0">
-                  <p:tgtEl>
-                    <p:sldTgt/>
-                  </p:tgtEl>
-                </p:cond>
-              </p:prevCondLst>
-              <p:nextCondLst>
-                <p:cond evt="onNext" delay="0">
-                  <p:tgtEl>
-                    <p:sldTgt/>
-                  </p:tgtEl>
-                </p:cond>
-              </p:nextCondLst>
-            </p:seq>
-          </p:childTnLst>
-        </p:cTn>
-      </p:par>
-    </p:tnLst>
-    <p:bldLst>
-      <p:bldP spid="5" grpId="0"/>
-    </p:bldLst>
-  </p:timing>
-</p:sld>
-</file>
-
-<file path=ppt/slides/slide8.xml><?xml version="1.0" encoding="utf-8"?>
-<p:sld xmlns:a="http://schemas.openxmlformats.org/drawingml/2006/main" xmlns:r="http://schemas.openxmlformats.org/officeDocument/2006/relationships" xmlns:p="http://schemas.openxmlformats.org/presentationml/2006/main">
-  <p:cSld>
-    <p:spTree>
-      <p:nvGrpSpPr>
-        <p:cNvPr id="1" name=""/>
-        <p:cNvGrpSpPr/>
-        <p:nvPr/>
-      </p:nvGrpSpPr>
-      <p:grpSpPr>
-        <a:xfrm>
-          <a:off x="0" y="0"/>
-          <a:ext cx="0" cy="0"/>
-          <a:chOff x="0" y="0"/>
-          <a:chExt cx="0" cy="0"/>
-        </a:xfrm>
-      </p:grpSpPr>
-      <p:sp>
-        <p:nvSpPr>
-          <p:cNvPr id="5" name="Rectangle 4"/>
-          <p:cNvSpPr/>
-          <p:nvPr/>
-        </p:nvSpPr>
-        <p:spPr>
-          <a:xfrm>
-            <a:off x="1219201" y="278693"/>
-            <a:ext cx="7333672" cy="707886"/>
-          </a:xfrm>
-          <a:prstGeom prst="rect">
-            <a:avLst/>
-          </a:prstGeom>
-          <a:noFill/>
-        </p:spPr>
-        <p:txBody>
-          <a:bodyPr wrap="square" lIns="91440" tIns="45720" rIns="91440" bIns="45720">
-            <a:spAutoFit/>
-          </a:bodyPr>
-          <a:lstStyle/>
-          <a:p>
-            <a:pPr algn="ctr"/>
-            <a:r>
-              <a:rPr lang="en-US" sz="4000" dirty="0">
-                <a:ln w="0"/>
-                <a:gradFill>
-                  <a:gsLst>
-                    <a:gs pos="0">
-                      <a:schemeClr val="accent5">
-                        <a:lumMod val="50000"/>
-                      </a:schemeClr>
-                    </a:gs>
-                    <a:gs pos="50000">
-                      <a:schemeClr val="accent5"/>
-                    </a:gs>
-                    <a:gs pos="100000">
-                      <a:schemeClr val="accent5">
-                        <a:lumMod val="60000"/>
-                        <a:lumOff val="40000"/>
-                      </a:schemeClr>
-                    </a:gs>
-                  </a:gsLst>
-                  <a:lin ang="5400000"/>
-                </a:gradFill>
-                <a:effectLst>
-                  <a:reflection blurRad="6350" stA="53000" endA="300" endPos="35500" dir="5400000" sy="-90000" algn="bl" rotWithShape="0"/>
-                </a:effectLst>
-                <a:latin typeface="Times New Roman" panose="02020603050405020304" pitchFamily="18" charset="0"/>
-                <a:cs typeface="Times New Roman" panose="02020603050405020304" pitchFamily="18" charset="0"/>
-              </a:rPr>
-              <a:t>V : FORM ỨNG DỤNG</a:t>
-            </a:r>
-            <a:endParaRPr lang="en-US" sz="4000" b="0" cap="none" spc="0" dirty="0">
-              <a:ln w="0"/>
-              <a:gradFill>
-                <a:gsLst>
-                  <a:gs pos="0">
-                    <a:schemeClr val="accent5">
-                      <a:lumMod val="50000"/>
-                    </a:schemeClr>
-                  </a:gs>
-                  <a:gs pos="50000">
-                    <a:schemeClr val="accent5"/>
-                  </a:gs>
-                  <a:gs pos="100000">
-                    <a:schemeClr val="accent5">
-                      <a:lumMod val="60000"/>
-                      <a:lumOff val="40000"/>
-                    </a:schemeClr>
-                  </a:gs>
-                </a:gsLst>
-                <a:lin ang="5400000"/>
-              </a:gradFill>
-              <a:effectLst>
-                <a:reflection blurRad="6350" stA="53000" endA="300" endPos="35500" dir="5400000" sy="-90000" algn="bl" rotWithShape="0"/>
-              </a:effectLst>
-              <a:latin typeface="Times New Roman" panose="02020603050405020304" pitchFamily="18" charset="0"/>
-              <a:cs typeface="Times New Roman" panose="02020603050405020304" pitchFamily="18" charset="0"/>
-            </a:endParaRPr>
-          </a:p>
-        </p:txBody>
-      </p:sp>
-      <p:pic>
-        <p:nvPicPr>
-          <p:cNvPr id="6" name="Content Placeholder 5" descr="A screenshot of a login page&#10;&#10;Description automatically generated">
-            <a:extLst>
-              <a:ext uri="{FF2B5EF4-FFF2-40B4-BE49-F238E27FC236}">
-                <a16:creationId xmlns:a16="http://schemas.microsoft.com/office/drawing/2014/main" id="{074B9104-DE15-4D0D-D447-2563D1509A31}"/>
-              </a:ext>
-            </a:extLst>
-          </p:cNvPr>
-          <p:cNvPicPr>
-            <a:picLocks noGrp="1" noChangeAspect="1"/>
-          </p:cNvPicPr>
-          <p:nvPr>
-            <p:ph idx="1"/>
-          </p:nvPr>
-        </p:nvPicPr>
-        <p:blipFill>
-          <a:blip r:embed="rId2"/>
-          <a:stretch>
-            <a:fillRect/>
-          </a:stretch>
-        </p:blipFill>
-        <p:spPr>
-          <a:xfrm>
-            <a:off x="1524168" y="2160588"/>
-            <a:ext cx="6903701" cy="3881437"/>
-          </a:xfrm>
-          <a:prstGeom prst="rect">
-            <a:avLst/>
-          </a:prstGeom>
-        </p:spPr>
-      </p:pic>
-      <p:sp>
-        <p:nvSpPr>
-          <p:cNvPr id="8" name="TextBox 7">
-            <a:extLst>
-              <a:ext uri="{FF2B5EF4-FFF2-40B4-BE49-F238E27FC236}">
-                <a16:creationId xmlns:a16="http://schemas.microsoft.com/office/drawing/2014/main" id="{1DC3E2F0-DDE7-27D4-D616-E6FA31242FBC}"/>
-              </a:ext>
-            </a:extLst>
-          </p:cNvPr>
-          <p:cNvSpPr txBox="1"/>
-          <p:nvPr/>
-        </p:nvSpPr>
-        <p:spPr>
-          <a:xfrm>
-            <a:off x="2037347" y="1411705"/>
-            <a:ext cx="5470358" cy="369332"/>
-          </a:xfrm>
-          <a:prstGeom prst="rect">
-            <a:avLst/>
-          </a:prstGeom>
-          <a:noFill/>
-        </p:spPr>
-        <p:txBody>
-          <a:bodyPr wrap="square" rtlCol="0">
-            <a:spAutoFit/>
-          </a:bodyPr>
-          <a:lstStyle/>
-          <a:p>
-            <a:pPr algn="ctr"/>
-            <a:r>
-              <a:rPr lang="en-US" dirty="0"/>
-              <a:t>FORM ĐĂNG NHẬP</a:t>
-            </a:r>
-          </a:p>
-        </p:txBody>
-      </p:sp>
-    </p:spTree>
-    <p:extLst>
-      <p:ext uri="{BB962C8B-B14F-4D97-AF65-F5344CB8AC3E}">
-        <p14:creationId xmlns:p14="http://schemas.microsoft.com/office/powerpoint/2010/main" val="726495051"/>
-      </p:ext>
-    </p:extLst>
-  </p:cSld>
-  <p:clrMapOvr>
-    <a:masterClrMapping/>
-  </p:clrMapOvr>
-  <mc:AlternateContent xmlns:mc="http://schemas.openxmlformats.org/markup-compatibility/2006" xmlns:p14="http://schemas.microsoft.com/office/powerpoint/2010/main">
-    <mc:Choice Requires="p14">
-      <p:transition spd="med" p14:dur="700">
-        <p:fade/>
-      </p:transition>
-    </mc:Choice>
-    <mc:Fallback xmlns="">
-      <p:transition spd="med">
-        <p:fade/>
-      </p:transition>
-    </mc:Fallback>
-  </mc:AlternateContent>
-  <p:timing>
-    <p:tnLst>
-      <p:par>
-        <p:cTn id="1" dur="indefinite" restart="never" nodeType="tmRoot">
-          <p:childTnLst>
-            <p:seq concurrent="1" nextAc="seek">
-              <p:cTn id="2" dur="indefinite" nodeType="mainSeq">
-                <p:childTnLst>
-                  <p:par>
-                    <p:cTn id="3" fill="hold">
-                      <p:stCondLst>
-                        <p:cond delay="indefinite"/>
-                      </p:stCondLst>
-                      <p:childTnLst>
-                        <p:par>
-                          <p:cTn id="4" fill="hold">
-                            <p:stCondLst>
-                              <p:cond delay="0"/>
-                            </p:stCondLst>
-                            <p:childTnLst>
-                              <p:par>
-                                <p:cTn id="5" presetID="6" presetClass="entr" presetSubtype="16" fill="hold" grpId="0" nodeType="clickEffect">
-                                  <p:stCondLst>
-                                    <p:cond delay="0"/>
-                                  </p:stCondLst>
-                                  <p:childTnLst>
-                                    <p:set>
-                                      <p:cBhvr>
-                                        <p:cTn id="6" dur="1" fill="hold">
-                                          <p:stCondLst>
-                                            <p:cond delay="0"/>
-                                          </p:stCondLst>
-                                        </p:cTn>
-                                        <p:tgtEl>
-                                          <p:spTgt spid="5"/>
-                                        </p:tgtEl>
-                                        <p:attrNameLst>
-                                          <p:attrName>style.visibility</p:attrName>
-                                        </p:attrNameLst>
-                                      </p:cBhvr>
-                                      <p:to>
-                                        <p:strVal val="visible"/>
-                                      </p:to>
-                                    </p:set>
-                                    <p:animEffect transition="in" filter="circle(in)">
-                                      <p:cBhvr>
-                                        <p:cTn id="7" dur="2000"/>
-                                        <p:tgtEl>
-                                          <p:spTgt spid="5"/>
-                                        </p:tgtEl>
-                                      </p:cBhvr>
-                                    </p:animEffect>
-                                  </p:childTnLst>
-                                </p:cTn>
-                              </p:par>
-                            </p:childTnLst>
-                          </p:cTn>
-                        </p:par>
-                      </p:childTnLst>
-                    </p:cTn>
-                  </p:par>
-                </p:childTnLst>
-              </p:cTn>
-              <p:prevCondLst>
-                <p:cond evt="onPrev" delay="0">
-                  <p:tgtEl>
-                    <p:sldTgt/>
-                  </p:tgtEl>
-                </p:cond>
-              </p:prevCondLst>
-              <p:nextCondLst>
-                <p:cond evt="onNext" delay="0">
-                  <p:tgtEl>
-                    <p:sldTgt/>
-                  </p:tgtEl>
-                </p:cond>
-              </p:nextCondLst>
-            </p:seq>
-          </p:childTnLst>
-        </p:cTn>
-      </p:par>
-    </p:tnLst>
-    <p:bldLst>
-      <p:bldP spid="5" grpId="0"/>
-    </p:bldLst>
-  </p:timing>
-</p:sld>
-</file>
-
-<file path=ppt/slides/slide9.xml><?xml version="1.0" encoding="utf-8"?>
-<p:sld xmlns:a="http://schemas.openxmlformats.org/drawingml/2006/main" xmlns:r="http://schemas.openxmlformats.org/officeDocument/2006/relationships" xmlns:p="http://schemas.openxmlformats.org/presentationml/2006/main">
-  <p:cSld>
-    <p:spTree>
-      <p:nvGrpSpPr>
-        <p:cNvPr id="1" name=""/>
-        <p:cNvGrpSpPr/>
-        <p:nvPr/>
-      </p:nvGrpSpPr>
-      <p:grpSpPr>
-        <a:xfrm>
-          <a:off x="0" y="0"/>
-          <a:ext cx="0" cy="0"/>
-          <a:chOff x="0" y="0"/>
-          <a:chExt cx="0" cy="0"/>
-        </a:xfrm>
-      </p:grpSpPr>
-      <p:sp>
-        <p:nvSpPr>
-          <p:cNvPr id="5" name="Rectangle 4"/>
-          <p:cNvSpPr/>
-          <p:nvPr/>
-        </p:nvSpPr>
-        <p:spPr>
-          <a:xfrm>
-            <a:off x="1219201" y="278693"/>
-            <a:ext cx="7333672" cy="707886"/>
-          </a:xfrm>
-          <a:prstGeom prst="rect">
-            <a:avLst/>
-          </a:prstGeom>
-          <a:noFill/>
-        </p:spPr>
-        <p:txBody>
-          <a:bodyPr wrap="square" lIns="91440" tIns="45720" rIns="91440" bIns="45720">
-            <a:spAutoFit/>
-          </a:bodyPr>
-          <a:lstStyle/>
-          <a:p>
-            <a:pPr algn="ctr"/>
-            <a:r>
-              <a:rPr lang="en-US" sz="4000" dirty="0">
-                <a:ln w="0"/>
-                <a:gradFill>
-                  <a:gsLst>
-                    <a:gs pos="0">
-                      <a:schemeClr val="accent5">
-                        <a:lumMod val="50000"/>
-                      </a:schemeClr>
-                    </a:gs>
-                    <a:gs pos="50000">
-                      <a:schemeClr val="accent5"/>
-                    </a:gs>
-                    <a:gs pos="100000">
-                      <a:schemeClr val="accent5">
-                        <a:lumMod val="60000"/>
-                        <a:lumOff val="40000"/>
-                      </a:schemeClr>
-                    </a:gs>
-                  </a:gsLst>
-                  <a:lin ang="5400000"/>
-                </a:gradFill>
-                <a:effectLst>
-                  <a:reflection blurRad="6350" stA="53000" endA="300" endPos="35500" dir="5400000" sy="-90000" algn="bl" rotWithShape="0"/>
-                </a:effectLst>
-                <a:latin typeface="Times New Roman" panose="02020603050405020304" pitchFamily="18" charset="0"/>
-                <a:cs typeface="Times New Roman" panose="02020603050405020304" pitchFamily="18" charset="0"/>
-              </a:rPr>
-              <a:t>V : FORM ỨNG DỤNG</a:t>
-            </a:r>
-            <a:endParaRPr lang="en-US" sz="4000" b="0" cap="none" spc="0" dirty="0">
-              <a:ln w="0"/>
-              <a:gradFill>
-                <a:gsLst>
-                  <a:gs pos="0">
-                    <a:schemeClr val="accent5">
-                      <a:lumMod val="50000"/>
-                    </a:schemeClr>
-                  </a:gs>
-                  <a:gs pos="50000">
-                    <a:schemeClr val="accent5"/>
-                  </a:gs>
-                  <a:gs pos="100000">
-                    <a:schemeClr val="accent5">
-                      <a:lumMod val="60000"/>
-                      <a:lumOff val="40000"/>
-                    </a:schemeClr>
-                  </a:gs>
-                </a:gsLst>
-                <a:lin ang="5400000"/>
-              </a:gradFill>
-              <a:effectLst>
-                <a:reflection blurRad="6350" stA="53000" endA="300" endPos="35500" dir="5400000" sy="-90000" algn="bl" rotWithShape="0"/>
-              </a:effectLst>
-              <a:latin typeface="Times New Roman" panose="02020603050405020304" pitchFamily="18" charset="0"/>
-              <a:cs typeface="Times New Roman" panose="02020603050405020304" pitchFamily="18" charset="0"/>
-            </a:endParaRPr>
-          </a:p>
-        </p:txBody>
-      </p:sp>
-      <p:sp>
-        <p:nvSpPr>
-          <p:cNvPr id="8" name="TextBox 7">
-            <a:extLst>
-              <a:ext uri="{FF2B5EF4-FFF2-40B4-BE49-F238E27FC236}">
-                <a16:creationId xmlns:a16="http://schemas.microsoft.com/office/drawing/2014/main" id="{1DC3E2F0-DDE7-27D4-D616-E6FA31242FBC}"/>
-              </a:ext>
-            </a:extLst>
-          </p:cNvPr>
-          <p:cNvSpPr txBox="1"/>
-          <p:nvPr/>
-        </p:nvSpPr>
-        <p:spPr>
-          <a:xfrm>
-            <a:off x="2037347" y="1411705"/>
-            <a:ext cx="5470358" cy="369332"/>
-          </a:xfrm>
-          <a:prstGeom prst="rect">
-            <a:avLst/>
-          </a:prstGeom>
-          <a:noFill/>
-        </p:spPr>
-        <p:txBody>
-          <a:bodyPr wrap="square" rtlCol="0">
-            <a:spAutoFit/>
-          </a:bodyPr>
-          <a:lstStyle/>
-          <a:p>
-            <a:pPr algn="ctr"/>
-            <a:r>
-              <a:rPr lang="en-US" dirty="0"/>
-              <a:t>FORM TRANG CHỦ</a:t>
-            </a:r>
-          </a:p>
-        </p:txBody>
-      </p:sp>
-      <p:pic>
-        <p:nvPicPr>
-          <p:cNvPr id="4" name="Content Placeholder 3" descr="A screenshot of a computer&#10;&#10;Description automatically generated">
-            <a:extLst>
-              <a:ext uri="{FF2B5EF4-FFF2-40B4-BE49-F238E27FC236}">
-                <a16:creationId xmlns:a16="http://schemas.microsoft.com/office/drawing/2014/main" id="{47845A03-9A28-04FB-2D07-AE2DA4D5FC73}"/>
-              </a:ext>
-            </a:extLst>
-          </p:cNvPr>
-          <p:cNvPicPr>
-            <a:picLocks noGrp="1" noChangeAspect="1"/>
-          </p:cNvPicPr>
-          <p:nvPr>
-            <p:ph idx="1"/>
-          </p:nvPr>
-        </p:nvPicPr>
-        <p:blipFill>
-          <a:blip r:embed="rId2"/>
-          <a:stretch>
-            <a:fillRect/>
-          </a:stretch>
-        </p:blipFill>
-        <p:spPr>
-          <a:xfrm>
-            <a:off x="1524168" y="2160588"/>
-            <a:ext cx="6903701" cy="3881437"/>
-          </a:xfrm>
-          <a:prstGeom prst="rect">
-            <a:avLst/>
-          </a:prstGeom>
-        </p:spPr>
-      </p:pic>
-    </p:spTree>
-    <p:extLst>
-      <p:ext uri="{BB962C8B-B14F-4D97-AF65-F5344CB8AC3E}">
-        <p14:creationId xmlns:p14="http://schemas.microsoft.com/office/powerpoint/2010/main" val="2072202467"/>
       </p:ext>
     </p:extLst>
   </p:cSld>
